--- a/docs/presentations/CineMind_захист_проєкту.pptx
+++ b/docs/presentations/CineMind_захист_проєкту.pptx
@@ -2,22 +2,23 @@
 <file path=ppt/presentation.xml><?xml version="1.0" encoding="utf-8"?>
 <p:presentation xmlns:p="http://schemas.openxmlformats.org/presentationml/2006/main">
   <p:sldMasterIdLst>
-    <p:sldMasterId xmlns:r="http://schemas.openxmlformats.org/officeDocument/2006/relationships" id="2147483648" r:id="R2148a7bc0eb84df4"/>
+    <p:sldMasterId xmlns:r="http://schemas.openxmlformats.org/officeDocument/2006/relationships" id="2147483648" r:id="R7788f5c636b241ad"/>
   </p:sldMasterIdLst>
   <p:notesMasterIdLst>
-    <p:notesMasterId xmlns:r="http://schemas.openxmlformats.org/officeDocument/2006/relationships" r:id="Rd16404bff6934994"/>
+    <p:notesMasterId xmlns:r="http://schemas.openxmlformats.org/officeDocument/2006/relationships" r:id="Re7464c97706345cf"/>
   </p:notesMasterIdLst>
   <p:sldIdLst>
-    <p:sldId xmlns:r="http://schemas.openxmlformats.org/officeDocument/2006/relationships" id="256" r:id="Rc0f85b1b0cae49d9"/>
-    <p:sldId xmlns:r="http://schemas.openxmlformats.org/officeDocument/2006/relationships" id="257" r:id="R637516ef183840a0"/>
-    <p:sldId xmlns:r="http://schemas.openxmlformats.org/officeDocument/2006/relationships" id="258" r:id="Ra5194b6b25c140e3"/>
-    <p:sldId xmlns:r="http://schemas.openxmlformats.org/officeDocument/2006/relationships" id="259" r:id="Radd63a91c84e4117"/>
-    <p:sldId xmlns:r="http://schemas.openxmlformats.org/officeDocument/2006/relationships" id="260" r:id="R527dd183f12a4944"/>
-    <p:sldId xmlns:r="http://schemas.openxmlformats.org/officeDocument/2006/relationships" id="261" r:id="R45e6a9f74a574189"/>
-    <p:sldId xmlns:r="http://schemas.openxmlformats.org/officeDocument/2006/relationships" id="262" r:id="R4dff47bf97fa4408"/>
-    <p:sldId xmlns:r="http://schemas.openxmlformats.org/officeDocument/2006/relationships" id="263" r:id="Rfa84634a4bdf49e9"/>
-    <p:sldId xmlns:r="http://schemas.openxmlformats.org/officeDocument/2006/relationships" id="264" r:id="Ra8b42b26da9d44d9"/>
-    <p:sldId xmlns:r="http://schemas.openxmlformats.org/officeDocument/2006/relationships" id="265" r:id="R3e874afd1cf04e8b"/>
+    <p:sldId xmlns:r="http://schemas.openxmlformats.org/officeDocument/2006/relationships" id="256" r:id="R7ac87dd4029440b1"/>
+    <p:sldId xmlns:r="http://schemas.openxmlformats.org/officeDocument/2006/relationships" id="257" r:id="R9e30627ee6c04573"/>
+    <p:sldId xmlns:r="http://schemas.openxmlformats.org/officeDocument/2006/relationships" id="258" r:id="Rc0fed0f15a1f453c"/>
+    <p:sldId xmlns:r="http://schemas.openxmlformats.org/officeDocument/2006/relationships" id="259" r:id="R4f6ac9ebc55a46bc"/>
+    <p:sldId xmlns:r="http://schemas.openxmlformats.org/officeDocument/2006/relationships" id="260" r:id="Rfb45e8ac7248456d"/>
+    <p:sldId xmlns:r="http://schemas.openxmlformats.org/officeDocument/2006/relationships" id="261" r:id="R94bdaf51323641a1"/>
+    <p:sldId xmlns:r="http://schemas.openxmlformats.org/officeDocument/2006/relationships" id="262" r:id="Ra318b1783bbc44ae"/>
+    <p:sldId xmlns:r="http://schemas.openxmlformats.org/officeDocument/2006/relationships" id="263" r:id="Rc7a65a57f73a4cf5"/>
+    <p:sldId xmlns:r="http://schemas.openxmlformats.org/officeDocument/2006/relationships" id="264" r:id="Rcfc04745bb84494b"/>
+    <p:sldId xmlns:r="http://schemas.openxmlformats.org/officeDocument/2006/relationships" id="265" r:id="R0bc2c800ac9146f2"/>
+    <p:sldId xmlns:r="http://schemas.openxmlformats.org/officeDocument/2006/relationships" id="266" r:id="Rcfa16655832c4224"/>
   </p:sldIdLst>
   <p:sldSz cx="12192000" cy="6858000"/>
   <p:notesSz cx="6858000" cy="9144000"/>
@@ -638,6 +639,72 @@
 </p:notes>
 </file>
 
+<file path=ppt/notesSlides/notesSlide11.xml><?xml version="1.0" encoding="utf-8"?>
+<p:notes xmlns:p="http://schemas.openxmlformats.org/presentationml/2006/main">
+  <p:cSld>
+    <p:spTree>
+      <p:nvGrpSpPr>
+        <p:cNvPr id="1" name=""/>
+        <p:cNvGrpSpPr/>
+        <p:nvPr/>
+      </p:nvGrpSpPr>
+      <p:grpSpPr>
+        <a:xfrm xmlns:a="http://schemas.openxmlformats.org/drawingml/2006/main"/>
+      </p:grpSpPr>
+      <p:sp>
+        <p:nvSpPr>
+          <p:cNvPr id="2" name="Slide Image Placeholder 1"/>
+          <p:cNvSpPr>
+            <a:spLocks xmlns:a="http://schemas.openxmlformats.org/drawingml/2006/main" noGrp="1"/>
+          </p:cNvSpPr>
+          <p:nvPr>
+            <p:ph type="sldImg" idx="0"/>
+          </p:nvPr>
+        </p:nvSpPr>
+        <p:spPr/>
+      </p:sp>
+      <p:sp>
+        <p:nvSpPr>
+          <p:cNvPr id="3" name="Notes Placeholder 2"/>
+          <p:cNvSpPr>
+            <a:spLocks xmlns:a="http://schemas.openxmlformats.org/drawingml/2006/main" noGrp="1"/>
+          </p:cNvSpPr>
+          <p:nvPr>
+            <p:ph type="body" idx="1"/>
+          </p:nvPr>
+        </p:nvSpPr>
+        <p:spPr/>
+        <p:txBody>
+          <a:bodyPr xmlns:a="http://schemas.openxmlformats.org/drawingml/2006/main"/>
+          <a:lstStyle xmlns:a="http://schemas.openxmlformats.org/drawingml/2006/main"/>
+          <a:p xmlns:a="http://schemas.openxmlformats.org/drawingml/2006/main"/>
+        </p:txBody>
+      </p:sp>
+      <p:sp>
+        <p:nvSpPr>
+          <p:cNvPr id="4" name="Slide Number Placeholder 3"/>
+          <p:cNvSpPr>
+            <a:spLocks xmlns:a="http://schemas.openxmlformats.org/drawingml/2006/main" noGrp="1"/>
+          </p:cNvSpPr>
+          <p:nvPr>
+            <p:ph type="sldNum" idx="5"/>
+          </p:nvPr>
+        </p:nvSpPr>
+        <p:spPr/>
+        <p:txBody>
+          <a:bodyPr xmlns:a="http://schemas.openxmlformats.org/drawingml/2006/main"/>
+          <a:lstStyle xmlns:a="http://schemas.openxmlformats.org/drawingml/2006/main"/>
+          <a:p xmlns:a="http://schemas.openxmlformats.org/drawingml/2006/main"/>
+        </p:txBody>
+      </p:sp>
+    </p:spTree>
+  </p:cSld>
+  <p:clrMapOvr>
+    <a:masterClrMapping xmlns:a="http://schemas.openxmlformats.org/drawingml/2006/main"/>
+  </p:clrMapOvr>
+</p:notes>
+</file>
+
 <file path=ppt/notesSlides/notesSlide2.xml><?xml version="1.0" encoding="utf-8"?>
 <p:notes xmlns:p="http://schemas.openxmlformats.org/presentationml/2006/main">
   <p:cSld>
@@ -1204,7 +1271,7 @@
   </p:cSld>
   <p:clrMap bg1="lt1" tx1="dk1" bg2="lt2" tx2="dk2" accent1="accent1" accent2="accent2" accent3="accent3" accent4="accent4" accent5="accent5" accent6="accent6" hlink="hlink" folHlink="folHlink"/>
   <p:sldLayoutIdLst>
-    <p:sldLayoutId xmlns:r="http://schemas.openxmlformats.org/officeDocument/2006/relationships" id="2147483649" r:id="R8485d356967147cd"/>
+    <p:sldLayoutId xmlns:r="http://schemas.openxmlformats.org/officeDocument/2006/relationships" id="2147483649" r:id="R9b38e318525a4f71"/>
   </p:sldLayoutIdLst>
   <p:txStyles>
     <p:titleStyle>
@@ -1752,10 +1819,10 @@
       </p:grpSpPr>
       <p:sp>
         <p:nvSpPr>
-          <p:cNvPr id="1" name="">
-            <a:extLst xmlns:a="http://schemas.openxmlformats.org/drawingml/2006/main">
-              <a:ext uri="{FF2B5EF4-FFF2-40B4-BE49-F238E27FC236}">
-                <a16:creationId xmlns:a16="http://schemas.microsoft.com/office/drawing/2014/main" id="{2ABEE62F-32DE-4984-A0EB-FD2E8525AE0A}"/>
+          <p:cNvPr id="15" name="">
+            <a:extLst xmlns:a="http://schemas.openxmlformats.org/drawingml/2006/main">
+              <a:ext uri="{FF2B5EF4-FFF2-40B4-BE49-F238E27FC236}">
+                <a16:creationId xmlns:a16="http://schemas.microsoft.com/office/drawing/2014/main" id="{B81E2A6F-04FE-4C6F-A8D0-7D7973584CC7}"/>
               </a:ext>
             </a:extLst>
           </p:cNvPr>
@@ -1783,7 +1850,7 @@
           <p:cNvPr id="2" name="">
             <a:extLst xmlns:a="http://schemas.openxmlformats.org/drawingml/2006/main">
               <a:ext uri="{FF2B5EF4-FFF2-40B4-BE49-F238E27FC236}">
-                <a16:creationId xmlns:a16="http://schemas.microsoft.com/office/drawing/2014/main" id="{ED54CAE9-A568-4526-98EB-F97EB020CFC2}"/>
+                <a16:creationId xmlns:a16="http://schemas.microsoft.com/office/drawing/2014/main" id="{768A4911-04E0-4647-9352-22EE6FCF49C4}"/>
               </a:ext>
             </a:extLst>
           </p:cNvPr>
@@ -1811,7 +1878,7 @@
           <p:cNvPr id="3" name="">
             <a:extLst xmlns:a="http://schemas.openxmlformats.org/drawingml/2006/main">
               <a:ext uri="{FF2B5EF4-FFF2-40B4-BE49-F238E27FC236}">
-                <a16:creationId xmlns:a16="http://schemas.microsoft.com/office/drawing/2014/main" id="{37182268-B0EB-4B3F-9643-A2B09CA13BEE}"/>
+                <a16:creationId xmlns:a16="http://schemas.microsoft.com/office/drawing/2014/main" id="{B44049F3-1A8A-4399-A342-871220BCB14B}"/>
               </a:ext>
             </a:extLst>
           </p:cNvPr>
@@ -1861,7 +1928,7 @@
           <p:cNvPr id="4" name="">
             <a:extLst xmlns:a="http://schemas.openxmlformats.org/drawingml/2006/main">
               <a:ext uri="{FF2B5EF4-FFF2-40B4-BE49-F238E27FC236}">
-                <a16:creationId xmlns:a16="http://schemas.microsoft.com/office/drawing/2014/main" id="{FC1C7371-96A1-4E53-B000-2311F1272BA8}"/>
+                <a16:creationId xmlns:a16="http://schemas.microsoft.com/office/drawing/2014/main" id="{D322BEF9-070F-4248-B51B-ECE8524716E2}"/>
               </a:ext>
             </a:extLst>
           </p:cNvPr>
@@ -1911,7 +1978,7 @@
           <p:cNvPr id="5" name="">
             <a:extLst xmlns:a="http://schemas.openxmlformats.org/drawingml/2006/main">
               <a:ext uri="{FF2B5EF4-FFF2-40B4-BE49-F238E27FC236}">
-                <a16:creationId xmlns:a16="http://schemas.microsoft.com/office/drawing/2014/main" id="{8E5DFF56-A712-4C88-9C30-9D8CEF44244E}"/>
+                <a16:creationId xmlns:a16="http://schemas.microsoft.com/office/drawing/2014/main" id="{EFEC5508-94D8-4B36-9831-A5C4E111E410}"/>
               </a:ext>
             </a:extLst>
           </p:cNvPr>
@@ -1952,7 +2019,7 @@
           <p:cNvPr id="6" name="">
             <a:extLst xmlns:a="http://schemas.openxmlformats.org/drawingml/2006/main">
               <a:ext uri="{FF2B5EF4-FFF2-40B4-BE49-F238E27FC236}">
-                <a16:creationId xmlns:a16="http://schemas.microsoft.com/office/drawing/2014/main" id="{6DECEA85-83F9-4060-8D68-D121B6557C59}"/>
+                <a16:creationId xmlns:a16="http://schemas.microsoft.com/office/drawing/2014/main" id="{CA5A3180-22A6-4CE8-AA42-E82DC7645799}"/>
               </a:ext>
             </a:extLst>
           </p:cNvPr>
@@ -2002,7 +2069,7 @@
           <p:cNvPr id="7" name="">
             <a:extLst xmlns:a="http://schemas.openxmlformats.org/drawingml/2006/main">
               <a:ext uri="{FF2B5EF4-FFF2-40B4-BE49-F238E27FC236}">
-                <a16:creationId xmlns:a16="http://schemas.microsoft.com/office/drawing/2014/main" id="{EE2B7378-CB88-4D1E-B858-68A748C93C6C}"/>
+                <a16:creationId xmlns:a16="http://schemas.microsoft.com/office/drawing/2014/main" id="{430BED00-879C-454F-B126-0748756E1F66}"/>
               </a:ext>
             </a:extLst>
           </p:cNvPr>
@@ -2043,7 +2110,7 @@
           <p:cNvPr id="8" name="">
             <a:extLst xmlns:a="http://schemas.openxmlformats.org/drawingml/2006/main">
               <a:ext uri="{FF2B5EF4-FFF2-40B4-BE49-F238E27FC236}">
-                <a16:creationId xmlns:a16="http://schemas.microsoft.com/office/drawing/2014/main" id="{C86694B3-ED58-45F6-8EF7-5C773C78431D}"/>
+                <a16:creationId xmlns:a16="http://schemas.microsoft.com/office/drawing/2014/main" id="{2B04C1AA-E87E-4A39-B58B-BF60496505EC}"/>
               </a:ext>
             </a:extLst>
           </p:cNvPr>
@@ -2093,7 +2160,7 @@
           <p:cNvPr id="9" name="">
             <a:extLst xmlns:a="http://schemas.openxmlformats.org/drawingml/2006/main">
               <a:ext uri="{FF2B5EF4-FFF2-40B4-BE49-F238E27FC236}">
-                <a16:creationId xmlns:a16="http://schemas.microsoft.com/office/drawing/2014/main" id="{38FC270B-564D-414F-9285-1628CAB815AB}"/>
+                <a16:creationId xmlns:a16="http://schemas.microsoft.com/office/drawing/2014/main" id="{6DC2CD7B-CB40-4EC4-BE34-6BBA0DE5BD4E}"/>
               </a:ext>
             </a:extLst>
           </p:cNvPr>
@@ -2134,7 +2201,7 @@
           <p:cNvPr id="10" name="">
             <a:extLst xmlns:a="http://schemas.openxmlformats.org/drawingml/2006/main">
               <a:ext uri="{FF2B5EF4-FFF2-40B4-BE49-F238E27FC236}">
-                <a16:creationId xmlns:a16="http://schemas.microsoft.com/office/drawing/2014/main" id="{FF207885-C3EF-4E33-96C9-F0C636641CA6}"/>
+                <a16:creationId xmlns:a16="http://schemas.microsoft.com/office/drawing/2014/main" id="{633FEE91-AADD-4914-BCAE-4A715FF8CBD5}"/>
               </a:ext>
             </a:extLst>
           </p:cNvPr>
@@ -2184,7 +2251,7 @@
           <p:cNvPr id="11" name="">
             <a:extLst xmlns:a="http://schemas.openxmlformats.org/drawingml/2006/main">
               <a:ext uri="{FF2B5EF4-FFF2-40B4-BE49-F238E27FC236}">
-                <a16:creationId xmlns:a16="http://schemas.microsoft.com/office/drawing/2014/main" id="{89D152FD-F2EF-4648-A5FD-2E722C735963}"/>
+                <a16:creationId xmlns:a16="http://schemas.microsoft.com/office/drawing/2014/main" id="{E0F7A563-71CB-4960-89A3-0837A79A4237}"/>
               </a:ext>
             </a:extLst>
           </p:cNvPr>
@@ -2225,7 +2292,7 @@
           <p:cNvPr id="12" name="">
             <a:extLst xmlns:a="http://schemas.openxmlformats.org/drawingml/2006/main">
               <a:ext uri="{FF2B5EF4-FFF2-40B4-BE49-F238E27FC236}">
-                <a16:creationId xmlns:a16="http://schemas.microsoft.com/office/drawing/2014/main" id="{2739C3A2-51E7-4F78-865F-041FA48F82B4}"/>
+                <a16:creationId xmlns:a16="http://schemas.microsoft.com/office/drawing/2014/main" id="{93863791-579E-4FD8-963C-128E524482E6}"/>
               </a:ext>
             </a:extLst>
           </p:cNvPr>
@@ -2265,7 +2332,7 @@
                   <a:srgbClr val="BF5AF2"/>
                 </a:solidFill>
               </a:rPr>
-              <a:t>AI-сервіс</a:t>
+              <a:t>Підбір</a:t>
             </a:r>
           </a:p>
         </p:txBody>
@@ -2279,7 +2346,7 @@
           <p:nvPr/>
         </p:nvPicPr>
         <p:blipFill>
-          <a:blip xmlns:r="http://schemas.openxmlformats.org/officeDocument/2006/relationships" xmlns:a="http://schemas.openxmlformats.org/drawingml/2006/main" r:embed="R0b1f2c6ef80d4955"/>
+          <a:blip xmlns:r="http://schemas.openxmlformats.org/officeDocument/2006/relationships" xmlns:a="http://schemas.openxmlformats.org/drawingml/2006/main" r:embed="R7039403c6305490a"/>
           <a:stretch xmlns:a="http://schemas.openxmlformats.org/drawingml/2006/main"/>
         </p:blipFill>
         <p:spPr>
@@ -2299,7 +2366,7 @@
           <p:cNvPr id="14" name="">
             <a:extLst xmlns:a="http://schemas.openxmlformats.org/drawingml/2006/main">
               <a:ext uri="{FF2B5EF4-FFF2-40B4-BE49-F238E27FC236}">
-                <a16:creationId xmlns:a16="http://schemas.microsoft.com/office/drawing/2014/main" id="{AABFB992-1794-428A-8B98-9DE02ADA14E9}"/>
+                <a16:creationId xmlns:a16="http://schemas.microsoft.com/office/drawing/2014/main" id="{1873418C-65CD-4770-97CE-6321E3FA8C5E}"/>
               </a:ext>
             </a:extLst>
           </p:cNvPr>
@@ -2347,7 +2414,7 @@
     </p:spTree>
     <p:extLst>
       <p:ext uri="{BB962C8B-B14F-4D97-AF65-F5344CB8AC3E}">
-        <p14:creationId xmlns:p14="http://schemas.microsoft.com/office/powerpoint/2010/main" val="1445796059"/>
+        <p14:creationId xmlns:p14="http://schemas.microsoft.com/office/powerpoint/2010/main" val="276354167"/>
       </p:ext>
     </p:extLst>
   </p:cSld>
@@ -2375,10 +2442,10 @@
       </p:grpSpPr>
       <p:sp>
         <p:nvSpPr>
-          <p:cNvPr id="1" name="">
-            <a:extLst xmlns:a="http://schemas.openxmlformats.org/drawingml/2006/main">
-              <a:ext uri="{FF2B5EF4-FFF2-40B4-BE49-F238E27FC236}">
-                <a16:creationId xmlns:a16="http://schemas.microsoft.com/office/drawing/2014/main" id="{BCC7C5D9-AE41-4BB5-82BC-578793385328}"/>
+          <p:cNvPr id="27" name="">
+            <a:extLst xmlns:a="http://schemas.openxmlformats.org/drawingml/2006/main">
+              <a:ext uri="{FF2B5EF4-FFF2-40B4-BE49-F238E27FC236}">
+                <a16:creationId xmlns:a16="http://schemas.microsoft.com/office/drawing/2014/main" id="{3A9D7020-F70C-49EC-A9AE-5CB58223DEA3}"/>
               </a:ext>
             </a:extLst>
           </p:cNvPr>
@@ -2406,7 +2473,7 @@
           <p:cNvPr id="2" name="">
             <a:extLst xmlns:a="http://schemas.openxmlformats.org/drawingml/2006/main">
               <a:ext uri="{FF2B5EF4-FFF2-40B4-BE49-F238E27FC236}">
-                <a16:creationId xmlns:a16="http://schemas.microsoft.com/office/drawing/2014/main" id="{062F6C52-37C3-4B51-85A0-58E989D53C54}"/>
+                <a16:creationId xmlns:a16="http://schemas.microsoft.com/office/drawing/2014/main" id="{6822FDF1-DBE3-4D6C-89AD-8D33912307B5}"/>
               </a:ext>
             </a:extLst>
           </p:cNvPr>
@@ -2434,7 +2501,7 @@
           <p:cNvPr id="3" name="">
             <a:extLst xmlns:a="http://schemas.openxmlformats.org/drawingml/2006/main">
               <a:ext uri="{FF2B5EF4-FFF2-40B4-BE49-F238E27FC236}">
-                <a16:creationId xmlns:a16="http://schemas.microsoft.com/office/drawing/2014/main" id="{3DE40BDF-6404-4921-ADC9-92E584DD4877}"/>
+                <a16:creationId xmlns:a16="http://schemas.microsoft.com/office/drawing/2014/main" id="{99C4BE93-C1A2-4937-A9A3-97BA6DDDA4AD}"/>
               </a:ext>
             </a:extLst>
           </p:cNvPr>
@@ -2484,7 +2551,7 @@
           <p:cNvPr id="4" name="">
             <a:extLst xmlns:a="http://schemas.openxmlformats.org/drawingml/2006/main">
               <a:ext uri="{FF2B5EF4-FFF2-40B4-BE49-F238E27FC236}">
-                <a16:creationId xmlns:a16="http://schemas.microsoft.com/office/drawing/2014/main" id="{3DBE2E8D-9B53-4E14-A857-BF8C979F6E82}"/>
+                <a16:creationId xmlns:a16="http://schemas.microsoft.com/office/drawing/2014/main" id="{C3A46A79-6E54-4487-91FD-1E41594E7E25}"/>
               </a:ext>
             </a:extLst>
           </p:cNvPr>
@@ -2524,7 +2591,7 @@
                   <a:srgbClr val="F7F8FF"/>
                 </a:solidFill>
               </a:rPr>
-              <a:t>Що показати на захисті</a:t>
+              <a:t>Проєкт перевірено перед захистом</a:t>
             </a:r>
           </a:p>
         </p:txBody>
@@ -2534,7 +2601,7 @@
           <p:cNvPr id="5" name="">
             <a:extLst xmlns:a="http://schemas.openxmlformats.org/drawingml/2006/main">
               <a:ext uri="{FF2B5EF4-FFF2-40B4-BE49-F238E27FC236}">
-                <a16:creationId xmlns:a16="http://schemas.microsoft.com/office/drawing/2014/main" id="{DA63D511-B637-4086-90D0-C9419FCCD7CC}"/>
+                <a16:creationId xmlns:a16="http://schemas.microsoft.com/office/drawing/2014/main" id="{A396811E-7F7C-406E-8807-30D4331736B7}"/>
               </a:ext>
             </a:extLst>
           </p:cNvPr>
@@ -2574,7 +2641,7 @@
                   <a:srgbClr val="A9B0C2"/>
                 </a:solidFill>
               </a:rPr>
-              <a:t>Демонстрацію можна провести по кроках: інтерфейс, оцінки, коментарі, backend і база даних.</a:t>
+              <a:t>Перевірка потрібна, щоб показати, що зміни не залишились тільки на рівні макета.</a:t>
             </a:r>
           </a:p>
         </p:txBody>
@@ -2584,18 +2651,441 @@
           <p:cNvPr id="6" name="">
             <a:extLst xmlns:a="http://schemas.openxmlformats.org/drawingml/2006/main">
               <a:ext uri="{FF2B5EF4-FFF2-40B4-BE49-F238E27FC236}">
-                <a16:creationId xmlns:a16="http://schemas.microsoft.com/office/drawing/2014/main" id="{B0462C70-597F-4A5D-9830-BA7E2B3DCE86}"/>
-              </a:ext>
-            </a:extLst>
-          </p:cNvPr>
-          <p:cNvSpPr>
-            <a:spLocks xmlns:a="http://schemas.openxmlformats.org/drawingml/2006/main" noGrp="1"/>
-          </p:cNvSpPr>
-          <p:nvPr/>
-        </p:nvSpPr>
-        <p:spPr>
-          <a:xfrm xmlns:a="http://schemas.openxmlformats.org/drawingml/2006/main">
-            <a:off x="1200150" y="2476500"/>
+                <a16:creationId xmlns:a16="http://schemas.microsoft.com/office/drawing/2014/main" id="{4C7826BA-EB55-47A2-A157-AF63A5B4F37F}"/>
+              </a:ext>
+            </a:extLst>
+          </p:cNvPr>
+          <p:cNvSpPr>
+            <a:spLocks xmlns:a="http://schemas.openxmlformats.org/drawingml/2006/main" noGrp="1"/>
+          </p:cNvSpPr>
+          <p:nvPr/>
+        </p:nvSpPr>
+        <p:spPr>
+          <a:xfrm xmlns:a="http://schemas.openxmlformats.org/drawingml/2006/main">
+            <a:off x="1047750" y="2571750"/>
+            <a:ext cx="2476500" cy="990600"/>
+          </a:xfrm>
+          <a:prstGeom xmlns:a="http://schemas.openxmlformats.org/drawingml/2006/main" prst="roundRect">
+            <a:avLst>
+              <a:gd name="adj" fmla="val 11538"/>
+            </a:avLst>
+          </a:prstGeom>
+          <a:solidFill xmlns:a="http://schemas.openxmlformats.org/drawingml/2006/main">
+            <a:srgbClr val="171A23"/>
+          </a:solidFill>
+          <a:ln xmlns:a="http://schemas.openxmlformats.org/drawingml/2006/main" w="9525">
+            <a:solidFill>
+              <a:srgbClr val="30D158"/>
+            </a:solidFill>
+            <a:prstDash val="solid"/>
+          </a:ln>
+        </p:spPr>
+        <p:style>
+          <a:lnRef xmlns:a="http://schemas.openxmlformats.org/drawingml/2006/main" idx="0"/>
+          <a:fillRef xmlns:a="http://schemas.openxmlformats.org/drawingml/2006/main" idx="0"/>
+          <a:effectRef xmlns:a="http://schemas.openxmlformats.org/drawingml/2006/main" idx="4"/>
+          <a:fontRef xmlns:a="http://schemas.openxmlformats.org/drawingml/2006/main" idx="major"/>
+        </p:style>
+      </p:sp>
+      <p:sp>
+        <p:nvSpPr>
+          <p:cNvPr id="7" name="">
+            <a:extLst xmlns:a="http://schemas.openxmlformats.org/drawingml/2006/main">
+              <a:ext uri="{FF2B5EF4-FFF2-40B4-BE49-F238E27FC236}">
+                <a16:creationId xmlns:a16="http://schemas.microsoft.com/office/drawing/2014/main" id="{5AF0E8B1-4358-4D9A-B036-A5A30B2E81DB}"/>
+              </a:ext>
+            </a:extLst>
+          </p:cNvPr>
+          <p:cNvSpPr>
+            <a:spLocks xmlns:a="http://schemas.openxmlformats.org/drawingml/2006/main" noGrp="1"/>
+          </p:cNvSpPr>
+          <p:nvPr/>
+        </p:nvSpPr>
+        <p:spPr>
+          <a:xfrm xmlns:a="http://schemas.openxmlformats.org/drawingml/2006/main">
+            <a:off x="1200150" y="2724150"/>
+            <a:ext cx="2171700" cy="323850"/>
+          </a:xfrm>
+          <a:prstGeom xmlns:a="http://schemas.openxmlformats.org/drawingml/2006/main" prst="rect">
+            <a:avLst/>
+          </a:prstGeom>
+          <a:noFill xmlns:a="http://schemas.openxmlformats.org/drawingml/2006/main"/>
+          <a:ln xmlns:a="http://schemas.openxmlformats.org/drawingml/2006/main" w="0">
+            <a:noFill/>
+            <a:prstDash val="solid"/>
+          </a:ln>
+        </p:spPr>
+        <p:txBody>
+          <a:bodyPr xmlns:a="http://schemas.openxmlformats.org/drawingml/2006/main"/>
+          <a:lstStyle xmlns:a="http://schemas.openxmlformats.org/drawingml/2006/main"/>
+          <a:p xmlns:a="http://schemas.openxmlformats.org/drawingml/2006/main">
+            <a:pPr algn="l">
+              <a:defRPr sz="2250" b="1">
+                <a:solidFill>
+                  <a:srgbClr val="30D158"/>
+                </a:solidFill>
+              </a:defRPr>
+            </a:pPr>
+            <a:r>
+              <a:rPr sz="2250" b="1">
+                <a:solidFill>
+                  <a:srgbClr val="30D158"/>
+                </a:solidFill>
+              </a:rPr>
+              <a:t>0</a:t>
+            </a:r>
+          </a:p>
+        </p:txBody>
+      </p:sp>
+      <p:sp>
+        <p:nvSpPr>
+          <p:cNvPr id="8" name="">
+            <a:extLst xmlns:a="http://schemas.openxmlformats.org/drawingml/2006/main">
+              <a:ext uri="{FF2B5EF4-FFF2-40B4-BE49-F238E27FC236}">
+                <a16:creationId xmlns:a16="http://schemas.microsoft.com/office/drawing/2014/main" id="{ED8CB735-8BC0-4E8E-9823-161198663DEE}"/>
+              </a:ext>
+            </a:extLst>
+          </p:cNvPr>
+          <p:cNvSpPr>
+            <a:spLocks xmlns:a="http://schemas.openxmlformats.org/drawingml/2006/main" noGrp="1"/>
+          </p:cNvSpPr>
+          <p:nvPr/>
+        </p:nvSpPr>
+        <p:spPr>
+          <a:xfrm xmlns:a="http://schemas.openxmlformats.org/drawingml/2006/main">
+            <a:off x="1200150" y="3124200"/>
+            <a:ext cx="2171700" cy="285750"/>
+          </a:xfrm>
+          <a:prstGeom xmlns:a="http://schemas.openxmlformats.org/drawingml/2006/main" prst="rect">
+            <a:avLst/>
+          </a:prstGeom>
+          <a:noFill xmlns:a="http://schemas.openxmlformats.org/drawingml/2006/main"/>
+          <a:ln xmlns:a="http://schemas.openxmlformats.org/drawingml/2006/main" w="0">
+            <a:noFill/>
+            <a:prstDash val="solid"/>
+          </a:ln>
+        </p:spPr>
+        <p:txBody>
+          <a:bodyPr xmlns:a="http://schemas.openxmlformats.org/drawingml/2006/main"/>
+          <a:lstStyle xmlns:a="http://schemas.openxmlformats.org/drawingml/2006/main"/>
+          <a:p xmlns:a="http://schemas.openxmlformats.org/drawingml/2006/main">
+            <a:pPr algn="l">
+              <a:defRPr sz="1125" b="0">
+                <a:solidFill>
+                  <a:srgbClr val="A9B0C2"/>
+                </a:solidFill>
+              </a:defRPr>
+            </a:pPr>
+            <a:r>
+              <a:rPr sz="1125" b="0">
+                <a:solidFill>
+                  <a:srgbClr val="A9B0C2"/>
+                </a:solidFill>
+              </a:rPr>
+              <a:t>помилок аналізу Flutter</a:t>
+            </a:r>
+          </a:p>
+        </p:txBody>
+      </p:sp>
+      <p:sp>
+        <p:nvSpPr>
+          <p:cNvPr id="9" name="">
+            <a:extLst xmlns:a="http://schemas.openxmlformats.org/drawingml/2006/main">
+              <a:ext uri="{FF2B5EF4-FFF2-40B4-BE49-F238E27FC236}">
+                <a16:creationId xmlns:a16="http://schemas.microsoft.com/office/drawing/2014/main" id="{F3425231-DA00-43F1-A33D-FE179CD908F1}"/>
+              </a:ext>
+            </a:extLst>
+          </p:cNvPr>
+          <p:cNvSpPr>
+            <a:spLocks xmlns:a="http://schemas.openxmlformats.org/drawingml/2006/main" noGrp="1"/>
+          </p:cNvSpPr>
+          <p:nvPr/>
+        </p:nvSpPr>
+        <p:spPr>
+          <a:xfrm xmlns:a="http://schemas.openxmlformats.org/drawingml/2006/main">
+            <a:off x="3905250" y="2571750"/>
+            <a:ext cx="2476500" cy="990600"/>
+          </a:xfrm>
+          <a:prstGeom xmlns:a="http://schemas.openxmlformats.org/drawingml/2006/main" prst="roundRect">
+            <a:avLst>
+              <a:gd name="adj" fmla="val 11538"/>
+            </a:avLst>
+          </a:prstGeom>
+          <a:solidFill xmlns:a="http://schemas.openxmlformats.org/drawingml/2006/main">
+            <a:srgbClr val="171A23"/>
+          </a:solidFill>
+          <a:ln xmlns:a="http://schemas.openxmlformats.org/drawingml/2006/main" w="9525">
+            <a:solidFill>
+              <a:srgbClr val="66D4CF"/>
+            </a:solidFill>
+            <a:prstDash val="solid"/>
+          </a:ln>
+        </p:spPr>
+        <p:style>
+          <a:lnRef xmlns:a="http://schemas.openxmlformats.org/drawingml/2006/main" idx="0"/>
+          <a:fillRef xmlns:a="http://schemas.openxmlformats.org/drawingml/2006/main" idx="0"/>
+          <a:effectRef xmlns:a="http://schemas.openxmlformats.org/drawingml/2006/main" idx="4"/>
+          <a:fontRef xmlns:a="http://schemas.openxmlformats.org/drawingml/2006/main" idx="major"/>
+        </p:style>
+      </p:sp>
+      <p:sp>
+        <p:nvSpPr>
+          <p:cNvPr id="10" name="">
+            <a:extLst xmlns:a="http://schemas.openxmlformats.org/drawingml/2006/main">
+              <a:ext uri="{FF2B5EF4-FFF2-40B4-BE49-F238E27FC236}">
+                <a16:creationId xmlns:a16="http://schemas.microsoft.com/office/drawing/2014/main" id="{D7D94EBF-95C2-43DE-8162-BA8CD84304A7}"/>
+              </a:ext>
+            </a:extLst>
+          </p:cNvPr>
+          <p:cNvSpPr>
+            <a:spLocks xmlns:a="http://schemas.openxmlformats.org/drawingml/2006/main" noGrp="1"/>
+          </p:cNvSpPr>
+          <p:nvPr/>
+        </p:nvSpPr>
+        <p:spPr>
+          <a:xfrm xmlns:a="http://schemas.openxmlformats.org/drawingml/2006/main">
+            <a:off x="4057650" y="2724150"/>
+            <a:ext cx="2171700" cy="323850"/>
+          </a:xfrm>
+          <a:prstGeom xmlns:a="http://schemas.openxmlformats.org/drawingml/2006/main" prst="rect">
+            <a:avLst/>
+          </a:prstGeom>
+          <a:noFill xmlns:a="http://schemas.openxmlformats.org/drawingml/2006/main"/>
+          <a:ln xmlns:a="http://schemas.openxmlformats.org/drawingml/2006/main" w="0">
+            <a:noFill/>
+            <a:prstDash val="solid"/>
+          </a:ln>
+        </p:spPr>
+        <p:txBody>
+          <a:bodyPr xmlns:a="http://schemas.openxmlformats.org/drawingml/2006/main"/>
+          <a:lstStyle xmlns:a="http://schemas.openxmlformats.org/drawingml/2006/main"/>
+          <a:p xmlns:a="http://schemas.openxmlformats.org/drawingml/2006/main">
+            <a:pPr algn="l">
+              <a:defRPr sz="2250" b="1">
+                <a:solidFill>
+                  <a:srgbClr val="66D4CF"/>
+                </a:solidFill>
+              </a:defRPr>
+            </a:pPr>
+            <a:r>
+              <a:rPr sz="2250" b="1">
+                <a:solidFill>
+                  <a:srgbClr val="66D4CF"/>
+                </a:solidFill>
+              </a:rPr>
+              <a:t>1/1</a:t>
+            </a:r>
+          </a:p>
+        </p:txBody>
+      </p:sp>
+      <p:sp>
+        <p:nvSpPr>
+          <p:cNvPr id="11" name="">
+            <a:extLst xmlns:a="http://schemas.openxmlformats.org/drawingml/2006/main">
+              <a:ext uri="{FF2B5EF4-FFF2-40B4-BE49-F238E27FC236}">
+                <a16:creationId xmlns:a16="http://schemas.microsoft.com/office/drawing/2014/main" id="{B641AFF3-A789-43A6-8FE7-89D6B04A23A7}"/>
+              </a:ext>
+            </a:extLst>
+          </p:cNvPr>
+          <p:cNvSpPr>
+            <a:spLocks xmlns:a="http://schemas.openxmlformats.org/drawingml/2006/main" noGrp="1"/>
+          </p:cNvSpPr>
+          <p:nvPr/>
+        </p:nvSpPr>
+        <p:spPr>
+          <a:xfrm xmlns:a="http://schemas.openxmlformats.org/drawingml/2006/main">
+            <a:off x="4057650" y="3124200"/>
+            <a:ext cx="2171700" cy="285750"/>
+          </a:xfrm>
+          <a:prstGeom xmlns:a="http://schemas.openxmlformats.org/drawingml/2006/main" prst="rect">
+            <a:avLst/>
+          </a:prstGeom>
+          <a:noFill xmlns:a="http://schemas.openxmlformats.org/drawingml/2006/main"/>
+          <a:ln xmlns:a="http://schemas.openxmlformats.org/drawingml/2006/main" w="0">
+            <a:noFill/>
+            <a:prstDash val="solid"/>
+          </a:ln>
+        </p:spPr>
+        <p:txBody>
+          <a:bodyPr xmlns:a="http://schemas.openxmlformats.org/drawingml/2006/main"/>
+          <a:lstStyle xmlns:a="http://schemas.openxmlformats.org/drawingml/2006/main"/>
+          <a:p xmlns:a="http://schemas.openxmlformats.org/drawingml/2006/main">
+            <a:pPr algn="l">
+              <a:defRPr sz="1125" b="0">
+                <a:solidFill>
+                  <a:srgbClr val="A9B0C2"/>
+                </a:solidFill>
+              </a:defRPr>
+            </a:pPr>
+            <a:r>
+              <a:rPr sz="1125" b="0">
+                <a:solidFill>
+                  <a:srgbClr val="A9B0C2"/>
+                </a:solidFill>
+              </a:rPr>
+              <a:t>тест пройшов</a:t>
+            </a:r>
+          </a:p>
+        </p:txBody>
+      </p:sp>
+      <p:sp>
+        <p:nvSpPr>
+          <p:cNvPr id="12" name="">
+            <a:extLst xmlns:a="http://schemas.openxmlformats.org/drawingml/2006/main">
+              <a:ext uri="{FF2B5EF4-FFF2-40B4-BE49-F238E27FC236}">
+                <a16:creationId xmlns:a16="http://schemas.microsoft.com/office/drawing/2014/main" id="{BA91FACA-9F2F-4E72-A4C3-A16F02F89B81}"/>
+              </a:ext>
+            </a:extLst>
+          </p:cNvPr>
+          <p:cNvSpPr>
+            <a:spLocks xmlns:a="http://schemas.openxmlformats.org/drawingml/2006/main" noGrp="1"/>
+          </p:cNvSpPr>
+          <p:nvPr/>
+        </p:nvSpPr>
+        <p:spPr>
+          <a:xfrm xmlns:a="http://schemas.openxmlformats.org/drawingml/2006/main">
+            <a:off x="6762750" y="2571750"/>
+            <a:ext cx="2476500" cy="990600"/>
+          </a:xfrm>
+          <a:prstGeom xmlns:a="http://schemas.openxmlformats.org/drawingml/2006/main" prst="roundRect">
+            <a:avLst>
+              <a:gd name="adj" fmla="val 11538"/>
+            </a:avLst>
+          </a:prstGeom>
+          <a:solidFill xmlns:a="http://schemas.openxmlformats.org/drawingml/2006/main">
+            <a:srgbClr val="171A23"/>
+          </a:solidFill>
+          <a:ln xmlns:a="http://schemas.openxmlformats.org/drawingml/2006/main" w="9525">
+            <a:solidFill>
+              <a:srgbClr val="0A84FF"/>
+            </a:solidFill>
+            <a:prstDash val="solid"/>
+          </a:ln>
+        </p:spPr>
+        <p:style>
+          <a:lnRef xmlns:a="http://schemas.openxmlformats.org/drawingml/2006/main" idx="0"/>
+          <a:fillRef xmlns:a="http://schemas.openxmlformats.org/drawingml/2006/main" idx="0"/>
+          <a:effectRef xmlns:a="http://schemas.openxmlformats.org/drawingml/2006/main" idx="4"/>
+          <a:fontRef xmlns:a="http://schemas.openxmlformats.org/drawingml/2006/main" idx="major"/>
+        </p:style>
+      </p:sp>
+      <p:sp>
+        <p:nvSpPr>
+          <p:cNvPr id="13" name="">
+            <a:extLst xmlns:a="http://schemas.openxmlformats.org/drawingml/2006/main">
+              <a:ext uri="{FF2B5EF4-FFF2-40B4-BE49-F238E27FC236}">
+                <a16:creationId xmlns:a16="http://schemas.microsoft.com/office/drawing/2014/main" id="{26CDF4E7-257B-4E53-985E-D95C243A6068}"/>
+              </a:ext>
+            </a:extLst>
+          </p:cNvPr>
+          <p:cNvSpPr>
+            <a:spLocks xmlns:a="http://schemas.openxmlformats.org/drawingml/2006/main" noGrp="1"/>
+          </p:cNvSpPr>
+          <p:nvPr/>
+        </p:nvSpPr>
+        <p:spPr>
+          <a:xfrm xmlns:a="http://schemas.openxmlformats.org/drawingml/2006/main">
+            <a:off x="6915150" y="2724150"/>
+            <a:ext cx="2171700" cy="323850"/>
+          </a:xfrm>
+          <a:prstGeom xmlns:a="http://schemas.openxmlformats.org/drawingml/2006/main" prst="rect">
+            <a:avLst/>
+          </a:prstGeom>
+          <a:noFill xmlns:a="http://schemas.openxmlformats.org/drawingml/2006/main"/>
+          <a:ln xmlns:a="http://schemas.openxmlformats.org/drawingml/2006/main" w="0">
+            <a:noFill/>
+            <a:prstDash val="solid"/>
+          </a:ln>
+        </p:spPr>
+        <p:txBody>
+          <a:bodyPr xmlns:a="http://schemas.openxmlformats.org/drawingml/2006/main"/>
+          <a:lstStyle xmlns:a="http://schemas.openxmlformats.org/drawingml/2006/main"/>
+          <a:p xmlns:a="http://schemas.openxmlformats.org/drawingml/2006/main">
+            <a:pPr algn="l">
+              <a:defRPr sz="2250" b="1">
+                <a:solidFill>
+                  <a:srgbClr val="0A84FF"/>
+                </a:solidFill>
+              </a:defRPr>
+            </a:pPr>
+            <a:r>
+              <a:rPr sz="2250" b="1">
+                <a:solidFill>
+                  <a:srgbClr val="0A84FF"/>
+                </a:solidFill>
+              </a:rPr>
+              <a:t>OK</a:t>
+            </a:r>
+          </a:p>
+        </p:txBody>
+      </p:sp>
+      <p:sp>
+        <p:nvSpPr>
+          <p:cNvPr id="14" name="">
+            <a:extLst xmlns:a="http://schemas.openxmlformats.org/drawingml/2006/main">
+              <a:ext uri="{FF2B5EF4-FFF2-40B4-BE49-F238E27FC236}">
+                <a16:creationId xmlns:a16="http://schemas.microsoft.com/office/drawing/2014/main" id="{5423B5BE-FFDA-4FDA-92B1-67A1C131EBFE}"/>
+              </a:ext>
+            </a:extLst>
+          </p:cNvPr>
+          <p:cNvSpPr>
+            <a:spLocks xmlns:a="http://schemas.openxmlformats.org/drawingml/2006/main" noGrp="1"/>
+          </p:cNvSpPr>
+          <p:nvPr/>
+        </p:nvSpPr>
+        <p:spPr>
+          <a:xfrm xmlns:a="http://schemas.openxmlformats.org/drawingml/2006/main">
+            <a:off x="6915150" y="3124200"/>
+            <a:ext cx="2171700" cy="285750"/>
+          </a:xfrm>
+          <a:prstGeom xmlns:a="http://schemas.openxmlformats.org/drawingml/2006/main" prst="rect">
+            <a:avLst/>
+          </a:prstGeom>
+          <a:noFill xmlns:a="http://schemas.openxmlformats.org/drawingml/2006/main"/>
+          <a:ln xmlns:a="http://schemas.openxmlformats.org/drawingml/2006/main" w="0">
+            <a:noFill/>
+            <a:prstDash val="solid"/>
+          </a:ln>
+        </p:spPr>
+        <p:txBody>
+          <a:bodyPr xmlns:a="http://schemas.openxmlformats.org/drawingml/2006/main"/>
+          <a:lstStyle xmlns:a="http://schemas.openxmlformats.org/drawingml/2006/main"/>
+          <a:p xmlns:a="http://schemas.openxmlformats.org/drawingml/2006/main">
+            <a:pPr algn="l">
+              <a:defRPr sz="1125" b="0">
+                <a:solidFill>
+                  <a:srgbClr val="A9B0C2"/>
+                </a:solidFill>
+              </a:defRPr>
+            </a:pPr>
+            <a:r>
+              <a:rPr sz="1125" b="0">
+                <a:solidFill>
+                  <a:srgbClr val="A9B0C2"/>
+                </a:solidFill>
+              </a:rPr>
+              <a:t>backend py_compile</a:t>
+            </a:r>
+          </a:p>
+        </p:txBody>
+      </p:sp>
+      <p:sp>
+        <p:nvSpPr>
+          <p:cNvPr id="15" name="">
+            <a:extLst xmlns:a="http://schemas.openxmlformats.org/drawingml/2006/main">
+              <a:ext uri="{FF2B5EF4-FFF2-40B4-BE49-F238E27FC236}">
+                <a16:creationId xmlns:a16="http://schemas.microsoft.com/office/drawing/2014/main" id="{11C332AF-DF17-4459-A31A-05B55ABA435E}"/>
+              </a:ext>
+            </a:extLst>
+          </p:cNvPr>
+          <p:cNvSpPr>
+            <a:spLocks xmlns:a="http://schemas.openxmlformats.org/drawingml/2006/main" noGrp="1"/>
+          </p:cNvSpPr>
+          <p:nvPr/>
+        </p:nvSpPr>
+        <p:spPr>
+          <a:xfrm xmlns:a="http://schemas.openxmlformats.org/drawingml/2006/main">
+            <a:off x="1104900" y="4191000"/>
             <a:ext cx="323850" cy="323850"/>
           </a:xfrm>
           <a:prstGeom xmlns:a="http://schemas.openxmlformats.org/drawingml/2006/main" prst="roundRect">
@@ -2622,21 +3112,21 @@
       </p:sp>
       <p:sp>
         <p:nvSpPr>
-          <p:cNvPr id="7" name="">
-            <a:extLst xmlns:a="http://schemas.openxmlformats.org/drawingml/2006/main">
-              <a:ext uri="{FF2B5EF4-FFF2-40B4-BE49-F238E27FC236}">
-                <a16:creationId xmlns:a16="http://schemas.microsoft.com/office/drawing/2014/main" id="{DDBAE40E-8F41-499C-BF2A-4FF4AE71764B}"/>
-              </a:ext>
-            </a:extLst>
-          </p:cNvPr>
-          <p:cNvSpPr>
-            <a:spLocks xmlns:a="http://schemas.openxmlformats.org/drawingml/2006/main" noGrp="1"/>
-          </p:cNvSpPr>
-          <p:nvPr/>
-        </p:nvSpPr>
-        <p:spPr>
-          <a:xfrm xmlns:a="http://schemas.openxmlformats.org/drawingml/2006/main">
-            <a:off x="1200150" y="2543175"/>
+          <p:cNvPr id="16" name="">
+            <a:extLst xmlns:a="http://schemas.openxmlformats.org/drawingml/2006/main">
+              <a:ext uri="{FF2B5EF4-FFF2-40B4-BE49-F238E27FC236}">
+                <a16:creationId xmlns:a16="http://schemas.microsoft.com/office/drawing/2014/main" id="{CC48A077-6344-4618-9773-88A6B351162B}"/>
+              </a:ext>
+            </a:extLst>
+          </p:cNvPr>
+          <p:cNvSpPr>
+            <a:spLocks xmlns:a="http://schemas.openxmlformats.org/drawingml/2006/main" noGrp="1"/>
+          </p:cNvSpPr>
+          <p:nvPr/>
+        </p:nvSpPr>
+        <p:spPr>
+          <a:xfrm xmlns:a="http://schemas.openxmlformats.org/drawingml/2006/main">
+            <a:off x="1104900" y="4257675"/>
             <a:ext cx="323850" cy="171450"/>
           </a:xfrm>
           <a:prstGeom xmlns:a="http://schemas.openxmlformats.org/drawingml/2006/main" prst="rect">
@@ -2672,22 +3162,22 @@
       </p:sp>
       <p:sp>
         <p:nvSpPr>
-          <p:cNvPr id="8" name="">
-            <a:extLst xmlns:a="http://schemas.openxmlformats.org/drawingml/2006/main">
-              <a:ext uri="{FF2B5EF4-FFF2-40B4-BE49-F238E27FC236}">
-                <a16:creationId xmlns:a16="http://schemas.microsoft.com/office/drawing/2014/main" id="{7A97168E-6F36-48A1-93E6-E53B8E4ACD17}"/>
-              </a:ext>
-            </a:extLst>
-          </p:cNvPr>
-          <p:cNvSpPr>
-            <a:spLocks xmlns:a="http://schemas.openxmlformats.org/drawingml/2006/main" noGrp="1"/>
-          </p:cNvSpPr>
-          <p:nvPr/>
-        </p:nvSpPr>
-        <p:spPr>
-          <a:xfrm xmlns:a="http://schemas.openxmlformats.org/drawingml/2006/main">
-            <a:off x="1657350" y="2495550"/>
-            <a:ext cx="8401050" cy="419100"/>
+          <p:cNvPr id="17" name="">
+            <a:extLst xmlns:a="http://schemas.openxmlformats.org/drawingml/2006/main">
+              <a:ext uri="{FF2B5EF4-FFF2-40B4-BE49-F238E27FC236}">
+                <a16:creationId xmlns:a16="http://schemas.microsoft.com/office/drawing/2014/main" id="{B82F14BB-0A91-4C56-A3D7-4205002C7CB6}"/>
+              </a:ext>
+            </a:extLst>
+          </p:cNvPr>
+          <p:cNvSpPr>
+            <a:spLocks xmlns:a="http://schemas.openxmlformats.org/drawingml/2006/main" noGrp="1"/>
+          </p:cNvSpPr>
+          <p:nvPr/>
+        </p:nvSpPr>
+        <p:spPr>
+          <a:xfrm xmlns:a="http://schemas.openxmlformats.org/drawingml/2006/main">
+            <a:off x="1562100" y="4210050"/>
+            <a:ext cx="9163050" cy="419100"/>
           </a:xfrm>
           <a:prstGeom xmlns:a="http://schemas.openxmlformats.org/drawingml/2006/main" prst="rect">
             <a:avLst/>
@@ -2715,28 +3205,28 @@
                   <a:srgbClr val="F7F8FF"/>
                 </a:solidFill>
               </a:rPr>
-              <a:t>Показати авторизацію, вибір смаків, головну стрічку й деталі фільму.</a:t>
-            </a:r>
-          </a:p>
-        </p:txBody>
-      </p:sp>
-      <p:sp>
-        <p:nvSpPr>
-          <p:cNvPr id="9" name="">
-            <a:extLst xmlns:a="http://schemas.openxmlformats.org/drawingml/2006/main">
-              <a:ext uri="{FF2B5EF4-FFF2-40B4-BE49-F238E27FC236}">
-                <a16:creationId xmlns:a16="http://schemas.microsoft.com/office/drawing/2014/main" id="{274133DF-2D2A-4F88-BC46-62C38A624D0B}"/>
-              </a:ext>
-            </a:extLst>
-          </p:cNvPr>
-          <p:cNvSpPr>
-            <a:spLocks xmlns:a="http://schemas.openxmlformats.org/drawingml/2006/main" noGrp="1"/>
-          </p:cNvSpPr>
-          <p:nvPr/>
-        </p:nvSpPr>
-        <p:spPr>
-          <a:xfrm xmlns:a="http://schemas.openxmlformats.org/drawingml/2006/main">
-            <a:off x="1200150" y="3124200"/>
+              <a:t>flutter analyze перевірив Dart-код і не знайшов помилок.</a:t>
+            </a:r>
+          </a:p>
+        </p:txBody>
+      </p:sp>
+      <p:sp>
+        <p:nvSpPr>
+          <p:cNvPr id="18" name="">
+            <a:extLst xmlns:a="http://schemas.openxmlformats.org/drawingml/2006/main">
+              <a:ext uri="{FF2B5EF4-FFF2-40B4-BE49-F238E27FC236}">
+                <a16:creationId xmlns:a16="http://schemas.microsoft.com/office/drawing/2014/main" id="{C67DA253-5723-4281-AD09-918C2C2047E1}"/>
+              </a:ext>
+            </a:extLst>
+          </p:cNvPr>
+          <p:cNvSpPr>
+            <a:spLocks xmlns:a="http://schemas.openxmlformats.org/drawingml/2006/main" noGrp="1"/>
+          </p:cNvSpPr>
+          <p:nvPr/>
+        </p:nvSpPr>
+        <p:spPr>
+          <a:xfrm xmlns:a="http://schemas.openxmlformats.org/drawingml/2006/main">
+            <a:off x="1104900" y="4667250"/>
             <a:ext cx="323850" cy="323850"/>
           </a:xfrm>
           <a:prstGeom xmlns:a="http://schemas.openxmlformats.org/drawingml/2006/main" prst="roundRect">
@@ -2763,21 +3253,21 @@
       </p:sp>
       <p:sp>
         <p:nvSpPr>
-          <p:cNvPr id="10" name="">
-            <a:extLst xmlns:a="http://schemas.openxmlformats.org/drawingml/2006/main">
-              <a:ext uri="{FF2B5EF4-FFF2-40B4-BE49-F238E27FC236}">
-                <a16:creationId xmlns:a16="http://schemas.microsoft.com/office/drawing/2014/main" id="{4720A08D-82E5-4D60-BB00-C2B8A8E7DC58}"/>
-              </a:ext>
-            </a:extLst>
-          </p:cNvPr>
-          <p:cNvSpPr>
-            <a:spLocks xmlns:a="http://schemas.openxmlformats.org/drawingml/2006/main" noGrp="1"/>
-          </p:cNvSpPr>
-          <p:nvPr/>
-        </p:nvSpPr>
-        <p:spPr>
-          <a:xfrm xmlns:a="http://schemas.openxmlformats.org/drawingml/2006/main">
-            <a:off x="1200150" y="3190875"/>
+          <p:cNvPr id="19" name="">
+            <a:extLst xmlns:a="http://schemas.openxmlformats.org/drawingml/2006/main">
+              <a:ext uri="{FF2B5EF4-FFF2-40B4-BE49-F238E27FC236}">
+                <a16:creationId xmlns:a16="http://schemas.microsoft.com/office/drawing/2014/main" id="{B2453A11-27E7-4762-B722-E86FFC6F93C4}"/>
+              </a:ext>
+            </a:extLst>
+          </p:cNvPr>
+          <p:cNvSpPr>
+            <a:spLocks xmlns:a="http://schemas.openxmlformats.org/drawingml/2006/main" noGrp="1"/>
+          </p:cNvSpPr>
+          <p:nvPr/>
+        </p:nvSpPr>
+        <p:spPr>
+          <a:xfrm xmlns:a="http://schemas.openxmlformats.org/drawingml/2006/main">
+            <a:off x="1104900" y="4733925"/>
             <a:ext cx="323850" cy="171450"/>
           </a:xfrm>
           <a:prstGeom xmlns:a="http://schemas.openxmlformats.org/drawingml/2006/main" prst="rect">
@@ -2813,22 +3303,22 @@
       </p:sp>
       <p:sp>
         <p:nvSpPr>
-          <p:cNvPr id="11" name="">
-            <a:extLst xmlns:a="http://schemas.openxmlformats.org/drawingml/2006/main">
-              <a:ext uri="{FF2B5EF4-FFF2-40B4-BE49-F238E27FC236}">
-                <a16:creationId xmlns:a16="http://schemas.microsoft.com/office/drawing/2014/main" id="{75D080F2-15F9-4E4A-AB6F-456906D91928}"/>
-              </a:ext>
-            </a:extLst>
-          </p:cNvPr>
-          <p:cNvSpPr>
-            <a:spLocks xmlns:a="http://schemas.openxmlformats.org/drawingml/2006/main" noGrp="1"/>
-          </p:cNvSpPr>
-          <p:nvPr/>
-        </p:nvSpPr>
-        <p:spPr>
-          <a:xfrm xmlns:a="http://schemas.openxmlformats.org/drawingml/2006/main">
-            <a:off x="1657350" y="3143250"/>
-            <a:ext cx="8401050" cy="419100"/>
+          <p:cNvPr id="20" name="">
+            <a:extLst xmlns:a="http://schemas.openxmlformats.org/drawingml/2006/main">
+              <a:ext uri="{FF2B5EF4-FFF2-40B4-BE49-F238E27FC236}">
+                <a16:creationId xmlns:a16="http://schemas.microsoft.com/office/drawing/2014/main" id="{E3206A61-8EF5-46FA-90B0-1431516EF799}"/>
+              </a:ext>
+            </a:extLst>
+          </p:cNvPr>
+          <p:cNvSpPr>
+            <a:spLocks xmlns:a="http://schemas.openxmlformats.org/drawingml/2006/main" noGrp="1"/>
+          </p:cNvSpPr>
+          <p:nvPr/>
+        </p:nvSpPr>
+        <p:spPr>
+          <a:xfrm xmlns:a="http://schemas.openxmlformats.org/drawingml/2006/main">
+            <a:off x="1562100" y="4686300"/>
+            <a:ext cx="9163050" cy="419100"/>
           </a:xfrm>
           <a:prstGeom xmlns:a="http://schemas.openxmlformats.org/drawingml/2006/main" prst="rect">
             <a:avLst/>
@@ -2856,28 +3346,28 @@
                   <a:srgbClr val="F7F8FF"/>
                 </a:solidFill>
               </a:rPr>
-              <a:t>Поставити оцінку, додати коментар і показати, що ці дані впливають на рекомендації.</a:t>
-            </a:r>
-          </a:p>
-        </p:txBody>
-      </p:sp>
-      <p:sp>
-        <p:nvSpPr>
-          <p:cNvPr id="12" name="">
-            <a:extLst xmlns:a="http://schemas.openxmlformats.org/drawingml/2006/main">
-              <a:ext uri="{FF2B5EF4-FFF2-40B4-BE49-F238E27FC236}">
-                <a16:creationId xmlns:a16="http://schemas.microsoft.com/office/drawing/2014/main" id="{A4824371-E5A6-4CFC-A32A-0EC8B69E5F3C}"/>
-              </a:ext>
-            </a:extLst>
-          </p:cNvPr>
-          <p:cNvSpPr>
-            <a:spLocks xmlns:a="http://schemas.openxmlformats.org/drawingml/2006/main" noGrp="1"/>
-          </p:cNvSpPr>
-          <p:nvPr/>
-        </p:nvSpPr>
-        <p:spPr>
-          <a:xfrm xmlns:a="http://schemas.openxmlformats.org/drawingml/2006/main">
-            <a:off x="1200150" y="3771900"/>
+              <a:t>flutter test запустив базовий widget-тест для стартового екрана.</a:t>
+            </a:r>
+          </a:p>
+        </p:txBody>
+      </p:sp>
+      <p:sp>
+        <p:nvSpPr>
+          <p:cNvPr id="21" name="">
+            <a:extLst xmlns:a="http://schemas.openxmlformats.org/drawingml/2006/main">
+              <a:ext uri="{FF2B5EF4-FFF2-40B4-BE49-F238E27FC236}">
+                <a16:creationId xmlns:a16="http://schemas.microsoft.com/office/drawing/2014/main" id="{74465C21-59A5-422B-BC35-53FD2C4A78C7}"/>
+              </a:ext>
+            </a:extLst>
+          </p:cNvPr>
+          <p:cNvSpPr>
+            <a:spLocks xmlns:a="http://schemas.openxmlformats.org/drawingml/2006/main" noGrp="1"/>
+          </p:cNvSpPr>
+          <p:nvPr/>
+        </p:nvSpPr>
+        <p:spPr>
+          <a:xfrm xmlns:a="http://schemas.openxmlformats.org/drawingml/2006/main">
+            <a:off x="1104900" y="5143500"/>
             <a:ext cx="323850" cy="323850"/>
           </a:xfrm>
           <a:prstGeom xmlns:a="http://schemas.openxmlformats.org/drawingml/2006/main" prst="roundRect">
@@ -2904,21 +3394,21 @@
       </p:sp>
       <p:sp>
         <p:nvSpPr>
-          <p:cNvPr id="13" name="">
-            <a:extLst xmlns:a="http://schemas.openxmlformats.org/drawingml/2006/main">
-              <a:ext uri="{FF2B5EF4-FFF2-40B4-BE49-F238E27FC236}">
-                <a16:creationId xmlns:a16="http://schemas.microsoft.com/office/drawing/2014/main" id="{E7B312B9-F2B3-41E3-BFA2-645AA7181C6C}"/>
-              </a:ext>
-            </a:extLst>
-          </p:cNvPr>
-          <p:cNvSpPr>
-            <a:spLocks xmlns:a="http://schemas.openxmlformats.org/drawingml/2006/main" noGrp="1"/>
-          </p:cNvSpPr>
-          <p:nvPr/>
-        </p:nvSpPr>
-        <p:spPr>
-          <a:xfrm xmlns:a="http://schemas.openxmlformats.org/drawingml/2006/main">
-            <a:off x="1200150" y="3838575"/>
+          <p:cNvPr id="22" name="">
+            <a:extLst xmlns:a="http://schemas.openxmlformats.org/drawingml/2006/main">
+              <a:ext uri="{FF2B5EF4-FFF2-40B4-BE49-F238E27FC236}">
+                <a16:creationId xmlns:a16="http://schemas.microsoft.com/office/drawing/2014/main" id="{5A40E816-A758-4DBF-B3E5-C31CF394DB50}"/>
+              </a:ext>
+            </a:extLst>
+          </p:cNvPr>
+          <p:cNvSpPr>
+            <a:spLocks xmlns:a="http://schemas.openxmlformats.org/drawingml/2006/main" noGrp="1"/>
+          </p:cNvSpPr>
+          <p:nvPr/>
+        </p:nvSpPr>
+        <p:spPr>
+          <a:xfrm xmlns:a="http://schemas.openxmlformats.org/drawingml/2006/main">
+            <a:off x="1104900" y="5210175"/>
             <a:ext cx="323850" cy="171450"/>
           </a:xfrm>
           <a:prstGeom xmlns:a="http://schemas.openxmlformats.org/drawingml/2006/main" prst="rect">
@@ -2954,22 +3444,22 @@
       </p:sp>
       <p:sp>
         <p:nvSpPr>
-          <p:cNvPr id="14" name="">
-            <a:extLst xmlns:a="http://schemas.openxmlformats.org/drawingml/2006/main">
-              <a:ext uri="{FF2B5EF4-FFF2-40B4-BE49-F238E27FC236}">
-                <a16:creationId xmlns:a16="http://schemas.microsoft.com/office/drawing/2014/main" id="{993D54F4-B29F-48C6-A5AD-FF62455ACABA}"/>
-              </a:ext>
-            </a:extLst>
-          </p:cNvPr>
-          <p:cNvSpPr>
-            <a:spLocks xmlns:a="http://schemas.openxmlformats.org/drawingml/2006/main" noGrp="1"/>
-          </p:cNvSpPr>
-          <p:nvPr/>
-        </p:nvSpPr>
-        <p:spPr>
-          <a:xfrm xmlns:a="http://schemas.openxmlformats.org/drawingml/2006/main">
-            <a:off x="1657350" y="3790950"/>
-            <a:ext cx="8401050" cy="419100"/>
+          <p:cNvPr id="23" name="">
+            <a:extLst xmlns:a="http://schemas.openxmlformats.org/drawingml/2006/main">
+              <a:ext uri="{FF2B5EF4-FFF2-40B4-BE49-F238E27FC236}">
+                <a16:creationId xmlns:a16="http://schemas.microsoft.com/office/drawing/2014/main" id="{AA188680-6654-4252-863A-7BCC7E4105FA}"/>
+              </a:ext>
+            </a:extLst>
+          </p:cNvPr>
+          <p:cNvSpPr>
+            <a:spLocks xmlns:a="http://schemas.openxmlformats.org/drawingml/2006/main" noGrp="1"/>
+          </p:cNvSpPr>
+          <p:nvPr/>
+        </p:nvSpPr>
+        <p:spPr>
+          <a:xfrm xmlns:a="http://schemas.openxmlformats.org/drawingml/2006/main">
+            <a:off x="1562100" y="5162550"/>
+            <a:ext cx="9163050" cy="419100"/>
           </a:xfrm>
           <a:prstGeom xmlns:a="http://schemas.openxmlformats.org/drawingml/2006/main" prst="rect">
             <a:avLst/>
@@ -2997,28 +3487,28 @@
                   <a:srgbClr val="F7F8FF"/>
                 </a:solidFill>
               </a:rPr>
-              <a:t>Відкрити вкладку “Система” та пояснити Flutter → FastAPI → PostgreSQL → рекомендації.</a:t>
-            </a:r>
-          </a:p>
-        </p:txBody>
-      </p:sp>
-      <p:sp>
-        <p:nvSpPr>
-          <p:cNvPr id="15" name="">
-            <a:extLst xmlns:a="http://schemas.openxmlformats.org/drawingml/2006/main">
-              <a:ext uri="{FF2B5EF4-FFF2-40B4-BE49-F238E27FC236}">
-                <a16:creationId xmlns:a16="http://schemas.microsoft.com/office/drawing/2014/main" id="{46062A82-23CD-4B12-A7E1-DD99199C6C05}"/>
-              </a:ext>
-            </a:extLst>
-          </p:cNvPr>
-          <p:cNvSpPr>
-            <a:spLocks xmlns:a="http://schemas.openxmlformats.org/drawingml/2006/main" noGrp="1"/>
-          </p:cNvSpPr>
-          <p:nvPr/>
-        </p:nvSpPr>
-        <p:spPr>
-          <a:xfrm xmlns:a="http://schemas.openxmlformats.org/drawingml/2006/main">
-            <a:off x="1200150" y="4419600"/>
+              <a:t>python -m py_compile backend/main.py перевірив синтаксис FastAPI backend.</a:t>
+            </a:r>
+          </a:p>
+        </p:txBody>
+      </p:sp>
+      <p:sp>
+        <p:nvSpPr>
+          <p:cNvPr id="24" name="">
+            <a:extLst xmlns:a="http://schemas.openxmlformats.org/drawingml/2006/main">
+              <a:ext uri="{FF2B5EF4-FFF2-40B4-BE49-F238E27FC236}">
+                <a16:creationId xmlns:a16="http://schemas.microsoft.com/office/drawing/2014/main" id="{0E266467-D550-4892-824A-79467DAC1E55}"/>
+              </a:ext>
+            </a:extLst>
+          </p:cNvPr>
+          <p:cNvSpPr>
+            <a:spLocks xmlns:a="http://schemas.openxmlformats.org/drawingml/2006/main" noGrp="1"/>
+          </p:cNvSpPr>
+          <p:nvPr/>
+        </p:nvSpPr>
+        <p:spPr>
+          <a:xfrm xmlns:a="http://schemas.openxmlformats.org/drawingml/2006/main">
+            <a:off x="1104900" y="5619750"/>
             <a:ext cx="323850" cy="323850"/>
           </a:xfrm>
           <a:prstGeom xmlns:a="http://schemas.openxmlformats.org/drawingml/2006/main" prst="roundRect">
@@ -3045,21 +3535,21 @@
       </p:sp>
       <p:sp>
         <p:nvSpPr>
-          <p:cNvPr id="16" name="">
-            <a:extLst xmlns:a="http://schemas.openxmlformats.org/drawingml/2006/main">
-              <a:ext uri="{FF2B5EF4-FFF2-40B4-BE49-F238E27FC236}">
-                <a16:creationId xmlns:a16="http://schemas.microsoft.com/office/drawing/2014/main" id="{BBB672B1-F5CB-49D4-89B5-6C3C557561A0}"/>
-              </a:ext>
-            </a:extLst>
-          </p:cNvPr>
-          <p:cNvSpPr>
-            <a:spLocks xmlns:a="http://schemas.openxmlformats.org/drawingml/2006/main" noGrp="1"/>
-          </p:cNvSpPr>
-          <p:nvPr/>
-        </p:nvSpPr>
-        <p:spPr>
-          <a:xfrm xmlns:a="http://schemas.openxmlformats.org/drawingml/2006/main">
-            <a:off x="1200150" y="4486275"/>
+          <p:cNvPr id="25" name="">
+            <a:extLst xmlns:a="http://schemas.openxmlformats.org/drawingml/2006/main">
+              <a:ext uri="{FF2B5EF4-FFF2-40B4-BE49-F238E27FC236}">
+                <a16:creationId xmlns:a16="http://schemas.microsoft.com/office/drawing/2014/main" id="{3B63F02E-BD24-4589-9469-107CCA777A86}"/>
+              </a:ext>
+            </a:extLst>
+          </p:cNvPr>
+          <p:cNvSpPr>
+            <a:spLocks xmlns:a="http://schemas.openxmlformats.org/drawingml/2006/main" noGrp="1"/>
+          </p:cNvSpPr>
+          <p:nvPr/>
+        </p:nvSpPr>
+        <p:spPr>
+          <a:xfrm xmlns:a="http://schemas.openxmlformats.org/drawingml/2006/main">
+            <a:off x="1104900" y="5686425"/>
             <a:ext cx="323850" cy="171450"/>
           </a:xfrm>
           <a:prstGeom xmlns:a="http://schemas.openxmlformats.org/drawingml/2006/main" prst="rect">
@@ -3095,22 +3585,22 @@
       </p:sp>
       <p:sp>
         <p:nvSpPr>
-          <p:cNvPr id="17" name="">
-            <a:extLst xmlns:a="http://schemas.openxmlformats.org/drawingml/2006/main">
-              <a:ext uri="{FF2B5EF4-FFF2-40B4-BE49-F238E27FC236}">
-                <a16:creationId xmlns:a16="http://schemas.microsoft.com/office/drawing/2014/main" id="{A09067F5-65DB-4D9B-A760-91273E9351C2}"/>
-              </a:ext>
-            </a:extLst>
-          </p:cNvPr>
-          <p:cNvSpPr>
-            <a:spLocks xmlns:a="http://schemas.openxmlformats.org/drawingml/2006/main" noGrp="1"/>
-          </p:cNvSpPr>
-          <p:nvPr/>
-        </p:nvSpPr>
-        <p:spPr>
-          <a:xfrm xmlns:a="http://schemas.openxmlformats.org/drawingml/2006/main">
-            <a:off x="1657350" y="4438650"/>
-            <a:ext cx="8401050" cy="419100"/>
+          <p:cNvPr id="26" name="">
+            <a:extLst xmlns:a="http://schemas.openxmlformats.org/drawingml/2006/main">
+              <a:ext uri="{FF2B5EF4-FFF2-40B4-BE49-F238E27FC236}">
+                <a16:creationId xmlns:a16="http://schemas.microsoft.com/office/drawing/2014/main" id="{2DEB6895-35D9-4E14-9281-270B04ED73A1}"/>
+              </a:ext>
+            </a:extLst>
+          </p:cNvPr>
+          <p:cNvSpPr>
+            <a:spLocks xmlns:a="http://schemas.openxmlformats.org/drawingml/2006/main" noGrp="1"/>
+          </p:cNvSpPr>
+          <p:nvPr/>
+        </p:nvSpPr>
+        <p:spPr>
+          <a:xfrm xmlns:a="http://schemas.openxmlformats.org/drawingml/2006/main">
+            <a:off x="1562100" y="5638800"/>
+            <a:ext cx="9163050" cy="419100"/>
           </a:xfrm>
           <a:prstGeom xmlns:a="http://schemas.openxmlformats.org/drawingml/2006/main" prst="rect">
             <a:avLst/>
@@ -3138,57 +3628,7 @@
                   <a:srgbClr val="F7F8FF"/>
                 </a:solidFill>
               </a:rPr>
-              <a:t>Показати backend/main.py і schema.sql як доказ підключення бази даних.</a:t>
-            </a:r>
-          </a:p>
-        </p:txBody>
-      </p:sp>
-      <p:sp>
-        <p:nvSpPr>
-          <p:cNvPr id="18" name="">
-            <a:extLst xmlns:a="http://schemas.openxmlformats.org/drawingml/2006/main">
-              <a:ext uri="{FF2B5EF4-FFF2-40B4-BE49-F238E27FC236}">
-                <a16:creationId xmlns:a16="http://schemas.microsoft.com/office/drawing/2014/main" id="{A0B5B86D-EB98-409C-8B9F-86C542C0A2E0}"/>
-              </a:ext>
-            </a:extLst>
-          </p:cNvPr>
-          <p:cNvSpPr>
-            <a:spLocks xmlns:a="http://schemas.openxmlformats.org/drawingml/2006/main" noGrp="1"/>
-          </p:cNvSpPr>
-          <p:nvPr/>
-        </p:nvSpPr>
-        <p:spPr>
-          <a:xfrm xmlns:a="http://schemas.openxmlformats.org/drawingml/2006/main">
-            <a:off x="1200150" y="5791200"/>
-            <a:ext cx="6858000" cy="285750"/>
-          </a:xfrm>
-          <a:prstGeom xmlns:a="http://schemas.openxmlformats.org/drawingml/2006/main" prst="rect">
-            <a:avLst/>
-          </a:prstGeom>
-          <a:noFill xmlns:a="http://schemas.openxmlformats.org/drawingml/2006/main"/>
-          <a:ln xmlns:a="http://schemas.openxmlformats.org/drawingml/2006/main" w="0">
-            <a:noFill/>
-            <a:prstDash val="solid"/>
-          </a:ln>
-        </p:spPr>
-        <p:txBody>
-          <a:bodyPr xmlns:a="http://schemas.openxmlformats.org/drawingml/2006/main"/>
-          <a:lstStyle xmlns:a="http://schemas.openxmlformats.org/drawingml/2006/main"/>
-          <a:p xmlns:a="http://schemas.openxmlformats.org/drawingml/2006/main">
-            <a:pPr algn="l">
-              <a:defRPr sz="1500" b="1">
-                <a:solidFill>
-                  <a:srgbClr val="66D4CF"/>
-                </a:solidFill>
-              </a:defRPr>
-            </a:pPr>
-            <a:r>
-              <a:rPr sz="1500" b="1">
-                <a:solidFill>
-                  <a:srgbClr val="66D4CF"/>
-                </a:solidFill>
-              </a:rPr>
-              <a:t>GitHub: github.com/Vanil-CEO/CineMind-movie-ai</a:t>
+              <a:t>Окремо підготовлено скріни інтерфейсу, FastAPI Swagger UI, PostgreSQL Query Tool і VS Code.</a:t>
             </a:r>
           </a:p>
         </p:txBody>
@@ -3196,7 +3636,856 @@
     </p:spTree>
     <p:extLst>
       <p:ext uri="{BB962C8B-B14F-4D97-AF65-F5344CB8AC3E}">
-        <p14:creationId xmlns:p14="http://schemas.microsoft.com/office/powerpoint/2010/main" val="1235511787"/>
+        <p14:creationId xmlns:p14="http://schemas.microsoft.com/office/powerpoint/2010/main" val="142528381"/>
+      </p:ext>
+    </p:extLst>
+  </p:cSld>
+</p:sld>
+</file>
+
+<file path=ppt/slides/slide11.xml><?xml version="1.0" encoding="utf-8"?>
+<p:sld xmlns:p="http://schemas.openxmlformats.org/presentationml/2006/main">
+  <p:cSld>
+    <p:bg>
+      <p:bgPr>
+        <a:solidFill xmlns:a="http://schemas.openxmlformats.org/drawingml/2006/main">
+          <a:srgbClr val="02040A"/>
+        </a:solidFill>
+      </p:bgPr>
+    </p:bg>
+    <p:spTree>
+      <p:nvGrpSpPr>
+        <p:cNvPr id="1" name=""/>
+        <p:cNvGrpSpPr/>
+        <p:nvPr/>
+      </p:nvGrpSpPr>
+      <p:grpSpPr>
+        <a:xfrm xmlns:a="http://schemas.openxmlformats.org/drawingml/2006/main"/>
+      </p:grpSpPr>
+      <p:sp>
+        <p:nvSpPr>
+          <p:cNvPr id="19" name="">
+            <a:extLst xmlns:a="http://schemas.openxmlformats.org/drawingml/2006/main">
+              <a:ext uri="{FF2B5EF4-FFF2-40B4-BE49-F238E27FC236}">
+                <a16:creationId xmlns:a16="http://schemas.microsoft.com/office/drawing/2014/main" id="{6C5AE337-0374-4D37-820B-12C933991DAB}"/>
+              </a:ext>
+            </a:extLst>
+          </p:cNvPr>
+          <p:cNvSpPr>
+            <a:spLocks xmlns:a="http://schemas.openxmlformats.org/drawingml/2006/main" noGrp="1"/>
+          </p:cNvSpPr>
+          <p:nvPr/>
+        </p:nvSpPr>
+        <p:spPr>
+          <a:xfrm xmlns:a="http://schemas.openxmlformats.org/drawingml/2006/main">
+            <a:off x="0" y="0"/>
+            <a:ext cx="12192000" cy="6858000"/>
+          </a:xfrm>
+          <a:prstGeom xmlns:a="http://schemas.openxmlformats.org/drawingml/2006/main" prst="rect">
+            <a:avLst/>
+          </a:prstGeom>
+          <a:ln xmlns:a="http://schemas.openxmlformats.org/drawingml/2006/main" w="0">
+            <a:noFill/>
+            <a:prstDash val="solid"/>
+          </a:ln>
+        </p:spPr>
+      </p:sp>
+      <p:sp>
+        <p:nvSpPr>
+          <p:cNvPr id="2" name="">
+            <a:extLst xmlns:a="http://schemas.openxmlformats.org/drawingml/2006/main">
+              <a:ext uri="{FF2B5EF4-FFF2-40B4-BE49-F238E27FC236}">
+                <a16:creationId xmlns:a16="http://schemas.microsoft.com/office/drawing/2014/main" id="{A31C3525-F7C8-4788-97B8-CBF0F55CE1E8}"/>
+              </a:ext>
+            </a:extLst>
+          </p:cNvPr>
+          <p:cNvSpPr>
+            <a:spLocks xmlns:a="http://schemas.openxmlformats.org/drawingml/2006/main" noGrp="1"/>
+          </p:cNvSpPr>
+          <p:nvPr/>
+        </p:nvSpPr>
+        <p:spPr>
+          <a:xfrm xmlns:a="http://schemas.openxmlformats.org/drawingml/2006/main">
+            <a:off x="0" y="0"/>
+            <a:ext cx="12192000" cy="6858000"/>
+          </a:xfrm>
+          <a:prstGeom xmlns:a="http://schemas.openxmlformats.org/drawingml/2006/main" prst="rect">
+            <a:avLst/>
+          </a:prstGeom>
+          <a:ln xmlns:a="http://schemas.openxmlformats.org/drawingml/2006/main" w="0">
+            <a:noFill/>
+            <a:prstDash val="solid"/>
+          </a:ln>
+        </p:spPr>
+      </p:sp>
+      <p:sp>
+        <p:nvSpPr>
+          <p:cNvPr id="3" name="">
+            <a:extLst xmlns:a="http://schemas.openxmlformats.org/drawingml/2006/main">
+              <a:ext uri="{FF2B5EF4-FFF2-40B4-BE49-F238E27FC236}">
+                <a16:creationId xmlns:a16="http://schemas.microsoft.com/office/drawing/2014/main" id="{45BD00AC-FD6C-4569-ACD7-24CCCEE82A7D}"/>
+              </a:ext>
+            </a:extLst>
+          </p:cNvPr>
+          <p:cNvSpPr>
+            <a:spLocks xmlns:a="http://schemas.openxmlformats.org/drawingml/2006/main" noGrp="1"/>
+          </p:cNvSpPr>
+          <p:nvPr/>
+        </p:nvSpPr>
+        <p:spPr>
+          <a:xfrm xmlns:a="http://schemas.openxmlformats.org/drawingml/2006/main">
+            <a:off x="552450" y="323850"/>
+            <a:ext cx="2095500" cy="266700"/>
+          </a:xfrm>
+          <a:prstGeom xmlns:a="http://schemas.openxmlformats.org/drawingml/2006/main" prst="rect">
+            <a:avLst/>
+          </a:prstGeom>
+          <a:noFill xmlns:a="http://schemas.openxmlformats.org/drawingml/2006/main"/>
+          <a:ln xmlns:a="http://schemas.openxmlformats.org/drawingml/2006/main" w="0">
+            <a:noFill/>
+            <a:prstDash val="solid"/>
+          </a:ln>
+        </p:spPr>
+        <p:txBody>
+          <a:bodyPr xmlns:a="http://schemas.openxmlformats.org/drawingml/2006/main"/>
+          <a:lstStyle xmlns:a="http://schemas.openxmlformats.org/drawingml/2006/main"/>
+          <a:p xmlns:a="http://schemas.openxmlformats.org/drawingml/2006/main">
+            <a:pPr algn="l">
+              <a:defRPr sz="1350" b="1">
+                <a:solidFill>
+                  <a:srgbClr val="66D4CF"/>
+                </a:solidFill>
+              </a:defRPr>
+            </a:pPr>
+            <a:r>
+              <a:rPr sz="1350" b="1">
+                <a:solidFill>
+                  <a:srgbClr val="66D4CF"/>
+                </a:solidFill>
+              </a:rPr>
+              <a:t>CineMind</a:t>
+            </a:r>
+          </a:p>
+        </p:txBody>
+      </p:sp>
+      <p:sp>
+        <p:nvSpPr>
+          <p:cNvPr id="4" name="">
+            <a:extLst xmlns:a="http://schemas.openxmlformats.org/drawingml/2006/main">
+              <a:ext uri="{FF2B5EF4-FFF2-40B4-BE49-F238E27FC236}">
+                <a16:creationId xmlns:a16="http://schemas.microsoft.com/office/drawing/2014/main" id="{4E627C40-87D5-4242-8666-C0777917D91C}"/>
+              </a:ext>
+            </a:extLst>
+          </p:cNvPr>
+          <p:cNvSpPr>
+            <a:spLocks xmlns:a="http://schemas.openxmlformats.org/drawingml/2006/main" noGrp="1"/>
+          </p:cNvSpPr>
+          <p:nvPr/>
+        </p:nvSpPr>
+        <p:spPr>
+          <a:xfrm xmlns:a="http://schemas.openxmlformats.org/drawingml/2006/main">
+            <a:off x="552450" y="704850"/>
+            <a:ext cx="7239000" cy="876300"/>
+          </a:xfrm>
+          <a:prstGeom xmlns:a="http://schemas.openxmlformats.org/drawingml/2006/main" prst="rect">
+            <a:avLst/>
+          </a:prstGeom>
+          <a:noFill xmlns:a="http://schemas.openxmlformats.org/drawingml/2006/main"/>
+          <a:ln xmlns:a="http://schemas.openxmlformats.org/drawingml/2006/main" w="0">
+            <a:noFill/>
+            <a:prstDash val="solid"/>
+          </a:ln>
+        </p:spPr>
+        <p:txBody>
+          <a:bodyPr xmlns:a="http://schemas.openxmlformats.org/drawingml/2006/main"/>
+          <a:lstStyle xmlns:a="http://schemas.openxmlformats.org/drawingml/2006/main"/>
+          <a:p xmlns:a="http://schemas.openxmlformats.org/drawingml/2006/main">
+            <a:pPr algn="l">
+              <a:defRPr sz="3000" b="1">
+                <a:solidFill>
+                  <a:srgbClr val="F7F8FF"/>
+                </a:solidFill>
+              </a:defRPr>
+            </a:pPr>
+            <a:r>
+              <a:rPr sz="3000" b="1">
+                <a:solidFill>
+                  <a:srgbClr val="F7F8FF"/>
+                </a:solidFill>
+              </a:rPr>
+              <a:t>Що показати на захисті</a:t>
+            </a:r>
+          </a:p>
+        </p:txBody>
+      </p:sp>
+      <p:sp>
+        <p:nvSpPr>
+          <p:cNvPr id="5" name="">
+            <a:extLst xmlns:a="http://schemas.openxmlformats.org/drawingml/2006/main">
+              <a:ext uri="{FF2B5EF4-FFF2-40B4-BE49-F238E27FC236}">
+                <a16:creationId xmlns:a16="http://schemas.microsoft.com/office/drawing/2014/main" id="{0C388819-F9EC-4AE3-8435-19D37226737F}"/>
+              </a:ext>
+            </a:extLst>
+          </p:cNvPr>
+          <p:cNvSpPr>
+            <a:spLocks xmlns:a="http://schemas.openxmlformats.org/drawingml/2006/main" noGrp="1"/>
+          </p:cNvSpPr>
+          <p:nvPr/>
+        </p:nvSpPr>
+        <p:spPr>
+          <a:xfrm xmlns:a="http://schemas.openxmlformats.org/drawingml/2006/main">
+            <a:off x="552450" y="1790700"/>
+            <a:ext cx="7810500" cy="495300"/>
+          </a:xfrm>
+          <a:prstGeom xmlns:a="http://schemas.openxmlformats.org/drawingml/2006/main" prst="rect">
+            <a:avLst/>
+          </a:prstGeom>
+          <a:noFill xmlns:a="http://schemas.openxmlformats.org/drawingml/2006/main"/>
+          <a:ln xmlns:a="http://schemas.openxmlformats.org/drawingml/2006/main" w="0">
+            <a:noFill/>
+            <a:prstDash val="solid"/>
+          </a:ln>
+        </p:spPr>
+        <p:txBody>
+          <a:bodyPr xmlns:a="http://schemas.openxmlformats.org/drawingml/2006/main"/>
+          <a:lstStyle xmlns:a="http://schemas.openxmlformats.org/drawingml/2006/main"/>
+          <a:p xmlns:a="http://schemas.openxmlformats.org/drawingml/2006/main">
+            <a:pPr algn="l">
+              <a:defRPr sz="1500" b="0">
+                <a:solidFill>
+                  <a:srgbClr val="A9B0C2"/>
+                </a:solidFill>
+              </a:defRPr>
+            </a:pPr>
+            <a:r>
+              <a:rPr sz="1500" b="0">
+                <a:solidFill>
+                  <a:srgbClr val="A9B0C2"/>
+                </a:solidFill>
+              </a:rPr>
+              <a:t>Демонстрацію можна провести по кроках: інтерфейс, оцінки, коментарі, backend і база даних.</a:t>
+            </a:r>
+          </a:p>
+        </p:txBody>
+      </p:sp>
+      <p:sp>
+        <p:nvSpPr>
+          <p:cNvPr id="6" name="">
+            <a:extLst xmlns:a="http://schemas.openxmlformats.org/drawingml/2006/main">
+              <a:ext uri="{FF2B5EF4-FFF2-40B4-BE49-F238E27FC236}">
+                <a16:creationId xmlns:a16="http://schemas.microsoft.com/office/drawing/2014/main" id="{40EFEF9C-7B04-49C5-AAA6-498558671594}"/>
+              </a:ext>
+            </a:extLst>
+          </p:cNvPr>
+          <p:cNvSpPr>
+            <a:spLocks xmlns:a="http://schemas.openxmlformats.org/drawingml/2006/main" noGrp="1"/>
+          </p:cNvSpPr>
+          <p:nvPr/>
+        </p:nvSpPr>
+        <p:spPr>
+          <a:xfrm xmlns:a="http://schemas.openxmlformats.org/drawingml/2006/main">
+            <a:off x="1200150" y="2476500"/>
+            <a:ext cx="323850" cy="323850"/>
+          </a:xfrm>
+          <a:prstGeom xmlns:a="http://schemas.openxmlformats.org/drawingml/2006/main" prst="roundRect">
+            <a:avLst>
+              <a:gd name="adj" fmla="val 35294"/>
+            </a:avLst>
+          </a:prstGeom>
+          <a:solidFill xmlns:a="http://schemas.openxmlformats.org/drawingml/2006/main">
+            <a:srgbClr val="0B1822"/>
+          </a:solidFill>
+          <a:ln xmlns:a="http://schemas.openxmlformats.org/drawingml/2006/main" w="9525">
+            <a:solidFill>
+              <a:srgbClr val="66D4CF"/>
+            </a:solidFill>
+            <a:prstDash val="solid"/>
+          </a:ln>
+        </p:spPr>
+        <p:style>
+          <a:lnRef xmlns:a="http://schemas.openxmlformats.org/drawingml/2006/main" idx="0"/>
+          <a:fillRef xmlns:a="http://schemas.openxmlformats.org/drawingml/2006/main" idx="0"/>
+          <a:effectRef xmlns:a="http://schemas.openxmlformats.org/drawingml/2006/main" idx="4"/>
+          <a:fontRef xmlns:a="http://schemas.openxmlformats.org/drawingml/2006/main" idx="major"/>
+        </p:style>
+      </p:sp>
+      <p:sp>
+        <p:nvSpPr>
+          <p:cNvPr id="7" name="">
+            <a:extLst xmlns:a="http://schemas.openxmlformats.org/drawingml/2006/main">
+              <a:ext uri="{FF2B5EF4-FFF2-40B4-BE49-F238E27FC236}">
+                <a16:creationId xmlns:a16="http://schemas.microsoft.com/office/drawing/2014/main" id="{292171C1-2FB2-427B-8D59-C1C9D9F4C406}"/>
+              </a:ext>
+            </a:extLst>
+          </p:cNvPr>
+          <p:cNvSpPr>
+            <a:spLocks xmlns:a="http://schemas.openxmlformats.org/drawingml/2006/main" noGrp="1"/>
+          </p:cNvSpPr>
+          <p:nvPr/>
+        </p:nvSpPr>
+        <p:spPr>
+          <a:xfrm xmlns:a="http://schemas.openxmlformats.org/drawingml/2006/main">
+            <a:off x="1200150" y="2543175"/>
+            <a:ext cx="323850" cy="171450"/>
+          </a:xfrm>
+          <a:prstGeom xmlns:a="http://schemas.openxmlformats.org/drawingml/2006/main" prst="rect">
+            <a:avLst/>
+          </a:prstGeom>
+          <a:noFill xmlns:a="http://schemas.openxmlformats.org/drawingml/2006/main"/>
+          <a:ln xmlns:a="http://schemas.openxmlformats.org/drawingml/2006/main" w="0">
+            <a:noFill/>
+            <a:prstDash val="solid"/>
+          </a:ln>
+        </p:spPr>
+        <p:txBody>
+          <a:bodyPr xmlns:a="http://schemas.openxmlformats.org/drawingml/2006/main"/>
+          <a:lstStyle xmlns:a="http://schemas.openxmlformats.org/drawingml/2006/main"/>
+          <a:p xmlns:a="http://schemas.openxmlformats.org/drawingml/2006/main">
+            <a:pPr algn="ctr">
+              <a:defRPr sz="1050" b="1">
+                <a:solidFill>
+                  <a:srgbClr val="66D4CF"/>
+                </a:solidFill>
+              </a:defRPr>
+            </a:pPr>
+            <a:r>
+              <a:rPr sz="1050" b="1">
+                <a:solidFill>
+                  <a:srgbClr val="66D4CF"/>
+                </a:solidFill>
+              </a:rPr>
+              <a:t>1</a:t>
+            </a:r>
+          </a:p>
+        </p:txBody>
+      </p:sp>
+      <p:sp>
+        <p:nvSpPr>
+          <p:cNvPr id="8" name="">
+            <a:extLst xmlns:a="http://schemas.openxmlformats.org/drawingml/2006/main">
+              <a:ext uri="{FF2B5EF4-FFF2-40B4-BE49-F238E27FC236}">
+                <a16:creationId xmlns:a16="http://schemas.microsoft.com/office/drawing/2014/main" id="{C35E1BFB-7B1F-4506-9E43-C2662A8300A3}"/>
+              </a:ext>
+            </a:extLst>
+          </p:cNvPr>
+          <p:cNvSpPr>
+            <a:spLocks xmlns:a="http://schemas.openxmlformats.org/drawingml/2006/main" noGrp="1"/>
+          </p:cNvSpPr>
+          <p:nvPr/>
+        </p:nvSpPr>
+        <p:spPr>
+          <a:xfrm xmlns:a="http://schemas.openxmlformats.org/drawingml/2006/main">
+            <a:off x="1657350" y="2495550"/>
+            <a:ext cx="8401050" cy="419100"/>
+          </a:xfrm>
+          <a:prstGeom xmlns:a="http://schemas.openxmlformats.org/drawingml/2006/main" prst="rect">
+            <a:avLst/>
+          </a:prstGeom>
+          <a:noFill xmlns:a="http://schemas.openxmlformats.org/drawingml/2006/main"/>
+          <a:ln xmlns:a="http://schemas.openxmlformats.org/drawingml/2006/main" w="0">
+            <a:noFill/>
+            <a:prstDash val="solid"/>
+          </a:ln>
+        </p:spPr>
+        <p:txBody>
+          <a:bodyPr xmlns:a="http://schemas.openxmlformats.org/drawingml/2006/main"/>
+          <a:lstStyle xmlns:a="http://schemas.openxmlformats.org/drawingml/2006/main"/>
+          <a:p xmlns:a="http://schemas.openxmlformats.org/drawingml/2006/main">
+            <a:pPr algn="l">
+              <a:defRPr sz="1350" b="0">
+                <a:solidFill>
+                  <a:srgbClr val="F7F8FF"/>
+                </a:solidFill>
+              </a:defRPr>
+            </a:pPr>
+            <a:r>
+              <a:rPr sz="1350" b="0">
+                <a:solidFill>
+                  <a:srgbClr val="F7F8FF"/>
+                </a:solidFill>
+              </a:rPr>
+              <a:t>Показати авторизацію, вибір смаків, головну стрічку й деталі фільму.</a:t>
+            </a:r>
+          </a:p>
+        </p:txBody>
+      </p:sp>
+      <p:sp>
+        <p:nvSpPr>
+          <p:cNvPr id="9" name="">
+            <a:extLst xmlns:a="http://schemas.openxmlformats.org/drawingml/2006/main">
+              <a:ext uri="{FF2B5EF4-FFF2-40B4-BE49-F238E27FC236}">
+                <a16:creationId xmlns:a16="http://schemas.microsoft.com/office/drawing/2014/main" id="{6EF5DB2B-86D2-4849-A8B5-37B148749E55}"/>
+              </a:ext>
+            </a:extLst>
+          </p:cNvPr>
+          <p:cNvSpPr>
+            <a:spLocks xmlns:a="http://schemas.openxmlformats.org/drawingml/2006/main" noGrp="1"/>
+          </p:cNvSpPr>
+          <p:nvPr/>
+        </p:nvSpPr>
+        <p:spPr>
+          <a:xfrm xmlns:a="http://schemas.openxmlformats.org/drawingml/2006/main">
+            <a:off x="1200150" y="3124200"/>
+            <a:ext cx="323850" cy="323850"/>
+          </a:xfrm>
+          <a:prstGeom xmlns:a="http://schemas.openxmlformats.org/drawingml/2006/main" prst="roundRect">
+            <a:avLst>
+              <a:gd name="adj" fmla="val 35294"/>
+            </a:avLst>
+          </a:prstGeom>
+          <a:solidFill xmlns:a="http://schemas.openxmlformats.org/drawingml/2006/main">
+            <a:srgbClr val="0B1822"/>
+          </a:solidFill>
+          <a:ln xmlns:a="http://schemas.openxmlformats.org/drawingml/2006/main" w="9525">
+            <a:solidFill>
+              <a:srgbClr val="66D4CF"/>
+            </a:solidFill>
+            <a:prstDash val="solid"/>
+          </a:ln>
+        </p:spPr>
+        <p:style>
+          <a:lnRef xmlns:a="http://schemas.openxmlformats.org/drawingml/2006/main" idx="0"/>
+          <a:fillRef xmlns:a="http://schemas.openxmlformats.org/drawingml/2006/main" idx="0"/>
+          <a:effectRef xmlns:a="http://schemas.openxmlformats.org/drawingml/2006/main" idx="4"/>
+          <a:fontRef xmlns:a="http://schemas.openxmlformats.org/drawingml/2006/main" idx="major"/>
+        </p:style>
+      </p:sp>
+      <p:sp>
+        <p:nvSpPr>
+          <p:cNvPr id="10" name="">
+            <a:extLst xmlns:a="http://schemas.openxmlformats.org/drawingml/2006/main">
+              <a:ext uri="{FF2B5EF4-FFF2-40B4-BE49-F238E27FC236}">
+                <a16:creationId xmlns:a16="http://schemas.microsoft.com/office/drawing/2014/main" id="{22E4E4E3-3F88-46A2-9AB4-94D3C9AC5253}"/>
+              </a:ext>
+            </a:extLst>
+          </p:cNvPr>
+          <p:cNvSpPr>
+            <a:spLocks xmlns:a="http://schemas.openxmlformats.org/drawingml/2006/main" noGrp="1"/>
+          </p:cNvSpPr>
+          <p:nvPr/>
+        </p:nvSpPr>
+        <p:spPr>
+          <a:xfrm xmlns:a="http://schemas.openxmlformats.org/drawingml/2006/main">
+            <a:off x="1200150" y="3190875"/>
+            <a:ext cx="323850" cy="171450"/>
+          </a:xfrm>
+          <a:prstGeom xmlns:a="http://schemas.openxmlformats.org/drawingml/2006/main" prst="rect">
+            <a:avLst/>
+          </a:prstGeom>
+          <a:noFill xmlns:a="http://schemas.openxmlformats.org/drawingml/2006/main"/>
+          <a:ln xmlns:a="http://schemas.openxmlformats.org/drawingml/2006/main" w="0">
+            <a:noFill/>
+            <a:prstDash val="solid"/>
+          </a:ln>
+        </p:spPr>
+        <p:txBody>
+          <a:bodyPr xmlns:a="http://schemas.openxmlformats.org/drawingml/2006/main"/>
+          <a:lstStyle xmlns:a="http://schemas.openxmlformats.org/drawingml/2006/main"/>
+          <a:p xmlns:a="http://schemas.openxmlformats.org/drawingml/2006/main">
+            <a:pPr algn="ctr">
+              <a:defRPr sz="1050" b="1">
+                <a:solidFill>
+                  <a:srgbClr val="66D4CF"/>
+                </a:solidFill>
+              </a:defRPr>
+            </a:pPr>
+            <a:r>
+              <a:rPr sz="1050" b="1">
+                <a:solidFill>
+                  <a:srgbClr val="66D4CF"/>
+                </a:solidFill>
+              </a:rPr>
+              <a:t>2</a:t>
+            </a:r>
+          </a:p>
+        </p:txBody>
+      </p:sp>
+      <p:sp>
+        <p:nvSpPr>
+          <p:cNvPr id="11" name="">
+            <a:extLst xmlns:a="http://schemas.openxmlformats.org/drawingml/2006/main">
+              <a:ext uri="{FF2B5EF4-FFF2-40B4-BE49-F238E27FC236}">
+                <a16:creationId xmlns:a16="http://schemas.microsoft.com/office/drawing/2014/main" id="{31938A03-0C8A-4CB1-BB6D-DC89783E05C8}"/>
+              </a:ext>
+            </a:extLst>
+          </p:cNvPr>
+          <p:cNvSpPr>
+            <a:spLocks xmlns:a="http://schemas.openxmlformats.org/drawingml/2006/main" noGrp="1"/>
+          </p:cNvSpPr>
+          <p:nvPr/>
+        </p:nvSpPr>
+        <p:spPr>
+          <a:xfrm xmlns:a="http://schemas.openxmlformats.org/drawingml/2006/main">
+            <a:off x="1657350" y="3143250"/>
+            <a:ext cx="8401050" cy="419100"/>
+          </a:xfrm>
+          <a:prstGeom xmlns:a="http://schemas.openxmlformats.org/drawingml/2006/main" prst="rect">
+            <a:avLst/>
+          </a:prstGeom>
+          <a:noFill xmlns:a="http://schemas.openxmlformats.org/drawingml/2006/main"/>
+          <a:ln xmlns:a="http://schemas.openxmlformats.org/drawingml/2006/main" w="0">
+            <a:noFill/>
+            <a:prstDash val="solid"/>
+          </a:ln>
+        </p:spPr>
+        <p:txBody>
+          <a:bodyPr xmlns:a="http://schemas.openxmlformats.org/drawingml/2006/main"/>
+          <a:lstStyle xmlns:a="http://schemas.openxmlformats.org/drawingml/2006/main"/>
+          <a:p xmlns:a="http://schemas.openxmlformats.org/drawingml/2006/main">
+            <a:pPr algn="l">
+              <a:defRPr sz="1350" b="0">
+                <a:solidFill>
+                  <a:srgbClr val="F7F8FF"/>
+                </a:solidFill>
+              </a:defRPr>
+            </a:pPr>
+            <a:r>
+              <a:rPr sz="1350" b="0">
+                <a:solidFill>
+                  <a:srgbClr val="F7F8FF"/>
+                </a:solidFill>
+              </a:rPr>
+              <a:t>Поставити оцінку, додати коментар і показати, що ці дані впливають на рекомендації.</a:t>
+            </a:r>
+          </a:p>
+        </p:txBody>
+      </p:sp>
+      <p:sp>
+        <p:nvSpPr>
+          <p:cNvPr id="12" name="">
+            <a:extLst xmlns:a="http://schemas.openxmlformats.org/drawingml/2006/main">
+              <a:ext uri="{FF2B5EF4-FFF2-40B4-BE49-F238E27FC236}">
+                <a16:creationId xmlns:a16="http://schemas.microsoft.com/office/drawing/2014/main" id="{B801F8A8-A1FF-4CB3-9044-5D1DA051DF65}"/>
+              </a:ext>
+            </a:extLst>
+          </p:cNvPr>
+          <p:cNvSpPr>
+            <a:spLocks xmlns:a="http://schemas.openxmlformats.org/drawingml/2006/main" noGrp="1"/>
+          </p:cNvSpPr>
+          <p:nvPr/>
+        </p:nvSpPr>
+        <p:spPr>
+          <a:xfrm xmlns:a="http://schemas.openxmlformats.org/drawingml/2006/main">
+            <a:off x="1200150" y="3771900"/>
+            <a:ext cx="323850" cy="323850"/>
+          </a:xfrm>
+          <a:prstGeom xmlns:a="http://schemas.openxmlformats.org/drawingml/2006/main" prst="roundRect">
+            <a:avLst>
+              <a:gd name="adj" fmla="val 35294"/>
+            </a:avLst>
+          </a:prstGeom>
+          <a:solidFill xmlns:a="http://schemas.openxmlformats.org/drawingml/2006/main">
+            <a:srgbClr val="0B1822"/>
+          </a:solidFill>
+          <a:ln xmlns:a="http://schemas.openxmlformats.org/drawingml/2006/main" w="9525">
+            <a:solidFill>
+              <a:srgbClr val="66D4CF"/>
+            </a:solidFill>
+            <a:prstDash val="solid"/>
+          </a:ln>
+        </p:spPr>
+        <p:style>
+          <a:lnRef xmlns:a="http://schemas.openxmlformats.org/drawingml/2006/main" idx="0"/>
+          <a:fillRef xmlns:a="http://schemas.openxmlformats.org/drawingml/2006/main" idx="0"/>
+          <a:effectRef xmlns:a="http://schemas.openxmlformats.org/drawingml/2006/main" idx="4"/>
+          <a:fontRef xmlns:a="http://schemas.openxmlformats.org/drawingml/2006/main" idx="major"/>
+        </p:style>
+      </p:sp>
+      <p:sp>
+        <p:nvSpPr>
+          <p:cNvPr id="13" name="">
+            <a:extLst xmlns:a="http://schemas.openxmlformats.org/drawingml/2006/main">
+              <a:ext uri="{FF2B5EF4-FFF2-40B4-BE49-F238E27FC236}">
+                <a16:creationId xmlns:a16="http://schemas.microsoft.com/office/drawing/2014/main" id="{93C7173E-A095-4E49-A395-7D4A8181FF79}"/>
+              </a:ext>
+            </a:extLst>
+          </p:cNvPr>
+          <p:cNvSpPr>
+            <a:spLocks xmlns:a="http://schemas.openxmlformats.org/drawingml/2006/main" noGrp="1"/>
+          </p:cNvSpPr>
+          <p:nvPr/>
+        </p:nvSpPr>
+        <p:spPr>
+          <a:xfrm xmlns:a="http://schemas.openxmlformats.org/drawingml/2006/main">
+            <a:off x="1200150" y="3838575"/>
+            <a:ext cx="323850" cy="171450"/>
+          </a:xfrm>
+          <a:prstGeom xmlns:a="http://schemas.openxmlformats.org/drawingml/2006/main" prst="rect">
+            <a:avLst/>
+          </a:prstGeom>
+          <a:noFill xmlns:a="http://schemas.openxmlformats.org/drawingml/2006/main"/>
+          <a:ln xmlns:a="http://schemas.openxmlformats.org/drawingml/2006/main" w="0">
+            <a:noFill/>
+            <a:prstDash val="solid"/>
+          </a:ln>
+        </p:spPr>
+        <p:txBody>
+          <a:bodyPr xmlns:a="http://schemas.openxmlformats.org/drawingml/2006/main"/>
+          <a:lstStyle xmlns:a="http://schemas.openxmlformats.org/drawingml/2006/main"/>
+          <a:p xmlns:a="http://schemas.openxmlformats.org/drawingml/2006/main">
+            <a:pPr algn="ctr">
+              <a:defRPr sz="1050" b="1">
+                <a:solidFill>
+                  <a:srgbClr val="66D4CF"/>
+                </a:solidFill>
+              </a:defRPr>
+            </a:pPr>
+            <a:r>
+              <a:rPr sz="1050" b="1">
+                <a:solidFill>
+                  <a:srgbClr val="66D4CF"/>
+                </a:solidFill>
+              </a:rPr>
+              <a:t>3</a:t>
+            </a:r>
+          </a:p>
+        </p:txBody>
+      </p:sp>
+      <p:sp>
+        <p:nvSpPr>
+          <p:cNvPr id="14" name="">
+            <a:extLst xmlns:a="http://schemas.openxmlformats.org/drawingml/2006/main">
+              <a:ext uri="{FF2B5EF4-FFF2-40B4-BE49-F238E27FC236}">
+                <a16:creationId xmlns:a16="http://schemas.microsoft.com/office/drawing/2014/main" id="{817FBA0E-66BC-4388-8ED1-791173B7CEFE}"/>
+              </a:ext>
+            </a:extLst>
+          </p:cNvPr>
+          <p:cNvSpPr>
+            <a:spLocks xmlns:a="http://schemas.openxmlformats.org/drawingml/2006/main" noGrp="1"/>
+          </p:cNvSpPr>
+          <p:nvPr/>
+        </p:nvSpPr>
+        <p:spPr>
+          <a:xfrm xmlns:a="http://schemas.openxmlformats.org/drawingml/2006/main">
+            <a:off x="1657350" y="3790950"/>
+            <a:ext cx="8401050" cy="419100"/>
+          </a:xfrm>
+          <a:prstGeom xmlns:a="http://schemas.openxmlformats.org/drawingml/2006/main" prst="rect">
+            <a:avLst/>
+          </a:prstGeom>
+          <a:noFill xmlns:a="http://schemas.openxmlformats.org/drawingml/2006/main"/>
+          <a:ln xmlns:a="http://schemas.openxmlformats.org/drawingml/2006/main" w="0">
+            <a:noFill/>
+            <a:prstDash val="solid"/>
+          </a:ln>
+        </p:spPr>
+        <p:txBody>
+          <a:bodyPr xmlns:a="http://schemas.openxmlformats.org/drawingml/2006/main"/>
+          <a:lstStyle xmlns:a="http://schemas.openxmlformats.org/drawingml/2006/main"/>
+          <a:p xmlns:a="http://schemas.openxmlformats.org/drawingml/2006/main">
+            <a:pPr algn="l">
+              <a:defRPr sz="1350" b="0">
+                <a:solidFill>
+                  <a:srgbClr val="F7F8FF"/>
+                </a:solidFill>
+              </a:defRPr>
+            </a:pPr>
+            <a:r>
+              <a:rPr sz="1350" b="0">
+                <a:solidFill>
+                  <a:srgbClr val="F7F8FF"/>
+                </a:solidFill>
+              </a:rPr>
+              <a:t>Відкрити вкладку “Система” та пояснити Flutter → FastAPI → PostgreSQL → підбір фільмів.</a:t>
+            </a:r>
+          </a:p>
+        </p:txBody>
+      </p:sp>
+      <p:sp>
+        <p:nvSpPr>
+          <p:cNvPr id="15" name="">
+            <a:extLst xmlns:a="http://schemas.openxmlformats.org/drawingml/2006/main">
+              <a:ext uri="{FF2B5EF4-FFF2-40B4-BE49-F238E27FC236}">
+                <a16:creationId xmlns:a16="http://schemas.microsoft.com/office/drawing/2014/main" id="{8108193B-F299-4D77-9B7A-0ACEA29B6AB7}"/>
+              </a:ext>
+            </a:extLst>
+          </p:cNvPr>
+          <p:cNvSpPr>
+            <a:spLocks xmlns:a="http://schemas.openxmlformats.org/drawingml/2006/main" noGrp="1"/>
+          </p:cNvSpPr>
+          <p:nvPr/>
+        </p:nvSpPr>
+        <p:spPr>
+          <a:xfrm xmlns:a="http://schemas.openxmlformats.org/drawingml/2006/main">
+            <a:off x="1200150" y="4419600"/>
+            <a:ext cx="323850" cy="323850"/>
+          </a:xfrm>
+          <a:prstGeom xmlns:a="http://schemas.openxmlformats.org/drawingml/2006/main" prst="roundRect">
+            <a:avLst>
+              <a:gd name="adj" fmla="val 35294"/>
+            </a:avLst>
+          </a:prstGeom>
+          <a:solidFill xmlns:a="http://schemas.openxmlformats.org/drawingml/2006/main">
+            <a:srgbClr val="0B1822"/>
+          </a:solidFill>
+          <a:ln xmlns:a="http://schemas.openxmlformats.org/drawingml/2006/main" w="9525">
+            <a:solidFill>
+              <a:srgbClr val="66D4CF"/>
+            </a:solidFill>
+            <a:prstDash val="solid"/>
+          </a:ln>
+        </p:spPr>
+        <p:style>
+          <a:lnRef xmlns:a="http://schemas.openxmlformats.org/drawingml/2006/main" idx="0"/>
+          <a:fillRef xmlns:a="http://schemas.openxmlformats.org/drawingml/2006/main" idx="0"/>
+          <a:effectRef xmlns:a="http://schemas.openxmlformats.org/drawingml/2006/main" idx="4"/>
+          <a:fontRef xmlns:a="http://schemas.openxmlformats.org/drawingml/2006/main" idx="major"/>
+        </p:style>
+      </p:sp>
+      <p:sp>
+        <p:nvSpPr>
+          <p:cNvPr id="16" name="">
+            <a:extLst xmlns:a="http://schemas.openxmlformats.org/drawingml/2006/main">
+              <a:ext uri="{FF2B5EF4-FFF2-40B4-BE49-F238E27FC236}">
+                <a16:creationId xmlns:a16="http://schemas.microsoft.com/office/drawing/2014/main" id="{F231D45B-2992-4672-991C-3D7C16A983E8}"/>
+              </a:ext>
+            </a:extLst>
+          </p:cNvPr>
+          <p:cNvSpPr>
+            <a:spLocks xmlns:a="http://schemas.openxmlformats.org/drawingml/2006/main" noGrp="1"/>
+          </p:cNvSpPr>
+          <p:nvPr/>
+        </p:nvSpPr>
+        <p:spPr>
+          <a:xfrm xmlns:a="http://schemas.openxmlformats.org/drawingml/2006/main">
+            <a:off x="1200150" y="4486275"/>
+            <a:ext cx="323850" cy="171450"/>
+          </a:xfrm>
+          <a:prstGeom xmlns:a="http://schemas.openxmlformats.org/drawingml/2006/main" prst="rect">
+            <a:avLst/>
+          </a:prstGeom>
+          <a:noFill xmlns:a="http://schemas.openxmlformats.org/drawingml/2006/main"/>
+          <a:ln xmlns:a="http://schemas.openxmlformats.org/drawingml/2006/main" w="0">
+            <a:noFill/>
+            <a:prstDash val="solid"/>
+          </a:ln>
+        </p:spPr>
+        <p:txBody>
+          <a:bodyPr xmlns:a="http://schemas.openxmlformats.org/drawingml/2006/main"/>
+          <a:lstStyle xmlns:a="http://schemas.openxmlformats.org/drawingml/2006/main"/>
+          <a:p xmlns:a="http://schemas.openxmlformats.org/drawingml/2006/main">
+            <a:pPr algn="ctr">
+              <a:defRPr sz="1050" b="1">
+                <a:solidFill>
+                  <a:srgbClr val="66D4CF"/>
+                </a:solidFill>
+              </a:defRPr>
+            </a:pPr>
+            <a:r>
+              <a:rPr sz="1050" b="1">
+                <a:solidFill>
+                  <a:srgbClr val="66D4CF"/>
+                </a:solidFill>
+              </a:rPr>
+              <a:t>4</a:t>
+            </a:r>
+          </a:p>
+        </p:txBody>
+      </p:sp>
+      <p:sp>
+        <p:nvSpPr>
+          <p:cNvPr id="17" name="">
+            <a:extLst xmlns:a="http://schemas.openxmlformats.org/drawingml/2006/main">
+              <a:ext uri="{FF2B5EF4-FFF2-40B4-BE49-F238E27FC236}">
+                <a16:creationId xmlns:a16="http://schemas.microsoft.com/office/drawing/2014/main" id="{41C17AD6-CB24-49F0-A8FC-E78C07455FA2}"/>
+              </a:ext>
+            </a:extLst>
+          </p:cNvPr>
+          <p:cNvSpPr>
+            <a:spLocks xmlns:a="http://schemas.openxmlformats.org/drawingml/2006/main" noGrp="1"/>
+          </p:cNvSpPr>
+          <p:nvPr/>
+        </p:nvSpPr>
+        <p:spPr>
+          <a:xfrm xmlns:a="http://schemas.openxmlformats.org/drawingml/2006/main">
+            <a:off x="1657350" y="4438650"/>
+            <a:ext cx="8401050" cy="419100"/>
+          </a:xfrm>
+          <a:prstGeom xmlns:a="http://schemas.openxmlformats.org/drawingml/2006/main" prst="rect">
+            <a:avLst/>
+          </a:prstGeom>
+          <a:noFill xmlns:a="http://schemas.openxmlformats.org/drawingml/2006/main"/>
+          <a:ln xmlns:a="http://schemas.openxmlformats.org/drawingml/2006/main" w="0">
+            <a:noFill/>
+            <a:prstDash val="solid"/>
+          </a:ln>
+        </p:spPr>
+        <p:txBody>
+          <a:bodyPr xmlns:a="http://schemas.openxmlformats.org/drawingml/2006/main"/>
+          <a:lstStyle xmlns:a="http://schemas.openxmlformats.org/drawingml/2006/main"/>
+          <a:p xmlns:a="http://schemas.openxmlformats.org/drawingml/2006/main">
+            <a:pPr algn="l">
+              <a:defRPr sz="1350" b="0">
+                <a:solidFill>
+                  <a:srgbClr val="F7F8FF"/>
+                </a:solidFill>
+              </a:defRPr>
+            </a:pPr>
+            <a:r>
+              <a:rPr sz="1350" b="0">
+                <a:solidFill>
+                  <a:srgbClr val="F7F8FF"/>
+                </a:solidFill>
+              </a:rPr>
+              <a:t>Показати backend/main.py і schema.sql як доказ підключення бази даних.</a:t>
+            </a:r>
+          </a:p>
+        </p:txBody>
+      </p:sp>
+      <p:sp>
+        <p:nvSpPr>
+          <p:cNvPr id="18" name="">
+            <a:extLst xmlns:a="http://schemas.openxmlformats.org/drawingml/2006/main">
+              <a:ext uri="{FF2B5EF4-FFF2-40B4-BE49-F238E27FC236}">
+                <a16:creationId xmlns:a16="http://schemas.microsoft.com/office/drawing/2014/main" id="{31DFE7D0-98E1-419F-979C-C1AC1D1D0418}"/>
+              </a:ext>
+            </a:extLst>
+          </p:cNvPr>
+          <p:cNvSpPr>
+            <a:spLocks xmlns:a="http://schemas.openxmlformats.org/drawingml/2006/main" noGrp="1"/>
+          </p:cNvSpPr>
+          <p:nvPr/>
+        </p:nvSpPr>
+        <p:spPr>
+          <a:xfrm xmlns:a="http://schemas.openxmlformats.org/drawingml/2006/main">
+            <a:off x="1200150" y="5791200"/>
+            <a:ext cx="6858000" cy="285750"/>
+          </a:xfrm>
+          <a:prstGeom xmlns:a="http://schemas.openxmlformats.org/drawingml/2006/main" prst="rect">
+            <a:avLst/>
+          </a:prstGeom>
+          <a:noFill xmlns:a="http://schemas.openxmlformats.org/drawingml/2006/main"/>
+          <a:ln xmlns:a="http://schemas.openxmlformats.org/drawingml/2006/main" w="0">
+            <a:noFill/>
+            <a:prstDash val="solid"/>
+          </a:ln>
+        </p:spPr>
+        <p:txBody>
+          <a:bodyPr xmlns:a="http://schemas.openxmlformats.org/drawingml/2006/main"/>
+          <a:lstStyle xmlns:a="http://schemas.openxmlformats.org/drawingml/2006/main"/>
+          <a:p xmlns:a="http://schemas.openxmlformats.org/drawingml/2006/main">
+            <a:pPr algn="l">
+              <a:defRPr sz="1500" b="1">
+                <a:solidFill>
+                  <a:srgbClr val="66D4CF"/>
+                </a:solidFill>
+              </a:defRPr>
+            </a:pPr>
+            <a:r>
+              <a:rPr sz="1500" b="1">
+                <a:solidFill>
+                  <a:srgbClr val="66D4CF"/>
+                </a:solidFill>
+              </a:rPr>
+              <a:t>GitHub: github.com/Vanil-CEO/CineMind-movie-ai</a:t>
+            </a:r>
+          </a:p>
+        </p:txBody>
+      </p:sp>
+    </p:spTree>
+    <p:extLst>
+      <p:ext uri="{BB962C8B-B14F-4D97-AF65-F5344CB8AC3E}">
+        <p14:creationId xmlns:p14="http://schemas.microsoft.com/office/powerpoint/2010/main" val="1145303018"/>
       </p:ext>
     </p:extLst>
   </p:cSld>
@@ -3224,10 +4513,10 @@
       </p:grpSpPr>
       <p:sp>
         <p:nvSpPr>
-          <p:cNvPr id="1" name="">
-            <a:extLst xmlns:a="http://schemas.openxmlformats.org/drawingml/2006/main">
-              <a:ext uri="{FF2B5EF4-FFF2-40B4-BE49-F238E27FC236}">
-                <a16:creationId xmlns:a16="http://schemas.microsoft.com/office/drawing/2014/main" id="{3E2619F2-D25A-4B4E-AF4B-EA936D4A2A49}"/>
+          <p:cNvPr id="27" name="">
+            <a:extLst xmlns:a="http://schemas.openxmlformats.org/drawingml/2006/main">
+              <a:ext uri="{FF2B5EF4-FFF2-40B4-BE49-F238E27FC236}">
+                <a16:creationId xmlns:a16="http://schemas.microsoft.com/office/drawing/2014/main" id="{41C0BD2D-E081-4E95-9D9A-A3C0FDBE4F65}"/>
               </a:ext>
             </a:extLst>
           </p:cNvPr>
@@ -3255,7 +4544,7 @@
           <p:cNvPr id="2" name="">
             <a:extLst xmlns:a="http://schemas.openxmlformats.org/drawingml/2006/main">
               <a:ext uri="{FF2B5EF4-FFF2-40B4-BE49-F238E27FC236}">
-                <a16:creationId xmlns:a16="http://schemas.microsoft.com/office/drawing/2014/main" id="{A35B8FB6-DDF0-4D83-9B98-B43E3B568681}"/>
+                <a16:creationId xmlns:a16="http://schemas.microsoft.com/office/drawing/2014/main" id="{F32C7C6D-B459-4108-A1B6-60CE060E33B0}"/>
               </a:ext>
             </a:extLst>
           </p:cNvPr>
@@ -3283,7 +4572,7 @@
           <p:cNvPr id="3" name="">
             <a:extLst xmlns:a="http://schemas.openxmlformats.org/drawingml/2006/main">
               <a:ext uri="{FF2B5EF4-FFF2-40B4-BE49-F238E27FC236}">
-                <a16:creationId xmlns:a16="http://schemas.microsoft.com/office/drawing/2014/main" id="{484D20FF-CFE5-4506-9B92-9F52193146A0}"/>
+                <a16:creationId xmlns:a16="http://schemas.microsoft.com/office/drawing/2014/main" id="{A23752B2-7D16-46B4-8702-AC9C44655B0C}"/>
               </a:ext>
             </a:extLst>
           </p:cNvPr>
@@ -3333,7 +4622,7 @@
           <p:cNvPr id="4" name="">
             <a:extLst xmlns:a="http://schemas.openxmlformats.org/drawingml/2006/main">
               <a:ext uri="{FF2B5EF4-FFF2-40B4-BE49-F238E27FC236}">
-                <a16:creationId xmlns:a16="http://schemas.microsoft.com/office/drawing/2014/main" id="{A02865E8-8129-4669-8420-BA737B8FBF88}"/>
+                <a16:creationId xmlns:a16="http://schemas.microsoft.com/office/drawing/2014/main" id="{96909688-EAC8-47A1-A6EB-3130D2850732}"/>
               </a:ext>
             </a:extLst>
           </p:cNvPr>
@@ -3383,7 +4672,7 @@
           <p:cNvPr id="5" name="">
             <a:extLst xmlns:a="http://schemas.openxmlformats.org/drawingml/2006/main">
               <a:ext uri="{FF2B5EF4-FFF2-40B4-BE49-F238E27FC236}">
-                <a16:creationId xmlns:a16="http://schemas.microsoft.com/office/drawing/2014/main" id="{0E1DBAC6-D2C2-4726-9FC5-FA5703A6A7AA}"/>
+                <a16:creationId xmlns:a16="http://schemas.microsoft.com/office/drawing/2014/main" id="{F80EA76F-FFA2-47CB-90F6-3D3260773212}"/>
               </a:ext>
             </a:extLst>
           </p:cNvPr>
@@ -3433,7 +4722,7 @@
           <p:cNvPr id="6" name="">
             <a:extLst xmlns:a="http://schemas.openxmlformats.org/drawingml/2006/main">
               <a:ext uri="{FF2B5EF4-FFF2-40B4-BE49-F238E27FC236}">
-                <a16:creationId xmlns:a16="http://schemas.microsoft.com/office/drawing/2014/main" id="{3FE64756-FF6B-40FF-8F23-9800FA0BB35C}"/>
+                <a16:creationId xmlns:a16="http://schemas.microsoft.com/office/drawing/2014/main" id="{9B984E8F-9ACA-4C59-A829-D8460C719A91}"/>
               </a:ext>
             </a:extLst>
           </p:cNvPr>
@@ -3474,7 +4763,7 @@
           <p:cNvPr id="7" name="">
             <a:extLst xmlns:a="http://schemas.openxmlformats.org/drawingml/2006/main">
               <a:ext uri="{FF2B5EF4-FFF2-40B4-BE49-F238E27FC236}">
-                <a16:creationId xmlns:a16="http://schemas.microsoft.com/office/drawing/2014/main" id="{3AB76424-430E-41D8-8F2F-8C9E4E1E2AA1}"/>
+                <a16:creationId xmlns:a16="http://schemas.microsoft.com/office/drawing/2014/main" id="{2C1C547F-2C09-4CA1-9EDB-78103B786575}"/>
               </a:ext>
             </a:extLst>
           </p:cNvPr>
@@ -3524,7 +4813,7 @@
           <p:cNvPr id="8" name="">
             <a:extLst xmlns:a="http://schemas.openxmlformats.org/drawingml/2006/main">
               <a:ext uri="{FF2B5EF4-FFF2-40B4-BE49-F238E27FC236}">
-                <a16:creationId xmlns:a16="http://schemas.microsoft.com/office/drawing/2014/main" id="{73E7E789-0ACC-4530-AE49-A9D44761C0E3}"/>
+                <a16:creationId xmlns:a16="http://schemas.microsoft.com/office/drawing/2014/main" id="{F6476355-3FA1-4EA6-9367-BB88052256DD}"/>
               </a:ext>
             </a:extLst>
           </p:cNvPr>
@@ -3574,7 +4863,7 @@
           <p:cNvPr id="9" name="">
             <a:extLst xmlns:a="http://schemas.openxmlformats.org/drawingml/2006/main">
               <a:ext uri="{FF2B5EF4-FFF2-40B4-BE49-F238E27FC236}">
-                <a16:creationId xmlns:a16="http://schemas.microsoft.com/office/drawing/2014/main" id="{9DE07FD6-B6E9-417F-A9EA-6227AA01C961}"/>
+                <a16:creationId xmlns:a16="http://schemas.microsoft.com/office/drawing/2014/main" id="{D98BEB1D-7153-4F78-89CA-48D66BD124B5}"/>
               </a:ext>
             </a:extLst>
           </p:cNvPr>
@@ -3615,7 +4904,7 @@
           <p:cNvPr id="10" name="">
             <a:extLst xmlns:a="http://schemas.openxmlformats.org/drawingml/2006/main">
               <a:ext uri="{FF2B5EF4-FFF2-40B4-BE49-F238E27FC236}">
-                <a16:creationId xmlns:a16="http://schemas.microsoft.com/office/drawing/2014/main" id="{37A34E73-A294-49E7-ABD8-8F69F23549A4}"/>
+                <a16:creationId xmlns:a16="http://schemas.microsoft.com/office/drawing/2014/main" id="{26770BF5-9CFA-4063-B433-528AECAA9104}"/>
               </a:ext>
             </a:extLst>
           </p:cNvPr>
@@ -3665,7 +4954,7 @@
           <p:cNvPr id="11" name="">
             <a:extLst xmlns:a="http://schemas.openxmlformats.org/drawingml/2006/main">
               <a:ext uri="{FF2B5EF4-FFF2-40B4-BE49-F238E27FC236}">
-                <a16:creationId xmlns:a16="http://schemas.microsoft.com/office/drawing/2014/main" id="{BBC2119C-5579-4857-AD8C-62D394EFFD03}"/>
+                <a16:creationId xmlns:a16="http://schemas.microsoft.com/office/drawing/2014/main" id="{C3754740-9F04-4169-BEAE-45EF877B25B2}"/>
               </a:ext>
             </a:extLst>
           </p:cNvPr>
@@ -3715,7 +5004,7 @@
           <p:cNvPr id="12" name="">
             <a:extLst xmlns:a="http://schemas.openxmlformats.org/drawingml/2006/main">
               <a:ext uri="{FF2B5EF4-FFF2-40B4-BE49-F238E27FC236}">
-                <a16:creationId xmlns:a16="http://schemas.microsoft.com/office/drawing/2014/main" id="{987D3CE9-3B04-469A-95BD-EE9174EE32D0}"/>
+                <a16:creationId xmlns:a16="http://schemas.microsoft.com/office/drawing/2014/main" id="{2598781A-3CFF-4F5C-A948-D6C3BC3AB481}"/>
               </a:ext>
             </a:extLst>
           </p:cNvPr>
@@ -3756,7 +5045,7 @@
           <p:cNvPr id="13" name="">
             <a:extLst xmlns:a="http://schemas.openxmlformats.org/drawingml/2006/main">
               <a:ext uri="{FF2B5EF4-FFF2-40B4-BE49-F238E27FC236}">
-                <a16:creationId xmlns:a16="http://schemas.microsoft.com/office/drawing/2014/main" id="{1AEABCF5-4474-4CF4-BCB4-A43C42FA423A}"/>
+                <a16:creationId xmlns:a16="http://schemas.microsoft.com/office/drawing/2014/main" id="{EC6FCF26-8D71-4763-8AD1-C0A7341B1CBD}"/>
               </a:ext>
             </a:extLst>
           </p:cNvPr>
@@ -3806,7 +5095,7 @@
           <p:cNvPr id="14" name="">
             <a:extLst xmlns:a="http://schemas.openxmlformats.org/drawingml/2006/main">
               <a:ext uri="{FF2B5EF4-FFF2-40B4-BE49-F238E27FC236}">
-                <a16:creationId xmlns:a16="http://schemas.microsoft.com/office/drawing/2014/main" id="{0E5A55E2-6282-4934-B1AA-70516CA62F5C}"/>
+                <a16:creationId xmlns:a16="http://schemas.microsoft.com/office/drawing/2014/main" id="{BA4081A2-6330-429A-9E37-41D8B66C4C52}"/>
               </a:ext>
             </a:extLst>
           </p:cNvPr>
@@ -3856,7 +5145,7 @@
           <p:cNvPr id="15" name="">
             <a:extLst xmlns:a="http://schemas.openxmlformats.org/drawingml/2006/main">
               <a:ext uri="{FF2B5EF4-FFF2-40B4-BE49-F238E27FC236}">
-                <a16:creationId xmlns:a16="http://schemas.microsoft.com/office/drawing/2014/main" id="{A17E5515-F9BE-44BF-84B0-4D103CA25A54}"/>
+                <a16:creationId xmlns:a16="http://schemas.microsoft.com/office/drawing/2014/main" id="{D33C14A2-774F-4389-99EE-0319B2D04645}"/>
               </a:ext>
             </a:extLst>
           </p:cNvPr>
@@ -3897,7 +5186,7 @@
           <p:cNvPr id="16" name="">
             <a:extLst xmlns:a="http://schemas.openxmlformats.org/drawingml/2006/main">
               <a:ext uri="{FF2B5EF4-FFF2-40B4-BE49-F238E27FC236}">
-                <a16:creationId xmlns:a16="http://schemas.microsoft.com/office/drawing/2014/main" id="{81968D24-8004-474C-A334-037E9FF2F0B8}"/>
+                <a16:creationId xmlns:a16="http://schemas.microsoft.com/office/drawing/2014/main" id="{3A8FD077-C55A-471F-94AC-5A857F9E5130}"/>
               </a:ext>
             </a:extLst>
           </p:cNvPr>
@@ -3937,7 +5226,7 @@
                   <a:srgbClr val="BF5AF2"/>
                 </a:solidFill>
               </a:rPr>
-              <a:t>AI</a:t>
+              <a:t>4</a:t>
             </a:r>
           </a:p>
         </p:txBody>
@@ -3947,7 +5236,7 @@
           <p:cNvPr id="17" name="">
             <a:extLst xmlns:a="http://schemas.openxmlformats.org/drawingml/2006/main">
               <a:ext uri="{FF2B5EF4-FFF2-40B4-BE49-F238E27FC236}">
-                <a16:creationId xmlns:a16="http://schemas.microsoft.com/office/drawing/2014/main" id="{2C2D5231-054E-4C5A-AF8E-B6CB00759FE9}"/>
+                <a16:creationId xmlns:a16="http://schemas.microsoft.com/office/drawing/2014/main" id="{265BC52F-91C5-4FFE-AC73-6E9AD0A9636A}"/>
               </a:ext>
             </a:extLst>
           </p:cNvPr>
@@ -3987,7 +5276,7 @@
                   <a:srgbClr val="A9B0C2"/>
                 </a:solidFill>
               </a:rPr>
-              <a:t>підбір за смаком</a:t>
+              <a:t>сигнали для підбору</a:t>
             </a:r>
           </a:p>
         </p:txBody>
@@ -3997,7 +5286,7 @@
           <p:cNvPr id="18" name="">
             <a:extLst xmlns:a="http://schemas.openxmlformats.org/drawingml/2006/main">
               <a:ext uri="{FF2B5EF4-FFF2-40B4-BE49-F238E27FC236}">
-                <a16:creationId xmlns:a16="http://schemas.microsoft.com/office/drawing/2014/main" id="{70801D07-CB30-42F0-A62E-06FD7D5BDC84}"/>
+                <a16:creationId xmlns:a16="http://schemas.microsoft.com/office/drawing/2014/main" id="{8F81F617-6C62-4B13-A07B-F35C079D1C99}"/>
               </a:ext>
             </a:extLst>
           </p:cNvPr>
@@ -4038,7 +5327,7 @@
           <p:cNvPr id="19" name="">
             <a:extLst xmlns:a="http://schemas.openxmlformats.org/drawingml/2006/main">
               <a:ext uri="{FF2B5EF4-FFF2-40B4-BE49-F238E27FC236}">
-                <a16:creationId xmlns:a16="http://schemas.microsoft.com/office/drawing/2014/main" id="{6615B677-3872-487B-8F13-E1D18CFB26EE}"/>
+                <a16:creationId xmlns:a16="http://schemas.microsoft.com/office/drawing/2014/main" id="{3E201271-8DB3-4C65-9965-D429537BB002}"/>
               </a:ext>
             </a:extLst>
           </p:cNvPr>
@@ -4088,7 +5377,7 @@
           <p:cNvPr id="20" name="">
             <a:extLst xmlns:a="http://schemas.openxmlformats.org/drawingml/2006/main">
               <a:ext uri="{FF2B5EF4-FFF2-40B4-BE49-F238E27FC236}">
-                <a16:creationId xmlns:a16="http://schemas.microsoft.com/office/drawing/2014/main" id="{C8A79C36-1AF7-41E8-8D43-07E19514FE75}"/>
+                <a16:creationId xmlns:a16="http://schemas.microsoft.com/office/drawing/2014/main" id="{9662AFE5-D912-4BC8-A809-F77A35FE09DB}"/>
               </a:ext>
             </a:extLst>
           </p:cNvPr>
@@ -4138,7 +5427,7 @@
           <p:cNvPr id="21" name="">
             <a:extLst xmlns:a="http://schemas.openxmlformats.org/drawingml/2006/main">
               <a:ext uri="{FF2B5EF4-FFF2-40B4-BE49-F238E27FC236}">
-                <a16:creationId xmlns:a16="http://schemas.microsoft.com/office/drawing/2014/main" id="{A37E9C75-F1EF-4B29-B01D-4E69CB2C0DC5}"/>
+                <a16:creationId xmlns:a16="http://schemas.microsoft.com/office/drawing/2014/main" id="{0EBC8343-0564-4063-B77C-8BFE3F7DF61F}"/>
               </a:ext>
             </a:extLst>
           </p:cNvPr>
@@ -4179,7 +5468,7 @@
           <p:cNvPr id="22" name="">
             <a:extLst xmlns:a="http://schemas.openxmlformats.org/drawingml/2006/main">
               <a:ext uri="{FF2B5EF4-FFF2-40B4-BE49-F238E27FC236}">
-                <a16:creationId xmlns:a16="http://schemas.microsoft.com/office/drawing/2014/main" id="{97E380BC-82FD-4FB5-BDF0-B272C56D32FD}"/>
+                <a16:creationId xmlns:a16="http://schemas.microsoft.com/office/drawing/2014/main" id="{260CF590-2D2C-41AA-84DF-7EF5E4761ED7}"/>
               </a:ext>
             </a:extLst>
           </p:cNvPr>
@@ -4229,7 +5518,7 @@
           <p:cNvPr id="23" name="">
             <a:extLst xmlns:a="http://schemas.openxmlformats.org/drawingml/2006/main">
               <a:ext uri="{FF2B5EF4-FFF2-40B4-BE49-F238E27FC236}">
-                <a16:creationId xmlns:a16="http://schemas.microsoft.com/office/drawing/2014/main" id="{49DEB2C1-AC4B-420D-BDAA-2CBD49AE949D}"/>
+                <a16:creationId xmlns:a16="http://schemas.microsoft.com/office/drawing/2014/main" id="{A8421D79-AB2D-4CCF-8D90-893606D348DA}"/>
               </a:ext>
             </a:extLst>
           </p:cNvPr>
@@ -4279,7 +5568,7 @@
           <p:cNvPr id="24" name="">
             <a:extLst xmlns:a="http://schemas.openxmlformats.org/drawingml/2006/main">
               <a:ext uri="{FF2B5EF4-FFF2-40B4-BE49-F238E27FC236}">
-                <a16:creationId xmlns:a16="http://schemas.microsoft.com/office/drawing/2014/main" id="{6D849B09-A509-4905-834F-4778167FAE2A}"/>
+                <a16:creationId xmlns:a16="http://schemas.microsoft.com/office/drawing/2014/main" id="{AAED1488-2FCF-4A27-9838-72419A00D988}"/>
               </a:ext>
             </a:extLst>
           </p:cNvPr>
@@ -4320,7 +5609,7 @@
           <p:cNvPr id="25" name="">
             <a:extLst xmlns:a="http://schemas.openxmlformats.org/drawingml/2006/main">
               <a:ext uri="{FF2B5EF4-FFF2-40B4-BE49-F238E27FC236}">
-                <a16:creationId xmlns:a16="http://schemas.microsoft.com/office/drawing/2014/main" id="{CDD9C202-A9F6-48B2-97DA-B0D594A19DC1}"/>
+                <a16:creationId xmlns:a16="http://schemas.microsoft.com/office/drawing/2014/main" id="{99D20322-6148-44CA-9885-9F6AA3FC4693}"/>
               </a:ext>
             </a:extLst>
           </p:cNvPr>
@@ -4370,7 +5659,7 @@
           <p:cNvPr id="26" name="">
             <a:extLst xmlns:a="http://schemas.openxmlformats.org/drawingml/2006/main">
               <a:ext uri="{FF2B5EF4-FFF2-40B4-BE49-F238E27FC236}">
-                <a16:creationId xmlns:a16="http://schemas.microsoft.com/office/drawing/2014/main" id="{EA13AA61-EFA5-4C16-A6C8-73DA2785CBD1}"/>
+                <a16:creationId xmlns:a16="http://schemas.microsoft.com/office/drawing/2014/main" id="{68C10E45-93A7-40FF-BE76-40723311E9CF}"/>
               </a:ext>
             </a:extLst>
           </p:cNvPr>
@@ -4410,7 +5699,7 @@
                   <a:srgbClr val="F7F8FF"/>
                 </a:solidFill>
               </a:rPr>
-              <a:t>Підготував backend на FastAPI та PostgreSQL-схему для збереження даних.</a:t>
+              <a:t>Підготував backend на FastAPI та PostgreSQL-схему для каталогу і дій користувача.</a:t>
             </a:r>
           </a:p>
         </p:txBody>
@@ -4418,7 +5707,7 @@
     </p:spTree>
     <p:extLst>
       <p:ext uri="{BB962C8B-B14F-4D97-AF65-F5344CB8AC3E}">
-        <p14:creationId xmlns:p14="http://schemas.microsoft.com/office/powerpoint/2010/main" val="1243654968"/>
+        <p14:creationId xmlns:p14="http://schemas.microsoft.com/office/powerpoint/2010/main" val="65485730"/>
       </p:ext>
     </p:extLst>
   </p:cSld>
@@ -4446,10 +5735,10 @@
       </p:grpSpPr>
       <p:sp>
         <p:nvSpPr>
-          <p:cNvPr id="1" name="">
-            <a:extLst xmlns:a="http://schemas.openxmlformats.org/drawingml/2006/main">
-              <a:ext uri="{FF2B5EF4-FFF2-40B4-BE49-F238E27FC236}">
-                <a16:creationId xmlns:a16="http://schemas.microsoft.com/office/drawing/2014/main" id="{C4DC0A14-1B1B-449F-9928-F76C3521DE92}"/>
+          <p:cNvPr id="22" name="">
+            <a:extLst xmlns:a="http://schemas.openxmlformats.org/drawingml/2006/main">
+              <a:ext uri="{FF2B5EF4-FFF2-40B4-BE49-F238E27FC236}">
+                <a16:creationId xmlns:a16="http://schemas.microsoft.com/office/drawing/2014/main" id="{08253D10-E3A6-46AD-B814-DB0A0C2BF568}"/>
               </a:ext>
             </a:extLst>
           </p:cNvPr>
@@ -4477,7 +5766,7 @@
           <p:cNvPr id="2" name="">
             <a:extLst xmlns:a="http://schemas.openxmlformats.org/drawingml/2006/main">
               <a:ext uri="{FF2B5EF4-FFF2-40B4-BE49-F238E27FC236}">
-                <a16:creationId xmlns:a16="http://schemas.microsoft.com/office/drawing/2014/main" id="{2AE13C71-6141-4CB9-B7B7-868DD577CAD8}"/>
+                <a16:creationId xmlns:a16="http://schemas.microsoft.com/office/drawing/2014/main" id="{C78A3863-C669-4376-B21A-8F9E8131095E}"/>
               </a:ext>
             </a:extLst>
           </p:cNvPr>
@@ -4505,7 +5794,7 @@
           <p:cNvPr id="3" name="">
             <a:extLst xmlns:a="http://schemas.openxmlformats.org/drawingml/2006/main">
               <a:ext uri="{FF2B5EF4-FFF2-40B4-BE49-F238E27FC236}">
-                <a16:creationId xmlns:a16="http://schemas.microsoft.com/office/drawing/2014/main" id="{BA3C1496-85F9-4E09-AB4B-CA5C88662727}"/>
+                <a16:creationId xmlns:a16="http://schemas.microsoft.com/office/drawing/2014/main" id="{86FA201A-1093-4E58-825C-19E6E64BF257}"/>
               </a:ext>
             </a:extLst>
           </p:cNvPr>
@@ -4555,7 +5844,7 @@
           <p:cNvPr id="4" name="">
             <a:extLst xmlns:a="http://schemas.openxmlformats.org/drawingml/2006/main">
               <a:ext uri="{FF2B5EF4-FFF2-40B4-BE49-F238E27FC236}">
-                <a16:creationId xmlns:a16="http://schemas.microsoft.com/office/drawing/2014/main" id="{503A4E1C-ECE0-4B2F-B892-4F0779B75C34}"/>
+                <a16:creationId xmlns:a16="http://schemas.microsoft.com/office/drawing/2014/main" id="{8FBD8833-063F-4AAE-8D7D-EEF0C6C81DDB}"/>
               </a:ext>
             </a:extLst>
           </p:cNvPr>
@@ -4605,7 +5894,7 @@
           <p:cNvPr id="5" name="">
             <a:extLst xmlns:a="http://schemas.openxmlformats.org/drawingml/2006/main">
               <a:ext uri="{FF2B5EF4-FFF2-40B4-BE49-F238E27FC236}">
-                <a16:creationId xmlns:a16="http://schemas.microsoft.com/office/drawing/2014/main" id="{E3FBDC98-0226-4C17-9109-AF7AAEB964B9}"/>
+                <a16:creationId xmlns:a16="http://schemas.microsoft.com/office/drawing/2014/main" id="{4EF86100-4BBA-4F61-A416-3C43A940BF42}"/>
               </a:ext>
             </a:extLst>
           </p:cNvPr>
@@ -4655,7 +5944,7 @@
           <p:cNvPr id="6" name="">
             <a:extLst xmlns:a="http://schemas.openxmlformats.org/drawingml/2006/main">
               <a:ext uri="{FF2B5EF4-FFF2-40B4-BE49-F238E27FC236}">
-                <a16:creationId xmlns:a16="http://schemas.microsoft.com/office/drawing/2014/main" id="{3E66B9F9-95E1-4CD5-A6DF-D033C9936256}"/>
+                <a16:creationId xmlns:a16="http://schemas.microsoft.com/office/drawing/2014/main" id="{0C143A10-E473-4D59-9B95-D4B3ACFB5707}"/>
               </a:ext>
             </a:extLst>
           </p:cNvPr>
@@ -4696,7 +5985,7 @@
           <p:cNvPr id="7" name="">
             <a:extLst xmlns:a="http://schemas.openxmlformats.org/drawingml/2006/main">
               <a:ext uri="{FF2B5EF4-FFF2-40B4-BE49-F238E27FC236}">
-                <a16:creationId xmlns:a16="http://schemas.microsoft.com/office/drawing/2014/main" id="{7802BABA-B196-4CFF-A49E-B9C892F2B0AE}"/>
+                <a16:creationId xmlns:a16="http://schemas.microsoft.com/office/drawing/2014/main" id="{737479AE-D012-41CD-8E1C-D5C7E4CB5C40}"/>
               </a:ext>
             </a:extLst>
           </p:cNvPr>
@@ -4746,7 +6035,7 @@
           <p:cNvPr id="8" name="">
             <a:extLst xmlns:a="http://schemas.openxmlformats.org/drawingml/2006/main">
               <a:ext uri="{FF2B5EF4-FFF2-40B4-BE49-F238E27FC236}">
-                <a16:creationId xmlns:a16="http://schemas.microsoft.com/office/drawing/2014/main" id="{5A0B556D-44F0-41CD-AB02-2E4729DCF76D}"/>
+                <a16:creationId xmlns:a16="http://schemas.microsoft.com/office/drawing/2014/main" id="{5F95F26B-FFE8-46B9-970F-FE355D159DEE}"/>
               </a:ext>
             </a:extLst>
           </p:cNvPr>
@@ -4796,7 +6085,7 @@
           <p:cNvPr id="9" name="">
             <a:extLst xmlns:a="http://schemas.openxmlformats.org/drawingml/2006/main">
               <a:ext uri="{FF2B5EF4-FFF2-40B4-BE49-F238E27FC236}">
-                <a16:creationId xmlns:a16="http://schemas.microsoft.com/office/drawing/2014/main" id="{F050534A-0E3E-4CBA-ABF7-F318E2DF923E}"/>
+                <a16:creationId xmlns:a16="http://schemas.microsoft.com/office/drawing/2014/main" id="{04D92BC6-8D41-4D3E-89FE-7206E4B77124}"/>
               </a:ext>
             </a:extLst>
           </p:cNvPr>
@@ -4846,7 +6135,7 @@
           <p:cNvPr id="10" name="">
             <a:extLst xmlns:a="http://schemas.openxmlformats.org/drawingml/2006/main">
               <a:ext uri="{FF2B5EF4-FFF2-40B4-BE49-F238E27FC236}">
-                <a16:creationId xmlns:a16="http://schemas.microsoft.com/office/drawing/2014/main" id="{BC0EB862-89DE-4B5C-996D-EADACEACE323}"/>
+                <a16:creationId xmlns:a16="http://schemas.microsoft.com/office/drawing/2014/main" id="{AAD41F80-CEBF-4A9C-B07F-B59A5677846F}"/>
               </a:ext>
             </a:extLst>
           </p:cNvPr>
@@ -4887,7 +6176,7 @@
           <p:cNvPr id="11" name="">
             <a:extLst xmlns:a="http://schemas.openxmlformats.org/drawingml/2006/main">
               <a:ext uri="{FF2B5EF4-FFF2-40B4-BE49-F238E27FC236}">
-                <a16:creationId xmlns:a16="http://schemas.microsoft.com/office/drawing/2014/main" id="{96B8AACF-5F92-4330-944D-C0190332EA3E}"/>
+                <a16:creationId xmlns:a16="http://schemas.microsoft.com/office/drawing/2014/main" id="{3ECE0987-731D-4FC7-A5E9-77FCC254271A}"/>
               </a:ext>
             </a:extLst>
           </p:cNvPr>
@@ -4937,7 +6226,7 @@
           <p:cNvPr id="12" name="">
             <a:extLst xmlns:a="http://schemas.openxmlformats.org/drawingml/2006/main">
               <a:ext uri="{FF2B5EF4-FFF2-40B4-BE49-F238E27FC236}">
-                <a16:creationId xmlns:a16="http://schemas.microsoft.com/office/drawing/2014/main" id="{A103DE23-B5E0-4547-86BC-927AD4706935}"/>
+                <a16:creationId xmlns:a16="http://schemas.microsoft.com/office/drawing/2014/main" id="{BAE37D5C-0C77-4692-85E0-7A637EAA9AB6}"/>
               </a:ext>
             </a:extLst>
           </p:cNvPr>
@@ -4987,7 +6276,7 @@
           <p:cNvPr id="13" name="">
             <a:extLst xmlns:a="http://schemas.openxmlformats.org/drawingml/2006/main">
               <a:ext uri="{FF2B5EF4-FFF2-40B4-BE49-F238E27FC236}">
-                <a16:creationId xmlns:a16="http://schemas.microsoft.com/office/drawing/2014/main" id="{DE5DEDD4-A8AF-4C16-A4F7-C15007BF0355}"/>
+                <a16:creationId xmlns:a16="http://schemas.microsoft.com/office/drawing/2014/main" id="{A28B0BD9-6053-4F0B-86B5-9D2130371F62}"/>
               </a:ext>
             </a:extLst>
           </p:cNvPr>
@@ -5037,7 +6326,7 @@
           <p:cNvPr id="14" name="">
             <a:extLst xmlns:a="http://schemas.openxmlformats.org/drawingml/2006/main">
               <a:ext uri="{FF2B5EF4-FFF2-40B4-BE49-F238E27FC236}">
-                <a16:creationId xmlns:a16="http://schemas.microsoft.com/office/drawing/2014/main" id="{35B6F66C-F154-4D2F-90B4-76CB6EE7A6DB}"/>
+                <a16:creationId xmlns:a16="http://schemas.microsoft.com/office/drawing/2014/main" id="{B6763994-C722-4ED2-8718-D96498496D6A}"/>
               </a:ext>
             </a:extLst>
           </p:cNvPr>
@@ -5078,7 +6367,7 @@
           <p:cNvPr id="15" name="">
             <a:extLst xmlns:a="http://schemas.openxmlformats.org/drawingml/2006/main">
               <a:ext uri="{FF2B5EF4-FFF2-40B4-BE49-F238E27FC236}">
-                <a16:creationId xmlns:a16="http://schemas.microsoft.com/office/drawing/2014/main" id="{DB588DD1-A168-4EE5-8D4C-6B1353FF34FC}"/>
+                <a16:creationId xmlns:a16="http://schemas.microsoft.com/office/drawing/2014/main" id="{F5965B62-F33A-4F42-B46E-00E77779F108}"/>
               </a:ext>
             </a:extLst>
           </p:cNvPr>
@@ -5128,7 +6417,7 @@
           <p:cNvPr id="16" name="">
             <a:extLst xmlns:a="http://schemas.openxmlformats.org/drawingml/2006/main">
               <a:ext uri="{FF2B5EF4-FFF2-40B4-BE49-F238E27FC236}">
-                <a16:creationId xmlns:a16="http://schemas.microsoft.com/office/drawing/2014/main" id="{5303E676-0AFB-41FE-B615-27350E1136F2}"/>
+                <a16:creationId xmlns:a16="http://schemas.microsoft.com/office/drawing/2014/main" id="{3D8DAF83-1BC3-485F-B1D1-D189A2334314}"/>
               </a:ext>
             </a:extLst>
           </p:cNvPr>
@@ -5178,7 +6467,7 @@
           <p:cNvPr id="17" name="">
             <a:extLst xmlns:a="http://schemas.openxmlformats.org/drawingml/2006/main">
               <a:ext uri="{FF2B5EF4-FFF2-40B4-BE49-F238E27FC236}">
-                <a16:creationId xmlns:a16="http://schemas.microsoft.com/office/drawing/2014/main" id="{C82B18BC-6727-4C09-BBEF-07EAAD89CABB}"/>
+                <a16:creationId xmlns:a16="http://schemas.microsoft.com/office/drawing/2014/main" id="{FAD8DB4B-3097-489D-A437-BAFB04E45752}"/>
               </a:ext>
             </a:extLst>
           </p:cNvPr>
@@ -5228,7 +6517,7 @@
           <p:cNvPr id="18" name="">
             <a:extLst xmlns:a="http://schemas.openxmlformats.org/drawingml/2006/main">
               <a:ext uri="{FF2B5EF4-FFF2-40B4-BE49-F238E27FC236}">
-                <a16:creationId xmlns:a16="http://schemas.microsoft.com/office/drawing/2014/main" id="{A7DE68DA-FF37-44AB-92E2-FB905D7ACEB8}"/>
+                <a16:creationId xmlns:a16="http://schemas.microsoft.com/office/drawing/2014/main" id="{896C6D89-30AF-4243-A157-F30F210A6169}"/>
               </a:ext>
             </a:extLst>
           </p:cNvPr>
@@ -5269,7 +6558,7 @@
           <p:cNvPr id="19" name="">
             <a:extLst xmlns:a="http://schemas.openxmlformats.org/drawingml/2006/main">
               <a:ext uri="{FF2B5EF4-FFF2-40B4-BE49-F238E27FC236}">
-                <a16:creationId xmlns:a16="http://schemas.microsoft.com/office/drawing/2014/main" id="{DC55AF48-6104-479D-BD01-CB94E084F547}"/>
+                <a16:creationId xmlns:a16="http://schemas.microsoft.com/office/drawing/2014/main" id="{3926EC8E-E207-42F0-975D-EA9EAA204182}"/>
               </a:ext>
             </a:extLst>
           </p:cNvPr>
@@ -5309,7 +6598,7 @@
                   <a:srgbClr val="BF5AF2"/>
                 </a:solidFill>
               </a:rPr>
-              <a:t>AI-сервіс</a:t>
+              <a:t>Підбір</a:t>
             </a:r>
           </a:p>
         </p:txBody>
@@ -5319,7 +6608,7 @@
           <p:cNvPr id="20" name="">
             <a:extLst xmlns:a="http://schemas.openxmlformats.org/drawingml/2006/main">
               <a:ext uri="{FF2B5EF4-FFF2-40B4-BE49-F238E27FC236}">
-                <a16:creationId xmlns:a16="http://schemas.microsoft.com/office/drawing/2014/main" id="{4D310F06-2A88-4E00-B296-049F15B91739}"/>
+                <a16:creationId xmlns:a16="http://schemas.microsoft.com/office/drawing/2014/main" id="{88C4050E-6955-404C-B128-222BE3215835}"/>
               </a:ext>
             </a:extLst>
           </p:cNvPr>
@@ -5359,7 +6648,7 @@
                   <a:srgbClr val="A9B0C2"/>
                 </a:solidFill>
               </a:rPr>
-              <a:t>підбір фільмів</a:t>
+              <a:t>рекомендація фільмів</a:t>
             </a:r>
           </a:p>
         </p:txBody>
@@ -5369,7 +6658,7 @@
           <p:cNvPr id="21" name="">
             <a:extLst xmlns:a="http://schemas.openxmlformats.org/drawingml/2006/main">
               <a:ext uri="{FF2B5EF4-FFF2-40B4-BE49-F238E27FC236}">
-                <a16:creationId xmlns:a16="http://schemas.microsoft.com/office/drawing/2014/main" id="{DD57FAB5-CCC7-41A3-BC58-AD5670869CE5}"/>
+                <a16:creationId xmlns:a16="http://schemas.microsoft.com/office/drawing/2014/main" id="{719F6FD1-E3C6-40F4-AB15-C2C7711CB87C}"/>
               </a:ext>
             </a:extLst>
           </p:cNvPr>
@@ -5417,7 +6706,7 @@
     </p:spTree>
     <p:extLst>
       <p:ext uri="{BB962C8B-B14F-4D97-AF65-F5344CB8AC3E}">
-        <p14:creationId xmlns:p14="http://schemas.microsoft.com/office/powerpoint/2010/main" val="1137447870"/>
+        <p14:creationId xmlns:p14="http://schemas.microsoft.com/office/powerpoint/2010/main" val="210430014"/>
       </p:ext>
     </p:extLst>
   </p:cSld>
@@ -5445,10 +6734,10 @@
       </p:grpSpPr>
       <p:sp>
         <p:nvSpPr>
-          <p:cNvPr id="1" name="">
-            <a:extLst xmlns:a="http://schemas.openxmlformats.org/drawingml/2006/main">
-              <a:ext uri="{FF2B5EF4-FFF2-40B4-BE49-F238E27FC236}">
-                <a16:creationId xmlns:a16="http://schemas.microsoft.com/office/drawing/2014/main" id="{7C1E50A9-650F-4B72-B701-2E525AC3D18C}"/>
+          <p:cNvPr id="24" name="">
+            <a:extLst xmlns:a="http://schemas.openxmlformats.org/drawingml/2006/main">
+              <a:ext uri="{FF2B5EF4-FFF2-40B4-BE49-F238E27FC236}">
+                <a16:creationId xmlns:a16="http://schemas.microsoft.com/office/drawing/2014/main" id="{2E48A170-9802-4426-AA5D-9BA0DC2BE1BC}"/>
               </a:ext>
             </a:extLst>
           </p:cNvPr>
@@ -5476,7 +6765,7 @@
           <p:cNvPr id="2" name="">
             <a:extLst xmlns:a="http://schemas.openxmlformats.org/drawingml/2006/main">
               <a:ext uri="{FF2B5EF4-FFF2-40B4-BE49-F238E27FC236}">
-                <a16:creationId xmlns:a16="http://schemas.microsoft.com/office/drawing/2014/main" id="{8949BB08-E15E-450E-9875-85B94E3DEA2F}"/>
+                <a16:creationId xmlns:a16="http://schemas.microsoft.com/office/drawing/2014/main" id="{8AB86790-4493-4E34-AAA6-5EC6C088BC08}"/>
               </a:ext>
             </a:extLst>
           </p:cNvPr>
@@ -5504,7 +6793,7 @@
           <p:cNvPr id="3" name="">
             <a:extLst xmlns:a="http://schemas.openxmlformats.org/drawingml/2006/main">
               <a:ext uri="{FF2B5EF4-FFF2-40B4-BE49-F238E27FC236}">
-                <a16:creationId xmlns:a16="http://schemas.microsoft.com/office/drawing/2014/main" id="{A64FB9D4-59B9-4883-9DF8-70D88E07916D}"/>
+                <a16:creationId xmlns:a16="http://schemas.microsoft.com/office/drawing/2014/main" id="{9C5474A2-5ABF-4E9B-B77D-B046E8F5E429}"/>
               </a:ext>
             </a:extLst>
           </p:cNvPr>
@@ -5554,7 +6843,7 @@
           <p:cNvPr id="4" name="">
             <a:extLst xmlns:a="http://schemas.openxmlformats.org/drawingml/2006/main">
               <a:ext uri="{FF2B5EF4-FFF2-40B4-BE49-F238E27FC236}">
-                <a16:creationId xmlns:a16="http://schemas.microsoft.com/office/drawing/2014/main" id="{E15E2B7D-36DA-48B3-A726-6E9637D03100}"/>
+                <a16:creationId xmlns:a16="http://schemas.microsoft.com/office/drawing/2014/main" id="{6F00A0A3-389B-4EAF-848C-F232555DF805}"/>
               </a:ext>
             </a:extLst>
           </p:cNvPr>
@@ -5594,7 +6883,7 @@
                   <a:srgbClr val="F7F8FF"/>
                 </a:solidFill>
               </a:rPr>
-              <a:t>PostgreSQL зберігає каталог і поведінку користувача</a:t>
+              <a:t>Як підключалась база даних</a:t>
             </a:r>
           </a:p>
         </p:txBody>
@@ -5604,7 +6893,7 @@
           <p:cNvPr id="5" name="">
             <a:extLst xmlns:a="http://schemas.openxmlformats.org/drawingml/2006/main">
               <a:ext uri="{FF2B5EF4-FFF2-40B4-BE49-F238E27FC236}">
-                <a16:creationId xmlns:a16="http://schemas.microsoft.com/office/drawing/2014/main" id="{F29A328F-CE1D-41E0-A619-CDBAE9829C1B}"/>
+                <a16:creationId xmlns:a16="http://schemas.microsoft.com/office/drawing/2014/main" id="{968823B6-6845-4F1E-8F08-80B9F4081779}"/>
               </a:ext>
             </a:extLst>
           </p:cNvPr>
@@ -5644,61 +6933,37 @@
                   <a:srgbClr val="A9B0C2"/>
                 </a:solidFill>
               </a:rPr>
-              <a:t>База даних розділена на сутності фільмів, жанрів, акторів і користувацьких дій.</a:t>
-            </a:r>
-          </a:p>
-        </p:txBody>
-      </p:sp>
-      <p:pic>
-        <p:nvPicPr>
-          <p:cNvPr id="24" name=""/>
-          <p:cNvPicPr>
-            <a:picLocks xmlns:a="http://schemas.openxmlformats.org/drawingml/2006/main" noChangeAspect="1"/>
-          </p:cNvPicPr>
-          <p:nvPr/>
-        </p:nvPicPr>
-        <p:blipFill>
-          <a:blip xmlns:r="http://schemas.openxmlformats.org/officeDocument/2006/relationships" xmlns:a="http://schemas.openxmlformats.org/drawingml/2006/main" r:embed="R3594e646012e4c0b"/>
-          <a:stretch xmlns:a="http://schemas.openxmlformats.org/drawingml/2006/main"/>
-        </p:blipFill>
-        <p:spPr>
-          <a:xfrm xmlns:a="http://schemas.openxmlformats.org/drawingml/2006/main">
-            <a:off x="685800" y="2469356"/>
-            <a:ext cx="5143500" cy="3214688"/>
+              <a:t>PostgreSQL запускається окремим контейнером, а FastAPI підключається до нього через змінну DATABASE_URL.</a:t>
+            </a:r>
+          </a:p>
+        </p:txBody>
+      </p:sp>
+      <p:sp>
+        <p:nvSpPr>
+          <p:cNvPr id="6" name="">
+            <a:extLst xmlns:a="http://schemas.openxmlformats.org/drawingml/2006/main">
+              <a:ext uri="{FF2B5EF4-FFF2-40B4-BE49-F238E27FC236}">
+                <a16:creationId xmlns:a16="http://schemas.microsoft.com/office/drawing/2014/main" id="{BE8F8710-FC23-479D-9DF2-CBB110E8C482}"/>
+              </a:ext>
+            </a:extLst>
+          </p:cNvPr>
+          <p:cNvSpPr>
+            <a:spLocks xmlns:a="http://schemas.openxmlformats.org/drawingml/2006/main" noGrp="1"/>
+          </p:cNvSpPr>
+          <p:nvPr/>
+        </p:nvSpPr>
+        <p:spPr>
+          <a:xfrm xmlns:a="http://schemas.openxmlformats.org/drawingml/2006/main">
+            <a:off x="819150" y="2381250"/>
+            <a:ext cx="838200" cy="552450"/>
           </a:xfrm>
           <a:prstGeom xmlns:a="http://schemas.openxmlformats.org/drawingml/2006/main" prst="roundRect">
             <a:avLst>
-              <a:gd name="adj" fmla="val 3158"/>
+              <a:gd name="adj" fmla="val 20690"/>
             </a:avLst>
           </a:prstGeom>
-        </p:spPr>
-      </p:pic>
-      <p:sp>
-        <p:nvSpPr>
-          <p:cNvPr id="7" name="">
-            <a:extLst xmlns:a="http://schemas.openxmlformats.org/drawingml/2006/main">
-              <a:ext uri="{FF2B5EF4-FFF2-40B4-BE49-F238E27FC236}">
-                <a16:creationId xmlns:a16="http://schemas.microsoft.com/office/drawing/2014/main" id="{4BF2ED70-524D-42D7-B5B5-7913574012A3}"/>
-              </a:ext>
-            </a:extLst>
-          </p:cNvPr>
-          <p:cNvSpPr>
-            <a:spLocks xmlns:a="http://schemas.openxmlformats.org/drawingml/2006/main" noGrp="1"/>
-          </p:cNvSpPr>
-          <p:nvPr/>
-        </p:nvSpPr>
-        <p:spPr>
-          <a:xfrm xmlns:a="http://schemas.openxmlformats.org/drawingml/2006/main">
-            <a:off x="6286500" y="2362200"/>
-            <a:ext cx="323850" cy="323850"/>
-          </a:xfrm>
-          <a:prstGeom xmlns:a="http://schemas.openxmlformats.org/drawingml/2006/main" prst="roundRect">
-            <a:avLst>
-              <a:gd name="adj" fmla="val 35294"/>
-            </a:avLst>
-          </a:prstGeom>
           <a:solidFill xmlns:a="http://schemas.openxmlformats.org/drawingml/2006/main">
-            <a:srgbClr val="0B1822"/>
+            <a:srgbClr val="07131F"/>
           </a:solidFill>
           <a:ln xmlns:a="http://schemas.openxmlformats.org/drawingml/2006/main" w="9525">
             <a:solidFill>
@@ -5716,50 +6981,100 @@
       </p:sp>
       <p:sp>
         <p:nvSpPr>
+          <p:cNvPr id="7" name="">
+            <a:extLst xmlns:a="http://schemas.openxmlformats.org/drawingml/2006/main">
+              <a:ext uri="{FF2B5EF4-FFF2-40B4-BE49-F238E27FC236}">
+                <a16:creationId xmlns:a16="http://schemas.microsoft.com/office/drawing/2014/main" id="{F428A3E9-ADBD-4B06-8132-D4E5D14765E2}"/>
+              </a:ext>
+            </a:extLst>
+          </p:cNvPr>
+          <p:cNvSpPr>
+            <a:spLocks xmlns:a="http://schemas.openxmlformats.org/drawingml/2006/main" noGrp="1"/>
+          </p:cNvSpPr>
+          <p:nvPr/>
+        </p:nvSpPr>
+        <p:spPr>
+          <a:xfrm xmlns:a="http://schemas.openxmlformats.org/drawingml/2006/main">
+            <a:off x="819150" y="2524125"/>
+            <a:ext cx="838200" cy="247650"/>
+          </a:xfrm>
+          <a:prstGeom xmlns:a="http://schemas.openxmlformats.org/drawingml/2006/main" prst="rect">
+            <a:avLst/>
+          </a:prstGeom>
+          <a:noFill xmlns:a="http://schemas.openxmlformats.org/drawingml/2006/main"/>
+          <a:ln xmlns:a="http://schemas.openxmlformats.org/drawingml/2006/main" w="0">
+            <a:noFill/>
+            <a:prstDash val="solid"/>
+          </a:ln>
+        </p:spPr>
+        <p:txBody>
+          <a:bodyPr xmlns:a="http://schemas.openxmlformats.org/drawingml/2006/main"/>
+          <a:lstStyle xmlns:a="http://schemas.openxmlformats.org/drawingml/2006/main"/>
+          <a:p xmlns:a="http://schemas.openxmlformats.org/drawingml/2006/main">
+            <a:pPr algn="ctr">
+              <a:defRPr sz="1950" b="1">
+                <a:solidFill>
+                  <a:srgbClr val="66D4CF"/>
+                </a:solidFill>
+              </a:defRPr>
+            </a:pPr>
+            <a:r>
+              <a:rPr sz="1950" b="1">
+                <a:solidFill>
+                  <a:srgbClr val="66D4CF"/>
+                </a:solidFill>
+              </a:rPr>
+              <a:t>1</a:t>
+            </a:r>
+          </a:p>
+        </p:txBody>
+      </p:sp>
+      <p:sp>
+        <p:nvSpPr>
           <p:cNvPr id="8" name="">
             <a:extLst xmlns:a="http://schemas.openxmlformats.org/drawingml/2006/main">
               <a:ext uri="{FF2B5EF4-FFF2-40B4-BE49-F238E27FC236}">
-                <a16:creationId xmlns:a16="http://schemas.microsoft.com/office/drawing/2014/main" id="{5B7C9B66-D851-4DEA-807D-E65CA10D7998}"/>
-              </a:ext>
-            </a:extLst>
-          </p:cNvPr>
-          <p:cNvSpPr>
-            <a:spLocks xmlns:a="http://schemas.openxmlformats.org/drawingml/2006/main" noGrp="1"/>
-          </p:cNvSpPr>
-          <p:nvPr/>
-        </p:nvSpPr>
-        <p:spPr>
-          <a:xfrm xmlns:a="http://schemas.openxmlformats.org/drawingml/2006/main">
-            <a:off x="6286500" y="2428875"/>
-            <a:ext cx="323850" cy="171450"/>
-          </a:xfrm>
-          <a:prstGeom xmlns:a="http://schemas.openxmlformats.org/drawingml/2006/main" prst="rect">
-            <a:avLst/>
-          </a:prstGeom>
-          <a:noFill xmlns:a="http://schemas.openxmlformats.org/drawingml/2006/main"/>
-          <a:ln xmlns:a="http://schemas.openxmlformats.org/drawingml/2006/main" w="0">
-            <a:noFill/>
-            <a:prstDash val="solid"/>
-          </a:ln>
-        </p:spPr>
-        <p:txBody>
-          <a:bodyPr xmlns:a="http://schemas.openxmlformats.org/drawingml/2006/main"/>
-          <a:lstStyle xmlns:a="http://schemas.openxmlformats.org/drawingml/2006/main"/>
-          <a:p xmlns:a="http://schemas.openxmlformats.org/drawingml/2006/main">
-            <a:pPr algn="ctr">
-              <a:defRPr sz="1050" b="1">
-                <a:solidFill>
-                  <a:srgbClr val="66D4CF"/>
-                </a:solidFill>
-              </a:defRPr>
-            </a:pPr>
-            <a:r>
-              <a:rPr sz="1050" b="1">
-                <a:solidFill>
-                  <a:srgbClr val="66D4CF"/>
-                </a:solidFill>
-              </a:rPr>
-              <a:t>1</a:t>
+                <a16:creationId xmlns:a16="http://schemas.microsoft.com/office/drawing/2014/main" id="{1F4425C6-0703-441F-87C0-9936638D9392}"/>
+              </a:ext>
+            </a:extLst>
+          </p:cNvPr>
+          <p:cNvSpPr>
+            <a:spLocks xmlns:a="http://schemas.openxmlformats.org/drawingml/2006/main" noGrp="1"/>
+          </p:cNvSpPr>
+          <p:nvPr/>
+        </p:nvSpPr>
+        <p:spPr>
+          <a:xfrm xmlns:a="http://schemas.openxmlformats.org/drawingml/2006/main">
+            <a:off x="1924050" y="2400300"/>
+            <a:ext cx="2381250" cy="266700"/>
+          </a:xfrm>
+          <a:prstGeom xmlns:a="http://schemas.openxmlformats.org/drawingml/2006/main" prst="rect">
+            <a:avLst/>
+          </a:prstGeom>
+          <a:noFill xmlns:a="http://schemas.openxmlformats.org/drawingml/2006/main"/>
+          <a:ln xmlns:a="http://schemas.openxmlformats.org/drawingml/2006/main" w="0">
+            <a:noFill/>
+            <a:prstDash val="solid"/>
+          </a:ln>
+        </p:spPr>
+        <p:txBody>
+          <a:bodyPr xmlns:a="http://schemas.openxmlformats.org/drawingml/2006/main"/>
+          <a:lstStyle xmlns:a="http://schemas.openxmlformats.org/drawingml/2006/main"/>
+          <a:p xmlns:a="http://schemas.openxmlformats.org/drawingml/2006/main">
+            <a:pPr algn="l">
+              <a:defRPr sz="1650" b="1">
+                <a:solidFill>
+                  <a:srgbClr val="F7F8FF"/>
+                </a:solidFill>
+              </a:defRPr>
+            </a:pPr>
+            <a:r>
+              <a:rPr sz="1650" b="1">
+                <a:solidFill>
+                  <a:srgbClr val="F7F8FF"/>
+                </a:solidFill>
+              </a:rPr>
+              <a:t>docker-compose.yml</a:t>
             </a:r>
           </a:p>
         </p:txBody>
@@ -5769,19 +7084,19 @@
           <p:cNvPr id="9" name="">
             <a:extLst xmlns:a="http://schemas.openxmlformats.org/drawingml/2006/main">
               <a:ext uri="{FF2B5EF4-FFF2-40B4-BE49-F238E27FC236}">
-                <a16:creationId xmlns:a16="http://schemas.microsoft.com/office/drawing/2014/main" id="{F0F86595-0C77-4705-B9F8-A23A503482E6}"/>
-              </a:ext>
-            </a:extLst>
-          </p:cNvPr>
-          <p:cNvSpPr>
-            <a:spLocks xmlns:a="http://schemas.openxmlformats.org/drawingml/2006/main" noGrp="1"/>
-          </p:cNvSpPr>
-          <p:nvPr/>
-        </p:nvSpPr>
-        <p:spPr>
-          <a:xfrm xmlns:a="http://schemas.openxmlformats.org/drawingml/2006/main">
-            <a:off x="6743700" y="2381250"/>
-            <a:ext cx="4305300" cy="419100"/>
+                <a16:creationId xmlns:a16="http://schemas.microsoft.com/office/drawing/2014/main" id="{7867775D-E8E3-4F92-802D-0DBB20597C2E}"/>
+              </a:ext>
+            </a:extLst>
+          </p:cNvPr>
+          <p:cNvSpPr>
+            <a:spLocks xmlns:a="http://schemas.openxmlformats.org/drawingml/2006/main" noGrp="1"/>
+          </p:cNvSpPr>
+          <p:nvPr/>
+        </p:nvSpPr>
+        <p:spPr>
+          <a:xfrm xmlns:a="http://schemas.openxmlformats.org/drawingml/2006/main">
+            <a:off x="1924050" y="2705100"/>
+            <a:ext cx="8191500" cy="323850"/>
           </a:xfrm>
           <a:prstGeom xmlns:a="http://schemas.openxmlformats.org/drawingml/2006/main" prst="rect">
             <a:avLst/>
@@ -5797,19 +7112,19 @@
           <a:lstStyle xmlns:a="http://schemas.openxmlformats.org/drawingml/2006/main"/>
           <a:p xmlns:a="http://schemas.openxmlformats.org/drawingml/2006/main">
             <a:pPr algn="l">
-              <a:defRPr sz="1350" b="0">
-                <a:solidFill>
-                  <a:srgbClr val="F7F8FF"/>
-                </a:solidFill>
-              </a:defRPr>
-            </a:pPr>
-            <a:r>
-              <a:rPr sz="1350" b="0">
-                <a:solidFill>
-                  <a:srgbClr val="F7F8FF"/>
-                </a:solidFill>
-              </a:rPr>
-              <a:t>Основні таблиці: users, movies, movie_genres, movie_actors.</a:t>
+              <a:defRPr sz="1275" b="0">
+                <a:solidFill>
+                  <a:srgbClr val="A9B0C2"/>
+                </a:solidFill>
+              </a:defRPr>
+            </a:pPr>
+            <a:r>
+              <a:rPr sz="1275" b="0">
+                <a:solidFill>
+                  <a:srgbClr val="A9B0C2"/>
+                </a:solidFill>
+              </a:rPr>
+              <a:t>описує контейнер PostgreSQL 16, порт 5432, користувача cinemind і базу cinemind</a:t>
             </a:r>
           </a:p>
         </p:txBody>
@@ -5819,27 +7134,27 @@
           <p:cNvPr id="10" name="">
             <a:extLst xmlns:a="http://schemas.openxmlformats.org/drawingml/2006/main">
               <a:ext uri="{FF2B5EF4-FFF2-40B4-BE49-F238E27FC236}">
-                <a16:creationId xmlns:a16="http://schemas.microsoft.com/office/drawing/2014/main" id="{955577F1-58E9-498A-89FE-51E152BE5980}"/>
-              </a:ext>
-            </a:extLst>
-          </p:cNvPr>
-          <p:cNvSpPr>
-            <a:spLocks xmlns:a="http://schemas.openxmlformats.org/drawingml/2006/main" noGrp="1"/>
-          </p:cNvSpPr>
-          <p:nvPr/>
-        </p:nvSpPr>
-        <p:spPr>
-          <a:xfrm xmlns:a="http://schemas.openxmlformats.org/drawingml/2006/main">
-            <a:off x="6286500" y="3009900"/>
-            <a:ext cx="323850" cy="323850"/>
+                <a16:creationId xmlns:a16="http://schemas.microsoft.com/office/drawing/2014/main" id="{9C7AB8E7-3753-450B-B604-B4DDD9342499}"/>
+              </a:ext>
+            </a:extLst>
+          </p:cNvPr>
+          <p:cNvSpPr>
+            <a:spLocks xmlns:a="http://schemas.openxmlformats.org/drawingml/2006/main" noGrp="1"/>
+          </p:cNvSpPr>
+          <p:nvPr/>
+        </p:nvSpPr>
+        <p:spPr>
+          <a:xfrm xmlns:a="http://schemas.openxmlformats.org/drawingml/2006/main">
+            <a:off x="819150" y="3200400"/>
+            <a:ext cx="838200" cy="552450"/>
           </a:xfrm>
           <a:prstGeom xmlns:a="http://schemas.openxmlformats.org/drawingml/2006/main" prst="roundRect">
             <a:avLst>
-              <a:gd name="adj" fmla="val 35294"/>
+              <a:gd name="adj" fmla="val 20690"/>
             </a:avLst>
           </a:prstGeom>
           <a:solidFill xmlns:a="http://schemas.openxmlformats.org/drawingml/2006/main">
-            <a:srgbClr val="0B1822"/>
+            <a:srgbClr val="07131F"/>
           </a:solidFill>
           <a:ln xmlns:a="http://schemas.openxmlformats.org/drawingml/2006/main" w="9525">
             <a:solidFill>
@@ -5860,19 +7175,19 @@
           <p:cNvPr id="11" name="">
             <a:extLst xmlns:a="http://schemas.openxmlformats.org/drawingml/2006/main">
               <a:ext uri="{FF2B5EF4-FFF2-40B4-BE49-F238E27FC236}">
-                <a16:creationId xmlns:a16="http://schemas.microsoft.com/office/drawing/2014/main" id="{A49925A9-1BFB-4AA8-BC1A-0173D7162E88}"/>
-              </a:ext>
-            </a:extLst>
-          </p:cNvPr>
-          <p:cNvSpPr>
-            <a:spLocks xmlns:a="http://schemas.openxmlformats.org/drawingml/2006/main" noGrp="1"/>
-          </p:cNvSpPr>
-          <p:nvPr/>
-        </p:nvSpPr>
-        <p:spPr>
-          <a:xfrm xmlns:a="http://schemas.openxmlformats.org/drawingml/2006/main">
-            <a:off x="6286500" y="3076575"/>
-            <a:ext cx="323850" cy="171450"/>
+                <a16:creationId xmlns:a16="http://schemas.microsoft.com/office/drawing/2014/main" id="{EA536BD6-469C-43F5-AB74-8C2C0D08E79B}"/>
+              </a:ext>
+            </a:extLst>
+          </p:cNvPr>
+          <p:cNvSpPr>
+            <a:spLocks xmlns:a="http://schemas.openxmlformats.org/drawingml/2006/main" noGrp="1"/>
+          </p:cNvSpPr>
+          <p:nvPr/>
+        </p:nvSpPr>
+        <p:spPr>
+          <a:xfrm xmlns:a="http://schemas.openxmlformats.org/drawingml/2006/main">
+            <a:off x="819150" y="3343275"/>
+            <a:ext cx="838200" cy="247650"/>
           </a:xfrm>
           <a:prstGeom xmlns:a="http://schemas.openxmlformats.org/drawingml/2006/main" prst="rect">
             <a:avLst/>
@@ -5888,14 +7203,14 @@
           <a:lstStyle xmlns:a="http://schemas.openxmlformats.org/drawingml/2006/main"/>
           <a:p xmlns:a="http://schemas.openxmlformats.org/drawingml/2006/main">
             <a:pPr algn="ctr">
-              <a:defRPr sz="1050" b="1">
+              <a:defRPr sz="1950" b="1">
                 <a:solidFill>
                   <a:srgbClr val="66D4CF"/>
                 </a:solidFill>
               </a:defRPr>
             </a:pPr>
             <a:r>
-              <a:rPr sz="1050" b="1">
+              <a:rPr sz="1950" b="1">
                 <a:solidFill>
                   <a:srgbClr val="66D4CF"/>
                 </a:solidFill>
@@ -5910,19 +7225,19 @@
           <p:cNvPr id="12" name="">
             <a:extLst xmlns:a="http://schemas.openxmlformats.org/drawingml/2006/main">
               <a:ext uri="{FF2B5EF4-FFF2-40B4-BE49-F238E27FC236}">
-                <a16:creationId xmlns:a16="http://schemas.microsoft.com/office/drawing/2014/main" id="{0E54FC53-1861-4F25-9EC5-C1143539EF43}"/>
-              </a:ext>
-            </a:extLst>
-          </p:cNvPr>
-          <p:cNvSpPr>
-            <a:spLocks xmlns:a="http://schemas.openxmlformats.org/drawingml/2006/main" noGrp="1"/>
-          </p:cNvSpPr>
-          <p:nvPr/>
-        </p:nvSpPr>
-        <p:spPr>
-          <a:xfrm xmlns:a="http://schemas.openxmlformats.org/drawingml/2006/main">
-            <a:off x="6743700" y="3028950"/>
-            <a:ext cx="4305300" cy="419100"/>
+                <a16:creationId xmlns:a16="http://schemas.microsoft.com/office/drawing/2014/main" id="{F7B180DA-F094-4AB6-AE0A-696650A26278}"/>
+              </a:ext>
+            </a:extLst>
+          </p:cNvPr>
+          <p:cNvSpPr>
+            <a:spLocks xmlns:a="http://schemas.openxmlformats.org/drawingml/2006/main" noGrp="1"/>
+          </p:cNvSpPr>
+          <p:nvPr/>
+        </p:nvSpPr>
+        <p:spPr>
+          <a:xfrm xmlns:a="http://schemas.openxmlformats.org/drawingml/2006/main">
+            <a:off x="1924050" y="3219450"/>
+            <a:ext cx="2381250" cy="266700"/>
           </a:xfrm>
           <a:prstGeom xmlns:a="http://schemas.openxmlformats.org/drawingml/2006/main" prst="rect">
             <a:avLst/>
@@ -5938,19 +7253,19 @@
           <a:lstStyle xmlns:a="http://schemas.openxmlformats.org/drawingml/2006/main"/>
           <a:p xmlns:a="http://schemas.openxmlformats.org/drawingml/2006/main">
             <a:pPr algn="l">
-              <a:defRPr sz="1350" b="0">
+              <a:defRPr sz="1650" b="1">
                 <a:solidFill>
                   <a:srgbClr val="F7F8FF"/>
                 </a:solidFill>
               </a:defRPr>
             </a:pPr>
             <a:r>
-              <a:rPr sz="1350" b="0">
+              <a:rPr sz="1650" b="1">
                 <a:solidFill>
                   <a:srgbClr val="F7F8FF"/>
                 </a:solidFill>
               </a:rPr>
-              <a:t>Дії користувача: favorites, watch_later, watched_movies, user_ratings.</a:t>
+              <a:t>schema.sql</a:t>
             </a:r>
           </a:p>
         </p:txBody>
@@ -5960,27 +7275,77 @@
           <p:cNvPr id="13" name="">
             <a:extLst xmlns:a="http://schemas.openxmlformats.org/drawingml/2006/main">
               <a:ext uri="{FF2B5EF4-FFF2-40B4-BE49-F238E27FC236}">
-                <a16:creationId xmlns:a16="http://schemas.microsoft.com/office/drawing/2014/main" id="{62F40922-7C83-4B2F-91B5-6BD7332C3D0F}"/>
-              </a:ext>
-            </a:extLst>
-          </p:cNvPr>
-          <p:cNvSpPr>
-            <a:spLocks xmlns:a="http://schemas.openxmlformats.org/drawingml/2006/main" noGrp="1"/>
-          </p:cNvSpPr>
-          <p:nvPr/>
-        </p:nvSpPr>
-        <p:spPr>
-          <a:xfrm xmlns:a="http://schemas.openxmlformats.org/drawingml/2006/main">
-            <a:off x="6286500" y="3657600"/>
-            <a:ext cx="323850" cy="323850"/>
+                <a16:creationId xmlns:a16="http://schemas.microsoft.com/office/drawing/2014/main" id="{C9CFEB19-717B-4544-973F-C415DDB8F3AF}"/>
+              </a:ext>
+            </a:extLst>
+          </p:cNvPr>
+          <p:cNvSpPr>
+            <a:spLocks xmlns:a="http://schemas.openxmlformats.org/drawingml/2006/main" noGrp="1"/>
+          </p:cNvSpPr>
+          <p:nvPr/>
+        </p:nvSpPr>
+        <p:spPr>
+          <a:xfrm xmlns:a="http://schemas.openxmlformats.org/drawingml/2006/main">
+            <a:off x="1924050" y="3524250"/>
+            <a:ext cx="8191500" cy="323850"/>
+          </a:xfrm>
+          <a:prstGeom xmlns:a="http://schemas.openxmlformats.org/drawingml/2006/main" prst="rect">
+            <a:avLst/>
+          </a:prstGeom>
+          <a:noFill xmlns:a="http://schemas.openxmlformats.org/drawingml/2006/main"/>
+          <a:ln xmlns:a="http://schemas.openxmlformats.org/drawingml/2006/main" w="0">
+            <a:noFill/>
+            <a:prstDash val="solid"/>
+          </a:ln>
+        </p:spPr>
+        <p:txBody>
+          <a:bodyPr xmlns:a="http://schemas.openxmlformats.org/drawingml/2006/main"/>
+          <a:lstStyle xmlns:a="http://schemas.openxmlformats.org/drawingml/2006/main"/>
+          <a:p xmlns:a="http://schemas.openxmlformats.org/drawingml/2006/main">
+            <a:pPr algn="l">
+              <a:defRPr sz="1275" b="0">
+                <a:solidFill>
+                  <a:srgbClr val="A9B0C2"/>
+                </a:solidFill>
+              </a:defRPr>
+            </a:pPr>
+            <a:r>
+              <a:rPr sz="1275" b="0">
+                <a:solidFill>
+                  <a:srgbClr val="A9B0C2"/>
+                </a:solidFill>
+              </a:rPr>
+              <a:t>створює таблиці users, movies, user_ratings, movie_comments та початковий каталог фільмів</a:t>
+            </a:r>
+          </a:p>
+        </p:txBody>
+      </p:sp>
+      <p:sp>
+        <p:nvSpPr>
+          <p:cNvPr id="14" name="">
+            <a:extLst xmlns:a="http://schemas.openxmlformats.org/drawingml/2006/main">
+              <a:ext uri="{FF2B5EF4-FFF2-40B4-BE49-F238E27FC236}">
+                <a16:creationId xmlns:a16="http://schemas.microsoft.com/office/drawing/2014/main" id="{EC1B50C8-9E50-447E-9370-D02AC9DB8B14}"/>
+              </a:ext>
+            </a:extLst>
+          </p:cNvPr>
+          <p:cNvSpPr>
+            <a:spLocks xmlns:a="http://schemas.openxmlformats.org/drawingml/2006/main" noGrp="1"/>
+          </p:cNvSpPr>
+          <p:nvPr/>
+        </p:nvSpPr>
+        <p:spPr>
+          <a:xfrm xmlns:a="http://schemas.openxmlformats.org/drawingml/2006/main">
+            <a:off x="819150" y="4019550"/>
+            <a:ext cx="838200" cy="552450"/>
           </a:xfrm>
           <a:prstGeom xmlns:a="http://schemas.openxmlformats.org/drawingml/2006/main" prst="roundRect">
             <a:avLst>
-              <a:gd name="adj" fmla="val 35294"/>
+              <a:gd name="adj" fmla="val 20690"/>
             </a:avLst>
           </a:prstGeom>
           <a:solidFill xmlns:a="http://schemas.openxmlformats.org/drawingml/2006/main">
-            <a:srgbClr val="0B1822"/>
+            <a:srgbClr val="07131F"/>
           </a:solidFill>
           <a:ln xmlns:a="http://schemas.openxmlformats.org/drawingml/2006/main" w="9525">
             <a:solidFill>
@@ -5998,22 +7363,22 @@
       </p:sp>
       <p:sp>
         <p:nvSpPr>
-          <p:cNvPr id="14" name="">
-            <a:extLst xmlns:a="http://schemas.openxmlformats.org/drawingml/2006/main">
-              <a:ext uri="{FF2B5EF4-FFF2-40B4-BE49-F238E27FC236}">
-                <a16:creationId xmlns:a16="http://schemas.microsoft.com/office/drawing/2014/main" id="{A3714C8F-49EE-4A1E-A8CD-F7B238DD65DE}"/>
-              </a:ext>
-            </a:extLst>
-          </p:cNvPr>
-          <p:cNvSpPr>
-            <a:spLocks xmlns:a="http://schemas.openxmlformats.org/drawingml/2006/main" noGrp="1"/>
-          </p:cNvSpPr>
-          <p:nvPr/>
-        </p:nvSpPr>
-        <p:spPr>
-          <a:xfrm xmlns:a="http://schemas.openxmlformats.org/drawingml/2006/main">
-            <a:off x="6286500" y="3724275"/>
-            <a:ext cx="323850" cy="171450"/>
+          <p:cNvPr id="15" name="">
+            <a:extLst xmlns:a="http://schemas.openxmlformats.org/drawingml/2006/main">
+              <a:ext uri="{FF2B5EF4-FFF2-40B4-BE49-F238E27FC236}">
+                <a16:creationId xmlns:a16="http://schemas.microsoft.com/office/drawing/2014/main" id="{955284A6-05D2-4E12-90D2-9DC1DD61F3AF}"/>
+              </a:ext>
+            </a:extLst>
+          </p:cNvPr>
+          <p:cNvSpPr>
+            <a:spLocks xmlns:a="http://schemas.openxmlformats.org/drawingml/2006/main" noGrp="1"/>
+          </p:cNvSpPr>
+          <p:nvPr/>
+        </p:nvSpPr>
+        <p:spPr>
+          <a:xfrm xmlns:a="http://schemas.openxmlformats.org/drawingml/2006/main">
+            <a:off x="819150" y="4162425"/>
+            <a:ext cx="838200" cy="247650"/>
           </a:xfrm>
           <a:prstGeom xmlns:a="http://schemas.openxmlformats.org/drawingml/2006/main" prst="rect">
             <a:avLst/>
@@ -6029,14 +7394,14 @@
           <a:lstStyle xmlns:a="http://schemas.openxmlformats.org/drawingml/2006/main"/>
           <a:p xmlns:a="http://schemas.openxmlformats.org/drawingml/2006/main">
             <a:pPr algn="ctr">
-              <a:defRPr sz="1050" b="1">
+              <a:defRPr sz="1950" b="1">
                 <a:solidFill>
                   <a:srgbClr val="66D4CF"/>
                 </a:solidFill>
               </a:defRPr>
             </a:pPr>
             <a:r>
-              <a:rPr sz="1050" b="1">
+              <a:rPr sz="1950" b="1">
                 <a:solidFill>
                   <a:srgbClr val="66D4CF"/>
                 </a:solidFill>
@@ -6048,22 +7413,22 @@
       </p:sp>
       <p:sp>
         <p:nvSpPr>
-          <p:cNvPr id="15" name="">
-            <a:extLst xmlns:a="http://schemas.openxmlformats.org/drawingml/2006/main">
-              <a:ext uri="{FF2B5EF4-FFF2-40B4-BE49-F238E27FC236}">
-                <a16:creationId xmlns:a16="http://schemas.microsoft.com/office/drawing/2014/main" id="{91E3821A-6969-4A10-AC43-EF7F0CCEE39E}"/>
-              </a:ext>
-            </a:extLst>
-          </p:cNvPr>
-          <p:cNvSpPr>
-            <a:spLocks xmlns:a="http://schemas.openxmlformats.org/drawingml/2006/main" noGrp="1"/>
-          </p:cNvSpPr>
-          <p:nvPr/>
-        </p:nvSpPr>
-        <p:spPr>
-          <a:xfrm xmlns:a="http://schemas.openxmlformats.org/drawingml/2006/main">
-            <a:off x="6743700" y="3676650"/>
-            <a:ext cx="4305300" cy="419100"/>
+          <p:cNvPr id="16" name="">
+            <a:extLst xmlns:a="http://schemas.openxmlformats.org/drawingml/2006/main">
+              <a:ext uri="{FF2B5EF4-FFF2-40B4-BE49-F238E27FC236}">
+                <a16:creationId xmlns:a16="http://schemas.microsoft.com/office/drawing/2014/main" id="{83E7323F-26B9-4781-A5AF-B5AE3996E225}"/>
+              </a:ext>
+            </a:extLst>
+          </p:cNvPr>
+          <p:cNvSpPr>
+            <a:spLocks xmlns:a="http://schemas.openxmlformats.org/drawingml/2006/main" noGrp="1"/>
+          </p:cNvSpPr>
+          <p:nvPr/>
+        </p:nvSpPr>
+        <p:spPr>
+          <a:xfrm xmlns:a="http://schemas.openxmlformats.org/drawingml/2006/main">
+            <a:off x="1924050" y="4038600"/>
+            <a:ext cx="2381250" cy="266700"/>
           </a:xfrm>
           <a:prstGeom xmlns:a="http://schemas.openxmlformats.org/drawingml/2006/main" prst="rect">
             <a:avLst/>
@@ -6079,49 +7444,99 @@
           <a:lstStyle xmlns:a="http://schemas.openxmlformats.org/drawingml/2006/main"/>
           <a:p xmlns:a="http://schemas.openxmlformats.org/drawingml/2006/main">
             <a:pPr algn="l">
-              <a:defRPr sz="1350" b="0">
+              <a:defRPr sz="1650" b="1">
                 <a:solidFill>
                   <a:srgbClr val="F7F8FF"/>
                 </a:solidFill>
               </a:defRPr>
             </a:pPr>
             <a:r>
-              <a:rPr sz="1350" b="0">
+              <a:rPr sz="1650" b="1">
                 <a:solidFill>
                   <a:srgbClr val="F7F8FF"/>
                 </a:solidFill>
               </a:rPr>
-              <a:t>Додано movie_comments для збереження відгуків користувача до фільмів.</a:t>
-            </a:r>
-          </a:p>
-        </p:txBody>
-      </p:sp>
-      <p:sp>
-        <p:nvSpPr>
-          <p:cNvPr id="16" name="">
-            <a:extLst xmlns:a="http://schemas.openxmlformats.org/drawingml/2006/main">
-              <a:ext uri="{FF2B5EF4-FFF2-40B4-BE49-F238E27FC236}">
-                <a16:creationId xmlns:a16="http://schemas.microsoft.com/office/drawing/2014/main" id="{E87C2BA6-3EA0-4DF5-B65C-0D9A3266B355}"/>
-              </a:ext>
-            </a:extLst>
-          </p:cNvPr>
-          <p:cNvSpPr>
-            <a:spLocks xmlns:a="http://schemas.openxmlformats.org/drawingml/2006/main" noGrp="1"/>
-          </p:cNvSpPr>
-          <p:nvPr/>
-        </p:nvSpPr>
-        <p:spPr>
-          <a:xfrm xmlns:a="http://schemas.openxmlformats.org/drawingml/2006/main">
-            <a:off x="6286500" y="4305300"/>
-            <a:ext cx="323850" cy="323850"/>
+              <a:t>DATABASE_URL</a:t>
+            </a:r>
+          </a:p>
+        </p:txBody>
+      </p:sp>
+      <p:sp>
+        <p:nvSpPr>
+          <p:cNvPr id="17" name="">
+            <a:extLst xmlns:a="http://schemas.openxmlformats.org/drawingml/2006/main">
+              <a:ext uri="{FF2B5EF4-FFF2-40B4-BE49-F238E27FC236}">
+                <a16:creationId xmlns:a16="http://schemas.microsoft.com/office/drawing/2014/main" id="{B9BEC206-9B5E-4C69-99AD-0ED2BE11AA15}"/>
+              </a:ext>
+            </a:extLst>
+          </p:cNvPr>
+          <p:cNvSpPr>
+            <a:spLocks xmlns:a="http://schemas.openxmlformats.org/drawingml/2006/main" noGrp="1"/>
+          </p:cNvSpPr>
+          <p:nvPr/>
+        </p:nvSpPr>
+        <p:spPr>
+          <a:xfrm xmlns:a="http://schemas.openxmlformats.org/drawingml/2006/main">
+            <a:off x="1924050" y="4343400"/>
+            <a:ext cx="8191500" cy="323850"/>
+          </a:xfrm>
+          <a:prstGeom xmlns:a="http://schemas.openxmlformats.org/drawingml/2006/main" prst="rect">
+            <a:avLst/>
+          </a:prstGeom>
+          <a:noFill xmlns:a="http://schemas.openxmlformats.org/drawingml/2006/main"/>
+          <a:ln xmlns:a="http://schemas.openxmlformats.org/drawingml/2006/main" w="0">
+            <a:noFill/>
+            <a:prstDash val="solid"/>
+          </a:ln>
+        </p:spPr>
+        <p:txBody>
+          <a:bodyPr xmlns:a="http://schemas.openxmlformats.org/drawingml/2006/main"/>
+          <a:lstStyle xmlns:a="http://schemas.openxmlformats.org/drawingml/2006/main"/>
+          <a:p xmlns:a="http://schemas.openxmlformats.org/drawingml/2006/main">
+            <a:pPr algn="l">
+              <a:defRPr sz="1275" b="0">
+                <a:solidFill>
+                  <a:srgbClr val="A9B0C2"/>
+                </a:solidFill>
+              </a:defRPr>
+            </a:pPr>
+            <a:r>
+              <a:rPr sz="1275" b="0">
+                <a:solidFill>
+                  <a:srgbClr val="A9B0C2"/>
+                </a:solidFill>
+              </a:rPr>
+              <a:t>передається у FastAPI як рядок підключення до локальної PostgreSQL-бази</a:t>
+            </a:r>
+          </a:p>
+        </p:txBody>
+      </p:sp>
+      <p:sp>
+        <p:nvSpPr>
+          <p:cNvPr id="18" name="">
+            <a:extLst xmlns:a="http://schemas.openxmlformats.org/drawingml/2006/main">
+              <a:ext uri="{FF2B5EF4-FFF2-40B4-BE49-F238E27FC236}">
+                <a16:creationId xmlns:a16="http://schemas.microsoft.com/office/drawing/2014/main" id="{4AFB75CF-5C5A-44AA-B610-8EDF9DC4CE13}"/>
+              </a:ext>
+            </a:extLst>
+          </p:cNvPr>
+          <p:cNvSpPr>
+            <a:spLocks xmlns:a="http://schemas.openxmlformats.org/drawingml/2006/main" noGrp="1"/>
+          </p:cNvSpPr>
+          <p:nvPr/>
+        </p:nvSpPr>
+        <p:spPr>
+          <a:xfrm xmlns:a="http://schemas.openxmlformats.org/drawingml/2006/main">
+            <a:off x="819150" y="4838700"/>
+            <a:ext cx="838200" cy="552450"/>
           </a:xfrm>
           <a:prstGeom xmlns:a="http://schemas.openxmlformats.org/drawingml/2006/main" prst="roundRect">
             <a:avLst>
-              <a:gd name="adj" fmla="val 35294"/>
+              <a:gd name="adj" fmla="val 20690"/>
             </a:avLst>
           </a:prstGeom>
           <a:solidFill xmlns:a="http://schemas.openxmlformats.org/drawingml/2006/main">
-            <a:srgbClr val="0B1822"/>
+            <a:srgbClr val="07131F"/>
           </a:solidFill>
           <a:ln xmlns:a="http://schemas.openxmlformats.org/drawingml/2006/main" w="9525">
             <a:solidFill>
@@ -6139,22 +7554,22 @@
       </p:sp>
       <p:sp>
         <p:nvSpPr>
-          <p:cNvPr id="17" name="">
-            <a:extLst xmlns:a="http://schemas.openxmlformats.org/drawingml/2006/main">
-              <a:ext uri="{FF2B5EF4-FFF2-40B4-BE49-F238E27FC236}">
-                <a16:creationId xmlns:a16="http://schemas.microsoft.com/office/drawing/2014/main" id="{D596DE39-DEB4-4459-A503-528D52001125}"/>
-              </a:ext>
-            </a:extLst>
-          </p:cNvPr>
-          <p:cNvSpPr>
-            <a:spLocks xmlns:a="http://schemas.openxmlformats.org/drawingml/2006/main" noGrp="1"/>
-          </p:cNvSpPr>
-          <p:nvPr/>
-        </p:nvSpPr>
-        <p:spPr>
-          <a:xfrm xmlns:a="http://schemas.openxmlformats.org/drawingml/2006/main">
-            <a:off x="6286500" y="4371975"/>
-            <a:ext cx="323850" cy="171450"/>
+          <p:cNvPr id="19" name="">
+            <a:extLst xmlns:a="http://schemas.openxmlformats.org/drawingml/2006/main">
+              <a:ext uri="{FF2B5EF4-FFF2-40B4-BE49-F238E27FC236}">
+                <a16:creationId xmlns:a16="http://schemas.microsoft.com/office/drawing/2014/main" id="{F5FE95F6-6708-47EB-878F-055F02C0CA17}"/>
+              </a:ext>
+            </a:extLst>
+          </p:cNvPr>
+          <p:cNvSpPr>
+            <a:spLocks xmlns:a="http://schemas.openxmlformats.org/drawingml/2006/main" noGrp="1"/>
+          </p:cNvSpPr>
+          <p:nvPr/>
+        </p:nvSpPr>
+        <p:spPr>
+          <a:xfrm xmlns:a="http://schemas.openxmlformats.org/drawingml/2006/main">
+            <a:off x="819150" y="4981575"/>
+            <a:ext cx="838200" cy="247650"/>
           </a:xfrm>
           <a:prstGeom xmlns:a="http://schemas.openxmlformats.org/drawingml/2006/main" prst="rect">
             <a:avLst/>
@@ -6170,14 +7585,14 @@
           <a:lstStyle xmlns:a="http://schemas.openxmlformats.org/drawingml/2006/main"/>
           <a:p xmlns:a="http://schemas.openxmlformats.org/drawingml/2006/main">
             <a:pPr algn="ctr">
-              <a:defRPr sz="1050" b="1">
+              <a:defRPr sz="1950" b="1">
                 <a:solidFill>
                   <a:srgbClr val="66D4CF"/>
                 </a:solidFill>
               </a:defRPr>
             </a:pPr>
             <a:r>
-              <a:rPr sz="1050" b="1">
+              <a:rPr sz="1950" b="1">
                 <a:solidFill>
                   <a:srgbClr val="66D4CF"/>
                 </a:solidFill>
@@ -6189,22 +7604,22 @@
       </p:sp>
       <p:sp>
         <p:nvSpPr>
-          <p:cNvPr id="18" name="">
-            <a:extLst xmlns:a="http://schemas.openxmlformats.org/drawingml/2006/main">
-              <a:ext uri="{FF2B5EF4-FFF2-40B4-BE49-F238E27FC236}">
-                <a16:creationId xmlns:a16="http://schemas.microsoft.com/office/drawing/2014/main" id="{B504CDBB-7602-4384-A29A-26210DB6EC68}"/>
-              </a:ext>
-            </a:extLst>
-          </p:cNvPr>
-          <p:cNvSpPr>
-            <a:spLocks xmlns:a="http://schemas.openxmlformats.org/drawingml/2006/main" noGrp="1"/>
-          </p:cNvSpPr>
-          <p:nvPr/>
-        </p:nvSpPr>
-        <p:spPr>
-          <a:xfrm xmlns:a="http://schemas.openxmlformats.org/drawingml/2006/main">
-            <a:off x="6743700" y="4324350"/>
-            <a:ext cx="4305300" cy="419100"/>
+          <p:cNvPr id="20" name="">
+            <a:extLst xmlns:a="http://schemas.openxmlformats.org/drawingml/2006/main">
+              <a:ext uri="{FF2B5EF4-FFF2-40B4-BE49-F238E27FC236}">
+                <a16:creationId xmlns:a16="http://schemas.microsoft.com/office/drawing/2014/main" id="{8B4B6145-DBEC-46B5-B21D-C5FB964DA507}"/>
+              </a:ext>
+            </a:extLst>
+          </p:cNvPr>
+          <p:cNvSpPr>
+            <a:spLocks xmlns:a="http://schemas.openxmlformats.org/drawingml/2006/main" noGrp="1"/>
+          </p:cNvSpPr>
+          <p:nvPr/>
+        </p:nvSpPr>
+        <p:spPr>
+          <a:xfrm xmlns:a="http://schemas.openxmlformats.org/drawingml/2006/main">
+            <a:off x="1924050" y="4857750"/>
+            <a:ext cx="2381250" cy="266700"/>
           </a:xfrm>
           <a:prstGeom xmlns:a="http://schemas.openxmlformats.org/drawingml/2006/main" prst="rect">
             <a:avLst/>
@@ -6220,19 +7635,143 @@
           <a:lstStyle xmlns:a="http://schemas.openxmlformats.org/drawingml/2006/main"/>
           <a:p xmlns:a="http://schemas.openxmlformats.org/drawingml/2006/main">
             <a:pPr algn="l">
-              <a:defRPr sz="1350" b="0">
+              <a:defRPr sz="1650" b="1">
                 <a:solidFill>
                   <a:srgbClr val="F7F8FF"/>
                 </a:solidFill>
               </a:defRPr>
             </a:pPr>
             <a:r>
-              <a:rPr sz="1350" b="0">
+              <a:rPr sz="1650" b="1">
                 <a:solidFill>
                   <a:srgbClr val="F7F8FF"/>
                 </a:solidFill>
               </a:rPr>
-              <a:t>Запуск через Docker Compose: PostgreSQL + змінна DATABASE_URL для FastAPI.</a:t>
+              <a:t>backend/main.py</a:t>
+            </a:r>
+          </a:p>
+        </p:txBody>
+      </p:sp>
+      <p:sp>
+        <p:nvSpPr>
+          <p:cNvPr id="21" name="">
+            <a:extLst xmlns:a="http://schemas.openxmlformats.org/drawingml/2006/main">
+              <a:ext uri="{FF2B5EF4-FFF2-40B4-BE49-F238E27FC236}">
+                <a16:creationId xmlns:a16="http://schemas.microsoft.com/office/drawing/2014/main" id="{C652EF54-DD02-4D4F-B19A-3EFDE1E53AFB}"/>
+              </a:ext>
+            </a:extLst>
+          </p:cNvPr>
+          <p:cNvSpPr>
+            <a:spLocks xmlns:a="http://schemas.openxmlformats.org/drawingml/2006/main" noGrp="1"/>
+          </p:cNvSpPr>
+          <p:nvPr/>
+        </p:nvSpPr>
+        <p:spPr>
+          <a:xfrm xmlns:a="http://schemas.openxmlformats.org/drawingml/2006/main">
+            <a:off x="1924050" y="5162550"/>
+            <a:ext cx="8191500" cy="323850"/>
+          </a:xfrm>
+          <a:prstGeom xmlns:a="http://schemas.openxmlformats.org/drawingml/2006/main" prst="rect">
+            <a:avLst/>
+          </a:prstGeom>
+          <a:noFill xmlns:a="http://schemas.openxmlformats.org/drawingml/2006/main"/>
+          <a:ln xmlns:a="http://schemas.openxmlformats.org/drawingml/2006/main" w="0">
+            <a:noFill/>
+            <a:prstDash val="solid"/>
+          </a:ln>
+        </p:spPr>
+        <p:txBody>
+          <a:bodyPr xmlns:a="http://schemas.openxmlformats.org/drawingml/2006/main"/>
+          <a:lstStyle xmlns:a="http://schemas.openxmlformats.org/drawingml/2006/main"/>
+          <a:p xmlns:a="http://schemas.openxmlformats.org/drawingml/2006/main">
+            <a:pPr algn="l">
+              <a:defRPr sz="1275" b="0">
+                <a:solidFill>
+                  <a:srgbClr val="A9B0C2"/>
+                </a:solidFill>
+              </a:defRPr>
+            </a:pPr>
+            <a:r>
+              <a:rPr sz="1275" b="0">
+                <a:solidFill>
+                  <a:srgbClr val="A9B0C2"/>
+                </a:solidFill>
+              </a:rPr>
+              <a:t>через psycopg відкриває з’єднання, виконує SQL-запити і повертає дані в endpoint-и</a:t>
+            </a:r>
+          </a:p>
+        </p:txBody>
+      </p:sp>
+      <p:pic>
+        <p:nvPicPr>
+          <p:cNvPr id="45" name=""/>
+          <p:cNvPicPr>
+            <a:picLocks xmlns:a="http://schemas.openxmlformats.org/drawingml/2006/main" noChangeAspect="1"/>
+          </p:cNvPicPr>
+          <p:nvPr/>
+        </p:nvPicPr>
+        <p:blipFill>
+          <a:blip xmlns:r="http://schemas.openxmlformats.org/officeDocument/2006/relationships" xmlns:a="http://schemas.openxmlformats.org/drawingml/2006/main" r:embed="R3314c4d8dfdd4dd2"/>
+          <a:stretch xmlns:a="http://schemas.openxmlformats.org/drawingml/2006/main"/>
+        </p:blipFill>
+        <p:spPr>
+          <a:xfrm xmlns:a="http://schemas.openxmlformats.org/drawingml/2006/main">
+            <a:off x="8477250" y="2678906"/>
+            <a:ext cx="2857500" cy="1785938"/>
+          </a:xfrm>
+          <a:prstGeom xmlns:a="http://schemas.openxmlformats.org/drawingml/2006/main" prst="roundRect">
+            <a:avLst>
+              <a:gd name="adj" fmla="val 4800"/>
+            </a:avLst>
+          </a:prstGeom>
+        </p:spPr>
+      </p:pic>
+      <p:sp>
+        <p:nvSpPr>
+          <p:cNvPr id="23" name="">
+            <a:extLst xmlns:a="http://schemas.openxmlformats.org/drawingml/2006/main">
+              <a:ext uri="{FF2B5EF4-FFF2-40B4-BE49-F238E27FC236}">
+                <a16:creationId xmlns:a16="http://schemas.microsoft.com/office/drawing/2014/main" id="{9578E199-B3DD-491D-8F99-A3B265A5756F}"/>
+              </a:ext>
+            </a:extLst>
+          </p:cNvPr>
+          <p:cNvSpPr>
+            <a:spLocks xmlns:a="http://schemas.openxmlformats.org/drawingml/2006/main" noGrp="1"/>
+          </p:cNvSpPr>
+          <p:nvPr/>
+        </p:nvSpPr>
+        <p:spPr>
+          <a:xfrm xmlns:a="http://schemas.openxmlformats.org/drawingml/2006/main">
+            <a:off x="1200150" y="5905500"/>
+            <a:ext cx="9334500" cy="323850"/>
+          </a:xfrm>
+          <a:prstGeom xmlns:a="http://schemas.openxmlformats.org/drawingml/2006/main" prst="rect">
+            <a:avLst/>
+          </a:prstGeom>
+          <a:noFill xmlns:a="http://schemas.openxmlformats.org/drawingml/2006/main"/>
+          <a:ln xmlns:a="http://schemas.openxmlformats.org/drawingml/2006/main" w="0">
+            <a:noFill/>
+            <a:prstDash val="solid"/>
+          </a:ln>
+        </p:spPr>
+        <p:txBody>
+          <a:bodyPr xmlns:a="http://schemas.openxmlformats.org/drawingml/2006/main"/>
+          <a:lstStyle xmlns:a="http://schemas.openxmlformats.org/drawingml/2006/main"/>
+          <a:p xmlns:a="http://schemas.openxmlformats.org/drawingml/2006/main">
+            <a:pPr algn="ctr">
+              <a:defRPr sz="1350" b="1">
+                <a:solidFill>
+                  <a:srgbClr val="66D4CF"/>
+                </a:solidFill>
+              </a:defRPr>
+            </a:pPr>
+            <a:r>
+              <a:rPr sz="1350" b="1">
+                <a:solidFill>
+                  <a:srgbClr val="66D4CF"/>
+                </a:solidFill>
+              </a:rPr>
+              <a:t>Послідовність підключення: контейнер → SQL-таблиці → рядок підключення → FastAPI endpoint-и.</a:t>
             </a:r>
           </a:p>
         </p:txBody>
@@ -6240,7 +7779,7 @@
     </p:spTree>
     <p:extLst>
       <p:ext uri="{BB962C8B-B14F-4D97-AF65-F5344CB8AC3E}">
-        <p14:creationId xmlns:p14="http://schemas.microsoft.com/office/powerpoint/2010/main" val="222558985"/>
+        <p14:creationId xmlns:p14="http://schemas.microsoft.com/office/powerpoint/2010/main" val="1768286411"/>
       </p:ext>
     </p:extLst>
   </p:cSld>
@@ -6268,10 +7807,10 @@
       </p:grpSpPr>
       <p:sp>
         <p:nvSpPr>
-          <p:cNvPr id="1" name="">
-            <a:extLst xmlns:a="http://schemas.openxmlformats.org/drawingml/2006/main">
-              <a:ext uri="{FF2B5EF4-FFF2-40B4-BE49-F238E27FC236}">
-                <a16:creationId xmlns:a16="http://schemas.microsoft.com/office/drawing/2014/main" id="{6BEE7CDD-A9B4-49F4-9010-1062A089A2CD}"/>
+          <p:cNvPr id="19" name="">
+            <a:extLst xmlns:a="http://schemas.openxmlformats.org/drawingml/2006/main">
+              <a:ext uri="{FF2B5EF4-FFF2-40B4-BE49-F238E27FC236}">
+                <a16:creationId xmlns:a16="http://schemas.microsoft.com/office/drawing/2014/main" id="{CE551CCA-E97B-422C-8285-2ACDA4CFB8A8}"/>
               </a:ext>
             </a:extLst>
           </p:cNvPr>
@@ -6299,7 +7838,7 @@
           <p:cNvPr id="2" name="">
             <a:extLst xmlns:a="http://schemas.openxmlformats.org/drawingml/2006/main">
               <a:ext uri="{FF2B5EF4-FFF2-40B4-BE49-F238E27FC236}">
-                <a16:creationId xmlns:a16="http://schemas.microsoft.com/office/drawing/2014/main" id="{3EC3EB74-5380-4F46-94A3-4F5D55CDF2DE}"/>
+                <a16:creationId xmlns:a16="http://schemas.microsoft.com/office/drawing/2014/main" id="{9832F203-7C4A-4BD8-B487-1FA976C9224D}"/>
               </a:ext>
             </a:extLst>
           </p:cNvPr>
@@ -6327,7 +7866,7 @@
           <p:cNvPr id="3" name="">
             <a:extLst xmlns:a="http://schemas.openxmlformats.org/drawingml/2006/main">
               <a:ext uri="{FF2B5EF4-FFF2-40B4-BE49-F238E27FC236}">
-                <a16:creationId xmlns:a16="http://schemas.microsoft.com/office/drawing/2014/main" id="{1105B3D0-91E5-4B13-87F8-7477934A354F}"/>
+                <a16:creationId xmlns:a16="http://schemas.microsoft.com/office/drawing/2014/main" id="{D457951A-6A78-4613-A4AB-91A178A3BFD2}"/>
               </a:ext>
             </a:extLst>
           </p:cNvPr>
@@ -6377,7 +7916,7 @@
           <p:cNvPr id="4" name="">
             <a:extLst xmlns:a="http://schemas.openxmlformats.org/drawingml/2006/main">
               <a:ext uri="{FF2B5EF4-FFF2-40B4-BE49-F238E27FC236}">
-                <a16:creationId xmlns:a16="http://schemas.microsoft.com/office/drawing/2014/main" id="{E8727907-B1F6-4B09-82CB-118BA7645BBE}"/>
+                <a16:creationId xmlns:a16="http://schemas.microsoft.com/office/drawing/2014/main" id="{B7BB532E-6D4E-44F0-A76B-17409C935054}"/>
               </a:ext>
             </a:extLst>
           </p:cNvPr>
@@ -6417,7 +7956,7 @@
                   <a:srgbClr val="F7F8FF"/>
                 </a:solidFill>
               </a:rPr>
-              <a:t>FastAPI став шаром між додатком і PostgreSQL</a:t>
+              <a:t>PostgreSQL зберігає каталог і поведінку користувача</a:t>
             </a:r>
           </a:p>
         </p:txBody>
@@ -6427,7 +7966,7 @@
           <p:cNvPr id="5" name="">
             <a:extLst xmlns:a="http://schemas.openxmlformats.org/drawingml/2006/main">
               <a:ext uri="{FF2B5EF4-FFF2-40B4-BE49-F238E27FC236}">
-                <a16:creationId xmlns:a16="http://schemas.microsoft.com/office/drawing/2014/main" id="{CB0CC32C-207B-4C5D-A2BB-404EB389E305}"/>
+                <a16:creationId xmlns:a16="http://schemas.microsoft.com/office/drawing/2014/main" id="{AF573863-E6AD-4775-BBB3-F2699DADC0D3}"/>
               </a:ext>
             </a:extLst>
           </p:cNvPr>
@@ -6467,31 +8006,31 @@
                   <a:srgbClr val="A9B0C2"/>
                 </a:solidFill>
               </a:rPr>
-              <a:t>API приймає дії користувача, перевіряє дані через Pydantic і повертає готові відповіді для інтерфейсу.</a:t>
+              <a:t>База даних розділена на сутності фільмів, жанрів, акторів і користувацьких дій.</a:t>
             </a:r>
           </a:p>
         </p:txBody>
       </p:sp>
       <p:pic>
         <p:nvPicPr>
-          <p:cNvPr id="26" name=""/>
+          <p:cNvPr id="24" name=""/>
           <p:cNvPicPr>
             <a:picLocks xmlns:a="http://schemas.openxmlformats.org/drawingml/2006/main" noChangeAspect="1"/>
           </p:cNvPicPr>
           <p:nvPr/>
         </p:nvPicPr>
         <p:blipFill>
-          <a:blip xmlns:r="http://schemas.openxmlformats.org/officeDocument/2006/relationships" xmlns:a="http://schemas.openxmlformats.org/drawingml/2006/main" r:embed="Rd8555277487e41af"/>
+          <a:blip xmlns:r="http://schemas.openxmlformats.org/officeDocument/2006/relationships" xmlns:a="http://schemas.openxmlformats.org/drawingml/2006/main" r:embed="Raf4a699032ee4bcf"/>
           <a:stretch xmlns:a="http://schemas.openxmlformats.org/drawingml/2006/main"/>
         </p:blipFill>
         <p:spPr>
           <a:xfrm xmlns:a="http://schemas.openxmlformats.org/drawingml/2006/main">
-            <a:off x="685800" y="2416969"/>
-            <a:ext cx="5219700" cy="3262313"/>
+            <a:off x="685800" y="2469356"/>
+            <a:ext cx="5143500" cy="3214688"/>
           </a:xfrm>
           <a:prstGeom xmlns:a="http://schemas.openxmlformats.org/drawingml/2006/main" prst="roundRect">
             <a:avLst>
-              <a:gd name="adj" fmla="val 3243"/>
+              <a:gd name="adj" fmla="val 3158"/>
             </a:avLst>
           </a:prstGeom>
         </p:spPr>
@@ -6501,31 +8040,31 @@
           <p:cNvPr id="7" name="">
             <a:extLst xmlns:a="http://schemas.openxmlformats.org/drawingml/2006/main">
               <a:ext uri="{FF2B5EF4-FFF2-40B4-BE49-F238E27FC236}">
-                <a16:creationId xmlns:a16="http://schemas.microsoft.com/office/drawing/2014/main" id="{0490C276-A990-47B2-B63B-6C6230C07351}"/>
-              </a:ext>
-            </a:extLst>
-          </p:cNvPr>
-          <p:cNvSpPr>
-            <a:spLocks xmlns:a="http://schemas.openxmlformats.org/drawingml/2006/main" noGrp="1"/>
-          </p:cNvSpPr>
-          <p:nvPr/>
-        </p:nvSpPr>
-        <p:spPr>
-          <a:xfrm xmlns:a="http://schemas.openxmlformats.org/drawingml/2006/main">
-            <a:off x="6286500" y="2305050"/>
-            <a:ext cx="2133600" cy="476250"/>
+                <a16:creationId xmlns:a16="http://schemas.microsoft.com/office/drawing/2014/main" id="{CDA4D88B-4BB8-43E9-94AF-BAD7A74EE849}"/>
+              </a:ext>
+            </a:extLst>
+          </p:cNvPr>
+          <p:cNvSpPr>
+            <a:spLocks xmlns:a="http://schemas.openxmlformats.org/drawingml/2006/main" noGrp="1"/>
+          </p:cNvSpPr>
+          <p:nvPr/>
+        </p:nvSpPr>
+        <p:spPr>
+          <a:xfrm xmlns:a="http://schemas.openxmlformats.org/drawingml/2006/main">
+            <a:off x="6286500" y="2362200"/>
+            <a:ext cx="323850" cy="323850"/>
           </a:xfrm>
           <a:prstGeom xmlns:a="http://schemas.openxmlformats.org/drawingml/2006/main" prst="roundRect">
             <a:avLst>
-              <a:gd name="adj" fmla="val 24000"/>
+              <a:gd name="adj" fmla="val 35294"/>
             </a:avLst>
           </a:prstGeom>
           <a:solidFill xmlns:a="http://schemas.openxmlformats.org/drawingml/2006/main">
-            <a:srgbClr val="07131F"/>
+            <a:srgbClr val="0B1822"/>
           </a:solidFill>
           <a:ln xmlns:a="http://schemas.openxmlformats.org/drawingml/2006/main" w="9525">
             <a:solidFill>
-              <a:srgbClr val="0A84FF"/>
+              <a:srgbClr val="66D4CF"/>
             </a:solidFill>
             <a:prstDash val="solid"/>
           </a:ln>
@@ -6542,19 +8081,69 @@
           <p:cNvPr id="8" name="">
             <a:extLst xmlns:a="http://schemas.openxmlformats.org/drawingml/2006/main">
               <a:ext uri="{FF2B5EF4-FFF2-40B4-BE49-F238E27FC236}">
-                <a16:creationId xmlns:a16="http://schemas.microsoft.com/office/drawing/2014/main" id="{3F12E154-3B62-4509-B499-0F7CD86E33FE}"/>
-              </a:ext>
-            </a:extLst>
-          </p:cNvPr>
-          <p:cNvSpPr>
-            <a:spLocks xmlns:a="http://schemas.openxmlformats.org/drawingml/2006/main" noGrp="1"/>
-          </p:cNvSpPr>
-          <p:nvPr/>
-        </p:nvSpPr>
-        <p:spPr>
-          <a:xfrm xmlns:a="http://schemas.openxmlformats.org/drawingml/2006/main">
-            <a:off x="6400800" y="2447925"/>
-            <a:ext cx="1905000" cy="190500"/>
+                <a16:creationId xmlns:a16="http://schemas.microsoft.com/office/drawing/2014/main" id="{C766E363-05E1-4F57-857A-015F4F028F57}"/>
+              </a:ext>
+            </a:extLst>
+          </p:cNvPr>
+          <p:cNvSpPr>
+            <a:spLocks xmlns:a="http://schemas.openxmlformats.org/drawingml/2006/main" noGrp="1"/>
+          </p:cNvSpPr>
+          <p:nvPr/>
+        </p:nvSpPr>
+        <p:spPr>
+          <a:xfrm xmlns:a="http://schemas.openxmlformats.org/drawingml/2006/main">
+            <a:off x="6286500" y="2428875"/>
+            <a:ext cx="323850" cy="171450"/>
+          </a:xfrm>
+          <a:prstGeom xmlns:a="http://schemas.openxmlformats.org/drawingml/2006/main" prst="rect">
+            <a:avLst/>
+          </a:prstGeom>
+          <a:noFill xmlns:a="http://schemas.openxmlformats.org/drawingml/2006/main"/>
+          <a:ln xmlns:a="http://schemas.openxmlformats.org/drawingml/2006/main" w="0">
+            <a:noFill/>
+            <a:prstDash val="solid"/>
+          </a:ln>
+        </p:spPr>
+        <p:txBody>
+          <a:bodyPr xmlns:a="http://schemas.openxmlformats.org/drawingml/2006/main"/>
+          <a:lstStyle xmlns:a="http://schemas.openxmlformats.org/drawingml/2006/main"/>
+          <a:p xmlns:a="http://schemas.openxmlformats.org/drawingml/2006/main">
+            <a:pPr algn="ctr">
+              <a:defRPr sz="1050" b="1">
+                <a:solidFill>
+                  <a:srgbClr val="66D4CF"/>
+                </a:solidFill>
+              </a:defRPr>
+            </a:pPr>
+            <a:r>
+              <a:rPr sz="1050" b="1">
+                <a:solidFill>
+                  <a:srgbClr val="66D4CF"/>
+                </a:solidFill>
+              </a:rPr>
+              <a:t>1</a:t>
+            </a:r>
+          </a:p>
+        </p:txBody>
+      </p:sp>
+      <p:sp>
+        <p:nvSpPr>
+          <p:cNvPr id="9" name="">
+            <a:extLst xmlns:a="http://schemas.openxmlformats.org/drawingml/2006/main">
+              <a:ext uri="{FF2B5EF4-FFF2-40B4-BE49-F238E27FC236}">
+                <a16:creationId xmlns:a16="http://schemas.microsoft.com/office/drawing/2014/main" id="{DB9D678B-8DB4-4BF3-9887-ECFE399BBA1D}"/>
+              </a:ext>
+            </a:extLst>
+          </p:cNvPr>
+          <p:cNvSpPr>
+            <a:spLocks xmlns:a="http://schemas.openxmlformats.org/drawingml/2006/main" noGrp="1"/>
+          </p:cNvSpPr>
+          <p:nvPr/>
+        </p:nvSpPr>
+        <p:spPr>
+          <a:xfrm xmlns:a="http://schemas.openxmlformats.org/drawingml/2006/main">
+            <a:off x="6743700" y="2381250"/>
+            <a:ext cx="4305300" cy="419100"/>
           </a:xfrm>
           <a:prstGeom xmlns:a="http://schemas.openxmlformats.org/drawingml/2006/main" prst="rect">
             <a:avLst/>
@@ -6570,49 +8159,49 @@
           <a:lstStyle xmlns:a="http://schemas.openxmlformats.org/drawingml/2006/main"/>
           <a:p xmlns:a="http://schemas.openxmlformats.org/drawingml/2006/main">
             <a:pPr algn="l">
-              <a:defRPr sz="1050" b="1">
+              <a:defRPr sz="1350" b="0">
                 <a:solidFill>
                   <a:srgbClr val="F7F8FF"/>
                 </a:solidFill>
               </a:defRPr>
             </a:pPr>
             <a:r>
-              <a:rPr sz="1050" b="1">
+              <a:rPr sz="1350" b="0">
                 <a:solidFill>
                   <a:srgbClr val="F7F8FF"/>
                 </a:solidFill>
               </a:rPr>
-              <a:t>GET /health</a:t>
-            </a:r>
-          </a:p>
-        </p:txBody>
-      </p:sp>
-      <p:sp>
-        <p:nvSpPr>
-          <p:cNvPr id="9" name="">
-            <a:extLst xmlns:a="http://schemas.openxmlformats.org/drawingml/2006/main">
-              <a:ext uri="{FF2B5EF4-FFF2-40B4-BE49-F238E27FC236}">
-                <a16:creationId xmlns:a16="http://schemas.microsoft.com/office/drawing/2014/main" id="{A5677B79-C3A5-489B-BDF0-4B9F1F317159}"/>
-              </a:ext>
-            </a:extLst>
-          </p:cNvPr>
-          <p:cNvSpPr>
-            <a:spLocks xmlns:a="http://schemas.openxmlformats.org/drawingml/2006/main" noGrp="1"/>
-          </p:cNvSpPr>
-          <p:nvPr/>
-        </p:nvSpPr>
-        <p:spPr>
-          <a:xfrm xmlns:a="http://schemas.openxmlformats.org/drawingml/2006/main">
-            <a:off x="8667750" y="2305050"/>
-            <a:ext cx="2133600" cy="476250"/>
+              <a:t>Основні таблиці: users, movies, movie_genres, movie_actors.</a:t>
+            </a:r>
+          </a:p>
+        </p:txBody>
+      </p:sp>
+      <p:sp>
+        <p:nvSpPr>
+          <p:cNvPr id="10" name="">
+            <a:extLst xmlns:a="http://schemas.openxmlformats.org/drawingml/2006/main">
+              <a:ext uri="{FF2B5EF4-FFF2-40B4-BE49-F238E27FC236}">
+                <a16:creationId xmlns:a16="http://schemas.microsoft.com/office/drawing/2014/main" id="{A3997C41-DB97-4F30-812A-FC51A860317D}"/>
+              </a:ext>
+            </a:extLst>
+          </p:cNvPr>
+          <p:cNvSpPr>
+            <a:spLocks xmlns:a="http://schemas.openxmlformats.org/drawingml/2006/main" noGrp="1"/>
+          </p:cNvSpPr>
+          <p:nvPr/>
+        </p:nvSpPr>
+        <p:spPr>
+          <a:xfrm xmlns:a="http://schemas.openxmlformats.org/drawingml/2006/main">
+            <a:off x="6286500" y="3009900"/>
+            <a:ext cx="323850" cy="323850"/>
           </a:xfrm>
           <a:prstGeom xmlns:a="http://schemas.openxmlformats.org/drawingml/2006/main" prst="roundRect">
             <a:avLst>
-              <a:gd name="adj" fmla="val 24000"/>
+              <a:gd name="adj" fmla="val 35294"/>
             </a:avLst>
           </a:prstGeom>
           <a:solidFill xmlns:a="http://schemas.openxmlformats.org/drawingml/2006/main">
-            <a:srgbClr val="07131F"/>
+            <a:srgbClr val="0B1822"/>
           </a:solidFill>
           <a:ln xmlns:a="http://schemas.openxmlformats.org/drawingml/2006/main" w="9525">
             <a:solidFill>
@@ -6630,22 +8219,72 @@
       </p:sp>
       <p:sp>
         <p:nvSpPr>
-          <p:cNvPr id="10" name="">
-            <a:extLst xmlns:a="http://schemas.openxmlformats.org/drawingml/2006/main">
-              <a:ext uri="{FF2B5EF4-FFF2-40B4-BE49-F238E27FC236}">
-                <a16:creationId xmlns:a16="http://schemas.microsoft.com/office/drawing/2014/main" id="{BA89D737-DDD0-4773-BAED-CDDE8693F51E}"/>
-              </a:ext>
-            </a:extLst>
-          </p:cNvPr>
-          <p:cNvSpPr>
-            <a:spLocks xmlns:a="http://schemas.openxmlformats.org/drawingml/2006/main" noGrp="1"/>
-          </p:cNvSpPr>
-          <p:nvPr/>
-        </p:nvSpPr>
-        <p:spPr>
-          <a:xfrm xmlns:a="http://schemas.openxmlformats.org/drawingml/2006/main">
-            <a:off x="8782050" y="2447925"/>
-            <a:ext cx="1905000" cy="190500"/>
+          <p:cNvPr id="11" name="">
+            <a:extLst xmlns:a="http://schemas.openxmlformats.org/drawingml/2006/main">
+              <a:ext uri="{FF2B5EF4-FFF2-40B4-BE49-F238E27FC236}">
+                <a16:creationId xmlns:a16="http://schemas.microsoft.com/office/drawing/2014/main" id="{E7AF33D1-7542-44EC-A5EB-839C6F207CF2}"/>
+              </a:ext>
+            </a:extLst>
+          </p:cNvPr>
+          <p:cNvSpPr>
+            <a:spLocks xmlns:a="http://schemas.openxmlformats.org/drawingml/2006/main" noGrp="1"/>
+          </p:cNvSpPr>
+          <p:nvPr/>
+        </p:nvSpPr>
+        <p:spPr>
+          <a:xfrm xmlns:a="http://schemas.openxmlformats.org/drawingml/2006/main">
+            <a:off x="6286500" y="3076575"/>
+            <a:ext cx="323850" cy="171450"/>
+          </a:xfrm>
+          <a:prstGeom xmlns:a="http://schemas.openxmlformats.org/drawingml/2006/main" prst="rect">
+            <a:avLst/>
+          </a:prstGeom>
+          <a:noFill xmlns:a="http://schemas.openxmlformats.org/drawingml/2006/main"/>
+          <a:ln xmlns:a="http://schemas.openxmlformats.org/drawingml/2006/main" w="0">
+            <a:noFill/>
+            <a:prstDash val="solid"/>
+          </a:ln>
+        </p:spPr>
+        <p:txBody>
+          <a:bodyPr xmlns:a="http://schemas.openxmlformats.org/drawingml/2006/main"/>
+          <a:lstStyle xmlns:a="http://schemas.openxmlformats.org/drawingml/2006/main"/>
+          <a:p xmlns:a="http://schemas.openxmlformats.org/drawingml/2006/main">
+            <a:pPr algn="ctr">
+              <a:defRPr sz="1050" b="1">
+                <a:solidFill>
+                  <a:srgbClr val="66D4CF"/>
+                </a:solidFill>
+              </a:defRPr>
+            </a:pPr>
+            <a:r>
+              <a:rPr sz="1050" b="1">
+                <a:solidFill>
+                  <a:srgbClr val="66D4CF"/>
+                </a:solidFill>
+              </a:rPr>
+              <a:t>2</a:t>
+            </a:r>
+          </a:p>
+        </p:txBody>
+      </p:sp>
+      <p:sp>
+        <p:nvSpPr>
+          <p:cNvPr id="12" name="">
+            <a:extLst xmlns:a="http://schemas.openxmlformats.org/drawingml/2006/main">
+              <a:ext uri="{FF2B5EF4-FFF2-40B4-BE49-F238E27FC236}">
+                <a16:creationId xmlns:a16="http://schemas.microsoft.com/office/drawing/2014/main" id="{BDEDA167-7A5B-4B5A-BA1F-6F8074F13FAD}"/>
+              </a:ext>
+            </a:extLst>
+          </p:cNvPr>
+          <p:cNvSpPr>
+            <a:spLocks xmlns:a="http://schemas.openxmlformats.org/drawingml/2006/main" noGrp="1"/>
+          </p:cNvSpPr>
+          <p:nvPr/>
+        </p:nvSpPr>
+        <p:spPr>
+          <a:xfrm xmlns:a="http://schemas.openxmlformats.org/drawingml/2006/main">
+            <a:off x="6743700" y="3028950"/>
+            <a:ext cx="4305300" cy="419100"/>
           </a:xfrm>
           <a:prstGeom xmlns:a="http://schemas.openxmlformats.org/drawingml/2006/main" prst="rect">
             <a:avLst/>
@@ -6661,53 +8300,53 @@
           <a:lstStyle xmlns:a="http://schemas.openxmlformats.org/drawingml/2006/main"/>
           <a:p xmlns:a="http://schemas.openxmlformats.org/drawingml/2006/main">
             <a:pPr algn="l">
-              <a:defRPr sz="1050" b="1">
+              <a:defRPr sz="1350" b="0">
                 <a:solidFill>
                   <a:srgbClr val="F7F8FF"/>
                 </a:solidFill>
               </a:defRPr>
             </a:pPr>
             <a:r>
-              <a:rPr sz="1050" b="1">
+              <a:rPr sz="1350" b="0">
                 <a:solidFill>
                   <a:srgbClr val="F7F8FF"/>
                 </a:solidFill>
               </a:rPr>
-              <a:t>GET /movies</a:t>
-            </a:r>
-          </a:p>
-        </p:txBody>
-      </p:sp>
-      <p:sp>
-        <p:nvSpPr>
-          <p:cNvPr id="11" name="">
-            <a:extLst xmlns:a="http://schemas.openxmlformats.org/drawingml/2006/main">
-              <a:ext uri="{FF2B5EF4-FFF2-40B4-BE49-F238E27FC236}">
-                <a16:creationId xmlns:a16="http://schemas.microsoft.com/office/drawing/2014/main" id="{A23D21C7-2926-4C7B-9BBF-F4803E9B7618}"/>
-              </a:ext>
-            </a:extLst>
-          </p:cNvPr>
-          <p:cNvSpPr>
-            <a:spLocks xmlns:a="http://schemas.openxmlformats.org/drawingml/2006/main" noGrp="1"/>
-          </p:cNvSpPr>
-          <p:nvPr/>
-        </p:nvSpPr>
-        <p:spPr>
-          <a:xfrm xmlns:a="http://schemas.openxmlformats.org/drawingml/2006/main">
-            <a:off x="6286500" y="3009900"/>
-            <a:ext cx="2133600" cy="476250"/>
+              <a:t>Дії користувача: favorites, watch_later, watched_movies, user_ratings.</a:t>
+            </a:r>
+          </a:p>
+        </p:txBody>
+      </p:sp>
+      <p:sp>
+        <p:nvSpPr>
+          <p:cNvPr id="13" name="">
+            <a:extLst xmlns:a="http://schemas.openxmlformats.org/drawingml/2006/main">
+              <a:ext uri="{FF2B5EF4-FFF2-40B4-BE49-F238E27FC236}">
+                <a16:creationId xmlns:a16="http://schemas.microsoft.com/office/drawing/2014/main" id="{386970C3-51A5-468A-9A1D-69D91143CA46}"/>
+              </a:ext>
+            </a:extLst>
+          </p:cNvPr>
+          <p:cNvSpPr>
+            <a:spLocks xmlns:a="http://schemas.openxmlformats.org/drawingml/2006/main" noGrp="1"/>
+          </p:cNvSpPr>
+          <p:nvPr/>
+        </p:nvSpPr>
+        <p:spPr>
+          <a:xfrm xmlns:a="http://schemas.openxmlformats.org/drawingml/2006/main">
+            <a:off x="6286500" y="3657600"/>
+            <a:ext cx="323850" cy="323850"/>
           </a:xfrm>
           <a:prstGeom xmlns:a="http://schemas.openxmlformats.org/drawingml/2006/main" prst="roundRect">
             <a:avLst>
-              <a:gd name="adj" fmla="val 24000"/>
+              <a:gd name="adj" fmla="val 35294"/>
             </a:avLst>
           </a:prstGeom>
           <a:solidFill xmlns:a="http://schemas.openxmlformats.org/drawingml/2006/main">
-            <a:srgbClr val="07131F"/>
+            <a:srgbClr val="0B1822"/>
           </a:solidFill>
           <a:ln xmlns:a="http://schemas.openxmlformats.org/drawingml/2006/main" w="9525">
             <a:solidFill>
-              <a:srgbClr val="0A84FF"/>
+              <a:srgbClr val="66D4CF"/>
             </a:solidFill>
             <a:prstDash val="solid"/>
           </a:ln>
@@ -6721,22 +8360,72 @@
       </p:sp>
       <p:sp>
         <p:nvSpPr>
-          <p:cNvPr id="12" name="">
-            <a:extLst xmlns:a="http://schemas.openxmlformats.org/drawingml/2006/main">
-              <a:ext uri="{FF2B5EF4-FFF2-40B4-BE49-F238E27FC236}">
-                <a16:creationId xmlns:a16="http://schemas.microsoft.com/office/drawing/2014/main" id="{F19433C7-36B8-4339-B628-D66272CB983E}"/>
-              </a:ext>
-            </a:extLst>
-          </p:cNvPr>
-          <p:cNvSpPr>
-            <a:spLocks xmlns:a="http://schemas.openxmlformats.org/drawingml/2006/main" noGrp="1"/>
-          </p:cNvSpPr>
-          <p:nvPr/>
-        </p:nvSpPr>
-        <p:spPr>
-          <a:xfrm xmlns:a="http://schemas.openxmlformats.org/drawingml/2006/main">
-            <a:off x="6400800" y="3152775"/>
-            <a:ext cx="1905000" cy="190500"/>
+          <p:cNvPr id="14" name="">
+            <a:extLst xmlns:a="http://schemas.openxmlformats.org/drawingml/2006/main">
+              <a:ext uri="{FF2B5EF4-FFF2-40B4-BE49-F238E27FC236}">
+                <a16:creationId xmlns:a16="http://schemas.microsoft.com/office/drawing/2014/main" id="{4DA457D3-AE80-4B27-B522-BC7E154674C7}"/>
+              </a:ext>
+            </a:extLst>
+          </p:cNvPr>
+          <p:cNvSpPr>
+            <a:spLocks xmlns:a="http://schemas.openxmlformats.org/drawingml/2006/main" noGrp="1"/>
+          </p:cNvSpPr>
+          <p:nvPr/>
+        </p:nvSpPr>
+        <p:spPr>
+          <a:xfrm xmlns:a="http://schemas.openxmlformats.org/drawingml/2006/main">
+            <a:off x="6286500" y="3724275"/>
+            <a:ext cx="323850" cy="171450"/>
+          </a:xfrm>
+          <a:prstGeom xmlns:a="http://schemas.openxmlformats.org/drawingml/2006/main" prst="rect">
+            <a:avLst/>
+          </a:prstGeom>
+          <a:noFill xmlns:a="http://schemas.openxmlformats.org/drawingml/2006/main"/>
+          <a:ln xmlns:a="http://schemas.openxmlformats.org/drawingml/2006/main" w="0">
+            <a:noFill/>
+            <a:prstDash val="solid"/>
+          </a:ln>
+        </p:spPr>
+        <p:txBody>
+          <a:bodyPr xmlns:a="http://schemas.openxmlformats.org/drawingml/2006/main"/>
+          <a:lstStyle xmlns:a="http://schemas.openxmlformats.org/drawingml/2006/main"/>
+          <a:p xmlns:a="http://schemas.openxmlformats.org/drawingml/2006/main">
+            <a:pPr algn="ctr">
+              <a:defRPr sz="1050" b="1">
+                <a:solidFill>
+                  <a:srgbClr val="66D4CF"/>
+                </a:solidFill>
+              </a:defRPr>
+            </a:pPr>
+            <a:r>
+              <a:rPr sz="1050" b="1">
+                <a:solidFill>
+                  <a:srgbClr val="66D4CF"/>
+                </a:solidFill>
+              </a:rPr>
+              <a:t>3</a:t>
+            </a:r>
+          </a:p>
+        </p:txBody>
+      </p:sp>
+      <p:sp>
+        <p:nvSpPr>
+          <p:cNvPr id="15" name="">
+            <a:extLst xmlns:a="http://schemas.openxmlformats.org/drawingml/2006/main">
+              <a:ext uri="{FF2B5EF4-FFF2-40B4-BE49-F238E27FC236}">
+                <a16:creationId xmlns:a16="http://schemas.microsoft.com/office/drawing/2014/main" id="{3D790827-1ABA-43B0-8E6D-4F34442D547E}"/>
+              </a:ext>
+            </a:extLst>
+          </p:cNvPr>
+          <p:cNvSpPr>
+            <a:spLocks xmlns:a="http://schemas.openxmlformats.org/drawingml/2006/main" noGrp="1"/>
+          </p:cNvSpPr>
+          <p:nvPr/>
+        </p:nvSpPr>
+        <p:spPr>
+          <a:xfrm xmlns:a="http://schemas.openxmlformats.org/drawingml/2006/main">
+            <a:off x="6743700" y="3676650"/>
+            <a:ext cx="4305300" cy="419100"/>
           </a:xfrm>
           <a:prstGeom xmlns:a="http://schemas.openxmlformats.org/drawingml/2006/main" prst="rect">
             <a:avLst/>
@@ -6752,49 +8441,49 @@
           <a:lstStyle xmlns:a="http://schemas.openxmlformats.org/drawingml/2006/main"/>
           <a:p xmlns:a="http://schemas.openxmlformats.org/drawingml/2006/main">
             <a:pPr algn="l">
-              <a:defRPr sz="1050" b="1">
+              <a:defRPr sz="1350" b="0">
                 <a:solidFill>
                   <a:srgbClr val="F7F8FF"/>
                 </a:solidFill>
               </a:defRPr>
             </a:pPr>
             <a:r>
-              <a:rPr sz="1050" b="1">
+              <a:rPr sz="1350" b="0">
                 <a:solidFill>
                   <a:srgbClr val="F7F8FF"/>
                 </a:solidFill>
               </a:rPr>
-              <a:t>POST /users</a:t>
-            </a:r>
-          </a:p>
-        </p:txBody>
-      </p:sp>
-      <p:sp>
-        <p:nvSpPr>
-          <p:cNvPr id="13" name="">
-            <a:extLst xmlns:a="http://schemas.openxmlformats.org/drawingml/2006/main">
-              <a:ext uri="{FF2B5EF4-FFF2-40B4-BE49-F238E27FC236}">
-                <a16:creationId xmlns:a16="http://schemas.microsoft.com/office/drawing/2014/main" id="{A03C61CC-CF27-4517-ACA3-833CD8F81E8D}"/>
-              </a:ext>
-            </a:extLst>
-          </p:cNvPr>
-          <p:cNvSpPr>
-            <a:spLocks xmlns:a="http://schemas.openxmlformats.org/drawingml/2006/main" noGrp="1"/>
-          </p:cNvSpPr>
-          <p:nvPr/>
-        </p:nvSpPr>
-        <p:spPr>
-          <a:xfrm xmlns:a="http://schemas.openxmlformats.org/drawingml/2006/main">
-            <a:off x="8667750" y="3009900"/>
-            <a:ext cx="2133600" cy="476250"/>
+              <a:t>Додано movie_comments для збереження відгуків користувача до фільмів.</a:t>
+            </a:r>
+          </a:p>
+        </p:txBody>
+      </p:sp>
+      <p:sp>
+        <p:nvSpPr>
+          <p:cNvPr id="16" name="">
+            <a:extLst xmlns:a="http://schemas.openxmlformats.org/drawingml/2006/main">
+              <a:ext uri="{FF2B5EF4-FFF2-40B4-BE49-F238E27FC236}">
+                <a16:creationId xmlns:a16="http://schemas.microsoft.com/office/drawing/2014/main" id="{AE19AD96-467F-40C0-9345-C9BA2A8F8F2F}"/>
+              </a:ext>
+            </a:extLst>
+          </p:cNvPr>
+          <p:cNvSpPr>
+            <a:spLocks xmlns:a="http://schemas.openxmlformats.org/drawingml/2006/main" noGrp="1"/>
+          </p:cNvSpPr>
+          <p:nvPr/>
+        </p:nvSpPr>
+        <p:spPr>
+          <a:xfrm xmlns:a="http://schemas.openxmlformats.org/drawingml/2006/main">
+            <a:off x="6286500" y="4305300"/>
+            <a:ext cx="323850" cy="323850"/>
           </a:xfrm>
           <a:prstGeom xmlns:a="http://schemas.openxmlformats.org/drawingml/2006/main" prst="roundRect">
             <a:avLst>
-              <a:gd name="adj" fmla="val 24000"/>
+              <a:gd name="adj" fmla="val 35294"/>
             </a:avLst>
           </a:prstGeom>
           <a:solidFill xmlns:a="http://schemas.openxmlformats.org/drawingml/2006/main">
-            <a:srgbClr val="07131F"/>
+            <a:srgbClr val="0B1822"/>
           </a:solidFill>
           <a:ln xmlns:a="http://schemas.openxmlformats.org/drawingml/2006/main" w="9525">
             <a:solidFill>
@@ -6812,22 +8501,72 @@
       </p:sp>
       <p:sp>
         <p:nvSpPr>
-          <p:cNvPr id="14" name="">
-            <a:extLst xmlns:a="http://schemas.openxmlformats.org/drawingml/2006/main">
-              <a:ext uri="{FF2B5EF4-FFF2-40B4-BE49-F238E27FC236}">
-                <a16:creationId xmlns:a16="http://schemas.microsoft.com/office/drawing/2014/main" id="{A9C656BC-D91E-4F7E-A376-80EB98AD25F4}"/>
-              </a:ext>
-            </a:extLst>
-          </p:cNvPr>
-          <p:cNvSpPr>
-            <a:spLocks xmlns:a="http://schemas.openxmlformats.org/drawingml/2006/main" noGrp="1"/>
-          </p:cNvSpPr>
-          <p:nvPr/>
-        </p:nvSpPr>
-        <p:spPr>
-          <a:xfrm xmlns:a="http://schemas.openxmlformats.org/drawingml/2006/main">
-            <a:off x="8782050" y="3152775"/>
-            <a:ext cx="1905000" cy="190500"/>
+          <p:cNvPr id="17" name="">
+            <a:extLst xmlns:a="http://schemas.openxmlformats.org/drawingml/2006/main">
+              <a:ext uri="{FF2B5EF4-FFF2-40B4-BE49-F238E27FC236}">
+                <a16:creationId xmlns:a16="http://schemas.microsoft.com/office/drawing/2014/main" id="{A73E2BA5-8FC0-4EFE-B819-218DBF87E997}"/>
+              </a:ext>
+            </a:extLst>
+          </p:cNvPr>
+          <p:cNvSpPr>
+            <a:spLocks xmlns:a="http://schemas.openxmlformats.org/drawingml/2006/main" noGrp="1"/>
+          </p:cNvSpPr>
+          <p:nvPr/>
+        </p:nvSpPr>
+        <p:spPr>
+          <a:xfrm xmlns:a="http://schemas.openxmlformats.org/drawingml/2006/main">
+            <a:off x="6286500" y="4371975"/>
+            <a:ext cx="323850" cy="171450"/>
+          </a:xfrm>
+          <a:prstGeom xmlns:a="http://schemas.openxmlformats.org/drawingml/2006/main" prst="rect">
+            <a:avLst/>
+          </a:prstGeom>
+          <a:noFill xmlns:a="http://schemas.openxmlformats.org/drawingml/2006/main"/>
+          <a:ln xmlns:a="http://schemas.openxmlformats.org/drawingml/2006/main" w="0">
+            <a:noFill/>
+            <a:prstDash val="solid"/>
+          </a:ln>
+        </p:spPr>
+        <p:txBody>
+          <a:bodyPr xmlns:a="http://schemas.openxmlformats.org/drawingml/2006/main"/>
+          <a:lstStyle xmlns:a="http://schemas.openxmlformats.org/drawingml/2006/main"/>
+          <a:p xmlns:a="http://schemas.openxmlformats.org/drawingml/2006/main">
+            <a:pPr algn="ctr">
+              <a:defRPr sz="1050" b="1">
+                <a:solidFill>
+                  <a:srgbClr val="66D4CF"/>
+                </a:solidFill>
+              </a:defRPr>
+            </a:pPr>
+            <a:r>
+              <a:rPr sz="1050" b="1">
+                <a:solidFill>
+                  <a:srgbClr val="66D4CF"/>
+                </a:solidFill>
+              </a:rPr>
+              <a:t>4</a:t>
+            </a:r>
+          </a:p>
+        </p:txBody>
+      </p:sp>
+      <p:sp>
+        <p:nvSpPr>
+          <p:cNvPr id="18" name="">
+            <a:extLst xmlns:a="http://schemas.openxmlformats.org/drawingml/2006/main">
+              <a:ext uri="{FF2B5EF4-FFF2-40B4-BE49-F238E27FC236}">
+                <a16:creationId xmlns:a16="http://schemas.microsoft.com/office/drawing/2014/main" id="{03BFFB12-A9BB-4C40-B3DA-179851B782DF}"/>
+              </a:ext>
+            </a:extLst>
+          </p:cNvPr>
+          <p:cNvSpPr>
+            <a:spLocks xmlns:a="http://schemas.openxmlformats.org/drawingml/2006/main" noGrp="1"/>
+          </p:cNvSpPr>
+          <p:nvPr/>
+        </p:nvSpPr>
+        <p:spPr>
+          <a:xfrm xmlns:a="http://schemas.openxmlformats.org/drawingml/2006/main">
+            <a:off x="6743700" y="4324350"/>
+            <a:ext cx="4305300" cy="419100"/>
           </a:xfrm>
           <a:prstGeom xmlns:a="http://schemas.openxmlformats.org/drawingml/2006/main" prst="rect">
             <a:avLst/>
@@ -6843,292 +8582,19 @@
           <a:lstStyle xmlns:a="http://schemas.openxmlformats.org/drawingml/2006/main"/>
           <a:p xmlns:a="http://schemas.openxmlformats.org/drawingml/2006/main">
             <a:pPr algn="l">
-              <a:defRPr sz="1050" b="1">
+              <a:defRPr sz="1350" b="0">
                 <a:solidFill>
                   <a:srgbClr val="F7F8FF"/>
                 </a:solidFill>
               </a:defRPr>
             </a:pPr>
             <a:r>
-              <a:rPr sz="1050" b="1">
+              <a:rPr sz="1350" b="0">
                 <a:solidFill>
                   <a:srgbClr val="F7F8FF"/>
                 </a:solidFill>
               </a:rPr>
-              <a:t>PUT /ratings</a:t>
-            </a:r>
-          </a:p>
-        </p:txBody>
-      </p:sp>
-      <p:sp>
-        <p:nvSpPr>
-          <p:cNvPr id="15" name="">
-            <a:extLst xmlns:a="http://schemas.openxmlformats.org/drawingml/2006/main">
-              <a:ext uri="{FF2B5EF4-FFF2-40B4-BE49-F238E27FC236}">
-                <a16:creationId xmlns:a16="http://schemas.microsoft.com/office/drawing/2014/main" id="{905D02D5-9F6B-4D0B-A456-208103C344A4}"/>
-              </a:ext>
-            </a:extLst>
-          </p:cNvPr>
-          <p:cNvSpPr>
-            <a:spLocks xmlns:a="http://schemas.openxmlformats.org/drawingml/2006/main" noGrp="1"/>
-          </p:cNvSpPr>
-          <p:nvPr/>
-        </p:nvSpPr>
-        <p:spPr>
-          <a:xfrm xmlns:a="http://schemas.openxmlformats.org/drawingml/2006/main">
-            <a:off x="6286500" y="3714750"/>
-            <a:ext cx="2133600" cy="476250"/>
-          </a:xfrm>
-          <a:prstGeom xmlns:a="http://schemas.openxmlformats.org/drawingml/2006/main" prst="roundRect">
-            <a:avLst>
-              <a:gd name="adj" fmla="val 24000"/>
-            </a:avLst>
-          </a:prstGeom>
-          <a:solidFill xmlns:a="http://schemas.openxmlformats.org/drawingml/2006/main">
-            <a:srgbClr val="07131F"/>
-          </a:solidFill>
-          <a:ln xmlns:a="http://schemas.openxmlformats.org/drawingml/2006/main" w="9525">
-            <a:solidFill>
-              <a:srgbClr val="0A84FF"/>
-            </a:solidFill>
-            <a:prstDash val="solid"/>
-          </a:ln>
-        </p:spPr>
-        <p:style>
-          <a:lnRef xmlns:a="http://schemas.openxmlformats.org/drawingml/2006/main" idx="0"/>
-          <a:fillRef xmlns:a="http://schemas.openxmlformats.org/drawingml/2006/main" idx="0"/>
-          <a:effectRef xmlns:a="http://schemas.openxmlformats.org/drawingml/2006/main" idx="4"/>
-          <a:fontRef xmlns:a="http://schemas.openxmlformats.org/drawingml/2006/main" idx="major"/>
-        </p:style>
-      </p:sp>
-      <p:sp>
-        <p:nvSpPr>
-          <p:cNvPr id="16" name="">
-            <a:extLst xmlns:a="http://schemas.openxmlformats.org/drawingml/2006/main">
-              <a:ext uri="{FF2B5EF4-FFF2-40B4-BE49-F238E27FC236}">
-                <a16:creationId xmlns:a16="http://schemas.microsoft.com/office/drawing/2014/main" id="{79F4D8AC-2E32-4C46-8A02-D0DEBCF6FECA}"/>
-              </a:ext>
-            </a:extLst>
-          </p:cNvPr>
-          <p:cNvSpPr>
-            <a:spLocks xmlns:a="http://schemas.openxmlformats.org/drawingml/2006/main" noGrp="1"/>
-          </p:cNvSpPr>
-          <p:nvPr/>
-        </p:nvSpPr>
-        <p:spPr>
-          <a:xfrm xmlns:a="http://schemas.openxmlformats.org/drawingml/2006/main">
-            <a:off x="6400800" y="3857625"/>
-            <a:ext cx="1905000" cy="190500"/>
-          </a:xfrm>
-          <a:prstGeom xmlns:a="http://schemas.openxmlformats.org/drawingml/2006/main" prst="rect">
-            <a:avLst/>
-          </a:prstGeom>
-          <a:noFill xmlns:a="http://schemas.openxmlformats.org/drawingml/2006/main"/>
-          <a:ln xmlns:a="http://schemas.openxmlformats.org/drawingml/2006/main" w="0">
-            <a:noFill/>
-            <a:prstDash val="solid"/>
-          </a:ln>
-        </p:spPr>
-        <p:txBody>
-          <a:bodyPr xmlns:a="http://schemas.openxmlformats.org/drawingml/2006/main"/>
-          <a:lstStyle xmlns:a="http://schemas.openxmlformats.org/drawingml/2006/main"/>
-          <a:p xmlns:a="http://schemas.openxmlformats.org/drawingml/2006/main">
-            <a:pPr algn="l">
-              <a:defRPr sz="1050" b="1">
-                <a:solidFill>
-                  <a:srgbClr val="F7F8FF"/>
-                </a:solidFill>
-              </a:defRPr>
-            </a:pPr>
-            <a:r>
-              <a:rPr sz="1050" b="1">
-                <a:solidFill>
-                  <a:srgbClr val="F7F8FF"/>
-                </a:solidFill>
-              </a:rPr>
-              <a:t>POST /comments</a:t>
-            </a:r>
-          </a:p>
-        </p:txBody>
-      </p:sp>
-      <p:sp>
-        <p:nvSpPr>
-          <p:cNvPr id="17" name="">
-            <a:extLst xmlns:a="http://schemas.openxmlformats.org/drawingml/2006/main">
-              <a:ext uri="{FF2B5EF4-FFF2-40B4-BE49-F238E27FC236}">
-                <a16:creationId xmlns:a16="http://schemas.microsoft.com/office/drawing/2014/main" id="{A13DE3F7-8AF2-4AD8-99DE-C567E0830D01}"/>
-              </a:ext>
-            </a:extLst>
-          </p:cNvPr>
-          <p:cNvSpPr>
-            <a:spLocks xmlns:a="http://schemas.openxmlformats.org/drawingml/2006/main" noGrp="1"/>
-          </p:cNvSpPr>
-          <p:nvPr/>
-        </p:nvSpPr>
-        <p:spPr>
-          <a:xfrm xmlns:a="http://schemas.openxmlformats.org/drawingml/2006/main">
-            <a:off x="8667750" y="3714750"/>
-            <a:ext cx="2133600" cy="476250"/>
-          </a:xfrm>
-          <a:prstGeom xmlns:a="http://schemas.openxmlformats.org/drawingml/2006/main" prst="roundRect">
-            <a:avLst>
-              <a:gd name="adj" fmla="val 24000"/>
-            </a:avLst>
-          </a:prstGeom>
-          <a:solidFill xmlns:a="http://schemas.openxmlformats.org/drawingml/2006/main">
-            <a:srgbClr val="07131F"/>
-          </a:solidFill>
-          <a:ln xmlns:a="http://schemas.openxmlformats.org/drawingml/2006/main" w="9525">
-            <a:solidFill>
-              <a:srgbClr val="66D4CF"/>
-            </a:solidFill>
-            <a:prstDash val="solid"/>
-          </a:ln>
-        </p:spPr>
-        <p:style>
-          <a:lnRef xmlns:a="http://schemas.openxmlformats.org/drawingml/2006/main" idx="0"/>
-          <a:fillRef xmlns:a="http://schemas.openxmlformats.org/drawingml/2006/main" idx="0"/>
-          <a:effectRef xmlns:a="http://schemas.openxmlformats.org/drawingml/2006/main" idx="4"/>
-          <a:fontRef xmlns:a="http://schemas.openxmlformats.org/drawingml/2006/main" idx="major"/>
-        </p:style>
-      </p:sp>
-      <p:sp>
-        <p:nvSpPr>
-          <p:cNvPr id="18" name="">
-            <a:extLst xmlns:a="http://schemas.openxmlformats.org/drawingml/2006/main">
-              <a:ext uri="{FF2B5EF4-FFF2-40B4-BE49-F238E27FC236}">
-                <a16:creationId xmlns:a16="http://schemas.microsoft.com/office/drawing/2014/main" id="{E277EBB0-E7EF-48B5-A54A-6096B3885CA0}"/>
-              </a:ext>
-            </a:extLst>
-          </p:cNvPr>
-          <p:cNvSpPr>
-            <a:spLocks xmlns:a="http://schemas.openxmlformats.org/drawingml/2006/main" noGrp="1"/>
-          </p:cNvSpPr>
-          <p:nvPr/>
-        </p:nvSpPr>
-        <p:spPr>
-          <a:xfrm xmlns:a="http://schemas.openxmlformats.org/drawingml/2006/main">
-            <a:off x="8782050" y="3857625"/>
-            <a:ext cx="1905000" cy="190500"/>
-          </a:xfrm>
-          <a:prstGeom xmlns:a="http://schemas.openxmlformats.org/drawingml/2006/main" prst="rect">
-            <a:avLst/>
-          </a:prstGeom>
-          <a:noFill xmlns:a="http://schemas.openxmlformats.org/drawingml/2006/main"/>
-          <a:ln xmlns:a="http://schemas.openxmlformats.org/drawingml/2006/main" w="0">
-            <a:noFill/>
-            <a:prstDash val="solid"/>
-          </a:ln>
-        </p:spPr>
-        <p:txBody>
-          <a:bodyPr xmlns:a="http://schemas.openxmlformats.org/drawingml/2006/main"/>
-          <a:lstStyle xmlns:a="http://schemas.openxmlformats.org/drawingml/2006/main"/>
-          <a:p xmlns:a="http://schemas.openxmlformats.org/drawingml/2006/main">
-            <a:pPr algn="l">
-              <a:defRPr sz="1050" b="1">
-                <a:solidFill>
-                  <a:srgbClr val="F7F8FF"/>
-                </a:solidFill>
-              </a:defRPr>
-            </a:pPr>
-            <a:r>
-              <a:rPr sz="1050" b="1">
-                <a:solidFill>
-                  <a:srgbClr val="F7F8FF"/>
-                </a:solidFill>
-              </a:rPr>
-              <a:t>POST /recommendations</a:t>
-            </a:r>
-          </a:p>
-        </p:txBody>
-      </p:sp>
-      <p:sp>
-        <p:nvSpPr>
-          <p:cNvPr id="19" name="">
-            <a:extLst xmlns:a="http://schemas.openxmlformats.org/drawingml/2006/main">
-              <a:ext uri="{FF2B5EF4-FFF2-40B4-BE49-F238E27FC236}">
-                <a16:creationId xmlns:a16="http://schemas.microsoft.com/office/drawing/2014/main" id="{885178B0-7916-44E7-9DC7-AB21C9F8E7FB}"/>
-              </a:ext>
-            </a:extLst>
-          </p:cNvPr>
-          <p:cNvSpPr>
-            <a:spLocks xmlns:a="http://schemas.openxmlformats.org/drawingml/2006/main" noGrp="1"/>
-          </p:cNvSpPr>
-          <p:nvPr/>
-        </p:nvSpPr>
-        <p:spPr>
-          <a:xfrm xmlns:a="http://schemas.openxmlformats.org/drawingml/2006/main">
-            <a:off x="6286500" y="4419600"/>
-            <a:ext cx="2133600" cy="476250"/>
-          </a:xfrm>
-          <a:prstGeom xmlns:a="http://schemas.openxmlformats.org/drawingml/2006/main" prst="roundRect">
-            <a:avLst>
-              <a:gd name="adj" fmla="val 24000"/>
-            </a:avLst>
-          </a:prstGeom>
-          <a:solidFill xmlns:a="http://schemas.openxmlformats.org/drawingml/2006/main">
-            <a:srgbClr val="07131F"/>
-          </a:solidFill>
-          <a:ln xmlns:a="http://schemas.openxmlformats.org/drawingml/2006/main" w="9525">
-            <a:solidFill>
-              <a:srgbClr val="0A84FF"/>
-            </a:solidFill>
-            <a:prstDash val="solid"/>
-          </a:ln>
-        </p:spPr>
-        <p:style>
-          <a:lnRef xmlns:a="http://schemas.openxmlformats.org/drawingml/2006/main" idx="0"/>
-          <a:fillRef xmlns:a="http://schemas.openxmlformats.org/drawingml/2006/main" idx="0"/>
-          <a:effectRef xmlns:a="http://schemas.openxmlformats.org/drawingml/2006/main" idx="4"/>
-          <a:fontRef xmlns:a="http://schemas.openxmlformats.org/drawingml/2006/main" idx="major"/>
-        </p:style>
-      </p:sp>
-      <p:sp>
-        <p:nvSpPr>
-          <p:cNvPr id="20" name="">
-            <a:extLst xmlns:a="http://schemas.openxmlformats.org/drawingml/2006/main">
-              <a:ext uri="{FF2B5EF4-FFF2-40B4-BE49-F238E27FC236}">
-                <a16:creationId xmlns:a16="http://schemas.microsoft.com/office/drawing/2014/main" id="{72DE3C44-DCA3-42B3-ABC2-43CF29E3DEEC}"/>
-              </a:ext>
-            </a:extLst>
-          </p:cNvPr>
-          <p:cNvSpPr>
-            <a:spLocks xmlns:a="http://schemas.openxmlformats.org/drawingml/2006/main" noGrp="1"/>
-          </p:cNvSpPr>
-          <p:nvPr/>
-        </p:nvSpPr>
-        <p:spPr>
-          <a:xfrm xmlns:a="http://schemas.openxmlformats.org/drawingml/2006/main">
-            <a:off x="6400800" y="4562475"/>
-            <a:ext cx="1905000" cy="190500"/>
-          </a:xfrm>
-          <a:prstGeom xmlns:a="http://schemas.openxmlformats.org/drawingml/2006/main" prst="rect">
-            <a:avLst/>
-          </a:prstGeom>
-          <a:noFill xmlns:a="http://schemas.openxmlformats.org/drawingml/2006/main"/>
-          <a:ln xmlns:a="http://schemas.openxmlformats.org/drawingml/2006/main" w="0">
-            <a:noFill/>
-            <a:prstDash val="solid"/>
-          </a:ln>
-        </p:spPr>
-        <p:txBody>
-          <a:bodyPr xmlns:a="http://schemas.openxmlformats.org/drawingml/2006/main"/>
-          <a:lstStyle xmlns:a="http://schemas.openxmlformats.org/drawingml/2006/main"/>
-          <a:p xmlns:a="http://schemas.openxmlformats.org/drawingml/2006/main">
-            <a:pPr algn="l">
-              <a:defRPr sz="1050" b="1">
-                <a:solidFill>
-                  <a:srgbClr val="F7F8FF"/>
-                </a:solidFill>
-              </a:defRPr>
-            </a:pPr>
-            <a:r>
-              <a:rPr sz="1050" b="1">
-                <a:solidFill>
-                  <a:srgbClr val="F7F8FF"/>
-                </a:solidFill>
-              </a:rPr>
-              <a:t>POST /ai/recommend</a:t>
+              <a:t>Запуск через Docker Compose: PostgreSQL + змінна DATABASE_URL для FastAPI.</a:t>
             </a:r>
           </a:p>
         </p:txBody>
@@ -7136,7 +8602,7 @@
     </p:spTree>
     <p:extLst>
       <p:ext uri="{BB962C8B-B14F-4D97-AF65-F5344CB8AC3E}">
-        <p14:creationId xmlns:p14="http://schemas.microsoft.com/office/powerpoint/2010/main" val="1502291245"/>
+        <p14:creationId xmlns:p14="http://schemas.microsoft.com/office/powerpoint/2010/main" val="2036824632"/>
       </p:ext>
     </p:extLst>
   </p:cSld>
@@ -7164,10 +8630,10 @@
       </p:grpSpPr>
       <p:sp>
         <p:nvSpPr>
-          <p:cNvPr id="1" name="">
-            <a:extLst xmlns:a="http://schemas.openxmlformats.org/drawingml/2006/main">
-              <a:ext uri="{FF2B5EF4-FFF2-40B4-BE49-F238E27FC236}">
-                <a16:creationId xmlns:a16="http://schemas.microsoft.com/office/drawing/2014/main" id="{11C4BF7C-5DB9-49A3-8CD4-2797A6889922}"/>
+          <p:cNvPr id="21" name="">
+            <a:extLst xmlns:a="http://schemas.openxmlformats.org/drawingml/2006/main">
+              <a:ext uri="{FF2B5EF4-FFF2-40B4-BE49-F238E27FC236}">
+                <a16:creationId xmlns:a16="http://schemas.microsoft.com/office/drawing/2014/main" id="{49138FD9-6A60-45AE-B0C7-C5E99C9625EB}"/>
               </a:ext>
             </a:extLst>
           </p:cNvPr>
@@ -7195,7 +8661,7 @@
           <p:cNvPr id="2" name="">
             <a:extLst xmlns:a="http://schemas.openxmlformats.org/drawingml/2006/main">
               <a:ext uri="{FF2B5EF4-FFF2-40B4-BE49-F238E27FC236}">
-                <a16:creationId xmlns:a16="http://schemas.microsoft.com/office/drawing/2014/main" id="{B22F8FF4-D21F-40D2-A88B-01C26048265A}"/>
+                <a16:creationId xmlns:a16="http://schemas.microsoft.com/office/drawing/2014/main" id="{4EC51824-F143-45FE-A66D-BA82EF50FB14}"/>
               </a:ext>
             </a:extLst>
           </p:cNvPr>
@@ -7223,7 +8689,7 @@
           <p:cNvPr id="3" name="">
             <a:extLst xmlns:a="http://schemas.openxmlformats.org/drawingml/2006/main">
               <a:ext uri="{FF2B5EF4-FFF2-40B4-BE49-F238E27FC236}">
-                <a16:creationId xmlns:a16="http://schemas.microsoft.com/office/drawing/2014/main" id="{DBDA3C9F-09E6-4892-818F-CB1DA47BEA80}"/>
+                <a16:creationId xmlns:a16="http://schemas.microsoft.com/office/drawing/2014/main" id="{BBBC2B63-DF64-4CA2-A443-DAE9066772C3}"/>
               </a:ext>
             </a:extLst>
           </p:cNvPr>
@@ -7273,7 +8739,7 @@
           <p:cNvPr id="4" name="">
             <a:extLst xmlns:a="http://schemas.openxmlformats.org/drawingml/2006/main">
               <a:ext uri="{FF2B5EF4-FFF2-40B4-BE49-F238E27FC236}">
-                <a16:creationId xmlns:a16="http://schemas.microsoft.com/office/drawing/2014/main" id="{752C2BC8-3A00-45BC-B90B-3493AC995452}"/>
+                <a16:creationId xmlns:a16="http://schemas.microsoft.com/office/drawing/2014/main" id="{AA645981-6C81-4A23-B152-D393C478CB32}"/>
               </a:ext>
             </a:extLst>
           </p:cNvPr>
@@ -7313,7 +8779,7 @@
                   <a:srgbClr val="F7F8FF"/>
                 </a:solidFill>
               </a:rPr>
-              <a:t>Рекомендації залежать від дій користувача</a:t>
+              <a:t>FastAPI став шаром між додатком і PostgreSQL</a:t>
             </a:r>
           </a:p>
         </p:txBody>
@@ -7323,7 +8789,7 @@
           <p:cNvPr id="5" name="">
             <a:extLst xmlns:a="http://schemas.openxmlformats.org/drawingml/2006/main">
               <a:ext uri="{FF2B5EF4-FFF2-40B4-BE49-F238E27FC236}">
-                <a16:creationId xmlns:a16="http://schemas.microsoft.com/office/drawing/2014/main" id="{CF2C51D6-DC5E-49A5-8914-A534AB96C98F}"/>
+                <a16:creationId xmlns:a16="http://schemas.microsoft.com/office/drawing/2014/main" id="{D3B21022-D491-4867-B2FE-1B6AB4AFFE10}"/>
               </a:ext>
             </a:extLst>
           </p:cNvPr>
@@ -7363,108 +8829,668 @@
                   <a:srgbClr val="A9B0C2"/>
                 </a:solidFill>
               </a:rPr>
-              <a:t>Підбір фільмів враховує запит, жанрові смаки, оцінки, переглянуті фільми і коментарі.</a:t>
+              <a:t>API приймає запити з інтерфейсу, перевіряє структуру даних через Pydantic і виконує SQL-запити.</a:t>
             </a:r>
           </a:p>
         </p:txBody>
       </p:sp>
       <p:pic>
         <p:nvPicPr>
-          <p:cNvPr id="14" name=""/>
+          <p:cNvPr id="26" name=""/>
           <p:cNvPicPr>
             <a:picLocks xmlns:a="http://schemas.openxmlformats.org/drawingml/2006/main" noChangeAspect="1"/>
           </p:cNvPicPr>
           <p:nvPr/>
         </p:nvPicPr>
         <p:blipFill>
-          <a:blip xmlns:r="http://schemas.openxmlformats.org/officeDocument/2006/relationships" xmlns:a="http://schemas.openxmlformats.org/drawingml/2006/main" r:embed="Rff16080b756e4708"/>
-          <a:srcRect xmlns:a="http://schemas.openxmlformats.org/drawingml/2006/main" l="11715" t="0" r="11715" b="0"/>
-          <a:stretch xmlns:a="http://schemas.openxmlformats.org/drawingml/2006/main">
-            <a:fillRect l="0" t="0" r="0" b="0"/>
-          </a:stretch>
+          <a:blip xmlns:r="http://schemas.openxmlformats.org/officeDocument/2006/relationships" xmlns:a="http://schemas.openxmlformats.org/drawingml/2006/main" r:embed="Rcd02cd684a884186"/>
+          <a:stretch xmlns:a="http://schemas.openxmlformats.org/drawingml/2006/main"/>
         </p:blipFill>
         <p:spPr>
           <a:xfrm xmlns:a="http://schemas.openxmlformats.org/drawingml/2006/main">
-            <a:off x="666750" y="2228850"/>
-            <a:ext cx="4953000" cy="3638550"/>
+            <a:off x="685800" y="2416969"/>
+            <a:ext cx="5219700" cy="3262313"/>
           </a:xfrm>
           <a:prstGeom xmlns:a="http://schemas.openxmlformats.org/drawingml/2006/main" prst="roundRect">
             <a:avLst>
-              <a:gd name="adj" fmla="val 3141"/>
+              <a:gd name="adj" fmla="val 3243"/>
             </a:avLst>
           </a:prstGeom>
         </p:spPr>
       </p:pic>
-      <p:pic>
-        <p:nvPicPr>
-          <p:cNvPr id="15" name=""/>
-          <p:cNvPicPr>
-            <a:picLocks xmlns:a="http://schemas.openxmlformats.org/drawingml/2006/main" noChangeAspect="1"/>
-          </p:cNvPicPr>
-          <p:nvPr/>
-        </p:nvPicPr>
-        <p:blipFill>
-          <a:blip xmlns:r="http://schemas.openxmlformats.org/officeDocument/2006/relationships" xmlns:a="http://schemas.openxmlformats.org/drawingml/2006/main" r:embed="Rcdabddadf5154770"/>
-          <a:stretch xmlns:a="http://schemas.openxmlformats.org/drawingml/2006/main"/>
-        </p:blipFill>
-        <p:spPr>
-          <a:xfrm xmlns:a="http://schemas.openxmlformats.org/drawingml/2006/main">
-            <a:off x="7392396" y="2228850"/>
-            <a:ext cx="1903007" cy="3638550"/>
+      <p:sp>
+        <p:nvSpPr>
+          <p:cNvPr id="7" name="">
+            <a:extLst xmlns:a="http://schemas.openxmlformats.org/drawingml/2006/main">
+              <a:ext uri="{FF2B5EF4-FFF2-40B4-BE49-F238E27FC236}">
+                <a16:creationId xmlns:a16="http://schemas.microsoft.com/office/drawing/2014/main" id="{13283CB0-A8A7-40F3-9065-AC4D8E53E3A1}"/>
+              </a:ext>
+            </a:extLst>
+          </p:cNvPr>
+          <p:cNvSpPr>
+            <a:spLocks xmlns:a="http://schemas.openxmlformats.org/drawingml/2006/main" noGrp="1"/>
+          </p:cNvSpPr>
+          <p:nvPr/>
+        </p:nvSpPr>
+        <p:spPr>
+          <a:xfrm xmlns:a="http://schemas.openxmlformats.org/drawingml/2006/main">
+            <a:off x="6286500" y="2305050"/>
+            <a:ext cx="2133600" cy="476250"/>
           </a:xfrm>
           <a:prstGeom xmlns:a="http://schemas.openxmlformats.org/drawingml/2006/main" prst="roundRect">
             <a:avLst>
-              <a:gd name="adj" fmla="val 3141"/>
+              <a:gd name="adj" fmla="val 24000"/>
             </a:avLst>
           </a:prstGeom>
-        </p:spPr>
-      </p:pic>
+          <a:solidFill xmlns:a="http://schemas.openxmlformats.org/drawingml/2006/main">
+            <a:srgbClr val="07131F"/>
+          </a:solidFill>
+          <a:ln xmlns:a="http://schemas.openxmlformats.org/drawingml/2006/main" w="9525">
+            <a:solidFill>
+              <a:srgbClr val="0A84FF"/>
+            </a:solidFill>
+            <a:prstDash val="solid"/>
+          </a:ln>
+        </p:spPr>
+        <p:style>
+          <a:lnRef xmlns:a="http://schemas.openxmlformats.org/drawingml/2006/main" idx="0"/>
+          <a:fillRef xmlns:a="http://schemas.openxmlformats.org/drawingml/2006/main" idx="0"/>
+          <a:effectRef xmlns:a="http://schemas.openxmlformats.org/drawingml/2006/main" idx="4"/>
+          <a:fontRef xmlns:a="http://schemas.openxmlformats.org/drawingml/2006/main" idx="major"/>
+        </p:style>
+      </p:sp>
       <p:sp>
         <p:nvSpPr>
           <p:cNvPr id="8" name="">
             <a:extLst xmlns:a="http://schemas.openxmlformats.org/drawingml/2006/main">
               <a:ext uri="{FF2B5EF4-FFF2-40B4-BE49-F238E27FC236}">
-                <a16:creationId xmlns:a16="http://schemas.microsoft.com/office/drawing/2014/main" id="{8B0BE515-9718-43AE-9440-6F5B344A74AD}"/>
-              </a:ext>
-            </a:extLst>
-          </p:cNvPr>
-          <p:cNvSpPr>
-            <a:spLocks xmlns:a="http://schemas.openxmlformats.org/drawingml/2006/main" noGrp="1"/>
-          </p:cNvSpPr>
-          <p:nvPr/>
-        </p:nvSpPr>
-        <p:spPr>
-          <a:xfrm xmlns:a="http://schemas.openxmlformats.org/drawingml/2006/main">
-            <a:off x="1123950" y="6019800"/>
-            <a:ext cx="9525000" cy="285750"/>
-          </a:xfrm>
-          <a:prstGeom xmlns:a="http://schemas.openxmlformats.org/drawingml/2006/main" prst="rect">
-            <a:avLst/>
-          </a:prstGeom>
-          <a:noFill xmlns:a="http://schemas.openxmlformats.org/drawingml/2006/main"/>
-          <a:ln xmlns:a="http://schemas.openxmlformats.org/drawingml/2006/main" w="0">
-            <a:noFill/>
-            <a:prstDash val="solid"/>
-          </a:ln>
-        </p:spPr>
-        <p:txBody>
-          <a:bodyPr xmlns:a="http://schemas.openxmlformats.org/drawingml/2006/main"/>
-          <a:lstStyle xmlns:a="http://schemas.openxmlformats.org/drawingml/2006/main"/>
-          <a:p xmlns:a="http://schemas.openxmlformats.org/drawingml/2006/main">
-            <a:pPr algn="ctr">
-              <a:defRPr sz="1350" b="1">
-                <a:solidFill>
-                  <a:srgbClr val="66D4CF"/>
-                </a:solidFill>
-              </a:defRPr>
-            </a:pPr>
-            <a:r>
-              <a:rPr sz="1350" b="1">
-                <a:solidFill>
-                  <a:srgbClr val="66D4CF"/>
-                </a:solidFill>
-              </a:rPr>
-              <a:t>Логіка підбору: збіг жанрів + оцінка користувача + врахування переглянутих фільмів + коротке пояснення вибору.</a:t>
+                <a16:creationId xmlns:a16="http://schemas.microsoft.com/office/drawing/2014/main" id="{566493A6-3BA7-4EE0-AD43-DAF9E76B02F6}"/>
+              </a:ext>
+            </a:extLst>
+          </p:cNvPr>
+          <p:cNvSpPr>
+            <a:spLocks xmlns:a="http://schemas.openxmlformats.org/drawingml/2006/main" noGrp="1"/>
+          </p:cNvSpPr>
+          <p:nvPr/>
+        </p:nvSpPr>
+        <p:spPr>
+          <a:xfrm xmlns:a="http://schemas.openxmlformats.org/drawingml/2006/main">
+            <a:off x="6400800" y="2447925"/>
+            <a:ext cx="1905000" cy="190500"/>
+          </a:xfrm>
+          <a:prstGeom xmlns:a="http://schemas.openxmlformats.org/drawingml/2006/main" prst="rect">
+            <a:avLst/>
+          </a:prstGeom>
+          <a:noFill xmlns:a="http://schemas.openxmlformats.org/drawingml/2006/main"/>
+          <a:ln xmlns:a="http://schemas.openxmlformats.org/drawingml/2006/main" w="0">
+            <a:noFill/>
+            <a:prstDash val="solid"/>
+          </a:ln>
+        </p:spPr>
+        <p:txBody>
+          <a:bodyPr xmlns:a="http://schemas.openxmlformats.org/drawingml/2006/main"/>
+          <a:lstStyle xmlns:a="http://schemas.openxmlformats.org/drawingml/2006/main"/>
+          <a:p xmlns:a="http://schemas.openxmlformats.org/drawingml/2006/main">
+            <a:pPr algn="l">
+              <a:defRPr sz="1050" b="1">
+                <a:solidFill>
+                  <a:srgbClr val="F7F8FF"/>
+                </a:solidFill>
+              </a:defRPr>
+            </a:pPr>
+            <a:r>
+              <a:rPr sz="1050" b="1">
+                <a:solidFill>
+                  <a:srgbClr val="F7F8FF"/>
+                </a:solidFill>
+              </a:rPr>
+              <a:t>GET /health</a:t>
+            </a:r>
+          </a:p>
+        </p:txBody>
+      </p:sp>
+      <p:sp>
+        <p:nvSpPr>
+          <p:cNvPr id="9" name="">
+            <a:extLst xmlns:a="http://schemas.openxmlformats.org/drawingml/2006/main">
+              <a:ext uri="{FF2B5EF4-FFF2-40B4-BE49-F238E27FC236}">
+                <a16:creationId xmlns:a16="http://schemas.microsoft.com/office/drawing/2014/main" id="{00872FE0-272A-44D7-905F-44D302CEBDDA}"/>
+              </a:ext>
+            </a:extLst>
+          </p:cNvPr>
+          <p:cNvSpPr>
+            <a:spLocks xmlns:a="http://schemas.openxmlformats.org/drawingml/2006/main" noGrp="1"/>
+          </p:cNvSpPr>
+          <p:nvPr/>
+        </p:nvSpPr>
+        <p:spPr>
+          <a:xfrm xmlns:a="http://schemas.openxmlformats.org/drawingml/2006/main">
+            <a:off x="8667750" y="2305050"/>
+            <a:ext cx="2133600" cy="476250"/>
+          </a:xfrm>
+          <a:prstGeom xmlns:a="http://schemas.openxmlformats.org/drawingml/2006/main" prst="roundRect">
+            <a:avLst>
+              <a:gd name="adj" fmla="val 24000"/>
+            </a:avLst>
+          </a:prstGeom>
+          <a:solidFill xmlns:a="http://schemas.openxmlformats.org/drawingml/2006/main">
+            <a:srgbClr val="07131F"/>
+          </a:solidFill>
+          <a:ln xmlns:a="http://schemas.openxmlformats.org/drawingml/2006/main" w="9525">
+            <a:solidFill>
+              <a:srgbClr val="66D4CF"/>
+            </a:solidFill>
+            <a:prstDash val="solid"/>
+          </a:ln>
+        </p:spPr>
+        <p:style>
+          <a:lnRef xmlns:a="http://schemas.openxmlformats.org/drawingml/2006/main" idx="0"/>
+          <a:fillRef xmlns:a="http://schemas.openxmlformats.org/drawingml/2006/main" idx="0"/>
+          <a:effectRef xmlns:a="http://schemas.openxmlformats.org/drawingml/2006/main" idx="4"/>
+          <a:fontRef xmlns:a="http://schemas.openxmlformats.org/drawingml/2006/main" idx="major"/>
+        </p:style>
+      </p:sp>
+      <p:sp>
+        <p:nvSpPr>
+          <p:cNvPr id="10" name="">
+            <a:extLst xmlns:a="http://schemas.openxmlformats.org/drawingml/2006/main">
+              <a:ext uri="{FF2B5EF4-FFF2-40B4-BE49-F238E27FC236}">
+                <a16:creationId xmlns:a16="http://schemas.microsoft.com/office/drawing/2014/main" id="{AFD392FD-6B8D-49AA-9E99-1F1DA0D286F9}"/>
+              </a:ext>
+            </a:extLst>
+          </p:cNvPr>
+          <p:cNvSpPr>
+            <a:spLocks xmlns:a="http://schemas.openxmlformats.org/drawingml/2006/main" noGrp="1"/>
+          </p:cNvSpPr>
+          <p:nvPr/>
+        </p:nvSpPr>
+        <p:spPr>
+          <a:xfrm xmlns:a="http://schemas.openxmlformats.org/drawingml/2006/main">
+            <a:off x="8782050" y="2447925"/>
+            <a:ext cx="1905000" cy="190500"/>
+          </a:xfrm>
+          <a:prstGeom xmlns:a="http://schemas.openxmlformats.org/drawingml/2006/main" prst="rect">
+            <a:avLst/>
+          </a:prstGeom>
+          <a:noFill xmlns:a="http://schemas.openxmlformats.org/drawingml/2006/main"/>
+          <a:ln xmlns:a="http://schemas.openxmlformats.org/drawingml/2006/main" w="0">
+            <a:noFill/>
+            <a:prstDash val="solid"/>
+          </a:ln>
+        </p:spPr>
+        <p:txBody>
+          <a:bodyPr xmlns:a="http://schemas.openxmlformats.org/drawingml/2006/main"/>
+          <a:lstStyle xmlns:a="http://schemas.openxmlformats.org/drawingml/2006/main"/>
+          <a:p xmlns:a="http://schemas.openxmlformats.org/drawingml/2006/main">
+            <a:pPr algn="l">
+              <a:defRPr sz="1050" b="1">
+                <a:solidFill>
+                  <a:srgbClr val="F7F8FF"/>
+                </a:solidFill>
+              </a:defRPr>
+            </a:pPr>
+            <a:r>
+              <a:rPr sz="1050" b="1">
+                <a:solidFill>
+                  <a:srgbClr val="F7F8FF"/>
+                </a:solidFill>
+              </a:rPr>
+              <a:t>GET /movies</a:t>
+            </a:r>
+          </a:p>
+        </p:txBody>
+      </p:sp>
+      <p:sp>
+        <p:nvSpPr>
+          <p:cNvPr id="11" name="">
+            <a:extLst xmlns:a="http://schemas.openxmlformats.org/drawingml/2006/main">
+              <a:ext uri="{FF2B5EF4-FFF2-40B4-BE49-F238E27FC236}">
+                <a16:creationId xmlns:a16="http://schemas.microsoft.com/office/drawing/2014/main" id="{C000B3AA-5910-4EB4-B1CF-A8763E0D0EF1}"/>
+              </a:ext>
+            </a:extLst>
+          </p:cNvPr>
+          <p:cNvSpPr>
+            <a:spLocks xmlns:a="http://schemas.openxmlformats.org/drawingml/2006/main" noGrp="1"/>
+          </p:cNvSpPr>
+          <p:nvPr/>
+        </p:nvSpPr>
+        <p:spPr>
+          <a:xfrm xmlns:a="http://schemas.openxmlformats.org/drawingml/2006/main">
+            <a:off x="6286500" y="3009900"/>
+            <a:ext cx="2133600" cy="476250"/>
+          </a:xfrm>
+          <a:prstGeom xmlns:a="http://schemas.openxmlformats.org/drawingml/2006/main" prst="roundRect">
+            <a:avLst>
+              <a:gd name="adj" fmla="val 24000"/>
+            </a:avLst>
+          </a:prstGeom>
+          <a:solidFill xmlns:a="http://schemas.openxmlformats.org/drawingml/2006/main">
+            <a:srgbClr val="07131F"/>
+          </a:solidFill>
+          <a:ln xmlns:a="http://schemas.openxmlformats.org/drawingml/2006/main" w="9525">
+            <a:solidFill>
+              <a:srgbClr val="0A84FF"/>
+            </a:solidFill>
+            <a:prstDash val="solid"/>
+          </a:ln>
+        </p:spPr>
+        <p:style>
+          <a:lnRef xmlns:a="http://schemas.openxmlformats.org/drawingml/2006/main" idx="0"/>
+          <a:fillRef xmlns:a="http://schemas.openxmlformats.org/drawingml/2006/main" idx="0"/>
+          <a:effectRef xmlns:a="http://schemas.openxmlformats.org/drawingml/2006/main" idx="4"/>
+          <a:fontRef xmlns:a="http://schemas.openxmlformats.org/drawingml/2006/main" idx="major"/>
+        </p:style>
+      </p:sp>
+      <p:sp>
+        <p:nvSpPr>
+          <p:cNvPr id="12" name="">
+            <a:extLst xmlns:a="http://schemas.openxmlformats.org/drawingml/2006/main">
+              <a:ext uri="{FF2B5EF4-FFF2-40B4-BE49-F238E27FC236}">
+                <a16:creationId xmlns:a16="http://schemas.microsoft.com/office/drawing/2014/main" id="{C1EB7104-0571-4F4F-8676-B8A8054358AA}"/>
+              </a:ext>
+            </a:extLst>
+          </p:cNvPr>
+          <p:cNvSpPr>
+            <a:spLocks xmlns:a="http://schemas.openxmlformats.org/drawingml/2006/main" noGrp="1"/>
+          </p:cNvSpPr>
+          <p:nvPr/>
+        </p:nvSpPr>
+        <p:spPr>
+          <a:xfrm xmlns:a="http://schemas.openxmlformats.org/drawingml/2006/main">
+            <a:off x="6400800" y="3152775"/>
+            <a:ext cx="1905000" cy="190500"/>
+          </a:xfrm>
+          <a:prstGeom xmlns:a="http://schemas.openxmlformats.org/drawingml/2006/main" prst="rect">
+            <a:avLst/>
+          </a:prstGeom>
+          <a:noFill xmlns:a="http://schemas.openxmlformats.org/drawingml/2006/main"/>
+          <a:ln xmlns:a="http://schemas.openxmlformats.org/drawingml/2006/main" w="0">
+            <a:noFill/>
+            <a:prstDash val="solid"/>
+          </a:ln>
+        </p:spPr>
+        <p:txBody>
+          <a:bodyPr xmlns:a="http://schemas.openxmlformats.org/drawingml/2006/main"/>
+          <a:lstStyle xmlns:a="http://schemas.openxmlformats.org/drawingml/2006/main"/>
+          <a:p xmlns:a="http://schemas.openxmlformats.org/drawingml/2006/main">
+            <a:pPr algn="l">
+              <a:defRPr sz="1050" b="1">
+                <a:solidFill>
+                  <a:srgbClr val="F7F8FF"/>
+                </a:solidFill>
+              </a:defRPr>
+            </a:pPr>
+            <a:r>
+              <a:rPr sz="1050" b="1">
+                <a:solidFill>
+                  <a:srgbClr val="F7F8FF"/>
+                </a:solidFill>
+              </a:rPr>
+              <a:t>POST /users</a:t>
+            </a:r>
+          </a:p>
+        </p:txBody>
+      </p:sp>
+      <p:sp>
+        <p:nvSpPr>
+          <p:cNvPr id="13" name="">
+            <a:extLst xmlns:a="http://schemas.openxmlformats.org/drawingml/2006/main">
+              <a:ext uri="{FF2B5EF4-FFF2-40B4-BE49-F238E27FC236}">
+                <a16:creationId xmlns:a16="http://schemas.microsoft.com/office/drawing/2014/main" id="{15CA8E87-0BFA-48F8-80DD-68C384CB3423}"/>
+              </a:ext>
+            </a:extLst>
+          </p:cNvPr>
+          <p:cNvSpPr>
+            <a:spLocks xmlns:a="http://schemas.openxmlformats.org/drawingml/2006/main" noGrp="1"/>
+          </p:cNvSpPr>
+          <p:nvPr/>
+        </p:nvSpPr>
+        <p:spPr>
+          <a:xfrm xmlns:a="http://schemas.openxmlformats.org/drawingml/2006/main">
+            <a:off x="8667750" y="3009900"/>
+            <a:ext cx="2133600" cy="476250"/>
+          </a:xfrm>
+          <a:prstGeom xmlns:a="http://schemas.openxmlformats.org/drawingml/2006/main" prst="roundRect">
+            <a:avLst>
+              <a:gd name="adj" fmla="val 24000"/>
+            </a:avLst>
+          </a:prstGeom>
+          <a:solidFill xmlns:a="http://schemas.openxmlformats.org/drawingml/2006/main">
+            <a:srgbClr val="07131F"/>
+          </a:solidFill>
+          <a:ln xmlns:a="http://schemas.openxmlformats.org/drawingml/2006/main" w="9525">
+            <a:solidFill>
+              <a:srgbClr val="66D4CF"/>
+            </a:solidFill>
+            <a:prstDash val="solid"/>
+          </a:ln>
+        </p:spPr>
+        <p:style>
+          <a:lnRef xmlns:a="http://schemas.openxmlformats.org/drawingml/2006/main" idx="0"/>
+          <a:fillRef xmlns:a="http://schemas.openxmlformats.org/drawingml/2006/main" idx="0"/>
+          <a:effectRef xmlns:a="http://schemas.openxmlformats.org/drawingml/2006/main" idx="4"/>
+          <a:fontRef xmlns:a="http://schemas.openxmlformats.org/drawingml/2006/main" idx="major"/>
+        </p:style>
+      </p:sp>
+      <p:sp>
+        <p:nvSpPr>
+          <p:cNvPr id="14" name="">
+            <a:extLst xmlns:a="http://schemas.openxmlformats.org/drawingml/2006/main">
+              <a:ext uri="{FF2B5EF4-FFF2-40B4-BE49-F238E27FC236}">
+                <a16:creationId xmlns:a16="http://schemas.microsoft.com/office/drawing/2014/main" id="{6C15BFBF-8D87-4E8E-9F97-CD3BEA69D50F}"/>
+              </a:ext>
+            </a:extLst>
+          </p:cNvPr>
+          <p:cNvSpPr>
+            <a:spLocks xmlns:a="http://schemas.openxmlformats.org/drawingml/2006/main" noGrp="1"/>
+          </p:cNvSpPr>
+          <p:nvPr/>
+        </p:nvSpPr>
+        <p:spPr>
+          <a:xfrm xmlns:a="http://schemas.openxmlformats.org/drawingml/2006/main">
+            <a:off x="8782050" y="3152775"/>
+            <a:ext cx="1905000" cy="190500"/>
+          </a:xfrm>
+          <a:prstGeom xmlns:a="http://schemas.openxmlformats.org/drawingml/2006/main" prst="rect">
+            <a:avLst/>
+          </a:prstGeom>
+          <a:noFill xmlns:a="http://schemas.openxmlformats.org/drawingml/2006/main"/>
+          <a:ln xmlns:a="http://schemas.openxmlformats.org/drawingml/2006/main" w="0">
+            <a:noFill/>
+            <a:prstDash val="solid"/>
+          </a:ln>
+        </p:spPr>
+        <p:txBody>
+          <a:bodyPr xmlns:a="http://schemas.openxmlformats.org/drawingml/2006/main"/>
+          <a:lstStyle xmlns:a="http://schemas.openxmlformats.org/drawingml/2006/main"/>
+          <a:p xmlns:a="http://schemas.openxmlformats.org/drawingml/2006/main">
+            <a:pPr algn="l">
+              <a:defRPr sz="1050" b="1">
+                <a:solidFill>
+                  <a:srgbClr val="F7F8FF"/>
+                </a:solidFill>
+              </a:defRPr>
+            </a:pPr>
+            <a:r>
+              <a:rPr sz="1050" b="1">
+                <a:solidFill>
+                  <a:srgbClr val="F7F8FF"/>
+                </a:solidFill>
+              </a:rPr>
+              <a:t>PUT /ratings</a:t>
+            </a:r>
+          </a:p>
+        </p:txBody>
+      </p:sp>
+      <p:sp>
+        <p:nvSpPr>
+          <p:cNvPr id="15" name="">
+            <a:extLst xmlns:a="http://schemas.openxmlformats.org/drawingml/2006/main">
+              <a:ext uri="{FF2B5EF4-FFF2-40B4-BE49-F238E27FC236}">
+                <a16:creationId xmlns:a16="http://schemas.microsoft.com/office/drawing/2014/main" id="{EACC6A3A-509E-4B5C-8F75-5B37B118A7EA}"/>
+              </a:ext>
+            </a:extLst>
+          </p:cNvPr>
+          <p:cNvSpPr>
+            <a:spLocks xmlns:a="http://schemas.openxmlformats.org/drawingml/2006/main" noGrp="1"/>
+          </p:cNvSpPr>
+          <p:nvPr/>
+        </p:nvSpPr>
+        <p:spPr>
+          <a:xfrm xmlns:a="http://schemas.openxmlformats.org/drawingml/2006/main">
+            <a:off x="6286500" y="3714750"/>
+            <a:ext cx="2133600" cy="476250"/>
+          </a:xfrm>
+          <a:prstGeom xmlns:a="http://schemas.openxmlformats.org/drawingml/2006/main" prst="roundRect">
+            <a:avLst>
+              <a:gd name="adj" fmla="val 24000"/>
+            </a:avLst>
+          </a:prstGeom>
+          <a:solidFill xmlns:a="http://schemas.openxmlformats.org/drawingml/2006/main">
+            <a:srgbClr val="07131F"/>
+          </a:solidFill>
+          <a:ln xmlns:a="http://schemas.openxmlformats.org/drawingml/2006/main" w="9525">
+            <a:solidFill>
+              <a:srgbClr val="0A84FF"/>
+            </a:solidFill>
+            <a:prstDash val="solid"/>
+          </a:ln>
+        </p:spPr>
+        <p:style>
+          <a:lnRef xmlns:a="http://schemas.openxmlformats.org/drawingml/2006/main" idx="0"/>
+          <a:fillRef xmlns:a="http://schemas.openxmlformats.org/drawingml/2006/main" idx="0"/>
+          <a:effectRef xmlns:a="http://schemas.openxmlformats.org/drawingml/2006/main" idx="4"/>
+          <a:fontRef xmlns:a="http://schemas.openxmlformats.org/drawingml/2006/main" idx="major"/>
+        </p:style>
+      </p:sp>
+      <p:sp>
+        <p:nvSpPr>
+          <p:cNvPr id="16" name="">
+            <a:extLst xmlns:a="http://schemas.openxmlformats.org/drawingml/2006/main">
+              <a:ext uri="{FF2B5EF4-FFF2-40B4-BE49-F238E27FC236}">
+                <a16:creationId xmlns:a16="http://schemas.microsoft.com/office/drawing/2014/main" id="{E8A67631-B4B5-4439-89C6-A998D3A2B071}"/>
+              </a:ext>
+            </a:extLst>
+          </p:cNvPr>
+          <p:cNvSpPr>
+            <a:spLocks xmlns:a="http://schemas.openxmlformats.org/drawingml/2006/main" noGrp="1"/>
+          </p:cNvSpPr>
+          <p:nvPr/>
+        </p:nvSpPr>
+        <p:spPr>
+          <a:xfrm xmlns:a="http://schemas.openxmlformats.org/drawingml/2006/main">
+            <a:off x="6400800" y="3857625"/>
+            <a:ext cx="1905000" cy="190500"/>
+          </a:xfrm>
+          <a:prstGeom xmlns:a="http://schemas.openxmlformats.org/drawingml/2006/main" prst="rect">
+            <a:avLst/>
+          </a:prstGeom>
+          <a:noFill xmlns:a="http://schemas.openxmlformats.org/drawingml/2006/main"/>
+          <a:ln xmlns:a="http://schemas.openxmlformats.org/drawingml/2006/main" w="0">
+            <a:noFill/>
+            <a:prstDash val="solid"/>
+          </a:ln>
+        </p:spPr>
+        <p:txBody>
+          <a:bodyPr xmlns:a="http://schemas.openxmlformats.org/drawingml/2006/main"/>
+          <a:lstStyle xmlns:a="http://schemas.openxmlformats.org/drawingml/2006/main"/>
+          <a:p xmlns:a="http://schemas.openxmlformats.org/drawingml/2006/main">
+            <a:pPr algn="l">
+              <a:defRPr sz="1050" b="1">
+                <a:solidFill>
+                  <a:srgbClr val="F7F8FF"/>
+                </a:solidFill>
+              </a:defRPr>
+            </a:pPr>
+            <a:r>
+              <a:rPr sz="1050" b="1">
+                <a:solidFill>
+                  <a:srgbClr val="F7F8FF"/>
+                </a:solidFill>
+              </a:rPr>
+              <a:t>POST /comments</a:t>
+            </a:r>
+          </a:p>
+        </p:txBody>
+      </p:sp>
+      <p:sp>
+        <p:nvSpPr>
+          <p:cNvPr id="17" name="">
+            <a:extLst xmlns:a="http://schemas.openxmlformats.org/drawingml/2006/main">
+              <a:ext uri="{FF2B5EF4-FFF2-40B4-BE49-F238E27FC236}">
+                <a16:creationId xmlns:a16="http://schemas.microsoft.com/office/drawing/2014/main" id="{6F83A5BD-8417-4D8E-BC92-3F71D96E70F0}"/>
+              </a:ext>
+            </a:extLst>
+          </p:cNvPr>
+          <p:cNvSpPr>
+            <a:spLocks xmlns:a="http://schemas.openxmlformats.org/drawingml/2006/main" noGrp="1"/>
+          </p:cNvSpPr>
+          <p:nvPr/>
+        </p:nvSpPr>
+        <p:spPr>
+          <a:xfrm xmlns:a="http://schemas.openxmlformats.org/drawingml/2006/main">
+            <a:off x="8667750" y="3714750"/>
+            <a:ext cx="2133600" cy="476250"/>
+          </a:xfrm>
+          <a:prstGeom xmlns:a="http://schemas.openxmlformats.org/drawingml/2006/main" prst="roundRect">
+            <a:avLst>
+              <a:gd name="adj" fmla="val 24000"/>
+            </a:avLst>
+          </a:prstGeom>
+          <a:solidFill xmlns:a="http://schemas.openxmlformats.org/drawingml/2006/main">
+            <a:srgbClr val="07131F"/>
+          </a:solidFill>
+          <a:ln xmlns:a="http://schemas.openxmlformats.org/drawingml/2006/main" w="9525">
+            <a:solidFill>
+              <a:srgbClr val="66D4CF"/>
+            </a:solidFill>
+            <a:prstDash val="solid"/>
+          </a:ln>
+        </p:spPr>
+        <p:style>
+          <a:lnRef xmlns:a="http://schemas.openxmlformats.org/drawingml/2006/main" idx="0"/>
+          <a:fillRef xmlns:a="http://schemas.openxmlformats.org/drawingml/2006/main" idx="0"/>
+          <a:effectRef xmlns:a="http://schemas.openxmlformats.org/drawingml/2006/main" idx="4"/>
+          <a:fontRef xmlns:a="http://schemas.openxmlformats.org/drawingml/2006/main" idx="major"/>
+        </p:style>
+      </p:sp>
+      <p:sp>
+        <p:nvSpPr>
+          <p:cNvPr id="18" name="">
+            <a:extLst xmlns:a="http://schemas.openxmlformats.org/drawingml/2006/main">
+              <a:ext uri="{FF2B5EF4-FFF2-40B4-BE49-F238E27FC236}">
+                <a16:creationId xmlns:a16="http://schemas.microsoft.com/office/drawing/2014/main" id="{C07EA183-65F2-4282-92E6-76B3C3EF720D}"/>
+              </a:ext>
+            </a:extLst>
+          </p:cNvPr>
+          <p:cNvSpPr>
+            <a:spLocks xmlns:a="http://schemas.openxmlformats.org/drawingml/2006/main" noGrp="1"/>
+          </p:cNvSpPr>
+          <p:nvPr/>
+        </p:nvSpPr>
+        <p:spPr>
+          <a:xfrm xmlns:a="http://schemas.openxmlformats.org/drawingml/2006/main">
+            <a:off x="8782050" y="3857625"/>
+            <a:ext cx="1905000" cy="190500"/>
+          </a:xfrm>
+          <a:prstGeom xmlns:a="http://schemas.openxmlformats.org/drawingml/2006/main" prst="rect">
+            <a:avLst/>
+          </a:prstGeom>
+          <a:noFill xmlns:a="http://schemas.openxmlformats.org/drawingml/2006/main"/>
+          <a:ln xmlns:a="http://schemas.openxmlformats.org/drawingml/2006/main" w="0">
+            <a:noFill/>
+            <a:prstDash val="solid"/>
+          </a:ln>
+        </p:spPr>
+        <p:txBody>
+          <a:bodyPr xmlns:a="http://schemas.openxmlformats.org/drawingml/2006/main"/>
+          <a:lstStyle xmlns:a="http://schemas.openxmlformats.org/drawingml/2006/main"/>
+          <a:p xmlns:a="http://schemas.openxmlformats.org/drawingml/2006/main">
+            <a:pPr algn="l">
+              <a:defRPr sz="1050" b="1">
+                <a:solidFill>
+                  <a:srgbClr val="F7F8FF"/>
+                </a:solidFill>
+              </a:defRPr>
+            </a:pPr>
+            <a:r>
+              <a:rPr sz="1050" b="1">
+                <a:solidFill>
+                  <a:srgbClr val="F7F8FF"/>
+                </a:solidFill>
+              </a:rPr>
+              <a:t>POST /recommendations</a:t>
+            </a:r>
+          </a:p>
+        </p:txBody>
+      </p:sp>
+      <p:sp>
+        <p:nvSpPr>
+          <p:cNvPr id="19" name="">
+            <a:extLst xmlns:a="http://schemas.openxmlformats.org/drawingml/2006/main">
+              <a:ext uri="{FF2B5EF4-FFF2-40B4-BE49-F238E27FC236}">
+                <a16:creationId xmlns:a16="http://schemas.microsoft.com/office/drawing/2014/main" id="{295A4616-CA0C-4896-81B2-ECFD9C8BC371}"/>
+              </a:ext>
+            </a:extLst>
+          </p:cNvPr>
+          <p:cNvSpPr>
+            <a:spLocks xmlns:a="http://schemas.openxmlformats.org/drawingml/2006/main" noGrp="1"/>
+          </p:cNvSpPr>
+          <p:nvPr/>
+        </p:nvSpPr>
+        <p:spPr>
+          <a:xfrm xmlns:a="http://schemas.openxmlformats.org/drawingml/2006/main">
+            <a:off x="6286500" y="4419600"/>
+            <a:ext cx="2133600" cy="476250"/>
+          </a:xfrm>
+          <a:prstGeom xmlns:a="http://schemas.openxmlformats.org/drawingml/2006/main" prst="roundRect">
+            <a:avLst>
+              <a:gd name="adj" fmla="val 24000"/>
+            </a:avLst>
+          </a:prstGeom>
+          <a:solidFill xmlns:a="http://schemas.openxmlformats.org/drawingml/2006/main">
+            <a:srgbClr val="07131F"/>
+          </a:solidFill>
+          <a:ln xmlns:a="http://schemas.openxmlformats.org/drawingml/2006/main" w="9525">
+            <a:solidFill>
+              <a:srgbClr val="0A84FF"/>
+            </a:solidFill>
+            <a:prstDash val="solid"/>
+          </a:ln>
+        </p:spPr>
+        <p:style>
+          <a:lnRef xmlns:a="http://schemas.openxmlformats.org/drawingml/2006/main" idx="0"/>
+          <a:fillRef xmlns:a="http://schemas.openxmlformats.org/drawingml/2006/main" idx="0"/>
+          <a:effectRef xmlns:a="http://schemas.openxmlformats.org/drawingml/2006/main" idx="4"/>
+          <a:fontRef xmlns:a="http://schemas.openxmlformats.org/drawingml/2006/main" idx="major"/>
+        </p:style>
+      </p:sp>
+      <p:sp>
+        <p:nvSpPr>
+          <p:cNvPr id="20" name="">
+            <a:extLst xmlns:a="http://schemas.openxmlformats.org/drawingml/2006/main">
+              <a:ext uri="{FF2B5EF4-FFF2-40B4-BE49-F238E27FC236}">
+                <a16:creationId xmlns:a16="http://schemas.microsoft.com/office/drawing/2014/main" id="{DD318B88-9A85-4E4D-8F07-8544761F0021}"/>
+              </a:ext>
+            </a:extLst>
+          </p:cNvPr>
+          <p:cNvSpPr>
+            <a:spLocks xmlns:a="http://schemas.openxmlformats.org/drawingml/2006/main" noGrp="1"/>
+          </p:cNvSpPr>
+          <p:nvPr/>
+        </p:nvSpPr>
+        <p:spPr>
+          <a:xfrm xmlns:a="http://schemas.openxmlformats.org/drawingml/2006/main">
+            <a:off x="6400800" y="4562475"/>
+            <a:ext cx="1905000" cy="190500"/>
+          </a:xfrm>
+          <a:prstGeom xmlns:a="http://schemas.openxmlformats.org/drawingml/2006/main" prst="rect">
+            <a:avLst/>
+          </a:prstGeom>
+          <a:noFill xmlns:a="http://schemas.openxmlformats.org/drawingml/2006/main"/>
+          <a:ln xmlns:a="http://schemas.openxmlformats.org/drawingml/2006/main" w="0">
+            <a:noFill/>
+            <a:prstDash val="solid"/>
+          </a:ln>
+        </p:spPr>
+        <p:txBody>
+          <a:bodyPr xmlns:a="http://schemas.openxmlformats.org/drawingml/2006/main"/>
+          <a:lstStyle xmlns:a="http://schemas.openxmlformats.org/drawingml/2006/main"/>
+          <a:p xmlns:a="http://schemas.openxmlformats.org/drawingml/2006/main">
+            <a:pPr algn="l">
+              <a:defRPr sz="1050" b="1">
+                <a:solidFill>
+                  <a:srgbClr val="F7F8FF"/>
+                </a:solidFill>
+              </a:defRPr>
+            </a:pPr>
+            <a:r>
+              <a:rPr sz="1050" b="1">
+                <a:solidFill>
+                  <a:srgbClr val="F7F8FF"/>
+                </a:solidFill>
+              </a:rPr>
+              <a:t>POST /ai/recommend</a:t>
             </a:r>
           </a:p>
         </p:txBody>
@@ -7472,7 +9498,7 @@
     </p:spTree>
     <p:extLst>
       <p:ext uri="{BB962C8B-B14F-4D97-AF65-F5344CB8AC3E}">
-        <p14:creationId xmlns:p14="http://schemas.microsoft.com/office/powerpoint/2010/main" val="1610450965"/>
+        <p14:creationId xmlns:p14="http://schemas.microsoft.com/office/powerpoint/2010/main" val="1704279018"/>
       </p:ext>
     </p:extLst>
   </p:cSld>
@@ -7500,10 +9526,10 @@
       </p:grpSpPr>
       <p:sp>
         <p:nvSpPr>
-          <p:cNvPr id="1" name="">
-            <a:extLst xmlns:a="http://schemas.openxmlformats.org/drawingml/2006/main">
-              <a:ext uri="{FF2B5EF4-FFF2-40B4-BE49-F238E27FC236}">
-                <a16:creationId xmlns:a16="http://schemas.microsoft.com/office/drawing/2014/main" id="{0309C698-1820-4B96-92C1-C709C1304D3B}"/>
+          <p:cNvPr id="9" name="">
+            <a:extLst xmlns:a="http://schemas.openxmlformats.org/drawingml/2006/main">
+              <a:ext uri="{FF2B5EF4-FFF2-40B4-BE49-F238E27FC236}">
+                <a16:creationId xmlns:a16="http://schemas.microsoft.com/office/drawing/2014/main" id="{52E4BE90-4F7E-48C1-92E4-0FB6D5F52475}"/>
               </a:ext>
             </a:extLst>
           </p:cNvPr>
@@ -7531,7 +9557,7 @@
           <p:cNvPr id="2" name="">
             <a:extLst xmlns:a="http://schemas.openxmlformats.org/drawingml/2006/main">
               <a:ext uri="{FF2B5EF4-FFF2-40B4-BE49-F238E27FC236}">
-                <a16:creationId xmlns:a16="http://schemas.microsoft.com/office/drawing/2014/main" id="{71686BAD-FDBC-4782-8380-964252827347}"/>
+                <a16:creationId xmlns:a16="http://schemas.microsoft.com/office/drawing/2014/main" id="{D19BF604-9B4F-4192-9F2A-D8083836531E}"/>
               </a:ext>
             </a:extLst>
           </p:cNvPr>
@@ -7559,7 +9585,7 @@
           <p:cNvPr id="3" name="">
             <a:extLst xmlns:a="http://schemas.openxmlformats.org/drawingml/2006/main">
               <a:ext uri="{FF2B5EF4-FFF2-40B4-BE49-F238E27FC236}">
-                <a16:creationId xmlns:a16="http://schemas.microsoft.com/office/drawing/2014/main" id="{1371BFA6-41B2-47BD-9742-C6893D06B46F}"/>
+                <a16:creationId xmlns:a16="http://schemas.microsoft.com/office/drawing/2014/main" id="{E132C79A-E5F6-414F-B1A6-A5C1AB58973C}"/>
               </a:ext>
             </a:extLst>
           </p:cNvPr>
@@ -7609,7 +9635,7 @@
           <p:cNvPr id="4" name="">
             <a:extLst xmlns:a="http://schemas.openxmlformats.org/drawingml/2006/main">
               <a:ext uri="{FF2B5EF4-FFF2-40B4-BE49-F238E27FC236}">
-                <a16:creationId xmlns:a16="http://schemas.microsoft.com/office/drawing/2014/main" id="{B4E8007F-DF4D-4961-8C41-442E0E1C4475}"/>
+                <a16:creationId xmlns:a16="http://schemas.microsoft.com/office/drawing/2014/main" id="{363B045D-D505-4CCD-91EE-A01429CB0F91}"/>
               </a:ext>
             </a:extLst>
           </p:cNvPr>
@@ -7649,7 +9675,7 @@
                   <a:srgbClr val="F7F8FF"/>
                 </a:solidFill>
               </a:rPr>
-              <a:t>Інтерфейс складається з кількох робочих екранів</a:t>
+              <a:t>Рекомендації залежать від дій користувача</a:t>
             </a:r>
           </a:p>
         </p:txBody>
@@ -7659,7 +9685,7 @@
           <p:cNvPr id="5" name="">
             <a:extLst xmlns:a="http://schemas.openxmlformats.org/drawingml/2006/main">
               <a:ext uri="{FF2B5EF4-FFF2-40B4-BE49-F238E27FC236}">
-                <a16:creationId xmlns:a16="http://schemas.microsoft.com/office/drawing/2014/main" id="{B08B507C-2D47-4C48-9BCB-684B524BAEEE}"/>
+                <a16:creationId xmlns:a16="http://schemas.microsoft.com/office/drawing/2014/main" id="{76C32958-E903-4119-AB65-CA157038DD88}"/>
               </a:ext>
             </a:extLst>
           </p:cNvPr>
@@ -7699,178 +9725,80 @@
                   <a:srgbClr val="A9B0C2"/>
                 </a:solidFill>
               </a:rPr>
-              <a:t>Є авторизація, вибір смаків, головна стрічка, деталі фільму, оцінки, коментарі та профіль.</a:t>
+              <a:t>Підбір фільмів враховує жанрові смаки, оцінки, переглянуті фільми і коментарі.</a:t>
             </a:r>
           </a:p>
         </p:txBody>
       </p:sp>
       <p:pic>
         <p:nvPicPr>
-          <p:cNvPr id="24" name=""/>
+          <p:cNvPr id="14" name=""/>
           <p:cNvPicPr>
             <a:picLocks xmlns:a="http://schemas.openxmlformats.org/drawingml/2006/main" noChangeAspect="1"/>
           </p:cNvPicPr>
           <p:nvPr/>
         </p:nvPicPr>
         <p:blipFill>
-          <a:blip xmlns:r="http://schemas.openxmlformats.org/officeDocument/2006/relationships" xmlns:a="http://schemas.openxmlformats.org/drawingml/2006/main" r:embed="R349faddf3736419b"/>
-          <a:srcRect xmlns:a="http://schemas.openxmlformats.org/drawingml/2006/main" l="7978" t="0" r="7978" b="0"/>
+          <a:blip xmlns:r="http://schemas.openxmlformats.org/officeDocument/2006/relationships" xmlns:a="http://schemas.openxmlformats.org/drawingml/2006/main" r:embed="R159fea66b2914e01"/>
+          <a:srcRect xmlns:a="http://schemas.openxmlformats.org/drawingml/2006/main" l="11715" t="0" r="11715" b="0"/>
           <a:stretch xmlns:a="http://schemas.openxmlformats.org/drawingml/2006/main">
             <a:fillRect l="0" t="0" r="0" b="0"/>
           </a:stretch>
         </p:blipFill>
         <p:spPr>
           <a:xfrm xmlns:a="http://schemas.openxmlformats.org/drawingml/2006/main">
-            <a:off x="685800" y="2095500"/>
-            <a:ext cx="2419350" cy="1619250"/>
+            <a:off x="666750" y="2228850"/>
+            <a:ext cx="4953000" cy="3638550"/>
           </a:xfrm>
           <a:prstGeom xmlns:a="http://schemas.openxmlformats.org/drawingml/2006/main" prst="roundRect">
             <a:avLst>
-              <a:gd name="adj" fmla="val 7059"/>
+              <a:gd name="adj" fmla="val 3141"/>
             </a:avLst>
           </a:prstGeom>
         </p:spPr>
       </p:pic>
       <p:pic>
         <p:nvPicPr>
-          <p:cNvPr id="25" name=""/>
+          <p:cNvPr id="15" name=""/>
           <p:cNvPicPr>
             <a:picLocks xmlns:a="http://schemas.openxmlformats.org/drawingml/2006/main" noChangeAspect="1"/>
           </p:cNvPicPr>
           <p:nvPr/>
         </p:nvPicPr>
         <p:blipFill>
-          <a:blip xmlns:r="http://schemas.openxmlformats.org/officeDocument/2006/relationships" xmlns:a="http://schemas.openxmlformats.org/drawingml/2006/main" r:embed="R4d968ea776c64340"/>
-          <a:srcRect xmlns:a="http://schemas.openxmlformats.org/drawingml/2006/main" l="7978" t="0" r="7978" b="0"/>
-          <a:stretch xmlns:a="http://schemas.openxmlformats.org/drawingml/2006/main">
-            <a:fillRect l="0" t="0" r="0" b="0"/>
-          </a:stretch>
+          <a:blip xmlns:r="http://schemas.openxmlformats.org/officeDocument/2006/relationships" xmlns:a="http://schemas.openxmlformats.org/drawingml/2006/main" r:embed="R9f2aa51837224b76"/>
+          <a:stretch xmlns:a="http://schemas.openxmlformats.org/drawingml/2006/main"/>
         </p:blipFill>
         <p:spPr>
           <a:xfrm xmlns:a="http://schemas.openxmlformats.org/drawingml/2006/main">
-            <a:off x="3295650" y="2095500"/>
-            <a:ext cx="2419350" cy="1619250"/>
+            <a:off x="7392396" y="2228850"/>
+            <a:ext cx="1903007" cy="3638550"/>
           </a:xfrm>
           <a:prstGeom xmlns:a="http://schemas.openxmlformats.org/drawingml/2006/main" prst="roundRect">
             <a:avLst>
-              <a:gd name="adj" fmla="val 7059"/>
+              <a:gd name="adj" fmla="val 3141"/>
             </a:avLst>
           </a:prstGeom>
         </p:spPr>
       </p:pic>
-      <p:pic>
-        <p:nvPicPr>
-          <p:cNvPr id="26" name=""/>
-          <p:cNvPicPr>
-            <a:picLocks xmlns:a="http://schemas.openxmlformats.org/drawingml/2006/main" noChangeAspect="1"/>
-          </p:cNvPicPr>
-          <p:nvPr/>
-        </p:nvPicPr>
-        <p:blipFill>
-          <a:blip xmlns:r="http://schemas.openxmlformats.org/officeDocument/2006/relationships" xmlns:a="http://schemas.openxmlformats.org/drawingml/2006/main" r:embed="Rf2cf3b55fa234898"/>
-          <a:srcRect xmlns:a="http://schemas.openxmlformats.org/drawingml/2006/main" l="7978" t="0" r="7978" b="0"/>
-          <a:stretch xmlns:a="http://schemas.openxmlformats.org/drawingml/2006/main">
-            <a:fillRect l="0" t="0" r="0" b="0"/>
-          </a:stretch>
-        </p:blipFill>
-        <p:spPr>
-          <a:xfrm xmlns:a="http://schemas.openxmlformats.org/drawingml/2006/main">
-            <a:off x="5905500" y="2095500"/>
-            <a:ext cx="2419350" cy="1619250"/>
-          </a:xfrm>
-          <a:prstGeom xmlns:a="http://schemas.openxmlformats.org/drawingml/2006/main" prst="roundRect">
-            <a:avLst>
-              <a:gd name="adj" fmla="val 7059"/>
-            </a:avLst>
-          </a:prstGeom>
-        </p:spPr>
-      </p:pic>
-      <p:pic>
-        <p:nvPicPr>
-          <p:cNvPr id="27" name=""/>
-          <p:cNvPicPr>
-            <a:picLocks xmlns:a="http://schemas.openxmlformats.org/drawingml/2006/main" noChangeAspect="1"/>
-          </p:cNvPicPr>
-          <p:nvPr/>
-        </p:nvPicPr>
-        <p:blipFill>
-          <a:blip xmlns:r="http://schemas.openxmlformats.org/officeDocument/2006/relationships" xmlns:a="http://schemas.openxmlformats.org/drawingml/2006/main" r:embed="R1d003a3b54344fc9"/>
-          <a:srcRect xmlns:a="http://schemas.openxmlformats.org/drawingml/2006/main" l="7978" t="0" r="7978" b="0"/>
-          <a:stretch xmlns:a="http://schemas.openxmlformats.org/drawingml/2006/main">
-            <a:fillRect l="0" t="0" r="0" b="0"/>
-          </a:stretch>
-        </p:blipFill>
-        <p:spPr>
-          <a:xfrm xmlns:a="http://schemas.openxmlformats.org/drawingml/2006/main">
-            <a:off x="8515350" y="2095500"/>
-            <a:ext cx="2419350" cy="1619250"/>
-          </a:xfrm>
-          <a:prstGeom xmlns:a="http://schemas.openxmlformats.org/drawingml/2006/main" prst="roundRect">
-            <a:avLst>
-              <a:gd name="adj" fmla="val 7059"/>
-            </a:avLst>
-          </a:prstGeom>
-        </p:spPr>
-      </p:pic>
-      <p:sp>
-        <p:nvSpPr>
-          <p:cNvPr id="10" name="">
-            <a:extLst xmlns:a="http://schemas.openxmlformats.org/drawingml/2006/main">
-              <a:ext uri="{FF2B5EF4-FFF2-40B4-BE49-F238E27FC236}">
-                <a16:creationId xmlns:a16="http://schemas.microsoft.com/office/drawing/2014/main" id="{A827F295-B8E5-4C01-8979-8D5AFA672DA3}"/>
-              </a:ext>
-            </a:extLst>
-          </p:cNvPr>
-          <p:cNvSpPr>
-            <a:spLocks xmlns:a="http://schemas.openxmlformats.org/drawingml/2006/main" noGrp="1"/>
-          </p:cNvSpPr>
-          <p:nvPr/>
-        </p:nvSpPr>
-        <p:spPr>
-          <a:xfrm xmlns:a="http://schemas.openxmlformats.org/drawingml/2006/main">
-            <a:off x="990600" y="4324350"/>
-            <a:ext cx="323850" cy="323850"/>
-          </a:xfrm>
-          <a:prstGeom xmlns:a="http://schemas.openxmlformats.org/drawingml/2006/main" prst="roundRect">
-            <a:avLst>
-              <a:gd name="adj" fmla="val 35294"/>
-            </a:avLst>
-          </a:prstGeom>
-          <a:solidFill xmlns:a="http://schemas.openxmlformats.org/drawingml/2006/main">
-            <a:srgbClr val="0B1822"/>
-          </a:solidFill>
-          <a:ln xmlns:a="http://schemas.openxmlformats.org/drawingml/2006/main" w="9525">
-            <a:solidFill>
-              <a:srgbClr val="66D4CF"/>
-            </a:solidFill>
-            <a:prstDash val="solid"/>
-          </a:ln>
-        </p:spPr>
-        <p:style>
-          <a:lnRef xmlns:a="http://schemas.openxmlformats.org/drawingml/2006/main" idx="0"/>
-          <a:fillRef xmlns:a="http://schemas.openxmlformats.org/drawingml/2006/main" idx="0"/>
-          <a:effectRef xmlns:a="http://schemas.openxmlformats.org/drawingml/2006/main" idx="4"/>
-          <a:fontRef xmlns:a="http://schemas.openxmlformats.org/drawingml/2006/main" idx="major"/>
-        </p:style>
-      </p:sp>
-      <p:sp>
-        <p:nvSpPr>
-          <p:cNvPr id="11" name="">
-            <a:extLst xmlns:a="http://schemas.openxmlformats.org/drawingml/2006/main">
-              <a:ext uri="{FF2B5EF4-FFF2-40B4-BE49-F238E27FC236}">
-                <a16:creationId xmlns:a16="http://schemas.microsoft.com/office/drawing/2014/main" id="{4A55721E-ADC4-4ADF-8751-FAF3B1B88E73}"/>
-              </a:ext>
-            </a:extLst>
-          </p:cNvPr>
-          <p:cNvSpPr>
-            <a:spLocks xmlns:a="http://schemas.openxmlformats.org/drawingml/2006/main" noGrp="1"/>
-          </p:cNvSpPr>
-          <p:nvPr/>
-        </p:nvSpPr>
-        <p:spPr>
-          <a:xfrm xmlns:a="http://schemas.openxmlformats.org/drawingml/2006/main">
-            <a:off x="990600" y="4391025"/>
-            <a:ext cx="323850" cy="171450"/>
+      <p:sp>
+        <p:nvSpPr>
+          <p:cNvPr id="8" name="">
+            <a:extLst xmlns:a="http://schemas.openxmlformats.org/drawingml/2006/main">
+              <a:ext uri="{FF2B5EF4-FFF2-40B4-BE49-F238E27FC236}">
+                <a16:creationId xmlns:a16="http://schemas.microsoft.com/office/drawing/2014/main" id="{4D801C93-6E3A-49EA-90C5-20A2A4295BBE}"/>
+              </a:ext>
+            </a:extLst>
+          </p:cNvPr>
+          <p:cNvSpPr>
+            <a:spLocks xmlns:a="http://schemas.openxmlformats.org/drawingml/2006/main" noGrp="1"/>
+          </p:cNvSpPr>
+          <p:nvPr/>
+        </p:nvSpPr>
+        <p:spPr>
+          <a:xfrm xmlns:a="http://schemas.openxmlformats.org/drawingml/2006/main">
+            <a:off x="1123950" y="6019800"/>
+            <a:ext cx="9525000" cy="285750"/>
           </a:xfrm>
           <a:prstGeom xmlns:a="http://schemas.openxmlformats.org/drawingml/2006/main" prst="rect">
             <a:avLst/>
@@ -7886,351 +9814,19 @@
           <a:lstStyle xmlns:a="http://schemas.openxmlformats.org/drawingml/2006/main"/>
           <a:p xmlns:a="http://schemas.openxmlformats.org/drawingml/2006/main">
             <a:pPr algn="ctr">
-              <a:defRPr sz="1050" b="1">
+              <a:defRPr sz="1350" b="1">
                 <a:solidFill>
                   <a:srgbClr val="66D4CF"/>
                 </a:solidFill>
               </a:defRPr>
             </a:pPr>
             <a:r>
-              <a:rPr sz="1050" b="1">
+              <a:rPr sz="1350" b="1">
                 <a:solidFill>
                   <a:srgbClr val="66D4CF"/>
                 </a:solidFill>
               </a:rPr>
-              <a:t>1</a:t>
-            </a:r>
-          </a:p>
-        </p:txBody>
-      </p:sp>
-      <p:sp>
-        <p:nvSpPr>
-          <p:cNvPr id="12" name="">
-            <a:extLst xmlns:a="http://schemas.openxmlformats.org/drawingml/2006/main">
-              <a:ext uri="{FF2B5EF4-FFF2-40B4-BE49-F238E27FC236}">
-                <a16:creationId xmlns:a16="http://schemas.microsoft.com/office/drawing/2014/main" id="{2CB6D854-E202-4F68-98C5-41F5DA7DD2E5}"/>
-              </a:ext>
-            </a:extLst>
-          </p:cNvPr>
-          <p:cNvSpPr>
-            <a:spLocks xmlns:a="http://schemas.openxmlformats.org/drawingml/2006/main" noGrp="1"/>
-          </p:cNvSpPr>
-          <p:nvPr/>
-        </p:nvSpPr>
-        <p:spPr>
-          <a:xfrm xmlns:a="http://schemas.openxmlformats.org/drawingml/2006/main">
-            <a:off x="1447800" y="4343400"/>
-            <a:ext cx="8877300" cy="419100"/>
-          </a:xfrm>
-          <a:prstGeom xmlns:a="http://schemas.openxmlformats.org/drawingml/2006/main" prst="rect">
-            <a:avLst/>
-          </a:prstGeom>
-          <a:noFill xmlns:a="http://schemas.openxmlformats.org/drawingml/2006/main"/>
-          <a:ln xmlns:a="http://schemas.openxmlformats.org/drawingml/2006/main" w="0">
-            <a:noFill/>
-            <a:prstDash val="solid"/>
-          </a:ln>
-        </p:spPr>
-        <p:txBody>
-          <a:bodyPr xmlns:a="http://schemas.openxmlformats.org/drawingml/2006/main"/>
-          <a:lstStyle xmlns:a="http://schemas.openxmlformats.org/drawingml/2006/main"/>
-          <a:p xmlns:a="http://schemas.openxmlformats.org/drawingml/2006/main">
-            <a:pPr algn="l">
-              <a:defRPr sz="1350" b="0">
-                <a:solidFill>
-                  <a:srgbClr val="F7F8FF"/>
-                </a:solidFill>
-              </a:defRPr>
-            </a:pPr>
-            <a:r>
-              <a:rPr sz="1350" b="0">
-                <a:solidFill>
-                  <a:srgbClr val="F7F8FF"/>
-                </a:solidFill>
-              </a:rPr>
-              <a:t>Афіші, блок трейлера, анімації та match meter роблять каталог зрозумілішим.</a:t>
-            </a:r>
-          </a:p>
-        </p:txBody>
-      </p:sp>
-      <p:sp>
-        <p:nvSpPr>
-          <p:cNvPr id="13" name="">
-            <a:extLst xmlns:a="http://schemas.openxmlformats.org/drawingml/2006/main">
-              <a:ext uri="{FF2B5EF4-FFF2-40B4-BE49-F238E27FC236}">
-                <a16:creationId xmlns:a16="http://schemas.microsoft.com/office/drawing/2014/main" id="{67C8ED78-671C-4E20-8257-C77448206FA9}"/>
-              </a:ext>
-            </a:extLst>
-          </p:cNvPr>
-          <p:cNvSpPr>
-            <a:spLocks xmlns:a="http://schemas.openxmlformats.org/drawingml/2006/main" noGrp="1"/>
-          </p:cNvSpPr>
-          <p:nvPr/>
-        </p:nvSpPr>
-        <p:spPr>
-          <a:xfrm xmlns:a="http://schemas.openxmlformats.org/drawingml/2006/main">
-            <a:off x="990600" y="4876800"/>
-            <a:ext cx="323850" cy="323850"/>
-          </a:xfrm>
-          <a:prstGeom xmlns:a="http://schemas.openxmlformats.org/drawingml/2006/main" prst="roundRect">
-            <a:avLst>
-              <a:gd name="adj" fmla="val 35294"/>
-            </a:avLst>
-          </a:prstGeom>
-          <a:solidFill xmlns:a="http://schemas.openxmlformats.org/drawingml/2006/main">
-            <a:srgbClr val="0B1822"/>
-          </a:solidFill>
-          <a:ln xmlns:a="http://schemas.openxmlformats.org/drawingml/2006/main" w="9525">
-            <a:solidFill>
-              <a:srgbClr val="66D4CF"/>
-            </a:solidFill>
-            <a:prstDash val="solid"/>
-          </a:ln>
-        </p:spPr>
-        <p:style>
-          <a:lnRef xmlns:a="http://schemas.openxmlformats.org/drawingml/2006/main" idx="0"/>
-          <a:fillRef xmlns:a="http://schemas.openxmlformats.org/drawingml/2006/main" idx="0"/>
-          <a:effectRef xmlns:a="http://schemas.openxmlformats.org/drawingml/2006/main" idx="4"/>
-          <a:fontRef xmlns:a="http://schemas.openxmlformats.org/drawingml/2006/main" idx="major"/>
-        </p:style>
-      </p:sp>
-      <p:sp>
-        <p:nvSpPr>
-          <p:cNvPr id="14" name="">
-            <a:extLst xmlns:a="http://schemas.openxmlformats.org/drawingml/2006/main">
-              <a:ext uri="{FF2B5EF4-FFF2-40B4-BE49-F238E27FC236}">
-                <a16:creationId xmlns:a16="http://schemas.microsoft.com/office/drawing/2014/main" id="{475F84C4-630B-43D1-977B-A533FF75B998}"/>
-              </a:ext>
-            </a:extLst>
-          </p:cNvPr>
-          <p:cNvSpPr>
-            <a:spLocks xmlns:a="http://schemas.openxmlformats.org/drawingml/2006/main" noGrp="1"/>
-          </p:cNvSpPr>
-          <p:nvPr/>
-        </p:nvSpPr>
-        <p:spPr>
-          <a:xfrm xmlns:a="http://schemas.openxmlformats.org/drawingml/2006/main">
-            <a:off x="990600" y="4943475"/>
-            <a:ext cx="323850" cy="171450"/>
-          </a:xfrm>
-          <a:prstGeom xmlns:a="http://schemas.openxmlformats.org/drawingml/2006/main" prst="rect">
-            <a:avLst/>
-          </a:prstGeom>
-          <a:noFill xmlns:a="http://schemas.openxmlformats.org/drawingml/2006/main"/>
-          <a:ln xmlns:a="http://schemas.openxmlformats.org/drawingml/2006/main" w="0">
-            <a:noFill/>
-            <a:prstDash val="solid"/>
-          </a:ln>
-        </p:spPr>
-        <p:txBody>
-          <a:bodyPr xmlns:a="http://schemas.openxmlformats.org/drawingml/2006/main"/>
-          <a:lstStyle xmlns:a="http://schemas.openxmlformats.org/drawingml/2006/main"/>
-          <a:p xmlns:a="http://schemas.openxmlformats.org/drawingml/2006/main">
-            <a:pPr algn="ctr">
-              <a:defRPr sz="1050" b="1">
-                <a:solidFill>
-                  <a:srgbClr val="66D4CF"/>
-                </a:solidFill>
-              </a:defRPr>
-            </a:pPr>
-            <a:r>
-              <a:rPr sz="1050" b="1">
-                <a:solidFill>
-                  <a:srgbClr val="66D4CF"/>
-                </a:solidFill>
-              </a:rPr>
-              <a:t>2</a:t>
-            </a:r>
-          </a:p>
-        </p:txBody>
-      </p:sp>
-      <p:sp>
-        <p:nvSpPr>
-          <p:cNvPr id="15" name="">
-            <a:extLst xmlns:a="http://schemas.openxmlformats.org/drawingml/2006/main">
-              <a:ext uri="{FF2B5EF4-FFF2-40B4-BE49-F238E27FC236}">
-                <a16:creationId xmlns:a16="http://schemas.microsoft.com/office/drawing/2014/main" id="{C0EEA0EF-EE1F-4B5C-BEE7-F4DE6852B830}"/>
-              </a:ext>
-            </a:extLst>
-          </p:cNvPr>
-          <p:cNvSpPr>
-            <a:spLocks xmlns:a="http://schemas.openxmlformats.org/drawingml/2006/main" noGrp="1"/>
-          </p:cNvSpPr>
-          <p:nvPr/>
-        </p:nvSpPr>
-        <p:spPr>
-          <a:xfrm xmlns:a="http://schemas.openxmlformats.org/drawingml/2006/main">
-            <a:off x="1447800" y="4895850"/>
-            <a:ext cx="8877300" cy="419100"/>
-          </a:xfrm>
-          <a:prstGeom xmlns:a="http://schemas.openxmlformats.org/drawingml/2006/main" prst="rect">
-            <a:avLst/>
-          </a:prstGeom>
-          <a:noFill xmlns:a="http://schemas.openxmlformats.org/drawingml/2006/main"/>
-          <a:ln xmlns:a="http://schemas.openxmlformats.org/drawingml/2006/main" w="0">
-            <a:noFill/>
-            <a:prstDash val="solid"/>
-          </a:ln>
-        </p:spPr>
-        <p:txBody>
-          <a:bodyPr xmlns:a="http://schemas.openxmlformats.org/drawingml/2006/main"/>
-          <a:lstStyle xmlns:a="http://schemas.openxmlformats.org/drawingml/2006/main"/>
-          <a:p xmlns:a="http://schemas.openxmlformats.org/drawingml/2006/main">
-            <a:pPr algn="l">
-              <a:defRPr sz="1350" b="0">
-                <a:solidFill>
-                  <a:srgbClr val="F7F8FF"/>
-                </a:solidFill>
-              </a:defRPr>
-            </a:pPr>
-            <a:r>
-              <a:rPr sz="1350" b="0">
-                <a:solidFill>
-                  <a:srgbClr val="F7F8FF"/>
-                </a:solidFill>
-              </a:rPr>
-              <a:t>Оцінка зірочками зберігається у стані застосунку і впливає на підбір.</a:t>
-            </a:r>
-          </a:p>
-        </p:txBody>
-      </p:sp>
-      <p:sp>
-        <p:nvSpPr>
-          <p:cNvPr id="16" name="">
-            <a:extLst xmlns:a="http://schemas.openxmlformats.org/drawingml/2006/main">
-              <a:ext uri="{FF2B5EF4-FFF2-40B4-BE49-F238E27FC236}">
-                <a16:creationId xmlns:a16="http://schemas.microsoft.com/office/drawing/2014/main" id="{4DCF5FE1-93C0-4DB2-91D2-08ECB9E01236}"/>
-              </a:ext>
-            </a:extLst>
-          </p:cNvPr>
-          <p:cNvSpPr>
-            <a:spLocks xmlns:a="http://schemas.openxmlformats.org/drawingml/2006/main" noGrp="1"/>
-          </p:cNvSpPr>
-          <p:nvPr/>
-        </p:nvSpPr>
-        <p:spPr>
-          <a:xfrm xmlns:a="http://schemas.openxmlformats.org/drawingml/2006/main">
-            <a:off x="990600" y="5429250"/>
-            <a:ext cx="323850" cy="323850"/>
-          </a:xfrm>
-          <a:prstGeom xmlns:a="http://schemas.openxmlformats.org/drawingml/2006/main" prst="roundRect">
-            <a:avLst>
-              <a:gd name="adj" fmla="val 35294"/>
-            </a:avLst>
-          </a:prstGeom>
-          <a:solidFill xmlns:a="http://schemas.openxmlformats.org/drawingml/2006/main">
-            <a:srgbClr val="0B1822"/>
-          </a:solidFill>
-          <a:ln xmlns:a="http://schemas.openxmlformats.org/drawingml/2006/main" w="9525">
-            <a:solidFill>
-              <a:srgbClr val="66D4CF"/>
-            </a:solidFill>
-            <a:prstDash val="solid"/>
-          </a:ln>
-        </p:spPr>
-        <p:style>
-          <a:lnRef xmlns:a="http://schemas.openxmlformats.org/drawingml/2006/main" idx="0"/>
-          <a:fillRef xmlns:a="http://schemas.openxmlformats.org/drawingml/2006/main" idx="0"/>
-          <a:effectRef xmlns:a="http://schemas.openxmlformats.org/drawingml/2006/main" idx="4"/>
-          <a:fontRef xmlns:a="http://schemas.openxmlformats.org/drawingml/2006/main" idx="major"/>
-        </p:style>
-      </p:sp>
-      <p:sp>
-        <p:nvSpPr>
-          <p:cNvPr id="17" name="">
-            <a:extLst xmlns:a="http://schemas.openxmlformats.org/drawingml/2006/main">
-              <a:ext uri="{FF2B5EF4-FFF2-40B4-BE49-F238E27FC236}">
-                <a16:creationId xmlns:a16="http://schemas.microsoft.com/office/drawing/2014/main" id="{719A46D4-BB12-42B0-9BC6-8282EA8CE2A4}"/>
-              </a:ext>
-            </a:extLst>
-          </p:cNvPr>
-          <p:cNvSpPr>
-            <a:spLocks xmlns:a="http://schemas.openxmlformats.org/drawingml/2006/main" noGrp="1"/>
-          </p:cNvSpPr>
-          <p:nvPr/>
-        </p:nvSpPr>
-        <p:spPr>
-          <a:xfrm xmlns:a="http://schemas.openxmlformats.org/drawingml/2006/main">
-            <a:off x="990600" y="5495925"/>
-            <a:ext cx="323850" cy="171450"/>
-          </a:xfrm>
-          <a:prstGeom xmlns:a="http://schemas.openxmlformats.org/drawingml/2006/main" prst="rect">
-            <a:avLst/>
-          </a:prstGeom>
-          <a:noFill xmlns:a="http://schemas.openxmlformats.org/drawingml/2006/main"/>
-          <a:ln xmlns:a="http://schemas.openxmlformats.org/drawingml/2006/main" w="0">
-            <a:noFill/>
-            <a:prstDash val="solid"/>
-          </a:ln>
-        </p:spPr>
-        <p:txBody>
-          <a:bodyPr xmlns:a="http://schemas.openxmlformats.org/drawingml/2006/main"/>
-          <a:lstStyle xmlns:a="http://schemas.openxmlformats.org/drawingml/2006/main"/>
-          <a:p xmlns:a="http://schemas.openxmlformats.org/drawingml/2006/main">
-            <a:pPr algn="ctr">
-              <a:defRPr sz="1050" b="1">
-                <a:solidFill>
-                  <a:srgbClr val="66D4CF"/>
-                </a:solidFill>
-              </a:defRPr>
-            </a:pPr>
-            <a:r>
-              <a:rPr sz="1050" b="1">
-                <a:solidFill>
-                  <a:srgbClr val="66D4CF"/>
-                </a:solidFill>
-              </a:rPr>
-              <a:t>3</a:t>
-            </a:r>
-          </a:p>
-        </p:txBody>
-      </p:sp>
-      <p:sp>
-        <p:nvSpPr>
-          <p:cNvPr id="18" name="">
-            <a:extLst xmlns:a="http://schemas.openxmlformats.org/drawingml/2006/main">
-              <a:ext uri="{FF2B5EF4-FFF2-40B4-BE49-F238E27FC236}">
-                <a16:creationId xmlns:a16="http://schemas.microsoft.com/office/drawing/2014/main" id="{11BA0B57-B25F-4EA9-BDFC-2B9D5FC9BF01}"/>
-              </a:ext>
-            </a:extLst>
-          </p:cNvPr>
-          <p:cNvSpPr>
-            <a:spLocks xmlns:a="http://schemas.openxmlformats.org/drawingml/2006/main" noGrp="1"/>
-          </p:cNvSpPr>
-          <p:nvPr/>
-        </p:nvSpPr>
-        <p:spPr>
-          <a:xfrm xmlns:a="http://schemas.openxmlformats.org/drawingml/2006/main">
-            <a:off x="1447800" y="5448300"/>
-            <a:ext cx="8877300" cy="419100"/>
-          </a:xfrm>
-          <a:prstGeom xmlns:a="http://schemas.openxmlformats.org/drawingml/2006/main" prst="rect">
-            <a:avLst/>
-          </a:prstGeom>
-          <a:noFill xmlns:a="http://schemas.openxmlformats.org/drawingml/2006/main"/>
-          <a:ln xmlns:a="http://schemas.openxmlformats.org/drawingml/2006/main" w="0">
-            <a:noFill/>
-            <a:prstDash val="solid"/>
-          </a:ln>
-        </p:spPr>
-        <p:txBody>
-          <a:bodyPr xmlns:a="http://schemas.openxmlformats.org/drawingml/2006/main"/>
-          <a:lstStyle xmlns:a="http://schemas.openxmlformats.org/drawingml/2006/main"/>
-          <a:p xmlns:a="http://schemas.openxmlformats.org/drawingml/2006/main">
-            <a:pPr algn="l">
-              <a:defRPr sz="1350" b="0">
-                <a:solidFill>
-                  <a:srgbClr val="F7F8FF"/>
-                </a:solidFill>
-              </a:defRPr>
-            </a:pPr>
-            <a:r>
-              <a:rPr sz="1350" b="0">
-                <a:solidFill>
-                  <a:srgbClr val="F7F8FF"/>
-                </a:solidFill>
-              </a:rPr>
-              <a:t>Профіль можна редагувати: ім’я, фото за URL та опис свого смаку.</a:t>
+              <a:t>Алгоритм підбору: збіг жанрів + оцінка користувача + врахування переглянутих фільмів + коротке пояснення вибору.</a:t>
             </a:r>
           </a:p>
         </p:txBody>
@@ -8238,7 +9834,7 @@
     </p:spTree>
     <p:extLst>
       <p:ext uri="{BB962C8B-B14F-4D97-AF65-F5344CB8AC3E}">
-        <p14:creationId xmlns:p14="http://schemas.microsoft.com/office/powerpoint/2010/main" val="1539189946"/>
+        <p14:creationId xmlns:p14="http://schemas.microsoft.com/office/powerpoint/2010/main" val="658402679"/>
       </p:ext>
     </p:extLst>
   </p:cSld>
@@ -8266,10 +9862,10 @@
       </p:grpSpPr>
       <p:sp>
         <p:nvSpPr>
-          <p:cNvPr id="1" name="">
-            <a:extLst xmlns:a="http://schemas.openxmlformats.org/drawingml/2006/main">
-              <a:ext uri="{FF2B5EF4-FFF2-40B4-BE49-F238E27FC236}">
-                <a16:creationId xmlns:a16="http://schemas.microsoft.com/office/drawing/2014/main" id="{1D9AC26B-1B31-4CA8-96B3-3B907BDADCF0}"/>
+          <p:cNvPr id="19" name="">
+            <a:extLst xmlns:a="http://schemas.openxmlformats.org/drawingml/2006/main">
+              <a:ext uri="{FF2B5EF4-FFF2-40B4-BE49-F238E27FC236}">
+                <a16:creationId xmlns:a16="http://schemas.microsoft.com/office/drawing/2014/main" id="{FF0A57A7-4269-46E2-B803-1B6B09D8A4F6}"/>
               </a:ext>
             </a:extLst>
           </p:cNvPr>
@@ -8297,7 +9893,7 @@
           <p:cNvPr id="2" name="">
             <a:extLst xmlns:a="http://schemas.openxmlformats.org/drawingml/2006/main">
               <a:ext uri="{FF2B5EF4-FFF2-40B4-BE49-F238E27FC236}">
-                <a16:creationId xmlns:a16="http://schemas.microsoft.com/office/drawing/2014/main" id="{56B49212-D9A9-4B3E-816A-C62200E2F802}"/>
+                <a16:creationId xmlns:a16="http://schemas.microsoft.com/office/drawing/2014/main" id="{481DF233-1ACF-4A64-A115-69665BD50850}"/>
               </a:ext>
             </a:extLst>
           </p:cNvPr>
@@ -8325,7 +9921,7 @@
           <p:cNvPr id="3" name="">
             <a:extLst xmlns:a="http://schemas.openxmlformats.org/drawingml/2006/main">
               <a:ext uri="{FF2B5EF4-FFF2-40B4-BE49-F238E27FC236}">
-                <a16:creationId xmlns:a16="http://schemas.microsoft.com/office/drawing/2014/main" id="{C68337BE-E67B-4C98-9981-C5C9AEE77BCA}"/>
+                <a16:creationId xmlns:a16="http://schemas.microsoft.com/office/drawing/2014/main" id="{A4BB26E5-BDCC-4995-9F9D-B730CD0C14CF}"/>
               </a:ext>
             </a:extLst>
           </p:cNvPr>
@@ -8375,7 +9971,7 @@
           <p:cNvPr id="4" name="">
             <a:extLst xmlns:a="http://schemas.openxmlformats.org/drawingml/2006/main">
               <a:ext uri="{FF2B5EF4-FFF2-40B4-BE49-F238E27FC236}">
-                <a16:creationId xmlns:a16="http://schemas.microsoft.com/office/drawing/2014/main" id="{96031F77-C954-4098-A563-D26C72C7082B}"/>
+                <a16:creationId xmlns:a16="http://schemas.microsoft.com/office/drawing/2014/main" id="{2EBFE0FF-E488-4F5F-B367-BA59BB819196}"/>
               </a:ext>
             </a:extLst>
           </p:cNvPr>
@@ -8415,7 +10011,7 @@
                   <a:srgbClr val="F7F8FF"/>
                 </a:solidFill>
               </a:rPr>
-              <a:t>Код розділений за відповідальністю</a:t>
+              <a:t>Інтерфейс складається з кількох робочих екранів</a:t>
             </a:r>
           </a:p>
         </p:txBody>
@@ -8425,7 +10021,7 @@
           <p:cNvPr id="5" name="">
             <a:extLst xmlns:a="http://schemas.openxmlformats.org/drawingml/2006/main">
               <a:ext uri="{FF2B5EF4-FFF2-40B4-BE49-F238E27FC236}">
-                <a16:creationId xmlns:a16="http://schemas.microsoft.com/office/drawing/2014/main" id="{DEA00817-921C-4D7E-B7D9-E47A2F126EF9}"/>
+                <a16:creationId xmlns:a16="http://schemas.microsoft.com/office/drawing/2014/main" id="{47BAA43F-CCA7-44BC-89B1-14EF9AEB3866}"/>
               </a:ext>
             </a:extLst>
           </p:cNvPr>
@@ -8465,101 +10061,178 @@
                   <a:srgbClr val="A9B0C2"/>
                 </a:solidFill>
               </a:rPr>
-              <a:t>Flutter відповідає за UX, FastAPI за HTTP-логіку, PostgreSQL за структуроване збереження даних.</a:t>
+              <a:t>Є авторизація, вибір смаків, головна стрічка, деталі фільму, оцінки, коментарі та профіль.</a:t>
             </a:r>
           </a:p>
         </p:txBody>
       </p:sp>
       <p:pic>
         <p:nvPicPr>
-          <p:cNvPr id="17" name=""/>
+          <p:cNvPr id="24" name=""/>
           <p:cNvPicPr>
             <a:picLocks xmlns:a="http://schemas.openxmlformats.org/drawingml/2006/main" noChangeAspect="1"/>
           </p:cNvPicPr>
           <p:nvPr/>
         </p:nvPicPr>
         <p:blipFill>
-          <a:blip xmlns:r="http://schemas.openxmlformats.org/officeDocument/2006/relationships" xmlns:a="http://schemas.openxmlformats.org/drawingml/2006/main" r:embed="Reff6f0eb5ceb4a76"/>
-          <a:stretch xmlns:a="http://schemas.openxmlformats.org/drawingml/2006/main"/>
+          <a:blip xmlns:r="http://schemas.openxmlformats.org/officeDocument/2006/relationships" xmlns:a="http://schemas.openxmlformats.org/drawingml/2006/main" r:embed="R06897ed9ec0c492d"/>
+          <a:srcRect xmlns:a="http://schemas.openxmlformats.org/drawingml/2006/main" l="7978" t="0" r="7978" b="0"/>
+          <a:stretch xmlns:a="http://schemas.openxmlformats.org/drawingml/2006/main">
+            <a:fillRect l="0" t="0" r="0" b="0"/>
+          </a:stretch>
         </p:blipFill>
         <p:spPr>
           <a:xfrm xmlns:a="http://schemas.openxmlformats.org/drawingml/2006/main">
-            <a:off x="1389295" y="2247900"/>
-            <a:ext cx="1793410" cy="3429000"/>
+            <a:off x="685800" y="2095500"/>
+            <a:ext cx="2419350" cy="1619250"/>
           </a:xfrm>
           <a:prstGeom xmlns:a="http://schemas.openxmlformats.org/drawingml/2006/main" prst="roundRect">
             <a:avLst>
-              <a:gd name="adj" fmla="val 3333"/>
+              <a:gd name="adj" fmla="val 7059"/>
             </a:avLst>
           </a:prstGeom>
         </p:spPr>
       </p:pic>
       <p:pic>
         <p:nvPicPr>
-          <p:cNvPr id="18" name=""/>
+          <p:cNvPr id="25" name=""/>
           <p:cNvPicPr>
             <a:picLocks xmlns:a="http://schemas.openxmlformats.org/drawingml/2006/main" noChangeAspect="1"/>
           </p:cNvPicPr>
           <p:nvPr/>
         </p:nvPicPr>
         <p:blipFill>
-          <a:blip xmlns:r="http://schemas.openxmlformats.org/officeDocument/2006/relationships" xmlns:a="http://schemas.openxmlformats.org/drawingml/2006/main" r:embed="Rcb93699c0bf44a19"/>
-          <a:stretch xmlns:a="http://schemas.openxmlformats.org/drawingml/2006/main"/>
+          <a:blip xmlns:r="http://schemas.openxmlformats.org/officeDocument/2006/relationships" xmlns:a="http://schemas.openxmlformats.org/drawingml/2006/main" r:embed="R2ade71833fae4a48"/>
+          <a:srcRect xmlns:a="http://schemas.openxmlformats.org/drawingml/2006/main" l="7978" t="0" r="7978" b="0"/>
+          <a:stretch xmlns:a="http://schemas.openxmlformats.org/drawingml/2006/main">
+            <a:fillRect l="0" t="0" r="0" b="0"/>
+          </a:stretch>
         </p:blipFill>
         <p:spPr>
           <a:xfrm xmlns:a="http://schemas.openxmlformats.org/drawingml/2006/main">
-            <a:off x="4381500" y="2890838"/>
-            <a:ext cx="3429000" cy="2143125"/>
+            <a:off x="3295650" y="2095500"/>
+            <a:ext cx="2419350" cy="1619250"/>
           </a:xfrm>
           <a:prstGeom xmlns:a="http://schemas.openxmlformats.org/drawingml/2006/main" prst="roundRect">
             <a:avLst>
-              <a:gd name="adj" fmla="val 3333"/>
+              <a:gd name="adj" fmla="val 7059"/>
             </a:avLst>
           </a:prstGeom>
         </p:spPr>
       </p:pic>
       <p:pic>
         <p:nvPicPr>
-          <p:cNvPr id="19" name=""/>
+          <p:cNvPr id="26" name=""/>
           <p:cNvPicPr>
             <a:picLocks xmlns:a="http://schemas.openxmlformats.org/drawingml/2006/main" noChangeAspect="1"/>
           </p:cNvPicPr>
           <p:nvPr/>
         </p:nvPicPr>
         <p:blipFill>
-          <a:blip xmlns:r="http://schemas.openxmlformats.org/officeDocument/2006/relationships" xmlns:a="http://schemas.openxmlformats.org/drawingml/2006/main" r:embed="R2523af84cddb415c"/>
-          <a:stretch xmlns:a="http://schemas.openxmlformats.org/drawingml/2006/main"/>
+          <a:blip xmlns:r="http://schemas.openxmlformats.org/officeDocument/2006/relationships" xmlns:a="http://schemas.openxmlformats.org/drawingml/2006/main" r:embed="Rfcf2e3481b09407a"/>
+          <a:srcRect xmlns:a="http://schemas.openxmlformats.org/drawingml/2006/main" l="7978" t="0" r="7978" b="0"/>
+          <a:stretch xmlns:a="http://schemas.openxmlformats.org/drawingml/2006/main">
+            <a:fillRect l="0" t="0" r="0" b="0"/>
+          </a:stretch>
         </p:blipFill>
         <p:spPr>
           <a:xfrm xmlns:a="http://schemas.openxmlformats.org/drawingml/2006/main">
-            <a:off x="8191500" y="2890838"/>
-            <a:ext cx="3429000" cy="2143125"/>
+            <a:off x="5905500" y="2095500"/>
+            <a:ext cx="2419350" cy="1619250"/>
           </a:xfrm>
           <a:prstGeom xmlns:a="http://schemas.openxmlformats.org/drawingml/2006/main" prst="roundRect">
             <a:avLst>
-              <a:gd name="adj" fmla="val 3333"/>
+              <a:gd name="adj" fmla="val 7059"/>
             </a:avLst>
           </a:prstGeom>
         </p:spPr>
       </p:pic>
-      <p:sp>
-        <p:nvSpPr>
-          <p:cNvPr id="9" name="">
-            <a:extLst xmlns:a="http://schemas.openxmlformats.org/drawingml/2006/main">
-              <a:ext uri="{FF2B5EF4-FFF2-40B4-BE49-F238E27FC236}">
-                <a16:creationId xmlns:a16="http://schemas.microsoft.com/office/drawing/2014/main" id="{6E7805B1-37CE-4E20-8A88-5589DA8B204A}"/>
-              </a:ext>
-            </a:extLst>
-          </p:cNvPr>
-          <p:cNvSpPr>
-            <a:spLocks xmlns:a="http://schemas.openxmlformats.org/drawingml/2006/main" noGrp="1"/>
-          </p:cNvSpPr>
-          <p:nvPr/>
-        </p:nvSpPr>
-        <p:spPr>
-          <a:xfrm xmlns:a="http://schemas.openxmlformats.org/drawingml/2006/main">
-            <a:off x="914400" y="5848350"/>
-            <a:ext cx="2762250" cy="228600"/>
+      <p:pic>
+        <p:nvPicPr>
+          <p:cNvPr id="27" name=""/>
+          <p:cNvPicPr>
+            <a:picLocks xmlns:a="http://schemas.openxmlformats.org/drawingml/2006/main" noChangeAspect="1"/>
+          </p:cNvPicPr>
+          <p:nvPr/>
+        </p:nvPicPr>
+        <p:blipFill>
+          <a:blip xmlns:r="http://schemas.openxmlformats.org/officeDocument/2006/relationships" xmlns:a="http://schemas.openxmlformats.org/drawingml/2006/main" r:embed="Rbaa50d98801846ae"/>
+          <a:srcRect xmlns:a="http://schemas.openxmlformats.org/drawingml/2006/main" l="7978" t="0" r="7978" b="0"/>
+          <a:stretch xmlns:a="http://schemas.openxmlformats.org/drawingml/2006/main">
+            <a:fillRect l="0" t="0" r="0" b="0"/>
+          </a:stretch>
+        </p:blipFill>
+        <p:spPr>
+          <a:xfrm xmlns:a="http://schemas.openxmlformats.org/drawingml/2006/main">
+            <a:off x="8515350" y="2095500"/>
+            <a:ext cx="2419350" cy="1619250"/>
+          </a:xfrm>
+          <a:prstGeom xmlns:a="http://schemas.openxmlformats.org/drawingml/2006/main" prst="roundRect">
+            <a:avLst>
+              <a:gd name="adj" fmla="val 7059"/>
+            </a:avLst>
+          </a:prstGeom>
+        </p:spPr>
+      </p:pic>
+      <p:sp>
+        <p:nvSpPr>
+          <p:cNvPr id="10" name="">
+            <a:extLst xmlns:a="http://schemas.openxmlformats.org/drawingml/2006/main">
+              <a:ext uri="{FF2B5EF4-FFF2-40B4-BE49-F238E27FC236}">
+                <a16:creationId xmlns:a16="http://schemas.microsoft.com/office/drawing/2014/main" id="{E03F417B-3D49-4AED-802A-493F27461E81}"/>
+              </a:ext>
+            </a:extLst>
+          </p:cNvPr>
+          <p:cNvSpPr>
+            <a:spLocks xmlns:a="http://schemas.openxmlformats.org/drawingml/2006/main" noGrp="1"/>
+          </p:cNvSpPr>
+          <p:nvPr/>
+        </p:nvSpPr>
+        <p:spPr>
+          <a:xfrm xmlns:a="http://schemas.openxmlformats.org/drawingml/2006/main">
+            <a:off x="990600" y="4324350"/>
+            <a:ext cx="323850" cy="323850"/>
+          </a:xfrm>
+          <a:prstGeom xmlns:a="http://schemas.openxmlformats.org/drawingml/2006/main" prst="roundRect">
+            <a:avLst>
+              <a:gd name="adj" fmla="val 35294"/>
+            </a:avLst>
+          </a:prstGeom>
+          <a:solidFill xmlns:a="http://schemas.openxmlformats.org/drawingml/2006/main">
+            <a:srgbClr val="0B1822"/>
+          </a:solidFill>
+          <a:ln xmlns:a="http://schemas.openxmlformats.org/drawingml/2006/main" w="9525">
+            <a:solidFill>
+              <a:srgbClr val="66D4CF"/>
+            </a:solidFill>
+            <a:prstDash val="solid"/>
+          </a:ln>
+        </p:spPr>
+        <p:style>
+          <a:lnRef xmlns:a="http://schemas.openxmlformats.org/drawingml/2006/main" idx="0"/>
+          <a:fillRef xmlns:a="http://schemas.openxmlformats.org/drawingml/2006/main" idx="0"/>
+          <a:effectRef xmlns:a="http://schemas.openxmlformats.org/drawingml/2006/main" idx="4"/>
+          <a:fontRef xmlns:a="http://schemas.openxmlformats.org/drawingml/2006/main" idx="major"/>
+        </p:style>
+      </p:sp>
+      <p:sp>
+        <p:nvSpPr>
+          <p:cNvPr id="11" name="">
+            <a:extLst xmlns:a="http://schemas.openxmlformats.org/drawingml/2006/main">
+              <a:ext uri="{FF2B5EF4-FFF2-40B4-BE49-F238E27FC236}">
+                <a16:creationId xmlns:a16="http://schemas.microsoft.com/office/drawing/2014/main" id="{09F3FA67-AE06-46FA-87B7-2ED8C00EB0D1}"/>
+              </a:ext>
+            </a:extLst>
+          </p:cNvPr>
+          <p:cNvSpPr>
+            <a:spLocks xmlns:a="http://schemas.openxmlformats.org/drawingml/2006/main" noGrp="1"/>
+          </p:cNvSpPr>
+          <p:nvPr/>
+        </p:nvSpPr>
+        <p:spPr>
+          <a:xfrm xmlns:a="http://schemas.openxmlformats.org/drawingml/2006/main">
+            <a:off x="990600" y="4391025"/>
+            <a:ext cx="323850" cy="171450"/>
           </a:xfrm>
           <a:prstGeom xmlns:a="http://schemas.openxmlformats.org/drawingml/2006/main" prst="rect">
             <a:avLst/>
@@ -8575,41 +10248,132 @@
           <a:lstStyle xmlns:a="http://schemas.openxmlformats.org/drawingml/2006/main"/>
           <a:p xmlns:a="http://schemas.openxmlformats.org/drawingml/2006/main">
             <a:pPr algn="ctr">
-              <a:defRPr sz="1350" b="1">
-                <a:solidFill>
-                  <a:srgbClr val="0A84FF"/>
-                </a:solidFill>
-              </a:defRPr>
-            </a:pPr>
-            <a:r>
-              <a:rPr sz="1350" b="1">
-                <a:solidFill>
-                  <a:srgbClr val="0A84FF"/>
-                </a:solidFill>
-              </a:rPr>
-              <a:t>Flutter logic</a:t>
-            </a:r>
-          </a:p>
-        </p:txBody>
-      </p:sp>
-      <p:sp>
-        <p:nvSpPr>
-          <p:cNvPr id="10" name="">
-            <a:extLst xmlns:a="http://schemas.openxmlformats.org/drawingml/2006/main">
-              <a:ext uri="{FF2B5EF4-FFF2-40B4-BE49-F238E27FC236}">
-                <a16:creationId xmlns:a16="http://schemas.microsoft.com/office/drawing/2014/main" id="{1BE459A4-BF73-426B-A89A-3EF7462B96C3}"/>
-              </a:ext>
-            </a:extLst>
-          </p:cNvPr>
-          <p:cNvSpPr>
-            <a:spLocks xmlns:a="http://schemas.openxmlformats.org/drawingml/2006/main" noGrp="1"/>
-          </p:cNvSpPr>
-          <p:nvPr/>
-        </p:nvSpPr>
-        <p:spPr>
-          <a:xfrm xmlns:a="http://schemas.openxmlformats.org/drawingml/2006/main">
-            <a:off x="4781550" y="5848350"/>
-            <a:ext cx="2571750" cy="228600"/>
+              <a:defRPr sz="1050" b="1">
+                <a:solidFill>
+                  <a:srgbClr val="66D4CF"/>
+                </a:solidFill>
+              </a:defRPr>
+            </a:pPr>
+            <a:r>
+              <a:rPr sz="1050" b="1">
+                <a:solidFill>
+                  <a:srgbClr val="66D4CF"/>
+                </a:solidFill>
+              </a:rPr>
+              <a:t>1</a:t>
+            </a:r>
+          </a:p>
+        </p:txBody>
+      </p:sp>
+      <p:sp>
+        <p:nvSpPr>
+          <p:cNvPr id="12" name="">
+            <a:extLst xmlns:a="http://schemas.openxmlformats.org/drawingml/2006/main">
+              <a:ext uri="{FF2B5EF4-FFF2-40B4-BE49-F238E27FC236}">
+                <a16:creationId xmlns:a16="http://schemas.microsoft.com/office/drawing/2014/main" id="{4484F54A-5AD6-4841-993D-8952BCD2D15E}"/>
+              </a:ext>
+            </a:extLst>
+          </p:cNvPr>
+          <p:cNvSpPr>
+            <a:spLocks xmlns:a="http://schemas.openxmlformats.org/drawingml/2006/main" noGrp="1"/>
+          </p:cNvSpPr>
+          <p:nvPr/>
+        </p:nvSpPr>
+        <p:spPr>
+          <a:xfrm xmlns:a="http://schemas.openxmlformats.org/drawingml/2006/main">
+            <a:off x="1447800" y="4343400"/>
+            <a:ext cx="8877300" cy="419100"/>
+          </a:xfrm>
+          <a:prstGeom xmlns:a="http://schemas.openxmlformats.org/drawingml/2006/main" prst="rect">
+            <a:avLst/>
+          </a:prstGeom>
+          <a:noFill xmlns:a="http://schemas.openxmlformats.org/drawingml/2006/main"/>
+          <a:ln xmlns:a="http://schemas.openxmlformats.org/drawingml/2006/main" w="0">
+            <a:noFill/>
+            <a:prstDash val="solid"/>
+          </a:ln>
+        </p:spPr>
+        <p:txBody>
+          <a:bodyPr xmlns:a="http://schemas.openxmlformats.org/drawingml/2006/main"/>
+          <a:lstStyle xmlns:a="http://schemas.openxmlformats.org/drawingml/2006/main"/>
+          <a:p xmlns:a="http://schemas.openxmlformats.org/drawingml/2006/main">
+            <a:pPr algn="l">
+              <a:defRPr sz="1350" b="0">
+                <a:solidFill>
+                  <a:srgbClr val="F7F8FF"/>
+                </a:solidFill>
+              </a:defRPr>
+            </a:pPr>
+            <a:r>
+              <a:rPr sz="1350" b="0">
+                <a:solidFill>
+                  <a:srgbClr val="F7F8FF"/>
+                </a:solidFill>
+              </a:rPr>
+              <a:t>Афіші, блок трейлера, анімації та match meter роблять каталог зрозумілішим.</a:t>
+            </a:r>
+          </a:p>
+        </p:txBody>
+      </p:sp>
+      <p:sp>
+        <p:nvSpPr>
+          <p:cNvPr id="13" name="">
+            <a:extLst xmlns:a="http://schemas.openxmlformats.org/drawingml/2006/main">
+              <a:ext uri="{FF2B5EF4-FFF2-40B4-BE49-F238E27FC236}">
+                <a16:creationId xmlns:a16="http://schemas.microsoft.com/office/drawing/2014/main" id="{8C90702F-1B11-4005-A8EE-4573BC2413EB}"/>
+              </a:ext>
+            </a:extLst>
+          </p:cNvPr>
+          <p:cNvSpPr>
+            <a:spLocks xmlns:a="http://schemas.openxmlformats.org/drawingml/2006/main" noGrp="1"/>
+          </p:cNvSpPr>
+          <p:nvPr/>
+        </p:nvSpPr>
+        <p:spPr>
+          <a:xfrm xmlns:a="http://schemas.openxmlformats.org/drawingml/2006/main">
+            <a:off x="990600" y="4876800"/>
+            <a:ext cx="323850" cy="323850"/>
+          </a:xfrm>
+          <a:prstGeom xmlns:a="http://schemas.openxmlformats.org/drawingml/2006/main" prst="roundRect">
+            <a:avLst>
+              <a:gd name="adj" fmla="val 35294"/>
+            </a:avLst>
+          </a:prstGeom>
+          <a:solidFill xmlns:a="http://schemas.openxmlformats.org/drawingml/2006/main">
+            <a:srgbClr val="0B1822"/>
+          </a:solidFill>
+          <a:ln xmlns:a="http://schemas.openxmlformats.org/drawingml/2006/main" w="9525">
+            <a:solidFill>
+              <a:srgbClr val="66D4CF"/>
+            </a:solidFill>
+            <a:prstDash val="solid"/>
+          </a:ln>
+        </p:spPr>
+        <p:style>
+          <a:lnRef xmlns:a="http://schemas.openxmlformats.org/drawingml/2006/main" idx="0"/>
+          <a:fillRef xmlns:a="http://schemas.openxmlformats.org/drawingml/2006/main" idx="0"/>
+          <a:effectRef xmlns:a="http://schemas.openxmlformats.org/drawingml/2006/main" idx="4"/>
+          <a:fontRef xmlns:a="http://schemas.openxmlformats.org/drawingml/2006/main" idx="major"/>
+        </p:style>
+      </p:sp>
+      <p:sp>
+        <p:nvSpPr>
+          <p:cNvPr id="14" name="">
+            <a:extLst xmlns:a="http://schemas.openxmlformats.org/drawingml/2006/main">
+              <a:ext uri="{FF2B5EF4-FFF2-40B4-BE49-F238E27FC236}">
+                <a16:creationId xmlns:a16="http://schemas.microsoft.com/office/drawing/2014/main" id="{39F9B759-E7AA-461C-B5DD-526205C6EC0E}"/>
+              </a:ext>
+            </a:extLst>
+          </p:cNvPr>
+          <p:cNvSpPr>
+            <a:spLocks xmlns:a="http://schemas.openxmlformats.org/drawingml/2006/main" noGrp="1"/>
+          </p:cNvSpPr>
+          <p:nvPr/>
+        </p:nvSpPr>
+        <p:spPr>
+          <a:xfrm xmlns:a="http://schemas.openxmlformats.org/drawingml/2006/main">
+            <a:off x="990600" y="4943475"/>
+            <a:ext cx="323850" cy="171450"/>
           </a:xfrm>
           <a:prstGeom xmlns:a="http://schemas.openxmlformats.org/drawingml/2006/main" prst="rect">
             <a:avLst/>
@@ -8625,41 +10389,132 @@
           <a:lstStyle xmlns:a="http://schemas.openxmlformats.org/drawingml/2006/main"/>
           <a:p xmlns:a="http://schemas.openxmlformats.org/drawingml/2006/main">
             <a:pPr algn="ctr">
-              <a:defRPr sz="1350" b="1">
+              <a:defRPr sz="1050" b="1">
                 <a:solidFill>
                   <a:srgbClr val="66D4CF"/>
                 </a:solidFill>
               </a:defRPr>
             </a:pPr>
             <a:r>
-              <a:rPr sz="1350" b="1">
+              <a:rPr sz="1050" b="1">
                 <a:solidFill>
                   <a:srgbClr val="66D4CF"/>
                 </a:solidFill>
               </a:rPr>
-              <a:t>VS Code: FastAPI</a:t>
-            </a:r>
-          </a:p>
-        </p:txBody>
-      </p:sp>
-      <p:sp>
-        <p:nvSpPr>
-          <p:cNvPr id="11" name="">
-            <a:extLst xmlns:a="http://schemas.openxmlformats.org/drawingml/2006/main">
-              <a:ext uri="{FF2B5EF4-FFF2-40B4-BE49-F238E27FC236}">
-                <a16:creationId xmlns:a16="http://schemas.microsoft.com/office/drawing/2014/main" id="{46F557EA-27C4-49C1-8A89-72C6172B71A1}"/>
-              </a:ext>
-            </a:extLst>
-          </p:cNvPr>
-          <p:cNvSpPr>
-            <a:spLocks xmlns:a="http://schemas.openxmlformats.org/drawingml/2006/main" noGrp="1"/>
-          </p:cNvSpPr>
-          <p:nvPr/>
-        </p:nvSpPr>
-        <p:spPr>
-          <a:xfrm xmlns:a="http://schemas.openxmlformats.org/drawingml/2006/main">
-            <a:off x="8572500" y="5848350"/>
-            <a:ext cx="2667000" cy="228600"/>
+              <a:t>2</a:t>
+            </a:r>
+          </a:p>
+        </p:txBody>
+      </p:sp>
+      <p:sp>
+        <p:nvSpPr>
+          <p:cNvPr id="15" name="">
+            <a:extLst xmlns:a="http://schemas.openxmlformats.org/drawingml/2006/main">
+              <a:ext uri="{FF2B5EF4-FFF2-40B4-BE49-F238E27FC236}">
+                <a16:creationId xmlns:a16="http://schemas.microsoft.com/office/drawing/2014/main" id="{7DE52175-565D-43D8-B147-02868B8B9977}"/>
+              </a:ext>
+            </a:extLst>
+          </p:cNvPr>
+          <p:cNvSpPr>
+            <a:spLocks xmlns:a="http://schemas.openxmlformats.org/drawingml/2006/main" noGrp="1"/>
+          </p:cNvSpPr>
+          <p:nvPr/>
+        </p:nvSpPr>
+        <p:spPr>
+          <a:xfrm xmlns:a="http://schemas.openxmlformats.org/drawingml/2006/main">
+            <a:off x="1447800" y="4895850"/>
+            <a:ext cx="8877300" cy="419100"/>
+          </a:xfrm>
+          <a:prstGeom xmlns:a="http://schemas.openxmlformats.org/drawingml/2006/main" prst="rect">
+            <a:avLst/>
+          </a:prstGeom>
+          <a:noFill xmlns:a="http://schemas.openxmlformats.org/drawingml/2006/main"/>
+          <a:ln xmlns:a="http://schemas.openxmlformats.org/drawingml/2006/main" w="0">
+            <a:noFill/>
+            <a:prstDash val="solid"/>
+          </a:ln>
+        </p:spPr>
+        <p:txBody>
+          <a:bodyPr xmlns:a="http://schemas.openxmlformats.org/drawingml/2006/main"/>
+          <a:lstStyle xmlns:a="http://schemas.openxmlformats.org/drawingml/2006/main"/>
+          <a:p xmlns:a="http://schemas.openxmlformats.org/drawingml/2006/main">
+            <a:pPr algn="l">
+              <a:defRPr sz="1350" b="0">
+                <a:solidFill>
+                  <a:srgbClr val="F7F8FF"/>
+                </a:solidFill>
+              </a:defRPr>
+            </a:pPr>
+            <a:r>
+              <a:rPr sz="1350" b="0">
+                <a:solidFill>
+                  <a:srgbClr val="F7F8FF"/>
+                </a:solidFill>
+              </a:rPr>
+              <a:t>Оцінка зірочками зберігається у стані застосунку і впливає на підбір.</a:t>
+            </a:r>
+          </a:p>
+        </p:txBody>
+      </p:sp>
+      <p:sp>
+        <p:nvSpPr>
+          <p:cNvPr id="16" name="">
+            <a:extLst xmlns:a="http://schemas.openxmlformats.org/drawingml/2006/main">
+              <a:ext uri="{FF2B5EF4-FFF2-40B4-BE49-F238E27FC236}">
+                <a16:creationId xmlns:a16="http://schemas.microsoft.com/office/drawing/2014/main" id="{095794EE-2926-4D28-8B25-ED008AC1B99E}"/>
+              </a:ext>
+            </a:extLst>
+          </p:cNvPr>
+          <p:cNvSpPr>
+            <a:spLocks xmlns:a="http://schemas.openxmlformats.org/drawingml/2006/main" noGrp="1"/>
+          </p:cNvSpPr>
+          <p:nvPr/>
+        </p:nvSpPr>
+        <p:spPr>
+          <a:xfrm xmlns:a="http://schemas.openxmlformats.org/drawingml/2006/main">
+            <a:off x="990600" y="5429250"/>
+            <a:ext cx="323850" cy="323850"/>
+          </a:xfrm>
+          <a:prstGeom xmlns:a="http://schemas.openxmlformats.org/drawingml/2006/main" prst="roundRect">
+            <a:avLst>
+              <a:gd name="adj" fmla="val 35294"/>
+            </a:avLst>
+          </a:prstGeom>
+          <a:solidFill xmlns:a="http://schemas.openxmlformats.org/drawingml/2006/main">
+            <a:srgbClr val="0B1822"/>
+          </a:solidFill>
+          <a:ln xmlns:a="http://schemas.openxmlformats.org/drawingml/2006/main" w="9525">
+            <a:solidFill>
+              <a:srgbClr val="66D4CF"/>
+            </a:solidFill>
+            <a:prstDash val="solid"/>
+          </a:ln>
+        </p:spPr>
+        <p:style>
+          <a:lnRef xmlns:a="http://schemas.openxmlformats.org/drawingml/2006/main" idx="0"/>
+          <a:fillRef xmlns:a="http://schemas.openxmlformats.org/drawingml/2006/main" idx="0"/>
+          <a:effectRef xmlns:a="http://schemas.openxmlformats.org/drawingml/2006/main" idx="4"/>
+          <a:fontRef xmlns:a="http://schemas.openxmlformats.org/drawingml/2006/main" idx="major"/>
+        </p:style>
+      </p:sp>
+      <p:sp>
+        <p:nvSpPr>
+          <p:cNvPr id="17" name="">
+            <a:extLst xmlns:a="http://schemas.openxmlformats.org/drawingml/2006/main">
+              <a:ext uri="{FF2B5EF4-FFF2-40B4-BE49-F238E27FC236}">
+                <a16:creationId xmlns:a16="http://schemas.microsoft.com/office/drawing/2014/main" id="{0B33F1B0-D545-49F4-84E9-9671F8365AC3}"/>
+              </a:ext>
+            </a:extLst>
+          </p:cNvPr>
+          <p:cNvSpPr>
+            <a:spLocks xmlns:a="http://schemas.openxmlformats.org/drawingml/2006/main" noGrp="1"/>
+          </p:cNvSpPr>
+          <p:nvPr/>
+        </p:nvSpPr>
+        <p:spPr>
+          <a:xfrm xmlns:a="http://schemas.openxmlformats.org/drawingml/2006/main">
+            <a:off x="990600" y="5495925"/>
+            <a:ext cx="323850" cy="171450"/>
           </a:xfrm>
           <a:prstGeom xmlns:a="http://schemas.openxmlformats.org/drawingml/2006/main" prst="rect">
             <a:avLst/>
@@ -8675,19 +10530,69 @@
           <a:lstStyle xmlns:a="http://schemas.openxmlformats.org/drawingml/2006/main"/>
           <a:p xmlns:a="http://schemas.openxmlformats.org/drawingml/2006/main">
             <a:pPr algn="ctr">
-              <a:defRPr sz="1350" b="1">
-                <a:solidFill>
-                  <a:srgbClr val="30D158"/>
-                </a:solidFill>
-              </a:defRPr>
-            </a:pPr>
-            <a:r>
-              <a:rPr sz="1350" b="1">
-                <a:solidFill>
-                  <a:srgbClr val="30D158"/>
-                </a:solidFill>
-              </a:rPr>
-              <a:t>VS Code: PostgreSQL</a:t>
+              <a:defRPr sz="1050" b="1">
+                <a:solidFill>
+                  <a:srgbClr val="66D4CF"/>
+                </a:solidFill>
+              </a:defRPr>
+            </a:pPr>
+            <a:r>
+              <a:rPr sz="1050" b="1">
+                <a:solidFill>
+                  <a:srgbClr val="66D4CF"/>
+                </a:solidFill>
+              </a:rPr>
+              <a:t>3</a:t>
+            </a:r>
+          </a:p>
+        </p:txBody>
+      </p:sp>
+      <p:sp>
+        <p:nvSpPr>
+          <p:cNvPr id="18" name="">
+            <a:extLst xmlns:a="http://schemas.openxmlformats.org/drawingml/2006/main">
+              <a:ext uri="{FF2B5EF4-FFF2-40B4-BE49-F238E27FC236}">
+                <a16:creationId xmlns:a16="http://schemas.microsoft.com/office/drawing/2014/main" id="{C961F261-7B17-447C-BAA3-2D7067506689}"/>
+              </a:ext>
+            </a:extLst>
+          </p:cNvPr>
+          <p:cNvSpPr>
+            <a:spLocks xmlns:a="http://schemas.openxmlformats.org/drawingml/2006/main" noGrp="1"/>
+          </p:cNvSpPr>
+          <p:nvPr/>
+        </p:nvSpPr>
+        <p:spPr>
+          <a:xfrm xmlns:a="http://schemas.openxmlformats.org/drawingml/2006/main">
+            <a:off x="1447800" y="5448300"/>
+            <a:ext cx="8877300" cy="419100"/>
+          </a:xfrm>
+          <a:prstGeom xmlns:a="http://schemas.openxmlformats.org/drawingml/2006/main" prst="rect">
+            <a:avLst/>
+          </a:prstGeom>
+          <a:noFill xmlns:a="http://schemas.openxmlformats.org/drawingml/2006/main"/>
+          <a:ln xmlns:a="http://schemas.openxmlformats.org/drawingml/2006/main" w="0">
+            <a:noFill/>
+            <a:prstDash val="solid"/>
+          </a:ln>
+        </p:spPr>
+        <p:txBody>
+          <a:bodyPr xmlns:a="http://schemas.openxmlformats.org/drawingml/2006/main"/>
+          <a:lstStyle xmlns:a="http://schemas.openxmlformats.org/drawingml/2006/main"/>
+          <a:p xmlns:a="http://schemas.openxmlformats.org/drawingml/2006/main">
+            <a:pPr algn="l">
+              <a:defRPr sz="1350" b="0">
+                <a:solidFill>
+                  <a:srgbClr val="F7F8FF"/>
+                </a:solidFill>
+              </a:defRPr>
+            </a:pPr>
+            <a:r>
+              <a:rPr sz="1350" b="0">
+                <a:solidFill>
+                  <a:srgbClr val="F7F8FF"/>
+                </a:solidFill>
+              </a:rPr>
+              <a:t>Профіль можна редагувати: ім’я, фото за URL та опис свого смаку.</a:t>
             </a:r>
           </a:p>
         </p:txBody>
@@ -8695,7 +10600,7 @@
     </p:spTree>
     <p:extLst>
       <p:ext uri="{BB962C8B-B14F-4D97-AF65-F5344CB8AC3E}">
-        <p14:creationId xmlns:p14="http://schemas.microsoft.com/office/powerpoint/2010/main" val="742513487"/>
+        <p14:creationId xmlns:p14="http://schemas.microsoft.com/office/powerpoint/2010/main" val="263440794"/>
       </p:ext>
     </p:extLst>
   </p:cSld>
@@ -8723,10 +10628,10 @@
       </p:grpSpPr>
       <p:sp>
         <p:nvSpPr>
-          <p:cNvPr id="1" name="">
-            <a:extLst xmlns:a="http://schemas.openxmlformats.org/drawingml/2006/main">
-              <a:ext uri="{FF2B5EF4-FFF2-40B4-BE49-F238E27FC236}">
-                <a16:creationId xmlns:a16="http://schemas.microsoft.com/office/drawing/2014/main" id="{3A94169E-A3A5-4163-BDE9-D342D8C67485}"/>
+          <p:cNvPr id="12" name="">
+            <a:extLst xmlns:a="http://schemas.openxmlformats.org/drawingml/2006/main">
+              <a:ext uri="{FF2B5EF4-FFF2-40B4-BE49-F238E27FC236}">
+                <a16:creationId xmlns:a16="http://schemas.microsoft.com/office/drawing/2014/main" id="{81593689-7798-4286-AD57-1F23380B9F77}"/>
               </a:ext>
             </a:extLst>
           </p:cNvPr>
@@ -8754,7 +10659,7 @@
           <p:cNvPr id="2" name="">
             <a:extLst xmlns:a="http://schemas.openxmlformats.org/drawingml/2006/main">
               <a:ext uri="{FF2B5EF4-FFF2-40B4-BE49-F238E27FC236}">
-                <a16:creationId xmlns:a16="http://schemas.microsoft.com/office/drawing/2014/main" id="{445FE9AD-98CE-4232-8E50-E4021422A289}"/>
+                <a16:creationId xmlns:a16="http://schemas.microsoft.com/office/drawing/2014/main" id="{FFB910E4-413E-4C9C-AD8C-9C76EEBB0374}"/>
               </a:ext>
             </a:extLst>
           </p:cNvPr>
@@ -8782,7 +10687,7 @@
           <p:cNvPr id="3" name="">
             <a:extLst xmlns:a="http://schemas.openxmlformats.org/drawingml/2006/main">
               <a:ext uri="{FF2B5EF4-FFF2-40B4-BE49-F238E27FC236}">
-                <a16:creationId xmlns:a16="http://schemas.microsoft.com/office/drawing/2014/main" id="{1F462D86-0C70-467C-982D-0C2AC631AB75}"/>
+                <a16:creationId xmlns:a16="http://schemas.microsoft.com/office/drawing/2014/main" id="{352D5036-4207-46E5-A1CE-973D44CD52A9}"/>
               </a:ext>
             </a:extLst>
           </p:cNvPr>
@@ -8832,7 +10737,7 @@
           <p:cNvPr id="4" name="">
             <a:extLst xmlns:a="http://schemas.openxmlformats.org/drawingml/2006/main">
               <a:ext uri="{FF2B5EF4-FFF2-40B4-BE49-F238E27FC236}">
-                <a16:creationId xmlns:a16="http://schemas.microsoft.com/office/drawing/2014/main" id="{59BB55C9-89B9-43C0-9A9F-1EA120CDD9F9}"/>
+                <a16:creationId xmlns:a16="http://schemas.microsoft.com/office/drawing/2014/main" id="{AAE197CD-BFEB-4C7A-B9A0-B76BE4251BB4}"/>
               </a:ext>
             </a:extLst>
           </p:cNvPr>
@@ -8872,7 +10777,7 @@
                   <a:srgbClr val="F7F8FF"/>
                 </a:solidFill>
               </a:rPr>
-              <a:t>Проєкт перевірено перед захистом</a:t>
+              <a:t>Код розділений за відповідальністю</a:t>
             </a:r>
           </a:p>
         </p:txBody>
@@ -8882,7 +10787,7 @@
           <p:cNvPr id="5" name="">
             <a:extLst xmlns:a="http://schemas.openxmlformats.org/drawingml/2006/main">
               <a:ext uri="{FF2B5EF4-FFF2-40B4-BE49-F238E27FC236}">
-                <a16:creationId xmlns:a16="http://schemas.microsoft.com/office/drawing/2014/main" id="{6449B387-A86A-4967-B335-B0015D3042AF}"/>
+                <a16:creationId xmlns:a16="http://schemas.microsoft.com/office/drawing/2014/main" id="{F082433C-FAED-4C97-A0F9-F6DCBBB97627}"/>
               </a:ext>
             </a:extLst>
           </p:cNvPr>
@@ -8922,493 +10827,151 @@
                   <a:srgbClr val="A9B0C2"/>
                 </a:solidFill>
               </a:rPr>
-              <a:t>Фокус перевірки: застосунок запускається, код аналізується без issues, базові тести проходять.</a:t>
-            </a:r>
-          </a:p>
-        </p:txBody>
-      </p:sp>
-      <p:sp>
-        <p:nvSpPr>
-          <p:cNvPr id="6" name="">
-            <a:extLst xmlns:a="http://schemas.openxmlformats.org/drawingml/2006/main">
-              <a:ext uri="{FF2B5EF4-FFF2-40B4-BE49-F238E27FC236}">
-                <a16:creationId xmlns:a16="http://schemas.microsoft.com/office/drawing/2014/main" id="{4748DC02-94C9-49F1-B0FD-B3FBBEECFB19}"/>
-              </a:ext>
-            </a:extLst>
-          </p:cNvPr>
-          <p:cNvSpPr>
-            <a:spLocks xmlns:a="http://schemas.openxmlformats.org/drawingml/2006/main" noGrp="1"/>
-          </p:cNvSpPr>
-          <p:nvPr/>
-        </p:nvSpPr>
-        <p:spPr>
-          <a:xfrm xmlns:a="http://schemas.openxmlformats.org/drawingml/2006/main">
-            <a:off x="1047750" y="2571750"/>
-            <a:ext cx="2476500" cy="990600"/>
+              <a:t>Flutter відповідає за UX, FastAPI за HTTP-логіку, PostgreSQL за структуроване збереження даних.</a:t>
+            </a:r>
+          </a:p>
+        </p:txBody>
+      </p:sp>
+      <p:pic>
+        <p:nvPicPr>
+          <p:cNvPr id="17" name=""/>
+          <p:cNvPicPr>
+            <a:picLocks xmlns:a="http://schemas.openxmlformats.org/drawingml/2006/main" noChangeAspect="1"/>
+          </p:cNvPicPr>
+          <p:nvPr/>
+        </p:nvPicPr>
+        <p:blipFill>
+          <a:blip xmlns:r="http://schemas.openxmlformats.org/officeDocument/2006/relationships" xmlns:a="http://schemas.openxmlformats.org/drawingml/2006/main" r:embed="R07f438511036449f"/>
+          <a:stretch xmlns:a="http://schemas.openxmlformats.org/drawingml/2006/main"/>
+        </p:blipFill>
+        <p:spPr>
+          <a:xfrm xmlns:a="http://schemas.openxmlformats.org/drawingml/2006/main">
+            <a:off x="1389295" y="2247900"/>
+            <a:ext cx="1793410" cy="3429000"/>
           </a:xfrm>
           <a:prstGeom xmlns:a="http://schemas.openxmlformats.org/drawingml/2006/main" prst="roundRect">
             <a:avLst>
-              <a:gd name="adj" fmla="val 11538"/>
+              <a:gd name="adj" fmla="val 3333"/>
             </a:avLst>
           </a:prstGeom>
-          <a:solidFill xmlns:a="http://schemas.openxmlformats.org/drawingml/2006/main">
-            <a:srgbClr val="171A23"/>
-          </a:solidFill>
-          <a:ln xmlns:a="http://schemas.openxmlformats.org/drawingml/2006/main" w="9525">
-            <a:solidFill>
-              <a:srgbClr val="30D158"/>
-            </a:solidFill>
-            <a:prstDash val="solid"/>
-          </a:ln>
-        </p:spPr>
-        <p:style>
-          <a:lnRef xmlns:a="http://schemas.openxmlformats.org/drawingml/2006/main" idx="0"/>
-          <a:fillRef xmlns:a="http://schemas.openxmlformats.org/drawingml/2006/main" idx="0"/>
-          <a:effectRef xmlns:a="http://schemas.openxmlformats.org/drawingml/2006/main" idx="4"/>
-          <a:fontRef xmlns:a="http://schemas.openxmlformats.org/drawingml/2006/main" idx="major"/>
-        </p:style>
-      </p:sp>
-      <p:sp>
-        <p:nvSpPr>
-          <p:cNvPr id="7" name="">
-            <a:extLst xmlns:a="http://schemas.openxmlformats.org/drawingml/2006/main">
-              <a:ext uri="{FF2B5EF4-FFF2-40B4-BE49-F238E27FC236}">
-                <a16:creationId xmlns:a16="http://schemas.microsoft.com/office/drawing/2014/main" id="{92715D38-CA76-4122-B96C-223D45DA881A}"/>
-              </a:ext>
-            </a:extLst>
-          </p:cNvPr>
-          <p:cNvSpPr>
-            <a:spLocks xmlns:a="http://schemas.openxmlformats.org/drawingml/2006/main" noGrp="1"/>
-          </p:cNvSpPr>
-          <p:nvPr/>
-        </p:nvSpPr>
-        <p:spPr>
-          <a:xfrm xmlns:a="http://schemas.openxmlformats.org/drawingml/2006/main">
-            <a:off x="1200150" y="2724150"/>
-            <a:ext cx="2171700" cy="323850"/>
-          </a:xfrm>
-          <a:prstGeom xmlns:a="http://schemas.openxmlformats.org/drawingml/2006/main" prst="rect">
-            <a:avLst/>
-          </a:prstGeom>
-          <a:noFill xmlns:a="http://schemas.openxmlformats.org/drawingml/2006/main"/>
-          <a:ln xmlns:a="http://schemas.openxmlformats.org/drawingml/2006/main" w="0">
-            <a:noFill/>
-            <a:prstDash val="solid"/>
-          </a:ln>
-        </p:spPr>
-        <p:txBody>
-          <a:bodyPr xmlns:a="http://schemas.openxmlformats.org/drawingml/2006/main"/>
-          <a:lstStyle xmlns:a="http://schemas.openxmlformats.org/drawingml/2006/main"/>
-          <a:p xmlns:a="http://schemas.openxmlformats.org/drawingml/2006/main">
-            <a:pPr algn="l">
-              <a:defRPr sz="2250" b="1">
-                <a:solidFill>
-                  <a:srgbClr val="30D158"/>
-                </a:solidFill>
-              </a:defRPr>
-            </a:pPr>
-            <a:r>
-              <a:rPr sz="2250" b="1">
-                <a:solidFill>
-                  <a:srgbClr val="30D158"/>
-                </a:solidFill>
-              </a:rPr>
-              <a:t>0</a:t>
-            </a:r>
-          </a:p>
-        </p:txBody>
-      </p:sp>
-      <p:sp>
-        <p:nvSpPr>
-          <p:cNvPr id="8" name="">
-            <a:extLst xmlns:a="http://schemas.openxmlformats.org/drawingml/2006/main">
-              <a:ext uri="{FF2B5EF4-FFF2-40B4-BE49-F238E27FC236}">
-                <a16:creationId xmlns:a16="http://schemas.microsoft.com/office/drawing/2014/main" id="{F1E60374-C81E-4B36-949A-2B98DB11BCF2}"/>
-              </a:ext>
-            </a:extLst>
-          </p:cNvPr>
-          <p:cNvSpPr>
-            <a:spLocks xmlns:a="http://schemas.openxmlformats.org/drawingml/2006/main" noGrp="1"/>
-          </p:cNvSpPr>
-          <p:nvPr/>
-        </p:nvSpPr>
-        <p:spPr>
-          <a:xfrm xmlns:a="http://schemas.openxmlformats.org/drawingml/2006/main">
-            <a:off x="1200150" y="3124200"/>
-            <a:ext cx="2171700" cy="285750"/>
-          </a:xfrm>
-          <a:prstGeom xmlns:a="http://schemas.openxmlformats.org/drawingml/2006/main" prst="rect">
-            <a:avLst/>
-          </a:prstGeom>
-          <a:noFill xmlns:a="http://schemas.openxmlformats.org/drawingml/2006/main"/>
-          <a:ln xmlns:a="http://schemas.openxmlformats.org/drawingml/2006/main" w="0">
-            <a:noFill/>
-            <a:prstDash val="solid"/>
-          </a:ln>
-        </p:spPr>
-        <p:txBody>
-          <a:bodyPr xmlns:a="http://schemas.openxmlformats.org/drawingml/2006/main"/>
-          <a:lstStyle xmlns:a="http://schemas.openxmlformats.org/drawingml/2006/main"/>
-          <a:p xmlns:a="http://schemas.openxmlformats.org/drawingml/2006/main">
-            <a:pPr algn="l">
-              <a:defRPr sz="1125" b="0">
-                <a:solidFill>
-                  <a:srgbClr val="A9B0C2"/>
-                </a:solidFill>
-              </a:defRPr>
-            </a:pPr>
-            <a:r>
-              <a:rPr sz="1125" b="0">
-                <a:solidFill>
-                  <a:srgbClr val="A9B0C2"/>
-                </a:solidFill>
-              </a:rPr>
-              <a:t>Flutter analyze issues</a:t>
-            </a:r>
-          </a:p>
-        </p:txBody>
-      </p:sp>
-      <p:sp>
-        <p:nvSpPr>
-          <p:cNvPr id="9" name="">
-            <a:extLst xmlns:a="http://schemas.openxmlformats.org/drawingml/2006/main">
-              <a:ext uri="{FF2B5EF4-FFF2-40B4-BE49-F238E27FC236}">
-                <a16:creationId xmlns:a16="http://schemas.microsoft.com/office/drawing/2014/main" id="{AC611253-CC3B-43F0-BE50-1F0A6D788095}"/>
-              </a:ext>
-            </a:extLst>
-          </p:cNvPr>
-          <p:cNvSpPr>
-            <a:spLocks xmlns:a="http://schemas.openxmlformats.org/drawingml/2006/main" noGrp="1"/>
-          </p:cNvSpPr>
-          <p:nvPr/>
-        </p:nvSpPr>
-        <p:spPr>
-          <a:xfrm xmlns:a="http://schemas.openxmlformats.org/drawingml/2006/main">
-            <a:off x="3905250" y="2571750"/>
-            <a:ext cx="2476500" cy="990600"/>
+        </p:spPr>
+      </p:pic>
+      <p:pic>
+        <p:nvPicPr>
+          <p:cNvPr id="18" name=""/>
+          <p:cNvPicPr>
+            <a:picLocks xmlns:a="http://schemas.openxmlformats.org/drawingml/2006/main" noChangeAspect="1"/>
+          </p:cNvPicPr>
+          <p:nvPr/>
+        </p:nvPicPr>
+        <p:blipFill>
+          <a:blip xmlns:r="http://schemas.openxmlformats.org/officeDocument/2006/relationships" xmlns:a="http://schemas.openxmlformats.org/drawingml/2006/main" r:embed="Rc374a20f46634663"/>
+          <a:stretch xmlns:a="http://schemas.openxmlformats.org/drawingml/2006/main"/>
+        </p:blipFill>
+        <p:spPr>
+          <a:xfrm xmlns:a="http://schemas.openxmlformats.org/drawingml/2006/main">
+            <a:off x="4381500" y="2890838"/>
+            <a:ext cx="3429000" cy="2143125"/>
           </a:xfrm>
           <a:prstGeom xmlns:a="http://schemas.openxmlformats.org/drawingml/2006/main" prst="roundRect">
             <a:avLst>
-              <a:gd name="adj" fmla="val 11538"/>
+              <a:gd name="adj" fmla="val 3333"/>
             </a:avLst>
           </a:prstGeom>
-          <a:solidFill xmlns:a="http://schemas.openxmlformats.org/drawingml/2006/main">
-            <a:srgbClr val="171A23"/>
-          </a:solidFill>
-          <a:ln xmlns:a="http://schemas.openxmlformats.org/drawingml/2006/main" w="9525">
-            <a:solidFill>
-              <a:srgbClr val="66D4CF"/>
-            </a:solidFill>
-            <a:prstDash val="solid"/>
-          </a:ln>
-        </p:spPr>
-        <p:style>
-          <a:lnRef xmlns:a="http://schemas.openxmlformats.org/drawingml/2006/main" idx="0"/>
-          <a:fillRef xmlns:a="http://schemas.openxmlformats.org/drawingml/2006/main" idx="0"/>
-          <a:effectRef xmlns:a="http://schemas.openxmlformats.org/drawingml/2006/main" idx="4"/>
-          <a:fontRef xmlns:a="http://schemas.openxmlformats.org/drawingml/2006/main" idx="major"/>
-        </p:style>
-      </p:sp>
-      <p:sp>
-        <p:nvSpPr>
-          <p:cNvPr id="10" name="">
-            <a:extLst xmlns:a="http://schemas.openxmlformats.org/drawingml/2006/main">
-              <a:ext uri="{FF2B5EF4-FFF2-40B4-BE49-F238E27FC236}">
-                <a16:creationId xmlns:a16="http://schemas.microsoft.com/office/drawing/2014/main" id="{D59671B3-00E3-4851-A684-222391D921F7}"/>
-              </a:ext>
-            </a:extLst>
-          </p:cNvPr>
-          <p:cNvSpPr>
-            <a:spLocks xmlns:a="http://schemas.openxmlformats.org/drawingml/2006/main" noGrp="1"/>
-          </p:cNvSpPr>
-          <p:nvPr/>
-        </p:nvSpPr>
-        <p:spPr>
-          <a:xfrm xmlns:a="http://schemas.openxmlformats.org/drawingml/2006/main">
-            <a:off x="4057650" y="2724150"/>
-            <a:ext cx="2171700" cy="323850"/>
-          </a:xfrm>
-          <a:prstGeom xmlns:a="http://schemas.openxmlformats.org/drawingml/2006/main" prst="rect">
-            <a:avLst/>
-          </a:prstGeom>
-          <a:noFill xmlns:a="http://schemas.openxmlformats.org/drawingml/2006/main"/>
-          <a:ln xmlns:a="http://schemas.openxmlformats.org/drawingml/2006/main" w="0">
-            <a:noFill/>
-            <a:prstDash val="solid"/>
-          </a:ln>
-        </p:spPr>
-        <p:txBody>
-          <a:bodyPr xmlns:a="http://schemas.openxmlformats.org/drawingml/2006/main"/>
-          <a:lstStyle xmlns:a="http://schemas.openxmlformats.org/drawingml/2006/main"/>
-          <a:p xmlns:a="http://schemas.openxmlformats.org/drawingml/2006/main">
-            <a:pPr algn="l">
-              <a:defRPr sz="2250" b="1">
-                <a:solidFill>
-                  <a:srgbClr val="66D4CF"/>
-                </a:solidFill>
-              </a:defRPr>
-            </a:pPr>
-            <a:r>
-              <a:rPr sz="2250" b="1">
-                <a:solidFill>
-                  <a:srgbClr val="66D4CF"/>
-                </a:solidFill>
-              </a:rPr>
-              <a:t>1/1</a:t>
-            </a:r>
-          </a:p>
-        </p:txBody>
-      </p:sp>
-      <p:sp>
-        <p:nvSpPr>
-          <p:cNvPr id="11" name="">
-            <a:extLst xmlns:a="http://schemas.openxmlformats.org/drawingml/2006/main">
-              <a:ext uri="{FF2B5EF4-FFF2-40B4-BE49-F238E27FC236}">
-                <a16:creationId xmlns:a16="http://schemas.microsoft.com/office/drawing/2014/main" id="{A70DB0CC-3EAE-41EE-8553-0F3E62E7E59F}"/>
-              </a:ext>
-            </a:extLst>
-          </p:cNvPr>
-          <p:cNvSpPr>
-            <a:spLocks xmlns:a="http://schemas.openxmlformats.org/drawingml/2006/main" noGrp="1"/>
-          </p:cNvSpPr>
-          <p:nvPr/>
-        </p:nvSpPr>
-        <p:spPr>
-          <a:xfrm xmlns:a="http://schemas.openxmlformats.org/drawingml/2006/main">
-            <a:off x="4057650" y="3124200"/>
-            <a:ext cx="2171700" cy="285750"/>
-          </a:xfrm>
-          <a:prstGeom xmlns:a="http://schemas.openxmlformats.org/drawingml/2006/main" prst="rect">
-            <a:avLst/>
-          </a:prstGeom>
-          <a:noFill xmlns:a="http://schemas.openxmlformats.org/drawingml/2006/main"/>
-          <a:ln xmlns:a="http://schemas.openxmlformats.org/drawingml/2006/main" w="0">
-            <a:noFill/>
-            <a:prstDash val="solid"/>
-          </a:ln>
-        </p:spPr>
-        <p:txBody>
-          <a:bodyPr xmlns:a="http://schemas.openxmlformats.org/drawingml/2006/main"/>
-          <a:lstStyle xmlns:a="http://schemas.openxmlformats.org/drawingml/2006/main"/>
-          <a:p xmlns:a="http://schemas.openxmlformats.org/drawingml/2006/main">
-            <a:pPr algn="l">
-              <a:defRPr sz="1125" b="0">
-                <a:solidFill>
-                  <a:srgbClr val="A9B0C2"/>
-                </a:solidFill>
-              </a:defRPr>
-            </a:pPr>
-            <a:r>
-              <a:rPr sz="1125" b="0">
-                <a:solidFill>
-                  <a:srgbClr val="A9B0C2"/>
-                </a:solidFill>
-              </a:rPr>
-              <a:t>widget test passed</a:t>
-            </a:r>
-          </a:p>
-        </p:txBody>
-      </p:sp>
-      <p:sp>
-        <p:nvSpPr>
-          <p:cNvPr id="12" name="">
-            <a:extLst xmlns:a="http://schemas.openxmlformats.org/drawingml/2006/main">
-              <a:ext uri="{FF2B5EF4-FFF2-40B4-BE49-F238E27FC236}">
-                <a16:creationId xmlns:a16="http://schemas.microsoft.com/office/drawing/2014/main" id="{773D9974-267F-4912-999F-CF459F34DF6C}"/>
-              </a:ext>
-            </a:extLst>
-          </p:cNvPr>
-          <p:cNvSpPr>
-            <a:spLocks xmlns:a="http://schemas.openxmlformats.org/drawingml/2006/main" noGrp="1"/>
-          </p:cNvSpPr>
-          <p:nvPr/>
-        </p:nvSpPr>
-        <p:spPr>
-          <a:xfrm xmlns:a="http://schemas.openxmlformats.org/drawingml/2006/main">
-            <a:off x="6762750" y="2571750"/>
-            <a:ext cx="2476500" cy="990600"/>
+        </p:spPr>
+      </p:pic>
+      <p:pic>
+        <p:nvPicPr>
+          <p:cNvPr id="19" name=""/>
+          <p:cNvPicPr>
+            <a:picLocks xmlns:a="http://schemas.openxmlformats.org/drawingml/2006/main" noChangeAspect="1"/>
+          </p:cNvPicPr>
+          <p:nvPr/>
+        </p:nvPicPr>
+        <p:blipFill>
+          <a:blip xmlns:r="http://schemas.openxmlformats.org/officeDocument/2006/relationships" xmlns:a="http://schemas.openxmlformats.org/drawingml/2006/main" r:embed="R5cd7e5cce0c24ea4"/>
+          <a:stretch xmlns:a="http://schemas.openxmlformats.org/drawingml/2006/main"/>
+        </p:blipFill>
+        <p:spPr>
+          <a:xfrm xmlns:a="http://schemas.openxmlformats.org/drawingml/2006/main">
+            <a:off x="8191500" y="2890838"/>
+            <a:ext cx="3429000" cy="2143125"/>
           </a:xfrm>
           <a:prstGeom xmlns:a="http://schemas.openxmlformats.org/drawingml/2006/main" prst="roundRect">
             <a:avLst>
-              <a:gd name="adj" fmla="val 11538"/>
+              <a:gd name="adj" fmla="val 3333"/>
             </a:avLst>
           </a:prstGeom>
-          <a:solidFill xmlns:a="http://schemas.openxmlformats.org/drawingml/2006/main">
-            <a:srgbClr val="171A23"/>
-          </a:solidFill>
-          <a:ln xmlns:a="http://schemas.openxmlformats.org/drawingml/2006/main" w="9525">
-            <a:solidFill>
-              <a:srgbClr val="0A84FF"/>
-            </a:solidFill>
-            <a:prstDash val="solid"/>
-          </a:ln>
-        </p:spPr>
-        <p:style>
-          <a:lnRef xmlns:a="http://schemas.openxmlformats.org/drawingml/2006/main" idx="0"/>
-          <a:fillRef xmlns:a="http://schemas.openxmlformats.org/drawingml/2006/main" idx="0"/>
-          <a:effectRef xmlns:a="http://schemas.openxmlformats.org/drawingml/2006/main" idx="4"/>
-          <a:fontRef xmlns:a="http://schemas.openxmlformats.org/drawingml/2006/main" idx="major"/>
-        </p:style>
-      </p:sp>
-      <p:sp>
-        <p:nvSpPr>
-          <p:cNvPr id="13" name="">
-            <a:extLst xmlns:a="http://schemas.openxmlformats.org/drawingml/2006/main">
-              <a:ext uri="{FF2B5EF4-FFF2-40B4-BE49-F238E27FC236}">
-                <a16:creationId xmlns:a16="http://schemas.microsoft.com/office/drawing/2014/main" id="{9FA1A524-B686-4F1D-87BB-855472E6BE67}"/>
-              </a:ext>
-            </a:extLst>
-          </p:cNvPr>
-          <p:cNvSpPr>
-            <a:spLocks xmlns:a="http://schemas.openxmlformats.org/drawingml/2006/main" noGrp="1"/>
-          </p:cNvSpPr>
-          <p:nvPr/>
-        </p:nvSpPr>
-        <p:spPr>
-          <a:xfrm xmlns:a="http://schemas.openxmlformats.org/drawingml/2006/main">
-            <a:off x="6915150" y="2724150"/>
-            <a:ext cx="2171700" cy="323850"/>
-          </a:xfrm>
-          <a:prstGeom xmlns:a="http://schemas.openxmlformats.org/drawingml/2006/main" prst="rect">
-            <a:avLst/>
-          </a:prstGeom>
-          <a:noFill xmlns:a="http://schemas.openxmlformats.org/drawingml/2006/main"/>
-          <a:ln xmlns:a="http://schemas.openxmlformats.org/drawingml/2006/main" w="0">
-            <a:noFill/>
-            <a:prstDash val="solid"/>
-          </a:ln>
-        </p:spPr>
-        <p:txBody>
-          <a:bodyPr xmlns:a="http://schemas.openxmlformats.org/drawingml/2006/main"/>
-          <a:lstStyle xmlns:a="http://schemas.openxmlformats.org/drawingml/2006/main"/>
-          <a:p xmlns:a="http://schemas.openxmlformats.org/drawingml/2006/main">
-            <a:pPr algn="l">
-              <a:defRPr sz="2250" b="1">
+        </p:spPr>
+      </p:pic>
+      <p:sp>
+        <p:nvSpPr>
+          <p:cNvPr id="9" name="">
+            <a:extLst xmlns:a="http://schemas.openxmlformats.org/drawingml/2006/main">
+              <a:ext uri="{FF2B5EF4-FFF2-40B4-BE49-F238E27FC236}">
+                <a16:creationId xmlns:a16="http://schemas.microsoft.com/office/drawing/2014/main" id="{E3F9E45F-0417-455A-9A23-63C870E1E8A4}"/>
+              </a:ext>
+            </a:extLst>
+          </p:cNvPr>
+          <p:cNvSpPr>
+            <a:spLocks xmlns:a="http://schemas.openxmlformats.org/drawingml/2006/main" noGrp="1"/>
+          </p:cNvSpPr>
+          <p:nvPr/>
+        </p:nvSpPr>
+        <p:spPr>
+          <a:xfrm xmlns:a="http://schemas.openxmlformats.org/drawingml/2006/main">
+            <a:off x="914400" y="5848350"/>
+            <a:ext cx="2762250" cy="228600"/>
+          </a:xfrm>
+          <a:prstGeom xmlns:a="http://schemas.openxmlformats.org/drawingml/2006/main" prst="rect">
+            <a:avLst/>
+          </a:prstGeom>
+          <a:noFill xmlns:a="http://schemas.openxmlformats.org/drawingml/2006/main"/>
+          <a:ln xmlns:a="http://schemas.openxmlformats.org/drawingml/2006/main" w="0">
+            <a:noFill/>
+            <a:prstDash val="solid"/>
+          </a:ln>
+        </p:spPr>
+        <p:txBody>
+          <a:bodyPr xmlns:a="http://schemas.openxmlformats.org/drawingml/2006/main"/>
+          <a:lstStyle xmlns:a="http://schemas.openxmlformats.org/drawingml/2006/main"/>
+          <a:p xmlns:a="http://schemas.openxmlformats.org/drawingml/2006/main">
+            <a:pPr algn="ctr">
+              <a:defRPr sz="1350" b="1">
                 <a:solidFill>
                   <a:srgbClr val="0A84FF"/>
                 </a:solidFill>
               </a:defRPr>
             </a:pPr>
             <a:r>
-              <a:rPr sz="2250" b="1">
+              <a:rPr sz="1350" b="1">
                 <a:solidFill>
                   <a:srgbClr val="0A84FF"/>
                 </a:solidFill>
               </a:rPr>
-              <a:t>OK</a:t>
-            </a:r>
-          </a:p>
-        </p:txBody>
-      </p:sp>
-      <p:sp>
-        <p:nvSpPr>
-          <p:cNvPr id="14" name="">
-            <a:extLst xmlns:a="http://schemas.openxmlformats.org/drawingml/2006/main">
-              <a:ext uri="{FF2B5EF4-FFF2-40B4-BE49-F238E27FC236}">
-                <a16:creationId xmlns:a16="http://schemas.microsoft.com/office/drawing/2014/main" id="{EF472B4C-A939-44E8-B2EE-BCFAC7BFE95B}"/>
-              </a:ext>
-            </a:extLst>
-          </p:cNvPr>
-          <p:cNvSpPr>
-            <a:spLocks xmlns:a="http://schemas.openxmlformats.org/drawingml/2006/main" noGrp="1"/>
-          </p:cNvSpPr>
-          <p:nvPr/>
-        </p:nvSpPr>
-        <p:spPr>
-          <a:xfrm xmlns:a="http://schemas.openxmlformats.org/drawingml/2006/main">
-            <a:off x="6915150" y="3124200"/>
-            <a:ext cx="2171700" cy="285750"/>
-          </a:xfrm>
-          <a:prstGeom xmlns:a="http://schemas.openxmlformats.org/drawingml/2006/main" prst="rect">
-            <a:avLst/>
-          </a:prstGeom>
-          <a:noFill xmlns:a="http://schemas.openxmlformats.org/drawingml/2006/main"/>
-          <a:ln xmlns:a="http://schemas.openxmlformats.org/drawingml/2006/main" w="0">
-            <a:noFill/>
-            <a:prstDash val="solid"/>
-          </a:ln>
-        </p:spPr>
-        <p:txBody>
-          <a:bodyPr xmlns:a="http://schemas.openxmlformats.org/drawingml/2006/main"/>
-          <a:lstStyle xmlns:a="http://schemas.openxmlformats.org/drawingml/2006/main"/>
-          <a:p xmlns:a="http://schemas.openxmlformats.org/drawingml/2006/main">
-            <a:pPr algn="l">
-              <a:defRPr sz="1125" b="0">
-                <a:solidFill>
-                  <a:srgbClr val="A9B0C2"/>
-                </a:solidFill>
-              </a:defRPr>
-            </a:pPr>
-            <a:r>
-              <a:rPr sz="1125" b="0">
-                <a:solidFill>
-                  <a:srgbClr val="A9B0C2"/>
-                </a:solidFill>
-              </a:rPr>
-              <a:t>backend py_compile</a:t>
-            </a:r>
-          </a:p>
-        </p:txBody>
-      </p:sp>
-      <p:sp>
-        <p:nvSpPr>
-          <p:cNvPr id="15" name="">
-            <a:extLst xmlns:a="http://schemas.openxmlformats.org/drawingml/2006/main">
-              <a:ext uri="{FF2B5EF4-FFF2-40B4-BE49-F238E27FC236}">
-                <a16:creationId xmlns:a16="http://schemas.microsoft.com/office/drawing/2014/main" id="{481E411F-EE31-4954-B991-45E4ABD78F33}"/>
-              </a:ext>
-            </a:extLst>
-          </p:cNvPr>
-          <p:cNvSpPr>
-            <a:spLocks xmlns:a="http://schemas.openxmlformats.org/drawingml/2006/main" noGrp="1"/>
-          </p:cNvSpPr>
-          <p:nvPr/>
-        </p:nvSpPr>
-        <p:spPr>
-          <a:xfrm xmlns:a="http://schemas.openxmlformats.org/drawingml/2006/main">
-            <a:off x="1104900" y="4191000"/>
-            <a:ext cx="323850" cy="323850"/>
-          </a:xfrm>
-          <a:prstGeom xmlns:a="http://schemas.openxmlformats.org/drawingml/2006/main" prst="roundRect">
-            <a:avLst>
-              <a:gd name="adj" fmla="val 35294"/>
-            </a:avLst>
-          </a:prstGeom>
-          <a:solidFill xmlns:a="http://schemas.openxmlformats.org/drawingml/2006/main">
-            <a:srgbClr val="0B1822"/>
-          </a:solidFill>
-          <a:ln xmlns:a="http://schemas.openxmlformats.org/drawingml/2006/main" w="9525">
-            <a:solidFill>
-              <a:srgbClr val="66D4CF"/>
-            </a:solidFill>
-            <a:prstDash val="solid"/>
-          </a:ln>
-        </p:spPr>
-        <p:style>
-          <a:lnRef xmlns:a="http://schemas.openxmlformats.org/drawingml/2006/main" idx="0"/>
-          <a:fillRef xmlns:a="http://schemas.openxmlformats.org/drawingml/2006/main" idx="0"/>
-          <a:effectRef xmlns:a="http://schemas.openxmlformats.org/drawingml/2006/main" idx="4"/>
-          <a:fontRef xmlns:a="http://schemas.openxmlformats.org/drawingml/2006/main" idx="major"/>
-        </p:style>
-      </p:sp>
-      <p:sp>
-        <p:nvSpPr>
-          <p:cNvPr id="16" name="">
-            <a:extLst xmlns:a="http://schemas.openxmlformats.org/drawingml/2006/main">
-              <a:ext uri="{FF2B5EF4-FFF2-40B4-BE49-F238E27FC236}">
-                <a16:creationId xmlns:a16="http://schemas.microsoft.com/office/drawing/2014/main" id="{1F6B4016-0F56-4839-A264-5720407F6879}"/>
-              </a:ext>
-            </a:extLst>
-          </p:cNvPr>
-          <p:cNvSpPr>
-            <a:spLocks xmlns:a="http://schemas.openxmlformats.org/drawingml/2006/main" noGrp="1"/>
-          </p:cNvSpPr>
-          <p:nvPr/>
-        </p:nvSpPr>
-        <p:spPr>
-          <a:xfrm xmlns:a="http://schemas.openxmlformats.org/drawingml/2006/main">
-            <a:off x="1104900" y="4257675"/>
-            <a:ext cx="323850" cy="171450"/>
+              <a:t>Flutter logic</a:t>
+            </a:r>
+          </a:p>
+        </p:txBody>
+      </p:sp>
+      <p:sp>
+        <p:nvSpPr>
+          <p:cNvPr id="10" name="">
+            <a:extLst xmlns:a="http://schemas.openxmlformats.org/drawingml/2006/main">
+              <a:ext uri="{FF2B5EF4-FFF2-40B4-BE49-F238E27FC236}">
+                <a16:creationId xmlns:a16="http://schemas.microsoft.com/office/drawing/2014/main" id="{70E3554F-BE35-495A-9560-67F7E2840D93}"/>
+              </a:ext>
+            </a:extLst>
+          </p:cNvPr>
+          <p:cNvSpPr>
+            <a:spLocks xmlns:a="http://schemas.openxmlformats.org/drawingml/2006/main" noGrp="1"/>
+          </p:cNvSpPr>
+          <p:nvPr/>
+        </p:nvSpPr>
+        <p:spPr>
+          <a:xfrm xmlns:a="http://schemas.openxmlformats.org/drawingml/2006/main">
+            <a:off x="4781550" y="5848350"/>
+            <a:ext cx="2571750" cy="228600"/>
           </a:xfrm>
           <a:prstGeom xmlns:a="http://schemas.openxmlformats.org/drawingml/2006/main" prst="rect">
             <a:avLst/>
@@ -9424,132 +10987,41 @@
           <a:lstStyle xmlns:a="http://schemas.openxmlformats.org/drawingml/2006/main"/>
           <a:p xmlns:a="http://schemas.openxmlformats.org/drawingml/2006/main">
             <a:pPr algn="ctr">
-              <a:defRPr sz="1050" b="1">
+              <a:defRPr sz="1350" b="1">
                 <a:solidFill>
                   <a:srgbClr val="66D4CF"/>
                 </a:solidFill>
               </a:defRPr>
             </a:pPr>
             <a:r>
-              <a:rPr sz="1050" b="1">
+              <a:rPr sz="1350" b="1">
                 <a:solidFill>
                   <a:srgbClr val="66D4CF"/>
                 </a:solidFill>
               </a:rPr>
-              <a:t>1</a:t>
-            </a:r>
-          </a:p>
-        </p:txBody>
-      </p:sp>
-      <p:sp>
-        <p:nvSpPr>
-          <p:cNvPr id="17" name="">
-            <a:extLst xmlns:a="http://schemas.openxmlformats.org/drawingml/2006/main">
-              <a:ext uri="{FF2B5EF4-FFF2-40B4-BE49-F238E27FC236}">
-                <a16:creationId xmlns:a16="http://schemas.microsoft.com/office/drawing/2014/main" id="{C43E9715-DE5A-4CD4-BE9F-F706E91B07E3}"/>
-              </a:ext>
-            </a:extLst>
-          </p:cNvPr>
-          <p:cNvSpPr>
-            <a:spLocks xmlns:a="http://schemas.openxmlformats.org/drawingml/2006/main" noGrp="1"/>
-          </p:cNvSpPr>
-          <p:nvPr/>
-        </p:nvSpPr>
-        <p:spPr>
-          <a:xfrm xmlns:a="http://schemas.openxmlformats.org/drawingml/2006/main">
-            <a:off x="1562100" y="4210050"/>
-            <a:ext cx="9163050" cy="419100"/>
-          </a:xfrm>
-          <a:prstGeom xmlns:a="http://schemas.openxmlformats.org/drawingml/2006/main" prst="rect">
-            <a:avLst/>
-          </a:prstGeom>
-          <a:noFill xmlns:a="http://schemas.openxmlformats.org/drawingml/2006/main"/>
-          <a:ln xmlns:a="http://schemas.openxmlformats.org/drawingml/2006/main" w="0">
-            <a:noFill/>
-            <a:prstDash val="solid"/>
-          </a:ln>
-        </p:spPr>
-        <p:txBody>
-          <a:bodyPr xmlns:a="http://schemas.openxmlformats.org/drawingml/2006/main"/>
-          <a:lstStyle xmlns:a="http://schemas.openxmlformats.org/drawingml/2006/main"/>
-          <a:p xmlns:a="http://schemas.openxmlformats.org/drawingml/2006/main">
-            <a:pPr algn="l">
-              <a:defRPr sz="1350" b="0">
-                <a:solidFill>
-                  <a:srgbClr val="F7F8FF"/>
-                </a:solidFill>
-              </a:defRPr>
-            </a:pPr>
-            <a:r>
-              <a:rPr sz="1350" b="0">
-                <a:solidFill>
-                  <a:srgbClr val="F7F8FF"/>
-                </a:solidFill>
-              </a:rPr>
-              <a:t>flutter analyze: No issues found.</a:t>
-            </a:r>
-          </a:p>
-        </p:txBody>
-      </p:sp>
-      <p:sp>
-        <p:nvSpPr>
-          <p:cNvPr id="18" name="">
-            <a:extLst xmlns:a="http://schemas.openxmlformats.org/drawingml/2006/main">
-              <a:ext uri="{FF2B5EF4-FFF2-40B4-BE49-F238E27FC236}">
-                <a16:creationId xmlns:a16="http://schemas.microsoft.com/office/drawing/2014/main" id="{7F94E2CB-9BDD-46EF-A95A-94297DCBDFC6}"/>
-              </a:ext>
-            </a:extLst>
-          </p:cNvPr>
-          <p:cNvSpPr>
-            <a:spLocks xmlns:a="http://schemas.openxmlformats.org/drawingml/2006/main" noGrp="1"/>
-          </p:cNvSpPr>
-          <p:nvPr/>
-        </p:nvSpPr>
-        <p:spPr>
-          <a:xfrm xmlns:a="http://schemas.openxmlformats.org/drawingml/2006/main">
-            <a:off x="1104900" y="4667250"/>
-            <a:ext cx="323850" cy="323850"/>
-          </a:xfrm>
-          <a:prstGeom xmlns:a="http://schemas.openxmlformats.org/drawingml/2006/main" prst="roundRect">
-            <a:avLst>
-              <a:gd name="adj" fmla="val 35294"/>
-            </a:avLst>
-          </a:prstGeom>
-          <a:solidFill xmlns:a="http://schemas.openxmlformats.org/drawingml/2006/main">
-            <a:srgbClr val="0B1822"/>
-          </a:solidFill>
-          <a:ln xmlns:a="http://schemas.openxmlformats.org/drawingml/2006/main" w="9525">
-            <a:solidFill>
-              <a:srgbClr val="66D4CF"/>
-            </a:solidFill>
-            <a:prstDash val="solid"/>
-          </a:ln>
-        </p:spPr>
-        <p:style>
-          <a:lnRef xmlns:a="http://schemas.openxmlformats.org/drawingml/2006/main" idx="0"/>
-          <a:fillRef xmlns:a="http://schemas.openxmlformats.org/drawingml/2006/main" idx="0"/>
-          <a:effectRef xmlns:a="http://schemas.openxmlformats.org/drawingml/2006/main" idx="4"/>
-          <a:fontRef xmlns:a="http://schemas.openxmlformats.org/drawingml/2006/main" idx="major"/>
-        </p:style>
-      </p:sp>
-      <p:sp>
-        <p:nvSpPr>
-          <p:cNvPr id="19" name="">
-            <a:extLst xmlns:a="http://schemas.openxmlformats.org/drawingml/2006/main">
-              <a:ext uri="{FF2B5EF4-FFF2-40B4-BE49-F238E27FC236}">
-                <a16:creationId xmlns:a16="http://schemas.microsoft.com/office/drawing/2014/main" id="{7B7E6C97-7A00-4756-9ED8-710599EC738A}"/>
-              </a:ext>
-            </a:extLst>
-          </p:cNvPr>
-          <p:cNvSpPr>
-            <a:spLocks xmlns:a="http://schemas.openxmlformats.org/drawingml/2006/main" noGrp="1"/>
-          </p:cNvSpPr>
-          <p:nvPr/>
-        </p:nvSpPr>
-        <p:spPr>
-          <a:xfrm xmlns:a="http://schemas.openxmlformats.org/drawingml/2006/main">
-            <a:off x="1104900" y="4733925"/>
-            <a:ext cx="323850" cy="171450"/>
+              <a:t>VS Code: FastAPI</a:t>
+            </a:r>
+          </a:p>
+        </p:txBody>
+      </p:sp>
+      <p:sp>
+        <p:nvSpPr>
+          <p:cNvPr id="11" name="">
+            <a:extLst xmlns:a="http://schemas.openxmlformats.org/drawingml/2006/main">
+              <a:ext uri="{FF2B5EF4-FFF2-40B4-BE49-F238E27FC236}">
+                <a16:creationId xmlns:a16="http://schemas.microsoft.com/office/drawing/2014/main" id="{C3774D94-BE71-456F-BE6B-7D667E9CB1B1}"/>
+              </a:ext>
+            </a:extLst>
+          </p:cNvPr>
+          <p:cNvSpPr>
+            <a:spLocks xmlns:a="http://schemas.openxmlformats.org/drawingml/2006/main" noGrp="1"/>
+          </p:cNvSpPr>
+          <p:nvPr/>
+        </p:nvSpPr>
+        <p:spPr>
+          <a:xfrm xmlns:a="http://schemas.openxmlformats.org/drawingml/2006/main">
+            <a:off x="8572500" y="5848350"/>
+            <a:ext cx="2667000" cy="228600"/>
           </a:xfrm>
           <a:prstGeom xmlns:a="http://schemas.openxmlformats.org/drawingml/2006/main" prst="rect">
             <a:avLst/>
@@ -9565,351 +11037,19 @@
           <a:lstStyle xmlns:a="http://schemas.openxmlformats.org/drawingml/2006/main"/>
           <a:p xmlns:a="http://schemas.openxmlformats.org/drawingml/2006/main">
             <a:pPr algn="ctr">
-              <a:defRPr sz="1050" b="1">
-                <a:solidFill>
-                  <a:srgbClr val="66D4CF"/>
-                </a:solidFill>
-              </a:defRPr>
-            </a:pPr>
-            <a:r>
-              <a:rPr sz="1050" b="1">
-                <a:solidFill>
-                  <a:srgbClr val="66D4CF"/>
-                </a:solidFill>
-              </a:rPr>
-              <a:t>2</a:t>
-            </a:r>
-          </a:p>
-        </p:txBody>
-      </p:sp>
-      <p:sp>
-        <p:nvSpPr>
-          <p:cNvPr id="20" name="">
-            <a:extLst xmlns:a="http://schemas.openxmlformats.org/drawingml/2006/main">
-              <a:ext uri="{FF2B5EF4-FFF2-40B4-BE49-F238E27FC236}">
-                <a16:creationId xmlns:a16="http://schemas.microsoft.com/office/drawing/2014/main" id="{DEAC73AD-9DD5-40EC-9822-B15C47D6511D}"/>
-              </a:ext>
-            </a:extLst>
-          </p:cNvPr>
-          <p:cNvSpPr>
-            <a:spLocks xmlns:a="http://schemas.openxmlformats.org/drawingml/2006/main" noGrp="1"/>
-          </p:cNvSpPr>
-          <p:nvPr/>
-        </p:nvSpPr>
-        <p:spPr>
-          <a:xfrm xmlns:a="http://schemas.openxmlformats.org/drawingml/2006/main">
-            <a:off x="1562100" y="4686300"/>
-            <a:ext cx="9163050" cy="419100"/>
-          </a:xfrm>
-          <a:prstGeom xmlns:a="http://schemas.openxmlformats.org/drawingml/2006/main" prst="rect">
-            <a:avLst/>
-          </a:prstGeom>
-          <a:noFill xmlns:a="http://schemas.openxmlformats.org/drawingml/2006/main"/>
-          <a:ln xmlns:a="http://schemas.openxmlformats.org/drawingml/2006/main" w="0">
-            <a:noFill/>
-            <a:prstDash val="solid"/>
-          </a:ln>
-        </p:spPr>
-        <p:txBody>
-          <a:bodyPr xmlns:a="http://schemas.openxmlformats.org/drawingml/2006/main"/>
-          <a:lstStyle xmlns:a="http://schemas.openxmlformats.org/drawingml/2006/main"/>
-          <a:p xmlns:a="http://schemas.openxmlformats.org/drawingml/2006/main">
-            <a:pPr algn="l">
-              <a:defRPr sz="1350" b="0">
-                <a:solidFill>
-                  <a:srgbClr val="F7F8FF"/>
-                </a:solidFill>
-              </a:defRPr>
-            </a:pPr>
-            <a:r>
-              <a:rPr sz="1350" b="0">
-                <a:solidFill>
-                  <a:srgbClr val="F7F8FF"/>
-                </a:solidFill>
-              </a:rPr>
-              <a:t>flutter test: All tests passed.</a:t>
-            </a:r>
-          </a:p>
-        </p:txBody>
-      </p:sp>
-      <p:sp>
-        <p:nvSpPr>
-          <p:cNvPr id="21" name="">
-            <a:extLst xmlns:a="http://schemas.openxmlformats.org/drawingml/2006/main">
-              <a:ext uri="{FF2B5EF4-FFF2-40B4-BE49-F238E27FC236}">
-                <a16:creationId xmlns:a16="http://schemas.microsoft.com/office/drawing/2014/main" id="{991FC4D5-6315-4757-8161-E92F8730784F}"/>
-              </a:ext>
-            </a:extLst>
-          </p:cNvPr>
-          <p:cNvSpPr>
-            <a:spLocks xmlns:a="http://schemas.openxmlformats.org/drawingml/2006/main" noGrp="1"/>
-          </p:cNvSpPr>
-          <p:nvPr/>
-        </p:nvSpPr>
-        <p:spPr>
-          <a:xfrm xmlns:a="http://schemas.openxmlformats.org/drawingml/2006/main">
-            <a:off x="1104900" y="5143500"/>
-            <a:ext cx="323850" cy="323850"/>
-          </a:xfrm>
-          <a:prstGeom xmlns:a="http://schemas.openxmlformats.org/drawingml/2006/main" prst="roundRect">
-            <a:avLst>
-              <a:gd name="adj" fmla="val 35294"/>
-            </a:avLst>
-          </a:prstGeom>
-          <a:solidFill xmlns:a="http://schemas.openxmlformats.org/drawingml/2006/main">
-            <a:srgbClr val="0B1822"/>
-          </a:solidFill>
-          <a:ln xmlns:a="http://schemas.openxmlformats.org/drawingml/2006/main" w="9525">
-            <a:solidFill>
-              <a:srgbClr val="66D4CF"/>
-            </a:solidFill>
-            <a:prstDash val="solid"/>
-          </a:ln>
-        </p:spPr>
-        <p:style>
-          <a:lnRef xmlns:a="http://schemas.openxmlformats.org/drawingml/2006/main" idx="0"/>
-          <a:fillRef xmlns:a="http://schemas.openxmlformats.org/drawingml/2006/main" idx="0"/>
-          <a:effectRef xmlns:a="http://schemas.openxmlformats.org/drawingml/2006/main" idx="4"/>
-          <a:fontRef xmlns:a="http://schemas.openxmlformats.org/drawingml/2006/main" idx="major"/>
-        </p:style>
-      </p:sp>
-      <p:sp>
-        <p:nvSpPr>
-          <p:cNvPr id="22" name="">
-            <a:extLst xmlns:a="http://schemas.openxmlformats.org/drawingml/2006/main">
-              <a:ext uri="{FF2B5EF4-FFF2-40B4-BE49-F238E27FC236}">
-                <a16:creationId xmlns:a16="http://schemas.microsoft.com/office/drawing/2014/main" id="{C6851F6B-8306-473A-B59C-DB7F31B955A0}"/>
-              </a:ext>
-            </a:extLst>
-          </p:cNvPr>
-          <p:cNvSpPr>
-            <a:spLocks xmlns:a="http://schemas.openxmlformats.org/drawingml/2006/main" noGrp="1"/>
-          </p:cNvSpPr>
-          <p:nvPr/>
-        </p:nvSpPr>
-        <p:spPr>
-          <a:xfrm xmlns:a="http://schemas.openxmlformats.org/drawingml/2006/main">
-            <a:off x="1104900" y="5210175"/>
-            <a:ext cx="323850" cy="171450"/>
-          </a:xfrm>
-          <a:prstGeom xmlns:a="http://schemas.openxmlformats.org/drawingml/2006/main" prst="rect">
-            <a:avLst/>
-          </a:prstGeom>
-          <a:noFill xmlns:a="http://schemas.openxmlformats.org/drawingml/2006/main"/>
-          <a:ln xmlns:a="http://schemas.openxmlformats.org/drawingml/2006/main" w="0">
-            <a:noFill/>
-            <a:prstDash val="solid"/>
-          </a:ln>
-        </p:spPr>
-        <p:txBody>
-          <a:bodyPr xmlns:a="http://schemas.openxmlformats.org/drawingml/2006/main"/>
-          <a:lstStyle xmlns:a="http://schemas.openxmlformats.org/drawingml/2006/main"/>
-          <a:p xmlns:a="http://schemas.openxmlformats.org/drawingml/2006/main">
-            <a:pPr algn="ctr">
-              <a:defRPr sz="1050" b="1">
-                <a:solidFill>
-                  <a:srgbClr val="66D4CF"/>
-                </a:solidFill>
-              </a:defRPr>
-            </a:pPr>
-            <a:r>
-              <a:rPr sz="1050" b="1">
-                <a:solidFill>
-                  <a:srgbClr val="66D4CF"/>
-                </a:solidFill>
-              </a:rPr>
-              <a:t>3</a:t>
-            </a:r>
-          </a:p>
-        </p:txBody>
-      </p:sp>
-      <p:sp>
-        <p:nvSpPr>
-          <p:cNvPr id="23" name="">
-            <a:extLst xmlns:a="http://schemas.openxmlformats.org/drawingml/2006/main">
-              <a:ext uri="{FF2B5EF4-FFF2-40B4-BE49-F238E27FC236}">
-                <a16:creationId xmlns:a16="http://schemas.microsoft.com/office/drawing/2014/main" id="{CB1D00E1-BDBD-4C9D-B98B-7A4E3F7C648A}"/>
-              </a:ext>
-            </a:extLst>
-          </p:cNvPr>
-          <p:cNvSpPr>
-            <a:spLocks xmlns:a="http://schemas.openxmlformats.org/drawingml/2006/main" noGrp="1"/>
-          </p:cNvSpPr>
-          <p:nvPr/>
-        </p:nvSpPr>
-        <p:spPr>
-          <a:xfrm xmlns:a="http://schemas.openxmlformats.org/drawingml/2006/main">
-            <a:off x="1562100" y="5162550"/>
-            <a:ext cx="9163050" cy="419100"/>
-          </a:xfrm>
-          <a:prstGeom xmlns:a="http://schemas.openxmlformats.org/drawingml/2006/main" prst="rect">
-            <a:avLst/>
-          </a:prstGeom>
-          <a:noFill xmlns:a="http://schemas.openxmlformats.org/drawingml/2006/main"/>
-          <a:ln xmlns:a="http://schemas.openxmlformats.org/drawingml/2006/main" w="0">
-            <a:noFill/>
-            <a:prstDash val="solid"/>
-          </a:ln>
-        </p:spPr>
-        <p:txBody>
-          <a:bodyPr xmlns:a="http://schemas.openxmlformats.org/drawingml/2006/main"/>
-          <a:lstStyle xmlns:a="http://schemas.openxmlformats.org/drawingml/2006/main"/>
-          <a:p xmlns:a="http://schemas.openxmlformats.org/drawingml/2006/main">
-            <a:pPr algn="l">
-              <a:defRPr sz="1350" b="0">
-                <a:solidFill>
-                  <a:srgbClr val="F7F8FF"/>
-                </a:solidFill>
-              </a:defRPr>
-            </a:pPr>
-            <a:r>
-              <a:rPr sz="1350" b="0">
-                <a:solidFill>
-                  <a:srgbClr val="F7F8FF"/>
-                </a:solidFill>
-              </a:rPr>
-              <a:t>python -m py_compile backend/main.py: синтаксис FastAPI backend валідний.</a:t>
-            </a:r>
-          </a:p>
-        </p:txBody>
-      </p:sp>
-      <p:sp>
-        <p:nvSpPr>
-          <p:cNvPr id="24" name="">
-            <a:extLst xmlns:a="http://schemas.openxmlformats.org/drawingml/2006/main">
-              <a:ext uri="{FF2B5EF4-FFF2-40B4-BE49-F238E27FC236}">
-                <a16:creationId xmlns:a16="http://schemas.microsoft.com/office/drawing/2014/main" id="{11CD19F5-F4FE-42EF-8F4B-D8DCC9B05E05}"/>
-              </a:ext>
-            </a:extLst>
-          </p:cNvPr>
-          <p:cNvSpPr>
-            <a:spLocks xmlns:a="http://schemas.openxmlformats.org/drawingml/2006/main" noGrp="1"/>
-          </p:cNvSpPr>
-          <p:nvPr/>
-        </p:nvSpPr>
-        <p:spPr>
-          <a:xfrm xmlns:a="http://schemas.openxmlformats.org/drawingml/2006/main">
-            <a:off x="1104900" y="5619750"/>
-            <a:ext cx="323850" cy="323850"/>
-          </a:xfrm>
-          <a:prstGeom xmlns:a="http://schemas.openxmlformats.org/drawingml/2006/main" prst="roundRect">
-            <a:avLst>
-              <a:gd name="adj" fmla="val 35294"/>
-            </a:avLst>
-          </a:prstGeom>
-          <a:solidFill xmlns:a="http://schemas.openxmlformats.org/drawingml/2006/main">
-            <a:srgbClr val="0B1822"/>
-          </a:solidFill>
-          <a:ln xmlns:a="http://schemas.openxmlformats.org/drawingml/2006/main" w="9525">
-            <a:solidFill>
-              <a:srgbClr val="66D4CF"/>
-            </a:solidFill>
-            <a:prstDash val="solid"/>
-          </a:ln>
-        </p:spPr>
-        <p:style>
-          <a:lnRef xmlns:a="http://schemas.openxmlformats.org/drawingml/2006/main" idx="0"/>
-          <a:fillRef xmlns:a="http://schemas.openxmlformats.org/drawingml/2006/main" idx="0"/>
-          <a:effectRef xmlns:a="http://schemas.openxmlformats.org/drawingml/2006/main" idx="4"/>
-          <a:fontRef xmlns:a="http://schemas.openxmlformats.org/drawingml/2006/main" idx="major"/>
-        </p:style>
-      </p:sp>
-      <p:sp>
-        <p:nvSpPr>
-          <p:cNvPr id="25" name="">
-            <a:extLst xmlns:a="http://schemas.openxmlformats.org/drawingml/2006/main">
-              <a:ext uri="{FF2B5EF4-FFF2-40B4-BE49-F238E27FC236}">
-                <a16:creationId xmlns:a16="http://schemas.microsoft.com/office/drawing/2014/main" id="{69744CFB-A333-4C00-A139-7D4BB350B02B}"/>
-              </a:ext>
-            </a:extLst>
-          </p:cNvPr>
-          <p:cNvSpPr>
-            <a:spLocks xmlns:a="http://schemas.openxmlformats.org/drawingml/2006/main" noGrp="1"/>
-          </p:cNvSpPr>
-          <p:nvPr/>
-        </p:nvSpPr>
-        <p:spPr>
-          <a:xfrm xmlns:a="http://schemas.openxmlformats.org/drawingml/2006/main">
-            <a:off x="1104900" y="5686425"/>
-            <a:ext cx="323850" cy="171450"/>
-          </a:xfrm>
-          <a:prstGeom xmlns:a="http://schemas.openxmlformats.org/drawingml/2006/main" prst="rect">
-            <a:avLst/>
-          </a:prstGeom>
-          <a:noFill xmlns:a="http://schemas.openxmlformats.org/drawingml/2006/main"/>
-          <a:ln xmlns:a="http://schemas.openxmlformats.org/drawingml/2006/main" w="0">
-            <a:noFill/>
-            <a:prstDash val="solid"/>
-          </a:ln>
-        </p:spPr>
-        <p:txBody>
-          <a:bodyPr xmlns:a="http://schemas.openxmlformats.org/drawingml/2006/main"/>
-          <a:lstStyle xmlns:a="http://schemas.openxmlformats.org/drawingml/2006/main"/>
-          <a:p xmlns:a="http://schemas.openxmlformats.org/drawingml/2006/main">
-            <a:pPr algn="ctr">
-              <a:defRPr sz="1050" b="1">
-                <a:solidFill>
-                  <a:srgbClr val="66D4CF"/>
-                </a:solidFill>
-              </a:defRPr>
-            </a:pPr>
-            <a:r>
-              <a:rPr sz="1050" b="1">
-                <a:solidFill>
-                  <a:srgbClr val="66D4CF"/>
-                </a:solidFill>
-              </a:rPr>
-              <a:t>4</a:t>
-            </a:r>
-          </a:p>
-        </p:txBody>
-      </p:sp>
-      <p:sp>
-        <p:nvSpPr>
-          <p:cNvPr id="26" name="">
-            <a:extLst xmlns:a="http://schemas.openxmlformats.org/drawingml/2006/main">
-              <a:ext uri="{FF2B5EF4-FFF2-40B4-BE49-F238E27FC236}">
-                <a16:creationId xmlns:a16="http://schemas.microsoft.com/office/drawing/2014/main" id="{67E190EB-7B0C-4C18-B678-AAA4A4ACB606}"/>
-              </a:ext>
-            </a:extLst>
-          </p:cNvPr>
-          <p:cNvSpPr>
-            <a:spLocks xmlns:a="http://schemas.openxmlformats.org/drawingml/2006/main" noGrp="1"/>
-          </p:cNvSpPr>
-          <p:nvPr/>
-        </p:nvSpPr>
-        <p:spPr>
-          <a:xfrm xmlns:a="http://schemas.openxmlformats.org/drawingml/2006/main">
-            <a:off x="1562100" y="5638800"/>
-            <a:ext cx="9163050" cy="419100"/>
-          </a:xfrm>
-          <a:prstGeom xmlns:a="http://schemas.openxmlformats.org/drawingml/2006/main" prst="rect">
-            <a:avLst/>
-          </a:prstGeom>
-          <a:noFill xmlns:a="http://schemas.openxmlformats.org/drawingml/2006/main"/>
-          <a:ln xmlns:a="http://schemas.openxmlformats.org/drawingml/2006/main" w="0">
-            <a:noFill/>
-            <a:prstDash val="solid"/>
-          </a:ln>
-        </p:spPr>
-        <p:txBody>
-          <a:bodyPr xmlns:a="http://schemas.openxmlformats.org/drawingml/2006/main"/>
-          <a:lstStyle xmlns:a="http://schemas.openxmlformats.org/drawingml/2006/main"/>
-          <a:p xmlns:a="http://schemas.openxmlformats.org/drawingml/2006/main">
-            <a:pPr algn="l">
-              <a:defRPr sz="1350" b="0">
-                <a:solidFill>
-                  <a:srgbClr val="F7F8FF"/>
-                </a:solidFill>
-              </a:defRPr>
-            </a:pPr>
-            <a:r>
-              <a:rPr sz="1350" b="0">
-                <a:solidFill>
-                  <a:srgbClr val="F7F8FF"/>
-                </a:solidFill>
-              </a:rPr>
-              <a:t>Додатково перевірено backend-файл через Python-компіляцію.</a:t>
+              <a:defRPr sz="1350" b="1">
+                <a:solidFill>
+                  <a:srgbClr val="30D158"/>
+                </a:solidFill>
+              </a:defRPr>
+            </a:pPr>
+            <a:r>
+              <a:rPr sz="1350" b="1">
+                <a:solidFill>
+                  <a:srgbClr val="30D158"/>
+                </a:solidFill>
+              </a:rPr>
+              <a:t>VS Code: PostgreSQL</a:t>
             </a:r>
           </a:p>
         </p:txBody>
@@ -9917,7 +11057,7 @@
     </p:spTree>
     <p:extLst>
       <p:ext uri="{BB962C8B-B14F-4D97-AF65-F5344CB8AC3E}">
-        <p14:creationId xmlns:p14="http://schemas.microsoft.com/office/powerpoint/2010/main" val="334655431"/>
+        <p14:creationId xmlns:p14="http://schemas.microsoft.com/office/powerpoint/2010/main" val="962076451"/>
       </p:ext>
     </p:extLst>
   </p:cSld>
